--- a/docs/presentation.pptx
+++ b/docs/presentation.pptx
@@ -19,6 +19,7 @@
     <p:sldId id="267" r:id="rId18"/>
     <p:sldId id="268" r:id="rId19"/>
     <p:sldId id="269" r:id="rId20"/>
+    <p:sldId id="270" r:id="rId21"/>
   </p:sldIdLst>
   <p:sldSz cx="12191695" cy="6858000" type="screen4x3"/>
   <p:notesSz cx="6858000" cy="9144000"/>
@@ -3772,7 +3773,7 @@
                 </a:solidFill>
                 <a:latin typeface="Consolas"/>
               </a:rPr>
-              <a:t>08  ·  ПОЛНОТЕКСТОВЫЙ ПОИСК</a:t>
+              <a:t>08  ·  ПОИСК ПО СООБЩЕНИЯМ</a:t>
             </a:r>
           </a:p>
         </p:txBody>
@@ -3807,7 +3808,7 @@
                 </a:solidFill>
                 <a:latin typeface="Segoe UI"/>
               </a:rPr>
-              <a:t>От LIKE к GIN + русскому словарю</a:t>
+              <a:t>Умный поиск на русском</a:t>
             </a:r>
           </a:p>
         </p:txBody>
@@ -3858,14 +3859,85 @@
       </p:sp>
       <p:sp>
         <p:nvSpPr>
-          <p:cNvPr id="9" name="Rectangle 8"/>
+          <p:cNvPr id="9" name="TextBox 8"/>
+          <p:cNvSpPr txBox="1"/>
+          <p:nvPr/>
+        </p:nvSpPr>
+        <p:spPr>
+          <a:xfrm>
+            <a:off x="822960" y="2194560"/>
+            <a:ext cx="10972800" cy="1371600"/>
+          </a:xfrm>
+          <a:prstGeom prst="rect">
+            <a:avLst/>
+          </a:prstGeom>
+          <a:noFill/>
+        </p:spPr>
+        <p:txBody>
+          <a:bodyPr wrap="square" lIns="0" rIns="0">
+            <a:spAutoFit/>
+          </a:bodyPr>
+          <a:lstStyle/>
+          <a:p>
+            <a:pPr algn="l">
+              <a:lnSpc>
+                <a:spcPct val="140000"/>
+              </a:lnSpc>
+            </a:pPr>
+            <a:r>
+              <a:rPr sz="1500" b="0">
+                <a:solidFill>
+                  <a:srgbClr val="0A0A0A"/>
+                </a:solidFill>
+                <a:latin typeface="Segoe UI"/>
+              </a:rPr>
+              <a:t>Поиск устроен так, что находит сообщения даже в разных формах слова.</a:t>
+            </a:r>
+          </a:p>
+          <a:p>
+            <a:pPr algn="l">
+              <a:lnSpc>
+                <a:spcPct val="140000"/>
+              </a:lnSpc>
+            </a:pPr>
+            <a:r>
+              <a:rPr sz="1500" b="0">
+                <a:solidFill>
+                  <a:srgbClr val="0A0A0A"/>
+                </a:solidFill>
+                <a:latin typeface="Segoe UI"/>
+              </a:rPr>
+              <a:t>Например, по запросу «обсуждать» найдутся сообщения со словами</a:t>
+            </a:r>
+          </a:p>
+          <a:p>
+            <a:pPr algn="l">
+              <a:lnSpc>
+                <a:spcPct val="140000"/>
+              </a:lnSpc>
+            </a:pPr>
+            <a:r>
+              <a:rPr sz="1500" b="0">
+                <a:solidFill>
+                  <a:srgbClr val="0A0A0A"/>
+                </a:solidFill>
+                <a:latin typeface="Segoe UI"/>
+              </a:rPr>
+              <a:t>«обсуждаю», «обсуждали», «обсуждать» — то есть по любой словоформе.</a:t>
+            </a:r>
+          </a:p>
+        </p:txBody>
+      </p:sp>
+      <p:sp>
+        <p:nvSpPr>
+          <p:cNvPr id="10" name="Rectangle 9"/>
           <p:cNvSpPr/>
           <p:nvPr/>
         </p:nvSpPr>
         <p:spPr>
           <a:xfrm>
-            <a:off x="822960" y="2148840"/>
-            <a:ext cx="5394960" cy="1920240"/>
+            <a:off x="822960" y="4023360"/>
+            <a:ext cx="3566160" cy="1554480"/>
           </a:xfrm>
           <a:prstGeom prst="rect">
             <a:avLst/>
@@ -3902,14 +3974,14 @@
       </p:sp>
       <p:sp>
         <p:nvSpPr>
-          <p:cNvPr id="10" name="TextBox 9"/>
-          <p:cNvSpPr txBox="1"/>
-          <p:nvPr/>
-        </p:nvSpPr>
-        <p:spPr>
-          <a:xfrm>
-            <a:off x="1005840" y="2286000"/>
-            <a:ext cx="5120640" cy="320040"/>
+          <p:cNvPr id="11" name="TextBox 10"/>
+          <p:cNvSpPr txBox="1"/>
+          <p:nvPr/>
+        </p:nvSpPr>
+        <p:spPr>
+          <a:xfrm>
+            <a:off x="1097280" y="4206240"/>
+            <a:ext cx="3200400" cy="320040"/>
           </a:xfrm>
           <a:prstGeom prst="rect">
             <a:avLst/>
@@ -3930,21 +4002,21 @@
                 </a:solidFill>
                 <a:latin typeface="Consolas"/>
               </a:rPr>
-              <a:t>БЫЛО</a:t>
-            </a:r>
-          </a:p>
-        </p:txBody>
-      </p:sp>
-      <p:sp>
-        <p:nvSpPr>
-          <p:cNvPr id="11" name="TextBox 10"/>
-          <p:cNvSpPr txBox="1"/>
-          <p:nvPr/>
-        </p:nvSpPr>
-        <p:spPr>
-          <a:xfrm>
-            <a:off x="1005840" y="2606040"/>
-            <a:ext cx="5120640" cy="457200"/>
+              <a:t>Запрос</a:t>
+            </a:r>
+          </a:p>
+        </p:txBody>
+      </p:sp>
+      <p:sp>
+        <p:nvSpPr>
+          <p:cNvPr id="12" name="TextBox 11"/>
+          <p:cNvSpPr txBox="1"/>
+          <p:nvPr/>
+        </p:nvSpPr>
+        <p:spPr>
+          <a:xfrm>
+            <a:off x="1097280" y="4617720"/>
+            <a:ext cx="3200400" cy="822960"/>
           </a:xfrm>
           <a:prstGeom prst="rect">
             <a:avLst/>
@@ -3959,68 +4031,13 @@
           <a:p>
             <a:pPr algn="l"/>
             <a:r>
-              <a:rPr sz="1300" b="0" i="0">
+              <a:rPr sz="1500" b="0" i="0">
                 <a:solidFill>
                   <a:srgbClr val="0A0A0A"/>
                 </a:solidFill>
-                <a:latin typeface="Consolas"/>
-              </a:rPr>
-              <a:t>WHERE LOWER(text) LIKE '%q%'</a:t>
-            </a:r>
-          </a:p>
-        </p:txBody>
-      </p:sp>
-      <p:sp>
-        <p:nvSpPr>
-          <p:cNvPr id="12" name="TextBox 11"/>
-          <p:cNvSpPr txBox="1"/>
-          <p:nvPr/>
-        </p:nvSpPr>
-        <p:spPr>
-          <a:xfrm>
-            <a:off x="1005840" y="3108960"/>
-            <a:ext cx="5120640" cy="1005840"/>
-          </a:xfrm>
-          <a:prstGeom prst="rect">
-            <a:avLst/>
-          </a:prstGeom>
-          <a:noFill/>
-        </p:spPr>
-        <p:txBody>
-          <a:bodyPr wrap="square" lIns="0" rIns="0">
-            <a:spAutoFit/>
-          </a:bodyPr>
-          <a:lstStyle/>
-          <a:p>
-            <a:pPr algn="l">
-              <a:lnSpc>
-                <a:spcPct val="130000"/>
-              </a:lnSpc>
-            </a:pPr>
-            <a:r>
-              <a:rPr sz="1200" b="0">
-                <a:solidFill>
-                  <a:srgbClr val="52525B"/>
-                </a:solidFill>
                 <a:latin typeface="Segoe UI"/>
               </a:rPr>
-              <a:t>— полный скан таблицы</a:t>
-            </a:r>
-          </a:p>
-          <a:p>
-            <a:pPr algn="l">
-              <a:lnSpc>
-                <a:spcPct val="130000"/>
-              </a:lnSpc>
-            </a:pPr>
-            <a:r>
-              <a:rPr sz="1200" b="0">
-                <a:solidFill>
-                  <a:srgbClr val="52525B"/>
-                </a:solidFill>
-                <a:latin typeface="Segoe UI"/>
-              </a:rPr>
-              <a:t>— не находит другие словоформы</a:t>
+              <a:t>обсуждать</a:t>
             </a:r>
           </a:p>
         </p:txBody>
@@ -4033,8 +4050,8 @@
         </p:nvSpPr>
         <p:spPr>
           <a:xfrm>
-            <a:off x="6400800" y="2148840"/>
-            <a:ext cx="5394960" cy="1920240"/>
+            <a:off x="4617720" y="4023360"/>
+            <a:ext cx="3566160" cy="1554480"/>
           </a:xfrm>
           <a:prstGeom prst="rect">
             <a:avLst/>
@@ -4077,8 +4094,8 @@
         </p:nvSpPr>
         <p:spPr>
           <a:xfrm>
-            <a:off x="6400800" y="2148840"/>
-            <a:ext cx="35000" cy="1920240"/>
+            <a:off x="4617720" y="4023360"/>
+            <a:ext cx="35000" cy="1554480"/>
           </a:xfrm>
           <a:prstGeom prst="rect">
             <a:avLst/>
@@ -4121,8 +4138,8 @@
         </p:nvSpPr>
         <p:spPr>
           <a:xfrm>
-            <a:off x="6583680" y="2286000"/>
-            <a:ext cx="5120640" cy="320040"/>
+            <a:off x="4892040" y="4206240"/>
+            <a:ext cx="3200400" cy="320040"/>
           </a:xfrm>
           <a:prstGeom prst="rect">
             <a:avLst/>
@@ -4139,11 +4156,11 @@
             <a:r>
               <a:rPr sz="1100" b="0" i="0">
                 <a:solidFill>
-                  <a:srgbClr val="0066FF"/>
+                  <a:srgbClr val="52525B"/>
                 </a:solidFill>
                 <a:latin typeface="Consolas"/>
               </a:rPr>
-              <a:t>СТАЛО</a:t>
+              <a:t>Тоже найдёт</a:t>
             </a:r>
           </a:p>
         </p:txBody>
@@ -4156,8 +4173,8 @@
         </p:nvSpPr>
         <p:spPr>
           <a:xfrm>
-            <a:off x="6583680" y="2606040"/>
-            <a:ext cx="5120640" cy="457200"/>
+            <a:off x="4892040" y="4617720"/>
+            <a:ext cx="3200400" cy="822960"/>
           </a:xfrm>
           <a:prstGeom prst="rect">
             <a:avLst/>
@@ -4172,133 +4189,27 @@
           <a:p>
             <a:pPr algn="l"/>
             <a:r>
-              <a:rPr sz="1200" b="0" i="0">
+              <a:rPr sz="1500" b="1" i="0">
                 <a:solidFill>
                   <a:srgbClr val="0A0A0A"/>
                 </a:solidFill>
-                <a:latin typeface="Consolas"/>
-              </a:rPr>
-              <a:t>to_tsvector('russian') @@ plainto_tsquery</a:t>
-            </a:r>
-          </a:p>
-        </p:txBody>
-      </p:sp>
-      <p:sp>
-        <p:nvSpPr>
-          <p:cNvPr id="17" name="TextBox 16"/>
-          <p:cNvSpPr txBox="1"/>
-          <p:nvPr/>
-        </p:nvSpPr>
-        <p:spPr>
-          <a:xfrm>
-            <a:off x="6583680" y="3108960"/>
-            <a:ext cx="5120640" cy="1005840"/>
-          </a:xfrm>
-          <a:prstGeom prst="rect">
-            <a:avLst/>
-          </a:prstGeom>
-          <a:noFill/>
-        </p:spPr>
-        <p:txBody>
-          <a:bodyPr wrap="square" lIns="0" rIns="0">
-            <a:spAutoFit/>
-          </a:bodyPr>
-          <a:lstStyle/>
-          <a:p>
-            <a:pPr algn="l">
-              <a:lnSpc>
-                <a:spcPct val="130000"/>
-              </a:lnSpc>
-            </a:pPr>
-            <a:r>
-              <a:rPr sz="1200" b="0">
-                <a:solidFill>
-                  <a:srgbClr val="0A0A0A"/>
-                </a:solidFill>
                 <a:latin typeface="Segoe UI"/>
               </a:rPr>
-              <a:t>— GIN-индекс, никакого скана</a:t>
-            </a:r>
-          </a:p>
-          <a:p>
-            <a:pPr algn="l">
-              <a:lnSpc>
-                <a:spcPct val="130000"/>
-              </a:lnSpc>
-            </a:pPr>
-            <a:r>
-              <a:rPr sz="1200" b="0">
-                <a:solidFill>
-                  <a:srgbClr val="0A0A0A"/>
-                </a:solidFill>
-                <a:latin typeface="Segoe UI"/>
-              </a:rPr>
-              <a:t>— стемминг: «обсуждать», «обсуждаю», «обсуждали»</a:t>
-            </a:r>
-          </a:p>
-          <a:p>
-            <a:pPr algn="l">
-              <a:lnSpc>
-                <a:spcPct val="130000"/>
-              </a:lnSpc>
-            </a:pPr>
-            <a:r>
-              <a:rPr sz="1200" b="0">
-                <a:solidFill>
-                  <a:srgbClr val="0A0A0A"/>
-                </a:solidFill>
-                <a:latin typeface="Segoe UI"/>
-              </a:rPr>
-              <a:t>— ранжирование через ts_rank_cd</a:t>
-            </a:r>
-          </a:p>
-        </p:txBody>
-      </p:sp>
-      <p:sp>
-        <p:nvSpPr>
-          <p:cNvPr id="18" name="TextBox 17"/>
-          <p:cNvSpPr txBox="1"/>
-          <p:nvPr/>
-        </p:nvSpPr>
-        <p:spPr>
-          <a:xfrm>
-            <a:off x="822960" y="4434840"/>
-            <a:ext cx="10972800" cy="320040"/>
-          </a:xfrm>
-          <a:prstGeom prst="rect">
-            <a:avLst/>
-          </a:prstGeom>
-          <a:noFill/>
-        </p:spPr>
-        <p:txBody>
-          <a:bodyPr wrap="square" lIns="0" rIns="0" tIns="0" bIns="0" anchor="t">
-            <a:spAutoFit/>
-          </a:bodyPr>
-          <a:lstStyle/>
-          <a:p>
-            <a:pPr algn="l"/>
-            <a:r>
-              <a:rPr sz="1100" b="0" i="0">
-                <a:solidFill>
-                  <a:srgbClr val="52525B"/>
-                </a:solidFill>
-                <a:latin typeface="Consolas"/>
-              </a:rPr>
-              <a:t>ЗАПРОС</a:t>
-            </a:r>
-          </a:p>
-        </p:txBody>
-      </p:sp>
-      <p:sp>
-        <p:nvSpPr>
-          <p:cNvPr id="19" name="Rectangle 18"/>
+              <a:t>обсуждаю, обсуждали, обсуждаем</a:t>
+            </a:r>
+          </a:p>
+        </p:txBody>
+      </p:sp>
+      <p:sp>
+        <p:nvSpPr>
+          <p:cNvPr id="17" name="Rectangle 16"/>
           <p:cNvSpPr/>
           <p:nvPr/>
         </p:nvSpPr>
         <p:spPr>
           <a:xfrm>
-            <a:off x="822960" y="4709160"/>
-            <a:ext cx="11247120" cy="1371600"/>
+            <a:off x="8412480" y="4023360"/>
+            <a:ext cx="3566160" cy="1554480"/>
           </a:xfrm>
           <a:prstGeom prst="rect">
             <a:avLst/>
@@ -4335,126 +4246,77 @@
       </p:sp>
       <p:sp>
         <p:nvSpPr>
+          <p:cNvPr id="18" name="TextBox 17"/>
+          <p:cNvSpPr txBox="1"/>
+          <p:nvPr/>
+        </p:nvSpPr>
+        <p:spPr>
+          <a:xfrm>
+            <a:off x="8686800" y="4206240"/>
+            <a:ext cx="3200400" cy="320040"/>
+          </a:xfrm>
+          <a:prstGeom prst="rect">
+            <a:avLst/>
+          </a:prstGeom>
+          <a:noFill/>
+        </p:spPr>
+        <p:txBody>
+          <a:bodyPr wrap="square" lIns="0" rIns="0" tIns="0" bIns="0" anchor="t">
+            <a:spAutoFit/>
+          </a:bodyPr>
+          <a:lstStyle/>
+          <a:p>
+            <a:pPr algn="l"/>
+            <a:r>
+              <a:rPr sz="1100" b="0" i="0">
+                <a:solidFill>
+                  <a:srgbClr val="52525B"/>
+                </a:solidFill>
+                <a:latin typeface="Consolas"/>
+              </a:rPr>
+              <a:t>Как это работает</a:t>
+            </a:r>
+          </a:p>
+        </p:txBody>
+      </p:sp>
+      <p:sp>
+        <p:nvSpPr>
+          <p:cNvPr id="19" name="TextBox 18"/>
+          <p:cNvSpPr txBox="1"/>
+          <p:nvPr/>
+        </p:nvSpPr>
+        <p:spPr>
+          <a:xfrm>
+            <a:off x="8686800" y="4617720"/>
+            <a:ext cx="3200400" cy="822960"/>
+          </a:xfrm>
+          <a:prstGeom prst="rect">
+            <a:avLst/>
+          </a:prstGeom>
+          <a:noFill/>
+        </p:spPr>
+        <p:txBody>
+          <a:bodyPr wrap="square" lIns="0" rIns="0" tIns="0" bIns="0" anchor="t">
+            <a:spAutoFit/>
+          </a:bodyPr>
+          <a:lstStyle/>
+          <a:p>
+            <a:pPr algn="l"/>
+            <a:r>
+              <a:rPr sz="1500" b="0" i="0">
+                <a:solidFill>
+                  <a:srgbClr val="0A0A0A"/>
+                </a:solidFill>
+                <a:latin typeface="Segoe UI"/>
+              </a:rPr>
+              <a:t>русский словарь PostgreSQL</a:t>
+            </a:r>
+          </a:p>
+        </p:txBody>
+      </p:sp>
+      <p:sp>
+        <p:nvSpPr>
           <p:cNvPr id="20" name="TextBox 19"/>
-          <p:cNvSpPr txBox="1"/>
-          <p:nvPr/>
-        </p:nvSpPr>
-        <p:spPr>
-          <a:xfrm>
-            <a:off x="960120" y="4800600"/>
-            <a:ext cx="10972800" cy="1280160"/>
-          </a:xfrm>
-          <a:prstGeom prst="rect">
-            <a:avLst/>
-          </a:prstGeom>
-          <a:noFill/>
-        </p:spPr>
-        <p:txBody>
-          <a:bodyPr wrap="square" lIns="0" rIns="0">
-            <a:spAutoFit/>
-          </a:bodyPr>
-          <a:lstStyle/>
-          <a:p>
-            <a:pPr algn="l">
-              <a:lnSpc>
-                <a:spcPct val="115000"/>
-              </a:lnSpc>
-            </a:pPr>
-            <a:r>
-              <a:rPr sz="1100" b="0">
-                <a:solidFill>
-                  <a:srgbClr val="0A0A0A"/>
-                </a:solidFill>
-                <a:latin typeface="Consolas"/>
-              </a:rPr>
-              <a:t>SELECT *,</a:t>
-            </a:r>
-          </a:p>
-          <a:p>
-            <a:pPr algn="l">
-              <a:lnSpc>
-                <a:spcPct val="115000"/>
-              </a:lnSpc>
-            </a:pPr>
-            <a:r>
-              <a:rPr sz="1100" b="0">
-                <a:solidFill>
-                  <a:srgbClr val="0A0A0A"/>
-                </a:solidFill>
-                <a:latin typeface="Consolas"/>
-              </a:rPr>
-              <a:t>       ts_rank_cd(to_tsvector('russian', text), plainto_tsquery('russian', :q)) AS rank</a:t>
-            </a:r>
-          </a:p>
-          <a:p>
-            <a:pPr algn="l">
-              <a:lnSpc>
-                <a:spcPct val="115000"/>
-              </a:lnSpc>
-            </a:pPr>
-            <a:r>
-              <a:rPr sz="1100" b="0">
-                <a:solidFill>
-                  <a:srgbClr val="0A0A0A"/>
-                </a:solidFill>
-                <a:latin typeface="Consolas"/>
-              </a:rPr>
-              <a:t>  FROM messages</a:t>
-            </a:r>
-          </a:p>
-          <a:p>
-            <a:pPr algn="l">
-              <a:lnSpc>
-                <a:spcPct val="115000"/>
-              </a:lnSpc>
-            </a:pPr>
-            <a:r>
-              <a:rPr sz="1100" b="0">
-                <a:solidFill>
-                  <a:srgbClr val="0A0A0A"/>
-                </a:solidFill>
-                <a:latin typeface="Consolas"/>
-              </a:rPr>
-              <a:t> WHERE chat_id = :chat_id</a:t>
-            </a:r>
-          </a:p>
-          <a:p>
-            <a:pPr algn="l">
-              <a:lnSpc>
-                <a:spcPct val="115000"/>
-              </a:lnSpc>
-            </a:pPr>
-            <a:r>
-              <a:rPr sz="1100" b="0">
-                <a:solidFill>
-                  <a:srgbClr val="0A0A0A"/>
-                </a:solidFill>
-                <a:latin typeface="Consolas"/>
-              </a:rPr>
-              <a:t>   AND to_tsvector('russian', text) @@ plainto_tsquery('russian', :q)</a:t>
-            </a:r>
-          </a:p>
-          <a:p>
-            <a:pPr algn="l">
-              <a:lnSpc>
-                <a:spcPct val="115000"/>
-              </a:lnSpc>
-            </a:pPr>
-            <a:r>
-              <a:rPr sz="1100" b="0">
-                <a:solidFill>
-                  <a:srgbClr val="0A0A0A"/>
-                </a:solidFill>
-                <a:latin typeface="Consolas"/>
-              </a:rPr>
-              <a:t> ORDER BY rank DESC, id DESC;</a:t>
-            </a:r>
-          </a:p>
-        </p:txBody>
-      </p:sp>
-      <p:sp>
-        <p:nvSpPr>
-          <p:cNvPr id="21" name="TextBox 20"/>
           <p:cNvSpPr txBox="1"/>
           <p:nvPr/>
         </p:nvSpPr>
@@ -4489,7 +4351,7 @@
       </p:sp>
       <p:sp>
         <p:nvSpPr>
-          <p:cNvPr id="22" name="TextBox 21"/>
+          <p:cNvPr id="21" name="TextBox 20"/>
           <p:cNvSpPr txBox="1"/>
           <p:nvPr/>
         </p:nvSpPr>
@@ -4517,7 +4379,7 @@
                 </a:solidFill>
                 <a:latin typeface="Consolas"/>
               </a:rPr>
-              <a:t>10 / 13</a:t>
+              <a:t>10 / 15</a:t>
             </a:r>
           </a:p>
         </p:txBody>
@@ -4754,7 +4616,7 @@
                 </a:solidFill>
                 <a:latin typeface="Consolas"/>
               </a:rPr>
-              <a:t>09  ·  АВТОРИЗАЦИЯ</a:t>
+              <a:t>09  ·  ВХОД И БЕЗОПАСНОСТЬ</a:t>
             </a:r>
           </a:p>
         </p:txBody>
@@ -4789,7 +4651,7 @@
                 </a:solidFill>
                 <a:latin typeface="Segoe UI"/>
               </a:rPr>
-              <a:t>JWT + refresh + ротация</a:t>
+              <a:t>Как защищены аккаунты</a:t>
             </a:r>
           </a:p>
         </p:txBody>
@@ -4840,549 +4702,14 @@
       </p:sp>
       <p:sp>
         <p:nvSpPr>
-          <p:cNvPr id="9" name="Rectangle 8"/>
-          <p:cNvSpPr/>
-          <p:nvPr/>
-        </p:nvSpPr>
-        <p:spPr>
-          <a:xfrm>
-            <a:off x="822960" y="2148840"/>
-            <a:ext cx="320040" cy="548640"/>
-          </a:xfrm>
-          <a:prstGeom prst="rect">
-            <a:avLst/>
-          </a:prstGeom>
-          <a:solidFill>
-            <a:srgbClr val="0066FF"/>
-          </a:solidFill>
-          <a:ln>
-            <a:noFill/>
-          </a:ln>
-          <a:effectLst/>
-        </p:spPr>
-        <p:style>
-          <a:lnRef idx="1">
-            <a:schemeClr val="accent1"/>
-          </a:lnRef>
-          <a:fillRef idx="3">
-            <a:schemeClr val="accent1"/>
-          </a:fillRef>
-          <a:effectRef idx="2">
-            <a:schemeClr val="accent1"/>
-          </a:effectRef>
-          <a:fontRef idx="minor">
-            <a:schemeClr val="lt1"/>
-          </a:fontRef>
-        </p:style>
-        <p:txBody>
-          <a:bodyPr rtlCol="0" anchor="ctr"/>
-          <a:lstStyle/>
-          <a:p>
-            <a:pPr algn="ctr"/>
-          </a:p>
-        </p:txBody>
-      </p:sp>
-      <p:sp>
-        <p:nvSpPr>
-          <p:cNvPr id="10" name="TextBox 9"/>
-          <p:cNvSpPr txBox="1"/>
-          <p:nvPr/>
-        </p:nvSpPr>
-        <p:spPr>
-          <a:xfrm>
-            <a:off x="1280160" y="2194560"/>
-            <a:ext cx="4572000" cy="365760"/>
-          </a:xfrm>
-          <a:prstGeom prst="rect">
-            <a:avLst/>
-          </a:prstGeom>
-          <a:noFill/>
-        </p:spPr>
-        <p:txBody>
-          <a:bodyPr wrap="square" lIns="0" rIns="0" tIns="0" bIns="0" anchor="t">
-            <a:spAutoFit/>
-          </a:bodyPr>
-          <a:lstStyle/>
-          <a:p>
-            <a:pPr algn="l"/>
-            <a:r>
-              <a:rPr sz="1300" b="1" i="0">
-                <a:solidFill>
-                  <a:srgbClr val="0A0A0A"/>
-                </a:solidFill>
-                <a:latin typeface="Consolas"/>
-              </a:rPr>
-              <a:t>POST /auth/login</a:t>
-            </a:r>
-          </a:p>
-        </p:txBody>
-      </p:sp>
-      <p:sp>
-        <p:nvSpPr>
-          <p:cNvPr id="11" name="TextBox 10"/>
-          <p:cNvSpPr txBox="1"/>
-          <p:nvPr/>
-        </p:nvSpPr>
-        <p:spPr>
-          <a:xfrm>
-            <a:off x="1280160" y="2468880"/>
-            <a:ext cx="10058400" cy="365760"/>
-          </a:xfrm>
-          <a:prstGeom prst="rect">
-            <a:avLst/>
-          </a:prstGeom>
-          <a:noFill/>
-        </p:spPr>
-        <p:txBody>
-          <a:bodyPr wrap="square" lIns="0" rIns="0" tIns="0" bIns="0" anchor="t">
-            <a:spAutoFit/>
-          </a:bodyPr>
-          <a:lstStyle/>
-          <a:p>
-            <a:pPr algn="l"/>
-            <a:r>
-              <a:rPr sz="1300" b="0" i="0">
-                <a:solidFill>
-                  <a:srgbClr val="52525B"/>
-                </a:solidFill>
-                <a:latin typeface="Segoe UI"/>
-              </a:rPr>
-              <a:t>пара access + refresh</a:t>
-            </a:r>
-          </a:p>
-        </p:txBody>
-      </p:sp>
-      <p:sp>
-        <p:nvSpPr>
-          <p:cNvPr id="12" name="Rectangle 11"/>
-          <p:cNvSpPr/>
-          <p:nvPr/>
-        </p:nvSpPr>
-        <p:spPr>
-          <a:xfrm>
-            <a:off x="822960" y="2926080"/>
-            <a:ext cx="320040" cy="548640"/>
-          </a:xfrm>
-          <a:prstGeom prst="rect">
-            <a:avLst/>
-          </a:prstGeom>
-          <a:solidFill>
-            <a:srgbClr val="0066FF"/>
-          </a:solidFill>
-          <a:ln>
-            <a:noFill/>
-          </a:ln>
-          <a:effectLst/>
-        </p:spPr>
-        <p:style>
-          <a:lnRef idx="1">
-            <a:schemeClr val="accent1"/>
-          </a:lnRef>
-          <a:fillRef idx="3">
-            <a:schemeClr val="accent1"/>
-          </a:fillRef>
-          <a:effectRef idx="2">
-            <a:schemeClr val="accent1"/>
-          </a:effectRef>
-          <a:fontRef idx="minor">
-            <a:schemeClr val="lt1"/>
-          </a:fontRef>
-        </p:style>
-        <p:txBody>
-          <a:bodyPr rtlCol="0" anchor="ctr"/>
-          <a:lstStyle/>
-          <a:p>
-            <a:pPr algn="ctr"/>
-          </a:p>
-        </p:txBody>
-      </p:sp>
-      <p:sp>
-        <p:nvSpPr>
-          <p:cNvPr id="13" name="TextBox 12"/>
-          <p:cNvSpPr txBox="1"/>
-          <p:nvPr/>
-        </p:nvSpPr>
-        <p:spPr>
-          <a:xfrm>
-            <a:off x="1280160" y="2971800"/>
-            <a:ext cx="4572000" cy="365760"/>
-          </a:xfrm>
-          <a:prstGeom prst="rect">
-            <a:avLst/>
-          </a:prstGeom>
-          <a:noFill/>
-        </p:spPr>
-        <p:txBody>
-          <a:bodyPr wrap="square" lIns="0" rIns="0" tIns="0" bIns="0" anchor="t">
-            <a:spAutoFit/>
-          </a:bodyPr>
-          <a:lstStyle/>
-          <a:p>
-            <a:pPr algn="l"/>
-            <a:r>
-              <a:rPr sz="1300" b="1" i="0">
-                <a:solidFill>
-                  <a:srgbClr val="0A0A0A"/>
-                </a:solidFill>
-                <a:latin typeface="Consolas"/>
-              </a:rPr>
-              <a:t>Bearer &lt;access&gt;</a:t>
-            </a:r>
-          </a:p>
-        </p:txBody>
-      </p:sp>
-      <p:sp>
-        <p:nvSpPr>
-          <p:cNvPr id="14" name="TextBox 13"/>
-          <p:cNvSpPr txBox="1"/>
-          <p:nvPr/>
-        </p:nvSpPr>
-        <p:spPr>
-          <a:xfrm>
-            <a:off x="1280160" y="3246120"/>
-            <a:ext cx="10058400" cy="365760"/>
-          </a:xfrm>
-          <a:prstGeom prst="rect">
-            <a:avLst/>
-          </a:prstGeom>
-          <a:noFill/>
-        </p:spPr>
-        <p:txBody>
-          <a:bodyPr wrap="square" lIns="0" rIns="0" tIns="0" bIns="0" anchor="t">
-            <a:spAutoFit/>
-          </a:bodyPr>
-          <a:lstStyle/>
-          <a:p>
-            <a:pPr algn="l"/>
-            <a:r>
-              <a:rPr sz="1300" b="0" i="0">
-                <a:solidFill>
-                  <a:srgbClr val="52525B"/>
-                </a:solidFill>
-                <a:latin typeface="Segoe UI"/>
-              </a:rPr>
-              <a:t>все защищённые запросы, TTL 30 мин</a:t>
-            </a:r>
-          </a:p>
-        </p:txBody>
-      </p:sp>
-      <p:sp>
-        <p:nvSpPr>
-          <p:cNvPr id="15" name="Rectangle 14"/>
-          <p:cNvSpPr/>
-          <p:nvPr/>
-        </p:nvSpPr>
-        <p:spPr>
-          <a:xfrm>
-            <a:off x="822960" y="3703320"/>
-            <a:ext cx="320040" cy="548640"/>
-          </a:xfrm>
-          <a:prstGeom prst="rect">
-            <a:avLst/>
-          </a:prstGeom>
-          <a:solidFill>
-            <a:srgbClr val="0066FF"/>
-          </a:solidFill>
-          <a:ln>
-            <a:noFill/>
-          </a:ln>
-          <a:effectLst/>
-        </p:spPr>
-        <p:style>
-          <a:lnRef idx="1">
-            <a:schemeClr val="accent1"/>
-          </a:lnRef>
-          <a:fillRef idx="3">
-            <a:schemeClr val="accent1"/>
-          </a:fillRef>
-          <a:effectRef idx="2">
-            <a:schemeClr val="accent1"/>
-          </a:effectRef>
-          <a:fontRef idx="minor">
-            <a:schemeClr val="lt1"/>
-          </a:fontRef>
-        </p:style>
-        <p:txBody>
-          <a:bodyPr rtlCol="0" anchor="ctr"/>
-          <a:lstStyle/>
-          <a:p>
-            <a:pPr algn="ctr"/>
-          </a:p>
-        </p:txBody>
-      </p:sp>
-      <p:sp>
-        <p:nvSpPr>
-          <p:cNvPr id="16" name="TextBox 15"/>
-          <p:cNvSpPr txBox="1"/>
-          <p:nvPr/>
-        </p:nvSpPr>
-        <p:spPr>
-          <a:xfrm>
-            <a:off x="1280160" y="3749040"/>
-            <a:ext cx="4572000" cy="365760"/>
-          </a:xfrm>
-          <a:prstGeom prst="rect">
-            <a:avLst/>
-          </a:prstGeom>
-          <a:noFill/>
-        </p:spPr>
-        <p:txBody>
-          <a:bodyPr wrap="square" lIns="0" rIns="0" tIns="0" bIns="0" anchor="t">
-            <a:spAutoFit/>
-          </a:bodyPr>
-          <a:lstStyle/>
-          <a:p>
-            <a:pPr algn="l"/>
-            <a:r>
-              <a:rPr sz="1300" b="1" i="0">
-                <a:solidFill>
-                  <a:srgbClr val="0A0A0A"/>
-                </a:solidFill>
-                <a:latin typeface="Consolas"/>
-              </a:rPr>
-              <a:t>POST /auth/refresh</a:t>
-            </a:r>
-          </a:p>
-        </p:txBody>
-      </p:sp>
-      <p:sp>
-        <p:nvSpPr>
-          <p:cNvPr id="17" name="TextBox 16"/>
-          <p:cNvSpPr txBox="1"/>
-          <p:nvPr/>
-        </p:nvSpPr>
-        <p:spPr>
-          <a:xfrm>
-            <a:off x="1280160" y="4023360"/>
-            <a:ext cx="10058400" cy="365760"/>
-          </a:xfrm>
-          <a:prstGeom prst="rect">
-            <a:avLst/>
-          </a:prstGeom>
-          <a:noFill/>
-        </p:spPr>
-        <p:txBody>
-          <a:bodyPr wrap="square" lIns="0" rIns="0" tIns="0" bIns="0" anchor="t">
-            <a:spAutoFit/>
-          </a:bodyPr>
-          <a:lstStyle/>
-          <a:p>
-            <a:pPr algn="l"/>
-            <a:r>
-              <a:rPr sz="1300" b="0" i="0">
-                <a:solidFill>
-                  <a:srgbClr val="52525B"/>
-                </a:solidFill>
-                <a:latin typeface="Segoe UI"/>
-              </a:rPr>
-              <a:t>старый refresh отзывается, выдаётся новая пара</a:t>
-            </a:r>
-          </a:p>
-        </p:txBody>
-      </p:sp>
-      <p:sp>
-        <p:nvSpPr>
-          <p:cNvPr id="18" name="Rectangle 17"/>
-          <p:cNvSpPr/>
-          <p:nvPr/>
-        </p:nvSpPr>
-        <p:spPr>
-          <a:xfrm>
-            <a:off x="822960" y="4480560"/>
-            <a:ext cx="320040" cy="548640"/>
-          </a:xfrm>
-          <a:prstGeom prst="rect">
-            <a:avLst/>
-          </a:prstGeom>
-          <a:solidFill>
-            <a:srgbClr val="0066FF"/>
-          </a:solidFill>
-          <a:ln>
-            <a:noFill/>
-          </a:ln>
-          <a:effectLst/>
-        </p:spPr>
-        <p:style>
-          <a:lnRef idx="1">
-            <a:schemeClr val="accent1"/>
-          </a:lnRef>
-          <a:fillRef idx="3">
-            <a:schemeClr val="accent1"/>
-          </a:fillRef>
-          <a:effectRef idx="2">
-            <a:schemeClr val="accent1"/>
-          </a:effectRef>
-          <a:fontRef idx="minor">
-            <a:schemeClr val="lt1"/>
-          </a:fontRef>
-        </p:style>
-        <p:txBody>
-          <a:bodyPr rtlCol="0" anchor="ctr"/>
-          <a:lstStyle/>
-          <a:p>
-            <a:pPr algn="ctr"/>
-          </a:p>
-        </p:txBody>
-      </p:sp>
-      <p:sp>
-        <p:nvSpPr>
-          <p:cNvPr id="19" name="TextBox 18"/>
-          <p:cNvSpPr txBox="1"/>
-          <p:nvPr/>
-        </p:nvSpPr>
-        <p:spPr>
-          <a:xfrm>
-            <a:off x="1280160" y="4526280"/>
-            <a:ext cx="4572000" cy="365760"/>
-          </a:xfrm>
-          <a:prstGeom prst="rect">
-            <a:avLst/>
-          </a:prstGeom>
-          <a:noFill/>
-        </p:spPr>
-        <p:txBody>
-          <a:bodyPr wrap="square" lIns="0" rIns="0" tIns="0" bIns="0" anchor="t">
-            <a:spAutoFit/>
-          </a:bodyPr>
-          <a:lstStyle/>
-          <a:p>
-            <a:pPr algn="l"/>
-            <a:r>
-              <a:rPr sz="1300" b="1" i="0">
-                <a:solidFill>
-                  <a:srgbClr val="0A0A0A"/>
-                </a:solidFill>
-                <a:latin typeface="Consolas"/>
-              </a:rPr>
-              <a:t>POST /auth/logout</a:t>
-            </a:r>
-          </a:p>
-        </p:txBody>
-      </p:sp>
-      <p:sp>
-        <p:nvSpPr>
-          <p:cNvPr id="20" name="TextBox 19"/>
-          <p:cNvSpPr txBox="1"/>
-          <p:nvPr/>
-        </p:nvSpPr>
-        <p:spPr>
-          <a:xfrm>
-            <a:off x="1280160" y="4800600"/>
-            <a:ext cx="10058400" cy="365760"/>
-          </a:xfrm>
-          <a:prstGeom prst="rect">
-            <a:avLst/>
-          </a:prstGeom>
-          <a:noFill/>
-        </p:spPr>
-        <p:txBody>
-          <a:bodyPr wrap="square" lIns="0" rIns="0" tIns="0" bIns="0" anchor="t">
-            <a:spAutoFit/>
-          </a:bodyPr>
-          <a:lstStyle/>
-          <a:p>
-            <a:pPr algn="l"/>
-            <a:r>
-              <a:rPr sz="1300" b="0" i="0">
-                <a:solidFill>
-                  <a:srgbClr val="52525B"/>
-                </a:solidFill>
-                <a:latin typeface="Segoe UI"/>
-              </a:rPr>
-              <a:t>refresh помечается revoked</a:t>
-            </a:r>
-          </a:p>
-        </p:txBody>
-      </p:sp>
-      <p:sp>
-        <p:nvSpPr>
-          <p:cNvPr id="21" name="Rectangle 20"/>
-          <p:cNvSpPr/>
-          <p:nvPr/>
-        </p:nvSpPr>
-        <p:spPr>
-          <a:xfrm>
-            <a:off x="6949440" y="2148840"/>
-            <a:ext cx="5120640" cy="3108960"/>
-          </a:xfrm>
-          <a:prstGeom prst="rect">
-            <a:avLst/>
-          </a:prstGeom>
-          <a:solidFill>
-            <a:srgbClr val="F5F5F5"/>
-          </a:solidFill>
-          <a:ln>
-            <a:noFill/>
-          </a:ln>
-          <a:effectLst/>
-        </p:spPr>
-        <p:style>
-          <a:lnRef idx="1">
-            <a:schemeClr val="accent1"/>
-          </a:lnRef>
-          <a:fillRef idx="3">
-            <a:schemeClr val="accent1"/>
-          </a:fillRef>
-          <a:effectRef idx="2">
-            <a:schemeClr val="accent1"/>
-          </a:effectRef>
-          <a:fontRef idx="minor">
-            <a:schemeClr val="lt1"/>
-          </a:fontRef>
-        </p:style>
-        <p:txBody>
-          <a:bodyPr rtlCol="0" anchor="ctr"/>
-          <a:lstStyle/>
-          <a:p>
-            <a:pPr algn="ctr"/>
-          </a:p>
-        </p:txBody>
-      </p:sp>
-      <p:sp>
-        <p:nvSpPr>
-          <p:cNvPr id="22" name="TextBox 21"/>
-          <p:cNvSpPr txBox="1"/>
-          <p:nvPr/>
-        </p:nvSpPr>
-        <p:spPr>
-          <a:xfrm>
-            <a:off x="7132320" y="2286000"/>
-            <a:ext cx="4754880" cy="320040"/>
-          </a:xfrm>
-          <a:prstGeom prst="rect">
-            <a:avLst/>
-          </a:prstGeom>
-          <a:noFill/>
-        </p:spPr>
-        <p:txBody>
-          <a:bodyPr wrap="square" lIns="0" rIns="0" tIns="0" bIns="0" anchor="t">
-            <a:spAutoFit/>
-          </a:bodyPr>
-          <a:lstStyle/>
-          <a:p>
-            <a:pPr algn="l"/>
-            <a:r>
-              <a:rPr sz="1100" b="0" i="0">
-                <a:solidFill>
-                  <a:srgbClr val="52525B"/>
-                </a:solidFill>
-                <a:latin typeface="Consolas"/>
-              </a:rPr>
-              <a:t>БЕЗОПАСНОСТЬ</a:t>
-            </a:r>
-          </a:p>
-        </p:txBody>
-      </p:sp>
-      <p:sp>
-        <p:nvSpPr>
-          <p:cNvPr id="23" name="TextBox 22"/>
-          <p:cNvSpPr txBox="1"/>
-          <p:nvPr/>
-        </p:nvSpPr>
-        <p:spPr>
-          <a:xfrm>
-            <a:off x="7132320" y="2606040"/>
-            <a:ext cx="4754880" cy="2651760"/>
+          <p:cNvPr id="9" name="TextBox 8"/>
+          <p:cNvSpPr txBox="1"/>
+          <p:nvPr/>
+        </p:nvSpPr>
+        <p:spPr>
+          <a:xfrm>
+            <a:off x="822960" y="2194560"/>
+            <a:ext cx="10972800" cy="1371600"/>
           </a:xfrm>
           <a:prstGeom prst="rect">
             <a:avLst/>
@@ -5397,104 +4724,194 @@
           <a:p>
             <a:pPr algn="l">
               <a:lnSpc>
-                <a:spcPct val="150000"/>
+                <a:spcPct val="140000"/>
               </a:lnSpc>
             </a:pPr>
             <a:r>
-              <a:rPr sz="1300" b="0">
+              <a:rPr sz="1500" b="0">
                 <a:solidFill>
                   <a:srgbClr val="0A0A0A"/>
                 </a:solidFill>
                 <a:latin typeface="Segoe UI"/>
               </a:rPr>
-              <a:t>— пароли — только bcrypt-хэш</a:t>
+              <a:t>Пользователь вводит логин и пароль — сервер выдаёт токен, с которым</a:t>
             </a:r>
           </a:p>
           <a:p>
             <a:pPr algn="l">
               <a:lnSpc>
-                <a:spcPct val="150000"/>
+                <a:spcPct val="140000"/>
               </a:lnSpc>
             </a:pPr>
             <a:r>
-              <a:rPr sz="1300" b="0">
+              <a:rPr sz="1500" b="0">
                 <a:solidFill>
                   <a:srgbClr val="0A0A0A"/>
                 </a:solidFill>
                 <a:latin typeface="Segoe UI"/>
               </a:rPr>
-              <a:t>— refresh хранится SHA-256 хэшем</a:t>
+              <a:t>клиент ходит по остальным запросам. Пароли никогда не хранятся в открытом</a:t>
             </a:r>
           </a:p>
           <a:p>
             <a:pPr algn="l">
               <a:lnSpc>
-                <a:spcPct val="150000"/>
+                <a:spcPct val="140000"/>
               </a:lnSpc>
             </a:pPr>
             <a:r>
-              <a:rPr sz="1300" b="0">
+              <a:rPr sz="1500" b="0">
                 <a:solidFill>
                   <a:srgbClr val="0A0A0A"/>
                 </a:solidFill>
                 <a:latin typeface="Segoe UI"/>
               </a:rPr>
-              <a:t>— ротация: одноразовый refresh</a:t>
-            </a:r>
-          </a:p>
+              <a:t>виде — только необратимо зашифрованными.</a:t>
+            </a:r>
+          </a:p>
+        </p:txBody>
+      </p:sp>
+      <p:sp>
+        <p:nvSpPr>
+          <p:cNvPr id="10" name="TextBox 9"/>
+          <p:cNvSpPr txBox="1"/>
+          <p:nvPr/>
+        </p:nvSpPr>
+        <p:spPr>
+          <a:xfrm>
+            <a:off x="822960" y="3794760"/>
+            <a:ext cx="10972800" cy="320040"/>
+          </a:xfrm>
+          <a:prstGeom prst="rect">
+            <a:avLst/>
+          </a:prstGeom>
+          <a:noFill/>
+        </p:spPr>
+        <p:txBody>
+          <a:bodyPr wrap="square" lIns="0" rIns="0" tIns="0" bIns="0" anchor="t">
+            <a:spAutoFit/>
+          </a:bodyPr>
+          <a:lstStyle/>
+          <a:p>
+            <a:pPr algn="l"/>
+            <a:r>
+              <a:rPr sz="1100" b="0" i="0">
+                <a:solidFill>
+                  <a:srgbClr val="52525B"/>
+                </a:solidFill>
+                <a:latin typeface="Consolas"/>
+              </a:rPr>
+              <a:t>ЧТО СДЕЛАЛИ ДЛЯ БЕЗОПАСНОСТИ</a:t>
+            </a:r>
+          </a:p>
+        </p:txBody>
+      </p:sp>
+      <p:sp>
+        <p:nvSpPr>
+          <p:cNvPr id="11" name="TextBox 10"/>
+          <p:cNvSpPr txBox="1"/>
+          <p:nvPr/>
+        </p:nvSpPr>
+        <p:spPr>
+          <a:xfrm>
+            <a:off x="822960" y="4160520"/>
+            <a:ext cx="10972800" cy="2286000"/>
+          </a:xfrm>
+          <a:prstGeom prst="rect">
+            <a:avLst/>
+          </a:prstGeom>
+          <a:noFill/>
+        </p:spPr>
+        <p:txBody>
+          <a:bodyPr wrap="square" lIns="0" rIns="0">
+            <a:spAutoFit/>
+          </a:bodyPr>
+          <a:lstStyle/>
           <a:p>
             <a:pPr algn="l">
               <a:lnSpc>
-                <a:spcPct val="150000"/>
+                <a:spcPct val="140000"/>
               </a:lnSpc>
             </a:pPr>
             <a:r>
-              <a:rPr sz="1300" b="0">
+              <a:rPr sz="1400" b="0">
                 <a:solidFill>
                   <a:srgbClr val="0A0A0A"/>
                 </a:solidFill>
                 <a:latin typeface="Segoe UI"/>
               </a:rPr>
-              <a:t>— row-lock (SELECT FOR UPDATE) от гонки</a:t>
+              <a:t>— пароли хранятся в зашифрованном виде (bcrypt)</a:t>
             </a:r>
           </a:p>
           <a:p>
             <a:pPr algn="l">
               <a:lnSpc>
-                <a:spcPct val="150000"/>
+                <a:spcPct val="140000"/>
               </a:lnSpc>
             </a:pPr>
             <a:r>
-              <a:rPr sz="1300" b="0">
+              <a:rPr sz="1400" b="0">
                 <a:solidFill>
                   <a:srgbClr val="0A0A0A"/>
                 </a:solidFill>
                 <a:latin typeface="Segoe UI"/>
               </a:rPr>
-              <a:t>— revoked_at помечает отозванные</a:t>
+              <a:t>— каждый запрос требует действующий токен</a:t>
             </a:r>
           </a:p>
           <a:p>
             <a:pPr algn="l">
               <a:lnSpc>
-                <a:spcPct val="150000"/>
+                <a:spcPct val="140000"/>
               </a:lnSpc>
             </a:pPr>
             <a:r>
-              <a:rPr sz="1300" b="0">
+              <a:rPr sz="1400" b="0">
                 <a:solidFill>
                   <a:srgbClr val="0A0A0A"/>
                 </a:solidFill>
                 <a:latin typeface="Segoe UI"/>
               </a:rPr>
-              <a:t>— TTL access = 30 мин · refresh = 30 дней</a:t>
-            </a:r>
-          </a:p>
-        </p:txBody>
-      </p:sp>
-      <p:sp>
-        <p:nvSpPr>
-          <p:cNvPr id="24" name="TextBox 23"/>
+              <a:t>— токен обновляется автоматически без повторного ввода пароля</a:t>
+            </a:r>
+          </a:p>
+          <a:p>
+            <a:pPr algn="l">
+              <a:lnSpc>
+                <a:spcPct val="140000"/>
+              </a:lnSpc>
+            </a:pPr>
+            <a:r>
+              <a:rPr sz="1400" b="0">
+                <a:solidFill>
+                  <a:srgbClr val="0A0A0A"/>
+                </a:solidFill>
+                <a:latin typeface="Segoe UI"/>
+              </a:rPr>
+              <a:t>— выход из аккаунта отзывает все токены на сервере</a:t>
+            </a:r>
+          </a:p>
+          <a:p>
+            <a:pPr algn="l">
+              <a:lnSpc>
+                <a:spcPct val="140000"/>
+              </a:lnSpc>
+            </a:pPr>
+            <a:r>
+              <a:rPr sz="1400" b="0">
+                <a:solidFill>
+                  <a:srgbClr val="0A0A0A"/>
+                </a:solidFill>
+                <a:latin typeface="Segoe UI"/>
+              </a:rPr>
+              <a:t>— в системе есть три роли: читатель, участник, владелец чата</a:t>
+            </a:r>
+          </a:p>
+        </p:txBody>
+      </p:sp>
+      <p:sp>
+        <p:nvSpPr>
+          <p:cNvPr id="12" name="TextBox 11"/>
           <p:cNvSpPr txBox="1"/>
           <p:nvPr/>
         </p:nvSpPr>
@@ -5529,7 +4946,7 @@
       </p:sp>
       <p:sp>
         <p:nvSpPr>
-          <p:cNvPr id="25" name="TextBox 24"/>
+          <p:cNvPr id="13" name="TextBox 12"/>
           <p:cNvSpPr txBox="1"/>
           <p:nvPr/>
         </p:nvSpPr>
@@ -5557,7 +4974,7 @@
                 </a:solidFill>
                 <a:latin typeface="Consolas"/>
               </a:rPr>
-              <a:t>11 / 13</a:t>
+              <a:t>11 / 15</a:t>
             </a:r>
           </a:p>
         </p:txBody>
@@ -6363,7 +5780,7 @@
                 </a:solidFill>
                 <a:latin typeface="Consolas"/>
               </a:rPr>
-              <a:t>12 / 13</a:t>
+              <a:t>12 / 15</a:t>
             </a:r>
           </a:p>
         </p:txBody>
@@ -6600,7 +6017,7 @@
                 </a:solidFill>
                 <a:latin typeface="Consolas"/>
               </a:rPr>
-              <a:t>11  ·  ТЕСТИРОВАНИЕ</a:t>
+              <a:t>12  ·  КАК МЫ РАБОТАЛИ</a:t>
             </a:r>
           </a:p>
         </p:txBody>
@@ -6635,7 +6052,7 @@
                 </a:solidFill>
                 <a:latin typeface="Segoe UI"/>
               </a:rPr>
-              <a:t>Автотесты + ручные сценарии</a:t>
+              <a:t>Этапы проекта</a:t>
             </a:r>
           </a:p>
         </p:txBody>
@@ -6692,52 +6109,8 @@
         </p:nvSpPr>
         <p:spPr>
           <a:xfrm>
-            <a:off x="822960" y="2148840"/>
-            <a:ext cx="3566160" cy="1554480"/>
-          </a:xfrm>
-          <a:prstGeom prst="rect">
-            <a:avLst/>
-          </a:prstGeom>
-          <a:solidFill>
-            <a:srgbClr val="F5F8FF"/>
-          </a:solidFill>
-          <a:ln>
-            <a:noFill/>
-          </a:ln>
-          <a:effectLst/>
-        </p:spPr>
-        <p:style>
-          <a:lnRef idx="1">
-            <a:schemeClr val="accent1"/>
-          </a:lnRef>
-          <a:fillRef idx="3">
-            <a:schemeClr val="accent1"/>
-          </a:fillRef>
-          <a:effectRef idx="2">
-            <a:schemeClr val="accent1"/>
-          </a:effectRef>
-          <a:fontRef idx="minor">
-            <a:schemeClr val="lt1"/>
-          </a:fontRef>
-        </p:style>
-        <p:txBody>
-          <a:bodyPr rtlCol="0" anchor="ctr"/>
-          <a:lstStyle/>
-          <a:p>
-            <a:pPr algn="ctr"/>
-          </a:p>
-        </p:txBody>
-      </p:sp>
-      <p:sp>
-        <p:nvSpPr>
-          <p:cNvPr id="10" name="Rectangle 9"/>
-          <p:cNvSpPr/>
-          <p:nvPr/>
-        </p:nvSpPr>
-        <p:spPr>
-          <a:xfrm>
-            <a:off x="822960" y="2148840"/>
-            <a:ext cx="35000" cy="1554480"/>
+            <a:off x="822960" y="2221992"/>
+            <a:ext cx="384048" cy="384048"/>
           </a:xfrm>
           <a:prstGeom prst="rect">
             <a:avLst/>
@@ -6774,14 +6147,49 @@
       </p:sp>
       <p:sp>
         <p:nvSpPr>
+          <p:cNvPr id="10" name="TextBox 9"/>
+          <p:cNvSpPr txBox="1"/>
+          <p:nvPr/>
+        </p:nvSpPr>
+        <p:spPr>
+          <a:xfrm>
+            <a:off x="822960" y="2258568"/>
+            <a:ext cx="384048" cy="320040"/>
+          </a:xfrm>
+          <a:prstGeom prst="rect">
+            <a:avLst/>
+          </a:prstGeom>
+          <a:noFill/>
+        </p:spPr>
+        <p:txBody>
+          <a:bodyPr wrap="square" lIns="0" rIns="0" tIns="0" bIns="0" anchor="t">
+            <a:spAutoFit/>
+          </a:bodyPr>
+          <a:lstStyle/>
+          <a:p>
+            <a:pPr algn="ctr"/>
+            <a:r>
+              <a:rPr sz="1300" b="1" i="0">
+                <a:solidFill>
+                  <a:srgbClr val="FFFFFF"/>
+                </a:solidFill>
+                <a:latin typeface="Segoe UI"/>
+              </a:rPr>
+              <a:t>1</a:t>
+            </a:r>
+          </a:p>
+        </p:txBody>
+      </p:sp>
+      <p:sp>
+        <p:nvSpPr>
           <p:cNvPr id="11" name="TextBox 10"/>
           <p:cNvSpPr txBox="1"/>
           <p:nvPr/>
         </p:nvSpPr>
         <p:spPr>
           <a:xfrm>
-            <a:off x="1143000" y="2377440"/>
-            <a:ext cx="3200400" cy="548640"/>
+            <a:off x="1417320" y="2194560"/>
+            <a:ext cx="4114800" cy="411480"/>
           </a:xfrm>
           <a:prstGeom prst="rect">
             <a:avLst/>
@@ -6796,13 +6204,13 @@
           <a:p>
             <a:pPr algn="l"/>
             <a:r>
-              <a:rPr sz="2600" b="1" i="0">
+              <a:rPr sz="1500" b="1" i="0">
                 <a:solidFill>
                   <a:srgbClr val="0A0A0A"/>
                 </a:solidFill>
                 <a:latin typeface="Segoe UI"/>
               </a:rPr>
-              <a:t>7 / 7</a:t>
+              <a:t>Разобрали ТЗ</a:t>
             </a:r>
           </a:p>
         </p:txBody>
@@ -6815,8 +6223,8 @@
         </p:nvSpPr>
         <p:spPr>
           <a:xfrm>
-            <a:off x="1143000" y="2971800"/>
-            <a:ext cx="3200400" cy="640080"/>
+            <a:off x="5669280" y="2221992"/>
+            <a:ext cx="6400800" cy="411480"/>
           </a:xfrm>
           <a:prstGeom prst="rect">
             <a:avLst/>
@@ -6837,7 +6245,7 @@
                 </a:solidFill>
                 <a:latin typeface="Segoe UI"/>
               </a:rPr>
-              <a:t>pytest-тестов проходят</a:t>
+              <a:t>выделили обязательные и дополнительные функции</a:t>
             </a:r>
           </a:p>
         </p:txBody>
@@ -6850,52 +6258,8 @@
         </p:nvSpPr>
         <p:spPr>
           <a:xfrm>
-            <a:off x="4617720" y="2148840"/>
-            <a:ext cx="3566160" cy="1554480"/>
-          </a:xfrm>
-          <a:prstGeom prst="rect">
-            <a:avLst/>
-          </a:prstGeom>
-          <a:solidFill>
-            <a:srgbClr val="F5F8FF"/>
-          </a:solidFill>
-          <a:ln>
-            <a:noFill/>
-          </a:ln>
-          <a:effectLst/>
-        </p:spPr>
-        <p:style>
-          <a:lnRef idx="1">
-            <a:schemeClr val="accent1"/>
-          </a:lnRef>
-          <a:fillRef idx="3">
-            <a:schemeClr val="accent1"/>
-          </a:fillRef>
-          <a:effectRef idx="2">
-            <a:schemeClr val="accent1"/>
-          </a:effectRef>
-          <a:fontRef idx="minor">
-            <a:schemeClr val="lt1"/>
-          </a:fontRef>
-        </p:style>
-        <p:txBody>
-          <a:bodyPr rtlCol="0" anchor="ctr"/>
-          <a:lstStyle/>
-          <a:p>
-            <a:pPr algn="ctr"/>
-          </a:p>
-        </p:txBody>
-      </p:sp>
-      <p:sp>
-        <p:nvSpPr>
-          <p:cNvPr id="14" name="Rectangle 13"/>
-          <p:cNvSpPr/>
-          <p:nvPr/>
-        </p:nvSpPr>
-        <p:spPr>
-          <a:xfrm>
-            <a:off x="4617720" y="2148840"/>
-            <a:ext cx="35000" cy="1554480"/>
+            <a:off x="822960" y="2788920"/>
+            <a:ext cx="384048" cy="384048"/>
           </a:xfrm>
           <a:prstGeom prst="rect">
             <a:avLst/>
@@ -6932,14 +6296,49 @@
       </p:sp>
       <p:sp>
         <p:nvSpPr>
+          <p:cNvPr id="14" name="TextBox 13"/>
+          <p:cNvSpPr txBox="1"/>
+          <p:nvPr/>
+        </p:nvSpPr>
+        <p:spPr>
+          <a:xfrm>
+            <a:off x="822960" y="2825496"/>
+            <a:ext cx="384048" cy="320040"/>
+          </a:xfrm>
+          <a:prstGeom prst="rect">
+            <a:avLst/>
+          </a:prstGeom>
+          <a:noFill/>
+        </p:spPr>
+        <p:txBody>
+          <a:bodyPr wrap="square" lIns="0" rIns="0" tIns="0" bIns="0" anchor="t">
+            <a:spAutoFit/>
+          </a:bodyPr>
+          <a:lstStyle/>
+          <a:p>
+            <a:pPr algn="ctr"/>
+            <a:r>
+              <a:rPr sz="1300" b="1" i="0">
+                <a:solidFill>
+                  <a:srgbClr val="FFFFFF"/>
+                </a:solidFill>
+                <a:latin typeface="Segoe UI"/>
+              </a:rPr>
+              <a:t>2</a:t>
+            </a:r>
+          </a:p>
+        </p:txBody>
+      </p:sp>
+      <p:sp>
+        <p:nvSpPr>
           <p:cNvPr id="15" name="TextBox 14"/>
           <p:cNvSpPr txBox="1"/>
           <p:nvPr/>
         </p:nvSpPr>
         <p:spPr>
           <a:xfrm>
-            <a:off x="4937760" y="2377440"/>
-            <a:ext cx="3200400" cy="548640"/>
+            <a:off x="1417320" y="2761488"/>
+            <a:ext cx="4114800" cy="411480"/>
           </a:xfrm>
           <a:prstGeom prst="rect">
             <a:avLst/>
@@ -6954,13 +6353,13 @@
           <a:p>
             <a:pPr algn="l"/>
             <a:r>
-              <a:rPr sz="2600" b="1" i="0">
+              <a:rPr sz="1500" b="1" i="0">
                 <a:solidFill>
                   <a:srgbClr val="0A0A0A"/>
                 </a:solidFill>
                 <a:latin typeface="Segoe UI"/>
               </a:rPr>
-              <a:t>4.5 сек</a:t>
+              <a:t>Спроектировали схему БД</a:t>
             </a:r>
           </a:p>
         </p:txBody>
@@ -6973,8 +6372,8 @@
         </p:nvSpPr>
         <p:spPr>
           <a:xfrm>
-            <a:off x="4937760" y="2971800"/>
-            <a:ext cx="3200400" cy="640080"/>
+            <a:off x="5669280" y="2788920"/>
+            <a:ext cx="6400800" cy="411480"/>
           </a:xfrm>
           <a:prstGeom prst="rect">
             <a:avLst/>
@@ -6995,7 +6394,7 @@
                 </a:solidFill>
                 <a:latin typeface="Segoe UI"/>
               </a:rPr>
-              <a:t>полный прогон suite</a:t>
+              <a:t>8 таблиц, связи между ними, ER-диаграмма</a:t>
             </a:r>
           </a:p>
         </p:txBody>
@@ -7008,52 +6407,8 @@
         </p:nvSpPr>
         <p:spPr>
           <a:xfrm>
-            <a:off x="8412480" y="2148840"/>
-            <a:ext cx="3566160" cy="1554480"/>
-          </a:xfrm>
-          <a:prstGeom prst="rect">
-            <a:avLst/>
-          </a:prstGeom>
-          <a:solidFill>
-            <a:srgbClr val="F5F8FF"/>
-          </a:solidFill>
-          <a:ln>
-            <a:noFill/>
-          </a:ln>
-          <a:effectLst/>
-        </p:spPr>
-        <p:style>
-          <a:lnRef idx="1">
-            <a:schemeClr val="accent1"/>
-          </a:lnRef>
-          <a:fillRef idx="3">
-            <a:schemeClr val="accent1"/>
-          </a:fillRef>
-          <a:effectRef idx="2">
-            <a:schemeClr val="accent1"/>
-          </a:effectRef>
-          <a:fontRef idx="minor">
-            <a:schemeClr val="lt1"/>
-          </a:fontRef>
-        </p:style>
-        <p:txBody>
-          <a:bodyPr rtlCol="0" anchor="ctr"/>
-          <a:lstStyle/>
-          <a:p>
-            <a:pPr algn="ctr"/>
-          </a:p>
-        </p:txBody>
-      </p:sp>
-      <p:sp>
-        <p:nvSpPr>
-          <p:cNvPr id="18" name="Rectangle 17"/>
-          <p:cNvSpPr/>
-          <p:nvPr/>
-        </p:nvSpPr>
-        <p:spPr>
-          <a:xfrm>
-            <a:off x="8412480" y="2148840"/>
-            <a:ext cx="35000" cy="1554480"/>
+            <a:off x="822960" y="3355848"/>
+            <a:ext cx="384048" cy="384048"/>
           </a:xfrm>
           <a:prstGeom prst="rect">
             <a:avLst/>
@@ -7090,14 +6445,49 @@
       </p:sp>
       <p:sp>
         <p:nvSpPr>
+          <p:cNvPr id="18" name="TextBox 17"/>
+          <p:cNvSpPr txBox="1"/>
+          <p:nvPr/>
+        </p:nvSpPr>
+        <p:spPr>
+          <a:xfrm>
+            <a:off x="822960" y="3392424"/>
+            <a:ext cx="384048" cy="320040"/>
+          </a:xfrm>
+          <a:prstGeom prst="rect">
+            <a:avLst/>
+          </a:prstGeom>
+          <a:noFill/>
+        </p:spPr>
+        <p:txBody>
+          <a:bodyPr wrap="square" lIns="0" rIns="0" tIns="0" bIns="0" anchor="t">
+            <a:spAutoFit/>
+          </a:bodyPr>
+          <a:lstStyle/>
+          <a:p>
+            <a:pPr algn="ctr"/>
+            <a:r>
+              <a:rPr sz="1300" b="1" i="0">
+                <a:solidFill>
+                  <a:srgbClr val="FFFFFF"/>
+                </a:solidFill>
+                <a:latin typeface="Segoe UI"/>
+              </a:rPr>
+              <a:t>3</a:t>
+            </a:r>
+          </a:p>
+        </p:txBody>
+      </p:sp>
+      <p:sp>
+        <p:nvSpPr>
           <p:cNvPr id="19" name="TextBox 18"/>
           <p:cNvSpPr txBox="1"/>
           <p:nvPr/>
         </p:nvSpPr>
         <p:spPr>
           <a:xfrm>
-            <a:off x="8732520" y="2377440"/>
-            <a:ext cx="3200400" cy="548640"/>
+            <a:off x="1417320" y="3328416"/>
+            <a:ext cx="4114800" cy="411480"/>
           </a:xfrm>
           <a:prstGeom prst="rect">
             <a:avLst/>
@@ -7112,13 +6502,13 @@
           <a:p>
             <a:pPr algn="l"/>
             <a:r>
-              <a:rPr sz="2600" b="1" i="0">
+              <a:rPr sz="1500" b="1" i="0">
                 <a:solidFill>
                   <a:srgbClr val="0A0A0A"/>
                 </a:solidFill>
                 <a:latin typeface="Segoe UI"/>
               </a:rPr>
-              <a:t>6 сцен.</a:t>
+              <a:t>Написали сервер</a:t>
             </a:r>
           </a:p>
         </p:txBody>
@@ -7131,8 +6521,8 @@
         </p:nvSpPr>
         <p:spPr>
           <a:xfrm>
-            <a:off x="8732520" y="2971800"/>
-            <a:ext cx="3200400" cy="640080"/>
+            <a:off x="5669280" y="3355848"/>
+            <a:ext cx="6400800" cy="411480"/>
           </a:xfrm>
           <a:prstGeom prst="rect">
             <a:avLst/>
@@ -7153,21 +6543,65 @@
                 </a:solidFill>
                 <a:latin typeface="Segoe UI"/>
               </a:rPr>
-              <a:t>ручных end-to-end проверок</a:t>
-            </a:r>
-          </a:p>
-        </p:txBody>
-      </p:sp>
-      <p:sp>
-        <p:nvSpPr>
-          <p:cNvPr id="21" name="TextBox 20"/>
-          <p:cNvSpPr txBox="1"/>
-          <p:nvPr/>
-        </p:nvSpPr>
-        <p:spPr>
-          <a:xfrm>
-            <a:off x="822960" y="4069080"/>
-            <a:ext cx="10972800" cy="320040"/>
+              <a:t>регистрация, чаты, сообщения, WebSocket</a:t>
+            </a:r>
+          </a:p>
+        </p:txBody>
+      </p:sp>
+      <p:sp>
+        <p:nvSpPr>
+          <p:cNvPr id="21" name="Rectangle 20"/>
+          <p:cNvSpPr/>
+          <p:nvPr/>
+        </p:nvSpPr>
+        <p:spPr>
+          <a:xfrm>
+            <a:off x="822960" y="3922776"/>
+            <a:ext cx="384048" cy="384048"/>
+          </a:xfrm>
+          <a:prstGeom prst="rect">
+            <a:avLst/>
+          </a:prstGeom>
+          <a:solidFill>
+            <a:srgbClr val="0066FF"/>
+          </a:solidFill>
+          <a:ln>
+            <a:noFill/>
+          </a:ln>
+          <a:effectLst/>
+        </p:spPr>
+        <p:style>
+          <a:lnRef idx="1">
+            <a:schemeClr val="accent1"/>
+          </a:lnRef>
+          <a:fillRef idx="3">
+            <a:schemeClr val="accent1"/>
+          </a:fillRef>
+          <a:effectRef idx="2">
+            <a:schemeClr val="accent1"/>
+          </a:effectRef>
+          <a:fontRef idx="minor">
+            <a:schemeClr val="lt1"/>
+          </a:fontRef>
+        </p:style>
+        <p:txBody>
+          <a:bodyPr rtlCol="0" anchor="ctr"/>
+          <a:lstStyle/>
+          <a:p>
+            <a:pPr algn="ctr"/>
+          </a:p>
+        </p:txBody>
+      </p:sp>
+      <p:sp>
+        <p:nvSpPr>
+          <p:cNvPr id="22" name="TextBox 21"/>
+          <p:cNvSpPr txBox="1"/>
+          <p:nvPr/>
+        </p:nvSpPr>
+        <p:spPr>
+          <a:xfrm>
+            <a:off x="822960" y="3959352"/>
+            <a:ext cx="384048" cy="320040"/>
           </a:xfrm>
           <a:prstGeom prst="rect">
             <a:avLst/>
@@ -7180,141 +6614,539 @@
           </a:bodyPr>
           <a:lstStyle/>
           <a:p>
+            <a:pPr algn="ctr"/>
+            <a:r>
+              <a:rPr sz="1300" b="1" i="0">
+                <a:solidFill>
+                  <a:srgbClr val="FFFFFF"/>
+                </a:solidFill>
+                <a:latin typeface="Segoe UI"/>
+              </a:rPr>
+              <a:t>4</a:t>
+            </a:r>
+          </a:p>
+        </p:txBody>
+      </p:sp>
+      <p:sp>
+        <p:nvSpPr>
+          <p:cNvPr id="23" name="TextBox 22"/>
+          <p:cNvSpPr txBox="1"/>
+          <p:nvPr/>
+        </p:nvSpPr>
+        <p:spPr>
+          <a:xfrm>
+            <a:off x="1417320" y="3895344"/>
+            <a:ext cx="4114800" cy="411480"/>
+          </a:xfrm>
+          <a:prstGeom prst="rect">
+            <a:avLst/>
+          </a:prstGeom>
+          <a:noFill/>
+        </p:spPr>
+        <p:txBody>
+          <a:bodyPr wrap="square" lIns="0" rIns="0" tIns="0" bIns="0" anchor="t">
+            <a:spAutoFit/>
+          </a:bodyPr>
+          <a:lstStyle/>
+          <a:p>
             <a:pPr algn="l"/>
             <a:r>
-              <a:rPr sz="1100" b="0" i="0">
+              <a:rPr sz="1500" b="1" i="0">
+                <a:solidFill>
+                  <a:srgbClr val="0A0A0A"/>
+                </a:solidFill>
+                <a:latin typeface="Segoe UI"/>
+              </a:rPr>
+              <a:t>Сделали клиент</a:t>
+            </a:r>
+          </a:p>
+        </p:txBody>
+      </p:sp>
+      <p:sp>
+        <p:nvSpPr>
+          <p:cNvPr id="24" name="TextBox 23"/>
+          <p:cNvSpPr txBox="1"/>
+          <p:nvPr/>
+        </p:nvSpPr>
+        <p:spPr>
+          <a:xfrm>
+            <a:off x="5669280" y="3922776"/>
+            <a:ext cx="6400800" cy="411480"/>
+          </a:xfrm>
+          <a:prstGeom prst="rect">
+            <a:avLst/>
+          </a:prstGeom>
+          <a:noFill/>
+        </p:spPr>
+        <p:txBody>
+          <a:bodyPr wrap="square" lIns="0" rIns="0" tIns="0" bIns="0" anchor="t">
+            <a:spAutoFit/>
+          </a:bodyPr>
+          <a:lstStyle/>
+          <a:p>
+            <a:pPr algn="l"/>
+            <a:r>
+              <a:rPr sz="1300" b="0" i="0">
                 <a:solidFill>
                   <a:srgbClr val="52525B"/>
                 </a:solidFill>
-                <a:latin typeface="Consolas"/>
-              </a:rPr>
-              <a:t>ЧТО ПОКРЫТО</a:t>
-            </a:r>
-          </a:p>
-        </p:txBody>
-      </p:sp>
-      <p:sp>
-        <p:nvSpPr>
-          <p:cNvPr id="22" name="TextBox 21"/>
-          <p:cNvSpPr txBox="1"/>
-          <p:nvPr/>
-        </p:nvSpPr>
-        <p:spPr>
-          <a:xfrm>
-            <a:off x="822960" y="4434840"/>
-            <a:ext cx="10972800" cy="1920240"/>
-          </a:xfrm>
-          <a:prstGeom prst="rect">
-            <a:avLst/>
-          </a:prstGeom>
-          <a:noFill/>
-        </p:spPr>
-        <p:txBody>
-          <a:bodyPr wrap="square" lIns="0" rIns="0">
-            <a:spAutoFit/>
-          </a:bodyPr>
-          <a:lstStyle/>
-          <a:p>
-            <a:pPr algn="l">
-              <a:lnSpc>
-                <a:spcPct val="135000"/>
-              </a:lnSpc>
-            </a:pPr>
-            <a:r>
-              <a:rPr sz="1300" b="0">
+                <a:latin typeface="Segoe UI"/>
+              </a:rPr>
+              <a:t>одностраничное веб-приложение</a:t>
+            </a:r>
+          </a:p>
+        </p:txBody>
+      </p:sp>
+      <p:sp>
+        <p:nvSpPr>
+          <p:cNvPr id="25" name="Rectangle 24"/>
+          <p:cNvSpPr/>
+          <p:nvPr/>
+        </p:nvSpPr>
+        <p:spPr>
+          <a:xfrm>
+            <a:off x="822960" y="4489704"/>
+            <a:ext cx="384048" cy="384048"/>
+          </a:xfrm>
+          <a:prstGeom prst="rect">
+            <a:avLst/>
+          </a:prstGeom>
+          <a:solidFill>
+            <a:srgbClr val="0066FF"/>
+          </a:solidFill>
+          <a:ln>
+            <a:noFill/>
+          </a:ln>
+          <a:effectLst/>
+        </p:spPr>
+        <p:style>
+          <a:lnRef idx="1">
+            <a:schemeClr val="accent1"/>
+          </a:lnRef>
+          <a:fillRef idx="3">
+            <a:schemeClr val="accent1"/>
+          </a:fillRef>
+          <a:effectRef idx="2">
+            <a:schemeClr val="accent1"/>
+          </a:effectRef>
+          <a:fontRef idx="minor">
+            <a:schemeClr val="lt1"/>
+          </a:fontRef>
+        </p:style>
+        <p:txBody>
+          <a:bodyPr rtlCol="0" anchor="ctr"/>
+          <a:lstStyle/>
+          <a:p>
+            <a:pPr algn="ctr"/>
+          </a:p>
+        </p:txBody>
+      </p:sp>
+      <p:sp>
+        <p:nvSpPr>
+          <p:cNvPr id="26" name="TextBox 25"/>
+          <p:cNvSpPr txBox="1"/>
+          <p:nvPr/>
+        </p:nvSpPr>
+        <p:spPr>
+          <a:xfrm>
+            <a:off x="822960" y="4526280"/>
+            <a:ext cx="384048" cy="320040"/>
+          </a:xfrm>
+          <a:prstGeom prst="rect">
+            <a:avLst/>
+          </a:prstGeom>
+          <a:noFill/>
+        </p:spPr>
+        <p:txBody>
+          <a:bodyPr wrap="square" lIns="0" rIns="0" tIns="0" bIns="0" anchor="t">
+            <a:spAutoFit/>
+          </a:bodyPr>
+          <a:lstStyle/>
+          <a:p>
+            <a:pPr algn="ctr"/>
+            <a:r>
+              <a:rPr sz="1300" b="1" i="0">
+                <a:solidFill>
+                  <a:srgbClr val="FFFFFF"/>
+                </a:solidFill>
+                <a:latin typeface="Segoe UI"/>
+              </a:rPr>
+              <a:t>5</a:t>
+            </a:r>
+          </a:p>
+        </p:txBody>
+      </p:sp>
+      <p:sp>
+        <p:nvSpPr>
+          <p:cNvPr id="27" name="TextBox 26"/>
+          <p:cNvSpPr txBox="1"/>
+          <p:nvPr/>
+        </p:nvSpPr>
+        <p:spPr>
+          <a:xfrm>
+            <a:off x="1417320" y="4462272"/>
+            <a:ext cx="4114800" cy="411480"/>
+          </a:xfrm>
+          <a:prstGeom prst="rect">
+            <a:avLst/>
+          </a:prstGeom>
+          <a:noFill/>
+        </p:spPr>
+        <p:txBody>
+          <a:bodyPr wrap="square" lIns="0" rIns="0" tIns="0" bIns="0" anchor="t">
+            <a:spAutoFit/>
+          </a:bodyPr>
+          <a:lstStyle/>
+          <a:p>
+            <a:pPr algn="l"/>
+            <a:r>
+              <a:rPr sz="1500" b="1" i="0">
                 <a:solidFill>
                   <a:srgbClr val="0A0A0A"/>
                 </a:solidFill>
                 <a:latin typeface="Segoe UI"/>
               </a:rPr>
-              <a:t>— регистрация и вход по логину/паролю</a:t>
-            </a:r>
-          </a:p>
-          <a:p>
-            <a:pPr algn="l">
-              <a:lnSpc>
-                <a:spcPct val="135000"/>
-              </a:lnSpc>
-            </a:pPr>
-            <a:r>
-              <a:rPr sz="1300" b="0">
+              <a:t>Добавили доп. функции</a:t>
+            </a:r>
+          </a:p>
+        </p:txBody>
+      </p:sp>
+      <p:sp>
+        <p:nvSpPr>
+          <p:cNvPr id="28" name="TextBox 27"/>
+          <p:cNvSpPr txBox="1"/>
+          <p:nvPr/>
+        </p:nvSpPr>
+        <p:spPr>
+          <a:xfrm>
+            <a:off x="5669280" y="4489704"/>
+            <a:ext cx="6400800" cy="411480"/>
+          </a:xfrm>
+          <a:prstGeom prst="rect">
+            <a:avLst/>
+          </a:prstGeom>
+          <a:noFill/>
+        </p:spPr>
+        <p:txBody>
+          <a:bodyPr wrap="square" lIns="0" rIns="0" tIns="0" bIns="0" anchor="t">
+            <a:spAutoFit/>
+          </a:bodyPr>
+          <a:lstStyle/>
+          <a:p>
+            <a:pPr algn="l"/>
+            <a:r>
+              <a:rPr sz="1300" b="0" i="0">
+                <a:solidFill>
+                  <a:srgbClr val="52525B"/>
+                </a:solidFill>
+                <a:latin typeface="Segoe UI"/>
+              </a:rPr>
+              <a:t>статусы прочтения, вложения, поиск</a:t>
+            </a:r>
+          </a:p>
+        </p:txBody>
+      </p:sp>
+      <p:sp>
+        <p:nvSpPr>
+          <p:cNvPr id="29" name="Rectangle 28"/>
+          <p:cNvSpPr/>
+          <p:nvPr/>
+        </p:nvSpPr>
+        <p:spPr>
+          <a:xfrm>
+            <a:off x="822960" y="5056632"/>
+            <a:ext cx="384048" cy="384048"/>
+          </a:xfrm>
+          <a:prstGeom prst="rect">
+            <a:avLst/>
+          </a:prstGeom>
+          <a:solidFill>
+            <a:srgbClr val="0066FF"/>
+          </a:solidFill>
+          <a:ln>
+            <a:noFill/>
+          </a:ln>
+          <a:effectLst/>
+        </p:spPr>
+        <p:style>
+          <a:lnRef idx="1">
+            <a:schemeClr val="accent1"/>
+          </a:lnRef>
+          <a:fillRef idx="3">
+            <a:schemeClr val="accent1"/>
+          </a:fillRef>
+          <a:effectRef idx="2">
+            <a:schemeClr val="accent1"/>
+          </a:effectRef>
+          <a:fontRef idx="minor">
+            <a:schemeClr val="lt1"/>
+          </a:fontRef>
+        </p:style>
+        <p:txBody>
+          <a:bodyPr rtlCol="0" anchor="ctr"/>
+          <a:lstStyle/>
+          <a:p>
+            <a:pPr algn="ctr"/>
+          </a:p>
+        </p:txBody>
+      </p:sp>
+      <p:sp>
+        <p:nvSpPr>
+          <p:cNvPr id="30" name="TextBox 29"/>
+          <p:cNvSpPr txBox="1"/>
+          <p:nvPr/>
+        </p:nvSpPr>
+        <p:spPr>
+          <a:xfrm>
+            <a:off x="822960" y="5093208"/>
+            <a:ext cx="384048" cy="320040"/>
+          </a:xfrm>
+          <a:prstGeom prst="rect">
+            <a:avLst/>
+          </a:prstGeom>
+          <a:noFill/>
+        </p:spPr>
+        <p:txBody>
+          <a:bodyPr wrap="square" lIns="0" rIns="0" tIns="0" bIns="0" anchor="t">
+            <a:spAutoFit/>
+          </a:bodyPr>
+          <a:lstStyle/>
+          <a:p>
+            <a:pPr algn="ctr"/>
+            <a:r>
+              <a:rPr sz="1300" b="1" i="0">
+                <a:solidFill>
+                  <a:srgbClr val="FFFFFF"/>
+                </a:solidFill>
+                <a:latin typeface="Segoe UI"/>
+              </a:rPr>
+              <a:t>6</a:t>
+            </a:r>
+          </a:p>
+        </p:txBody>
+      </p:sp>
+      <p:sp>
+        <p:nvSpPr>
+          <p:cNvPr id="31" name="TextBox 30"/>
+          <p:cNvSpPr txBox="1"/>
+          <p:nvPr/>
+        </p:nvSpPr>
+        <p:spPr>
+          <a:xfrm>
+            <a:off x="1417320" y="5029200"/>
+            <a:ext cx="4114800" cy="411480"/>
+          </a:xfrm>
+          <a:prstGeom prst="rect">
+            <a:avLst/>
+          </a:prstGeom>
+          <a:noFill/>
+        </p:spPr>
+        <p:txBody>
+          <a:bodyPr wrap="square" lIns="0" rIns="0" tIns="0" bIns="0" anchor="t">
+            <a:spAutoFit/>
+          </a:bodyPr>
+          <a:lstStyle/>
+          <a:p>
+            <a:pPr algn="l"/>
+            <a:r>
+              <a:rPr sz="1500" b="1" i="0">
                 <a:solidFill>
                   <a:srgbClr val="0A0A0A"/>
                 </a:solidFill>
                 <a:latin typeface="Segoe UI"/>
               </a:rPr>
-              <a:t>— неверный пароль → 401</a:t>
-            </a:r>
-          </a:p>
-          <a:p>
-            <a:pPr algn="l">
-              <a:lnSpc>
-                <a:spcPct val="135000"/>
-              </a:lnSpc>
-            </a:pPr>
-            <a:r>
-              <a:rPr sz="1300" b="0">
+              <a:t>Покрыли тестами</a:t>
+            </a:r>
+          </a:p>
+        </p:txBody>
+      </p:sp>
+      <p:sp>
+        <p:nvSpPr>
+          <p:cNvPr id="32" name="TextBox 31"/>
+          <p:cNvSpPr txBox="1"/>
+          <p:nvPr/>
+        </p:nvSpPr>
+        <p:spPr>
+          <a:xfrm>
+            <a:off x="5669280" y="5056632"/>
+            <a:ext cx="6400800" cy="411480"/>
+          </a:xfrm>
+          <a:prstGeom prst="rect">
+            <a:avLst/>
+          </a:prstGeom>
+          <a:noFill/>
+        </p:spPr>
+        <p:txBody>
+          <a:bodyPr wrap="square" lIns="0" rIns="0" tIns="0" bIns="0" anchor="t">
+            <a:spAutoFit/>
+          </a:bodyPr>
+          <a:lstStyle/>
+          <a:p>
+            <a:pPr algn="l"/>
+            <a:r>
+              <a:rPr sz="1300" b="0" i="0">
+                <a:solidFill>
+                  <a:srgbClr val="52525B"/>
+                </a:solidFill>
+                <a:latin typeface="Segoe UI"/>
+              </a:rPr>
+              <a:t>автоматические и ручные проверки</a:t>
+            </a:r>
+          </a:p>
+        </p:txBody>
+      </p:sp>
+      <p:sp>
+        <p:nvSpPr>
+          <p:cNvPr id="33" name="Rectangle 32"/>
+          <p:cNvSpPr/>
+          <p:nvPr/>
+        </p:nvSpPr>
+        <p:spPr>
+          <a:xfrm>
+            <a:off x="822960" y="5623560"/>
+            <a:ext cx="384048" cy="384048"/>
+          </a:xfrm>
+          <a:prstGeom prst="rect">
+            <a:avLst/>
+          </a:prstGeom>
+          <a:solidFill>
+            <a:srgbClr val="0066FF"/>
+          </a:solidFill>
+          <a:ln>
+            <a:noFill/>
+          </a:ln>
+          <a:effectLst/>
+        </p:spPr>
+        <p:style>
+          <a:lnRef idx="1">
+            <a:schemeClr val="accent1"/>
+          </a:lnRef>
+          <a:fillRef idx="3">
+            <a:schemeClr val="accent1"/>
+          </a:fillRef>
+          <a:effectRef idx="2">
+            <a:schemeClr val="accent1"/>
+          </a:effectRef>
+          <a:fontRef idx="minor">
+            <a:schemeClr val="lt1"/>
+          </a:fontRef>
+        </p:style>
+        <p:txBody>
+          <a:bodyPr rtlCol="0" anchor="ctr"/>
+          <a:lstStyle/>
+          <a:p>
+            <a:pPr algn="ctr"/>
+          </a:p>
+        </p:txBody>
+      </p:sp>
+      <p:sp>
+        <p:nvSpPr>
+          <p:cNvPr id="34" name="TextBox 33"/>
+          <p:cNvSpPr txBox="1"/>
+          <p:nvPr/>
+        </p:nvSpPr>
+        <p:spPr>
+          <a:xfrm>
+            <a:off x="822960" y="5660136"/>
+            <a:ext cx="384048" cy="320040"/>
+          </a:xfrm>
+          <a:prstGeom prst="rect">
+            <a:avLst/>
+          </a:prstGeom>
+          <a:noFill/>
+        </p:spPr>
+        <p:txBody>
+          <a:bodyPr wrap="square" lIns="0" rIns="0" tIns="0" bIns="0" anchor="t">
+            <a:spAutoFit/>
+          </a:bodyPr>
+          <a:lstStyle/>
+          <a:p>
+            <a:pPr algn="ctr"/>
+            <a:r>
+              <a:rPr sz="1300" b="1" i="0">
+                <a:solidFill>
+                  <a:srgbClr val="FFFFFF"/>
+                </a:solidFill>
+                <a:latin typeface="Segoe UI"/>
+              </a:rPr>
+              <a:t>7</a:t>
+            </a:r>
+          </a:p>
+        </p:txBody>
+      </p:sp>
+      <p:sp>
+        <p:nvSpPr>
+          <p:cNvPr id="35" name="TextBox 34"/>
+          <p:cNvSpPr txBox="1"/>
+          <p:nvPr/>
+        </p:nvSpPr>
+        <p:spPr>
+          <a:xfrm>
+            <a:off x="1417320" y="5596128"/>
+            <a:ext cx="4114800" cy="411480"/>
+          </a:xfrm>
+          <a:prstGeom prst="rect">
+            <a:avLst/>
+          </a:prstGeom>
+          <a:noFill/>
+        </p:spPr>
+        <p:txBody>
+          <a:bodyPr wrap="square" lIns="0" rIns="0" tIns="0" bIns="0" anchor="t">
+            <a:spAutoFit/>
+          </a:bodyPr>
+          <a:lstStyle/>
+          <a:p>
+            <a:pPr algn="l"/>
+            <a:r>
+              <a:rPr sz="1500" b="1" i="0">
                 <a:solidFill>
                   <a:srgbClr val="0A0A0A"/>
                 </a:solidFill>
                 <a:latin typeface="Segoe UI"/>
               </a:rPr>
-              <a:t>— создание чата, отправка, история, поиск (со стеммингом)</a:t>
-            </a:r>
-          </a:p>
-          <a:p>
-            <a:pPr algn="l">
-              <a:lnSpc>
-                <a:spcPct val="135000"/>
-              </a:lnSpc>
-            </a:pPr>
-            <a:r>
-              <a:rPr sz="1300" b="0">
-                <a:solidFill>
-                  <a:srgbClr val="0A0A0A"/>
+              <a:t>Оформили документацию</a:t>
+            </a:r>
+          </a:p>
+        </p:txBody>
+      </p:sp>
+      <p:sp>
+        <p:nvSpPr>
+          <p:cNvPr id="36" name="TextBox 35"/>
+          <p:cNvSpPr txBox="1"/>
+          <p:nvPr/>
+        </p:nvSpPr>
+        <p:spPr>
+          <a:xfrm>
+            <a:off x="5669280" y="5623560"/>
+            <a:ext cx="6400800" cy="411480"/>
+          </a:xfrm>
+          <a:prstGeom prst="rect">
+            <a:avLst/>
+          </a:prstGeom>
+          <a:noFill/>
+        </p:spPr>
+        <p:txBody>
+          <a:bodyPr wrap="square" lIns="0" rIns="0" tIns="0" bIns="0" anchor="t">
+            <a:spAutoFit/>
+          </a:bodyPr>
+          <a:lstStyle/>
+          <a:p>
+            <a:pPr algn="l"/>
+            <a:r>
+              <a:rPr sz="1300" b="0" i="0">
+                <a:solidFill>
+                  <a:srgbClr val="52525B"/>
                 </a:solidFill>
                 <a:latin typeface="Segoe UI"/>
               </a:rPr>
-              <a:t>— ограничение прав: reader не может отправлять — 403</a:t>
-            </a:r>
-          </a:p>
-          <a:p>
-            <a:pPr algn="l">
-              <a:lnSpc>
-                <a:spcPct val="135000"/>
-              </a:lnSpc>
-            </a:pPr>
-            <a:r>
-              <a:rPr sz="1300" b="0">
-                <a:solidFill>
-                  <a:srgbClr val="0A0A0A"/>
-                </a:solidFill>
-                <a:latin typeface="Segoe UI"/>
-              </a:rPr>
-              <a:t>— ротация refresh: старый refresh становится недействительным</a:t>
-            </a:r>
-          </a:p>
-          <a:p>
-            <a:pPr algn="l">
-              <a:lnSpc>
-                <a:spcPct val="135000"/>
-              </a:lnSpc>
-            </a:pPr>
-            <a:r>
-              <a:rPr sz="1300" b="0">
-                <a:solidFill>
-                  <a:srgbClr val="0A0A0A"/>
-                </a:solidFill>
-                <a:latin typeface="Segoe UI"/>
-              </a:rPr>
-              <a:t>— идемпотентность: повтор с тем же client_msg_id не создаёт дубликат</a:t>
-            </a:r>
-          </a:p>
-        </p:txBody>
-      </p:sp>
-      <p:sp>
-        <p:nvSpPr>
-          <p:cNvPr id="23" name="TextBox 22"/>
+              <a:t>отчёт по ГОСТ, скриншоты, видеодемо</a:t>
+            </a:r>
+          </a:p>
+        </p:txBody>
+      </p:sp>
+      <p:sp>
+        <p:nvSpPr>
+          <p:cNvPr id="37" name="TextBox 36"/>
           <p:cNvSpPr txBox="1"/>
           <p:nvPr/>
         </p:nvSpPr>
@@ -7349,7 +7181,7 @@
       </p:sp>
       <p:sp>
         <p:nvSpPr>
-          <p:cNvPr id="24" name="TextBox 23"/>
+          <p:cNvPr id="38" name="TextBox 37"/>
           <p:cNvSpPr txBox="1"/>
           <p:nvPr/>
         </p:nvSpPr>
@@ -7377,7 +7209,7 @@
                 </a:solidFill>
                 <a:latin typeface="Consolas"/>
               </a:rPr>
-              <a:t>13 / 13</a:t>
+              <a:t>14 / 15</a:t>
             </a:r>
           </a:p>
         </p:txBody>
@@ -7614,6 +7446,1020 @@
                 </a:solidFill>
                 <a:latin typeface="Consolas"/>
               </a:rPr>
+              <a:t>11  ·  ТЕСТИРОВАНИЕ</a:t>
+            </a:r>
+          </a:p>
+        </p:txBody>
+      </p:sp>
+      <p:sp>
+        <p:nvSpPr>
+          <p:cNvPr id="7" name="TextBox 6"/>
+          <p:cNvSpPr txBox="1"/>
+          <p:nvPr/>
+        </p:nvSpPr>
+        <p:spPr>
+          <a:xfrm>
+            <a:off x="502920" y="868680"/>
+            <a:ext cx="10972800" cy="777240"/>
+          </a:xfrm>
+          <a:prstGeom prst="rect">
+            <a:avLst/>
+          </a:prstGeom>
+          <a:noFill/>
+        </p:spPr>
+        <p:txBody>
+          <a:bodyPr wrap="square" lIns="0" rIns="0" tIns="0" bIns="0" anchor="t">
+            <a:spAutoFit/>
+          </a:bodyPr>
+          <a:lstStyle/>
+          <a:p>
+            <a:pPr algn="l"/>
+            <a:r>
+              <a:rPr sz="3200" b="1" i="0">
+                <a:solidFill>
+                  <a:srgbClr val="0A0A0A"/>
+                </a:solidFill>
+                <a:latin typeface="Segoe UI"/>
+              </a:rPr>
+              <a:t>Автотесты + ручные сценарии</a:t>
+            </a:r>
+          </a:p>
+        </p:txBody>
+      </p:sp>
+      <p:sp>
+        <p:nvSpPr>
+          <p:cNvPr id="8" name="Rectangle 7"/>
+          <p:cNvSpPr/>
+          <p:nvPr/>
+        </p:nvSpPr>
+        <p:spPr>
+          <a:xfrm>
+            <a:off x="502920" y="1691640"/>
+            <a:ext cx="11155680" cy="9525"/>
+          </a:xfrm>
+          <a:prstGeom prst="rect">
+            <a:avLst/>
+          </a:prstGeom>
+          <a:solidFill>
+            <a:srgbClr val="E5E5E5"/>
+          </a:solidFill>
+          <a:ln>
+            <a:noFill/>
+          </a:ln>
+          <a:effectLst/>
+        </p:spPr>
+        <p:style>
+          <a:lnRef idx="1">
+            <a:schemeClr val="accent1"/>
+          </a:lnRef>
+          <a:fillRef idx="3">
+            <a:schemeClr val="accent1"/>
+          </a:fillRef>
+          <a:effectRef idx="2">
+            <a:schemeClr val="accent1"/>
+          </a:effectRef>
+          <a:fontRef idx="minor">
+            <a:schemeClr val="lt1"/>
+          </a:fontRef>
+        </p:style>
+        <p:txBody>
+          <a:bodyPr rtlCol="0" anchor="ctr"/>
+          <a:lstStyle/>
+          <a:p>
+            <a:pPr algn="ctr"/>
+          </a:p>
+        </p:txBody>
+      </p:sp>
+      <p:sp>
+        <p:nvSpPr>
+          <p:cNvPr id="9" name="Rectangle 8"/>
+          <p:cNvSpPr/>
+          <p:nvPr/>
+        </p:nvSpPr>
+        <p:spPr>
+          <a:xfrm>
+            <a:off x="822960" y="2148840"/>
+            <a:ext cx="3566160" cy="1554480"/>
+          </a:xfrm>
+          <a:prstGeom prst="rect">
+            <a:avLst/>
+          </a:prstGeom>
+          <a:solidFill>
+            <a:srgbClr val="F5F8FF"/>
+          </a:solidFill>
+          <a:ln>
+            <a:noFill/>
+          </a:ln>
+          <a:effectLst/>
+        </p:spPr>
+        <p:style>
+          <a:lnRef idx="1">
+            <a:schemeClr val="accent1"/>
+          </a:lnRef>
+          <a:fillRef idx="3">
+            <a:schemeClr val="accent1"/>
+          </a:fillRef>
+          <a:effectRef idx="2">
+            <a:schemeClr val="accent1"/>
+          </a:effectRef>
+          <a:fontRef idx="minor">
+            <a:schemeClr val="lt1"/>
+          </a:fontRef>
+        </p:style>
+        <p:txBody>
+          <a:bodyPr rtlCol="0" anchor="ctr"/>
+          <a:lstStyle/>
+          <a:p>
+            <a:pPr algn="ctr"/>
+          </a:p>
+        </p:txBody>
+      </p:sp>
+      <p:sp>
+        <p:nvSpPr>
+          <p:cNvPr id="10" name="Rectangle 9"/>
+          <p:cNvSpPr/>
+          <p:nvPr/>
+        </p:nvSpPr>
+        <p:spPr>
+          <a:xfrm>
+            <a:off x="822960" y="2148840"/>
+            <a:ext cx="35000" cy="1554480"/>
+          </a:xfrm>
+          <a:prstGeom prst="rect">
+            <a:avLst/>
+          </a:prstGeom>
+          <a:solidFill>
+            <a:srgbClr val="0066FF"/>
+          </a:solidFill>
+          <a:ln>
+            <a:noFill/>
+          </a:ln>
+          <a:effectLst/>
+        </p:spPr>
+        <p:style>
+          <a:lnRef idx="1">
+            <a:schemeClr val="accent1"/>
+          </a:lnRef>
+          <a:fillRef idx="3">
+            <a:schemeClr val="accent1"/>
+          </a:fillRef>
+          <a:effectRef idx="2">
+            <a:schemeClr val="accent1"/>
+          </a:effectRef>
+          <a:fontRef idx="minor">
+            <a:schemeClr val="lt1"/>
+          </a:fontRef>
+        </p:style>
+        <p:txBody>
+          <a:bodyPr rtlCol="0" anchor="ctr"/>
+          <a:lstStyle/>
+          <a:p>
+            <a:pPr algn="ctr"/>
+          </a:p>
+        </p:txBody>
+      </p:sp>
+      <p:sp>
+        <p:nvSpPr>
+          <p:cNvPr id="11" name="TextBox 10"/>
+          <p:cNvSpPr txBox="1"/>
+          <p:nvPr/>
+        </p:nvSpPr>
+        <p:spPr>
+          <a:xfrm>
+            <a:off x="1143000" y="2377440"/>
+            <a:ext cx="3200400" cy="548640"/>
+          </a:xfrm>
+          <a:prstGeom prst="rect">
+            <a:avLst/>
+          </a:prstGeom>
+          <a:noFill/>
+        </p:spPr>
+        <p:txBody>
+          <a:bodyPr wrap="square" lIns="0" rIns="0" tIns="0" bIns="0" anchor="t">
+            <a:spAutoFit/>
+          </a:bodyPr>
+          <a:lstStyle/>
+          <a:p>
+            <a:pPr algn="l"/>
+            <a:r>
+              <a:rPr sz="2600" b="1" i="0">
+                <a:solidFill>
+                  <a:srgbClr val="0A0A0A"/>
+                </a:solidFill>
+                <a:latin typeface="Segoe UI"/>
+              </a:rPr>
+              <a:t>7 / 7</a:t>
+            </a:r>
+          </a:p>
+        </p:txBody>
+      </p:sp>
+      <p:sp>
+        <p:nvSpPr>
+          <p:cNvPr id="12" name="TextBox 11"/>
+          <p:cNvSpPr txBox="1"/>
+          <p:nvPr/>
+        </p:nvSpPr>
+        <p:spPr>
+          <a:xfrm>
+            <a:off x="1143000" y="2971800"/>
+            <a:ext cx="3200400" cy="640080"/>
+          </a:xfrm>
+          <a:prstGeom prst="rect">
+            <a:avLst/>
+          </a:prstGeom>
+          <a:noFill/>
+        </p:spPr>
+        <p:txBody>
+          <a:bodyPr wrap="square" lIns="0" rIns="0" tIns="0" bIns="0" anchor="t">
+            <a:spAutoFit/>
+          </a:bodyPr>
+          <a:lstStyle/>
+          <a:p>
+            <a:pPr algn="l"/>
+            <a:r>
+              <a:rPr sz="1300" b="0" i="0">
+                <a:solidFill>
+                  <a:srgbClr val="52525B"/>
+                </a:solidFill>
+                <a:latin typeface="Segoe UI"/>
+              </a:rPr>
+              <a:t>pytest-тестов проходят</a:t>
+            </a:r>
+          </a:p>
+        </p:txBody>
+      </p:sp>
+      <p:sp>
+        <p:nvSpPr>
+          <p:cNvPr id="13" name="Rectangle 12"/>
+          <p:cNvSpPr/>
+          <p:nvPr/>
+        </p:nvSpPr>
+        <p:spPr>
+          <a:xfrm>
+            <a:off x="4617720" y="2148840"/>
+            <a:ext cx="3566160" cy="1554480"/>
+          </a:xfrm>
+          <a:prstGeom prst="rect">
+            <a:avLst/>
+          </a:prstGeom>
+          <a:solidFill>
+            <a:srgbClr val="F5F8FF"/>
+          </a:solidFill>
+          <a:ln>
+            <a:noFill/>
+          </a:ln>
+          <a:effectLst/>
+        </p:spPr>
+        <p:style>
+          <a:lnRef idx="1">
+            <a:schemeClr val="accent1"/>
+          </a:lnRef>
+          <a:fillRef idx="3">
+            <a:schemeClr val="accent1"/>
+          </a:fillRef>
+          <a:effectRef idx="2">
+            <a:schemeClr val="accent1"/>
+          </a:effectRef>
+          <a:fontRef idx="minor">
+            <a:schemeClr val="lt1"/>
+          </a:fontRef>
+        </p:style>
+        <p:txBody>
+          <a:bodyPr rtlCol="0" anchor="ctr"/>
+          <a:lstStyle/>
+          <a:p>
+            <a:pPr algn="ctr"/>
+          </a:p>
+        </p:txBody>
+      </p:sp>
+      <p:sp>
+        <p:nvSpPr>
+          <p:cNvPr id="14" name="Rectangle 13"/>
+          <p:cNvSpPr/>
+          <p:nvPr/>
+        </p:nvSpPr>
+        <p:spPr>
+          <a:xfrm>
+            <a:off x="4617720" y="2148840"/>
+            <a:ext cx="35000" cy="1554480"/>
+          </a:xfrm>
+          <a:prstGeom prst="rect">
+            <a:avLst/>
+          </a:prstGeom>
+          <a:solidFill>
+            <a:srgbClr val="0066FF"/>
+          </a:solidFill>
+          <a:ln>
+            <a:noFill/>
+          </a:ln>
+          <a:effectLst/>
+        </p:spPr>
+        <p:style>
+          <a:lnRef idx="1">
+            <a:schemeClr val="accent1"/>
+          </a:lnRef>
+          <a:fillRef idx="3">
+            <a:schemeClr val="accent1"/>
+          </a:fillRef>
+          <a:effectRef idx="2">
+            <a:schemeClr val="accent1"/>
+          </a:effectRef>
+          <a:fontRef idx="minor">
+            <a:schemeClr val="lt1"/>
+          </a:fontRef>
+        </p:style>
+        <p:txBody>
+          <a:bodyPr rtlCol="0" anchor="ctr"/>
+          <a:lstStyle/>
+          <a:p>
+            <a:pPr algn="ctr"/>
+          </a:p>
+        </p:txBody>
+      </p:sp>
+      <p:sp>
+        <p:nvSpPr>
+          <p:cNvPr id="15" name="TextBox 14"/>
+          <p:cNvSpPr txBox="1"/>
+          <p:nvPr/>
+        </p:nvSpPr>
+        <p:spPr>
+          <a:xfrm>
+            <a:off x="4937760" y="2377440"/>
+            <a:ext cx="3200400" cy="548640"/>
+          </a:xfrm>
+          <a:prstGeom prst="rect">
+            <a:avLst/>
+          </a:prstGeom>
+          <a:noFill/>
+        </p:spPr>
+        <p:txBody>
+          <a:bodyPr wrap="square" lIns="0" rIns="0" tIns="0" bIns="0" anchor="t">
+            <a:spAutoFit/>
+          </a:bodyPr>
+          <a:lstStyle/>
+          <a:p>
+            <a:pPr algn="l"/>
+            <a:r>
+              <a:rPr sz="2600" b="1" i="0">
+                <a:solidFill>
+                  <a:srgbClr val="0A0A0A"/>
+                </a:solidFill>
+                <a:latin typeface="Segoe UI"/>
+              </a:rPr>
+              <a:t>4.5 сек</a:t>
+            </a:r>
+          </a:p>
+        </p:txBody>
+      </p:sp>
+      <p:sp>
+        <p:nvSpPr>
+          <p:cNvPr id="16" name="TextBox 15"/>
+          <p:cNvSpPr txBox="1"/>
+          <p:nvPr/>
+        </p:nvSpPr>
+        <p:spPr>
+          <a:xfrm>
+            <a:off x="4937760" y="2971800"/>
+            <a:ext cx="3200400" cy="640080"/>
+          </a:xfrm>
+          <a:prstGeom prst="rect">
+            <a:avLst/>
+          </a:prstGeom>
+          <a:noFill/>
+        </p:spPr>
+        <p:txBody>
+          <a:bodyPr wrap="square" lIns="0" rIns="0" tIns="0" bIns="0" anchor="t">
+            <a:spAutoFit/>
+          </a:bodyPr>
+          <a:lstStyle/>
+          <a:p>
+            <a:pPr algn="l"/>
+            <a:r>
+              <a:rPr sz="1300" b="0" i="0">
+                <a:solidFill>
+                  <a:srgbClr val="52525B"/>
+                </a:solidFill>
+                <a:latin typeface="Segoe UI"/>
+              </a:rPr>
+              <a:t>полный прогон suite</a:t>
+            </a:r>
+          </a:p>
+        </p:txBody>
+      </p:sp>
+      <p:sp>
+        <p:nvSpPr>
+          <p:cNvPr id="17" name="Rectangle 16"/>
+          <p:cNvSpPr/>
+          <p:nvPr/>
+        </p:nvSpPr>
+        <p:spPr>
+          <a:xfrm>
+            <a:off x="8412480" y="2148840"/>
+            <a:ext cx="3566160" cy="1554480"/>
+          </a:xfrm>
+          <a:prstGeom prst="rect">
+            <a:avLst/>
+          </a:prstGeom>
+          <a:solidFill>
+            <a:srgbClr val="F5F8FF"/>
+          </a:solidFill>
+          <a:ln>
+            <a:noFill/>
+          </a:ln>
+          <a:effectLst/>
+        </p:spPr>
+        <p:style>
+          <a:lnRef idx="1">
+            <a:schemeClr val="accent1"/>
+          </a:lnRef>
+          <a:fillRef idx="3">
+            <a:schemeClr val="accent1"/>
+          </a:fillRef>
+          <a:effectRef idx="2">
+            <a:schemeClr val="accent1"/>
+          </a:effectRef>
+          <a:fontRef idx="minor">
+            <a:schemeClr val="lt1"/>
+          </a:fontRef>
+        </p:style>
+        <p:txBody>
+          <a:bodyPr rtlCol="0" anchor="ctr"/>
+          <a:lstStyle/>
+          <a:p>
+            <a:pPr algn="ctr"/>
+          </a:p>
+        </p:txBody>
+      </p:sp>
+      <p:sp>
+        <p:nvSpPr>
+          <p:cNvPr id="18" name="Rectangle 17"/>
+          <p:cNvSpPr/>
+          <p:nvPr/>
+        </p:nvSpPr>
+        <p:spPr>
+          <a:xfrm>
+            <a:off x="8412480" y="2148840"/>
+            <a:ext cx="35000" cy="1554480"/>
+          </a:xfrm>
+          <a:prstGeom prst="rect">
+            <a:avLst/>
+          </a:prstGeom>
+          <a:solidFill>
+            <a:srgbClr val="0066FF"/>
+          </a:solidFill>
+          <a:ln>
+            <a:noFill/>
+          </a:ln>
+          <a:effectLst/>
+        </p:spPr>
+        <p:style>
+          <a:lnRef idx="1">
+            <a:schemeClr val="accent1"/>
+          </a:lnRef>
+          <a:fillRef idx="3">
+            <a:schemeClr val="accent1"/>
+          </a:fillRef>
+          <a:effectRef idx="2">
+            <a:schemeClr val="accent1"/>
+          </a:effectRef>
+          <a:fontRef idx="minor">
+            <a:schemeClr val="lt1"/>
+          </a:fontRef>
+        </p:style>
+        <p:txBody>
+          <a:bodyPr rtlCol="0" anchor="ctr"/>
+          <a:lstStyle/>
+          <a:p>
+            <a:pPr algn="ctr"/>
+          </a:p>
+        </p:txBody>
+      </p:sp>
+      <p:sp>
+        <p:nvSpPr>
+          <p:cNvPr id="19" name="TextBox 18"/>
+          <p:cNvSpPr txBox="1"/>
+          <p:nvPr/>
+        </p:nvSpPr>
+        <p:spPr>
+          <a:xfrm>
+            <a:off x="8732520" y="2377440"/>
+            <a:ext cx="3200400" cy="548640"/>
+          </a:xfrm>
+          <a:prstGeom prst="rect">
+            <a:avLst/>
+          </a:prstGeom>
+          <a:noFill/>
+        </p:spPr>
+        <p:txBody>
+          <a:bodyPr wrap="square" lIns="0" rIns="0" tIns="0" bIns="0" anchor="t">
+            <a:spAutoFit/>
+          </a:bodyPr>
+          <a:lstStyle/>
+          <a:p>
+            <a:pPr algn="l"/>
+            <a:r>
+              <a:rPr sz="2600" b="1" i="0">
+                <a:solidFill>
+                  <a:srgbClr val="0A0A0A"/>
+                </a:solidFill>
+                <a:latin typeface="Segoe UI"/>
+              </a:rPr>
+              <a:t>6 сцен.</a:t>
+            </a:r>
+          </a:p>
+        </p:txBody>
+      </p:sp>
+      <p:sp>
+        <p:nvSpPr>
+          <p:cNvPr id="20" name="TextBox 19"/>
+          <p:cNvSpPr txBox="1"/>
+          <p:nvPr/>
+        </p:nvSpPr>
+        <p:spPr>
+          <a:xfrm>
+            <a:off x="8732520" y="2971800"/>
+            <a:ext cx="3200400" cy="640080"/>
+          </a:xfrm>
+          <a:prstGeom prst="rect">
+            <a:avLst/>
+          </a:prstGeom>
+          <a:noFill/>
+        </p:spPr>
+        <p:txBody>
+          <a:bodyPr wrap="square" lIns="0" rIns="0" tIns="0" bIns="0" anchor="t">
+            <a:spAutoFit/>
+          </a:bodyPr>
+          <a:lstStyle/>
+          <a:p>
+            <a:pPr algn="l"/>
+            <a:r>
+              <a:rPr sz="1300" b="0" i="0">
+                <a:solidFill>
+                  <a:srgbClr val="52525B"/>
+                </a:solidFill>
+                <a:latin typeface="Segoe UI"/>
+              </a:rPr>
+              <a:t>ручных end-to-end проверок</a:t>
+            </a:r>
+          </a:p>
+        </p:txBody>
+      </p:sp>
+      <p:sp>
+        <p:nvSpPr>
+          <p:cNvPr id="21" name="TextBox 20"/>
+          <p:cNvSpPr txBox="1"/>
+          <p:nvPr/>
+        </p:nvSpPr>
+        <p:spPr>
+          <a:xfrm>
+            <a:off x="822960" y="4069080"/>
+            <a:ext cx="10972800" cy="320040"/>
+          </a:xfrm>
+          <a:prstGeom prst="rect">
+            <a:avLst/>
+          </a:prstGeom>
+          <a:noFill/>
+        </p:spPr>
+        <p:txBody>
+          <a:bodyPr wrap="square" lIns="0" rIns="0" tIns="0" bIns="0" anchor="t">
+            <a:spAutoFit/>
+          </a:bodyPr>
+          <a:lstStyle/>
+          <a:p>
+            <a:pPr algn="l"/>
+            <a:r>
+              <a:rPr sz="1100" b="0" i="0">
+                <a:solidFill>
+                  <a:srgbClr val="52525B"/>
+                </a:solidFill>
+                <a:latin typeface="Consolas"/>
+              </a:rPr>
+              <a:t>ЧТО ПОКРЫТО</a:t>
+            </a:r>
+          </a:p>
+        </p:txBody>
+      </p:sp>
+      <p:sp>
+        <p:nvSpPr>
+          <p:cNvPr id="22" name="TextBox 21"/>
+          <p:cNvSpPr txBox="1"/>
+          <p:nvPr/>
+        </p:nvSpPr>
+        <p:spPr>
+          <a:xfrm>
+            <a:off x="822960" y="4434840"/>
+            <a:ext cx="10972800" cy="1920240"/>
+          </a:xfrm>
+          <a:prstGeom prst="rect">
+            <a:avLst/>
+          </a:prstGeom>
+          <a:noFill/>
+        </p:spPr>
+        <p:txBody>
+          <a:bodyPr wrap="square" lIns="0" rIns="0">
+            <a:spAutoFit/>
+          </a:bodyPr>
+          <a:lstStyle/>
+          <a:p>
+            <a:pPr algn="l">
+              <a:lnSpc>
+                <a:spcPct val="135000"/>
+              </a:lnSpc>
+            </a:pPr>
+            <a:r>
+              <a:rPr sz="1300" b="0">
+                <a:solidFill>
+                  <a:srgbClr val="0A0A0A"/>
+                </a:solidFill>
+                <a:latin typeface="Segoe UI"/>
+              </a:rPr>
+              <a:t>— регистрация и вход по логину/паролю</a:t>
+            </a:r>
+          </a:p>
+          <a:p>
+            <a:pPr algn="l">
+              <a:lnSpc>
+                <a:spcPct val="135000"/>
+              </a:lnSpc>
+            </a:pPr>
+            <a:r>
+              <a:rPr sz="1300" b="0">
+                <a:solidFill>
+                  <a:srgbClr val="0A0A0A"/>
+                </a:solidFill>
+                <a:latin typeface="Segoe UI"/>
+              </a:rPr>
+              <a:t>— неверный пароль → 401</a:t>
+            </a:r>
+          </a:p>
+          <a:p>
+            <a:pPr algn="l">
+              <a:lnSpc>
+                <a:spcPct val="135000"/>
+              </a:lnSpc>
+            </a:pPr>
+            <a:r>
+              <a:rPr sz="1300" b="0">
+                <a:solidFill>
+                  <a:srgbClr val="0A0A0A"/>
+                </a:solidFill>
+                <a:latin typeface="Segoe UI"/>
+              </a:rPr>
+              <a:t>— создание чата, отправка, история, поиск (со стеммингом)</a:t>
+            </a:r>
+          </a:p>
+          <a:p>
+            <a:pPr algn="l">
+              <a:lnSpc>
+                <a:spcPct val="135000"/>
+              </a:lnSpc>
+            </a:pPr>
+            <a:r>
+              <a:rPr sz="1300" b="0">
+                <a:solidFill>
+                  <a:srgbClr val="0A0A0A"/>
+                </a:solidFill>
+                <a:latin typeface="Segoe UI"/>
+              </a:rPr>
+              <a:t>— ограничение прав: reader не может отправлять — 403</a:t>
+            </a:r>
+          </a:p>
+          <a:p>
+            <a:pPr algn="l">
+              <a:lnSpc>
+                <a:spcPct val="135000"/>
+              </a:lnSpc>
+            </a:pPr>
+            <a:r>
+              <a:rPr sz="1300" b="0">
+                <a:solidFill>
+                  <a:srgbClr val="0A0A0A"/>
+                </a:solidFill>
+                <a:latin typeface="Segoe UI"/>
+              </a:rPr>
+              <a:t>— ротация refresh: старый refresh становится недействительным</a:t>
+            </a:r>
+          </a:p>
+          <a:p>
+            <a:pPr algn="l">
+              <a:lnSpc>
+                <a:spcPct val="135000"/>
+              </a:lnSpc>
+            </a:pPr>
+            <a:r>
+              <a:rPr sz="1300" b="0">
+                <a:solidFill>
+                  <a:srgbClr val="0A0A0A"/>
+                </a:solidFill>
+                <a:latin typeface="Segoe UI"/>
+              </a:rPr>
+              <a:t>— идемпотентность: повтор с тем же client_msg_id не создаёт дубликат</a:t>
+            </a:r>
+          </a:p>
+        </p:txBody>
+      </p:sp>
+      <p:sp>
+        <p:nvSpPr>
+          <p:cNvPr id="23" name="TextBox 22"/>
+          <p:cNvSpPr txBox="1"/>
+          <p:nvPr/>
+        </p:nvSpPr>
+        <p:spPr>
+          <a:xfrm>
+            <a:off x="502920" y="6446520"/>
+            <a:ext cx="5486400" cy="274320"/>
+          </a:xfrm>
+          <a:prstGeom prst="rect">
+            <a:avLst/>
+          </a:prstGeom>
+          <a:noFill/>
+        </p:spPr>
+        <p:txBody>
+          <a:bodyPr wrap="square" lIns="0" rIns="0" tIns="0" bIns="0" anchor="t">
+            <a:spAutoFit/>
+          </a:bodyPr>
+          <a:lstStyle/>
+          <a:p>
+            <a:pPr algn="l"/>
+            <a:r>
+              <a:rPr sz="900" b="0" i="0">
+                <a:solidFill>
+                  <a:srgbClr val="52525B"/>
+                </a:solidFill>
+                <a:latin typeface="Consolas"/>
+              </a:rPr>
+              <a:t>MESSENGER  ·  VK Education / Case #1</a:t>
+            </a:r>
+          </a:p>
+        </p:txBody>
+      </p:sp>
+      <p:sp>
+        <p:nvSpPr>
+          <p:cNvPr id="24" name="TextBox 23"/>
+          <p:cNvSpPr txBox="1"/>
+          <p:nvPr/>
+        </p:nvSpPr>
+        <p:spPr>
+          <a:xfrm>
+            <a:off x="10561320" y="6446520"/>
+            <a:ext cx="1554480" cy="274320"/>
+          </a:xfrm>
+          <a:prstGeom prst="rect">
+            <a:avLst/>
+          </a:prstGeom>
+          <a:noFill/>
+        </p:spPr>
+        <p:txBody>
+          <a:bodyPr wrap="square" lIns="0" rIns="0" tIns="0" bIns="0" anchor="t">
+            <a:spAutoFit/>
+          </a:bodyPr>
+          <a:lstStyle/>
+          <a:p>
+            <a:pPr algn="r"/>
+            <a:r>
+              <a:rPr sz="900" b="0" i="0">
+                <a:solidFill>
+                  <a:srgbClr val="52525B"/>
+                </a:solidFill>
+                <a:latin typeface="Consolas"/>
+              </a:rPr>
+              <a:t>13 / 15</a:t>
+            </a:r>
+          </a:p>
+        </p:txBody>
+      </p:sp>
+    </p:spTree>
+  </p:cSld>
+  <p:clrMapOvr>
+    <a:masterClrMapping/>
+  </p:clrMapOvr>
+</p:sld>
+</file>
+
+<file path=ppt/slides/slide15.xml><?xml version="1.0" encoding="utf-8"?>
+<p:sld xmlns:a="http://schemas.openxmlformats.org/drawingml/2006/main" xmlns:p="http://schemas.openxmlformats.org/presentationml/2006/main" xmlns:r="http://schemas.openxmlformats.org/officeDocument/2006/relationships">
+  <p:cSld>
+    <p:bg>
+      <p:bgPr>
+        <a:solidFill>
+          <a:srgbClr val="FFFFFF"/>
+        </a:solidFill>
+        <a:effectLst/>
+      </p:bgPr>
+    </p:bg>
+    <p:spTree>
+      <p:nvGrpSpPr>
+        <p:cNvPr id="1" name=""/>
+        <p:cNvGrpSpPr/>
+        <p:nvPr/>
+      </p:nvGrpSpPr>
+      <p:grpSpPr/>
+      <p:sp>
+        <p:nvSpPr>
+          <p:cNvPr id="2" name="Rectangle 1"/>
+          <p:cNvSpPr/>
+          <p:nvPr/>
+        </p:nvSpPr>
+        <p:spPr>
+          <a:xfrm>
+            <a:off x="502920" y="457200"/>
+            <a:ext cx="160000" cy="160000"/>
+          </a:xfrm>
+          <a:prstGeom prst="rect">
+            <a:avLst/>
+          </a:prstGeom>
+          <a:solidFill>
+            <a:srgbClr val="0066FF"/>
+          </a:solidFill>
+          <a:ln>
+            <a:noFill/>
+          </a:ln>
+          <a:effectLst/>
+        </p:spPr>
+        <p:style>
+          <a:lnRef idx="1">
+            <a:schemeClr val="accent1"/>
+          </a:lnRef>
+          <a:fillRef idx="3">
+            <a:schemeClr val="accent1"/>
+          </a:fillRef>
+          <a:effectRef idx="2">
+            <a:schemeClr val="accent1"/>
+          </a:effectRef>
+          <a:fontRef idx="minor">
+            <a:schemeClr val="lt1"/>
+          </a:fontRef>
+        </p:style>
+        <p:txBody>
+          <a:bodyPr rtlCol="0" anchor="ctr"/>
+          <a:lstStyle/>
+          <a:p>
+            <a:pPr algn="ctr"/>
+          </a:p>
+        </p:txBody>
+      </p:sp>
+      <p:sp>
+        <p:nvSpPr>
+          <p:cNvPr id="3" name="Rectangle 2"/>
+          <p:cNvSpPr/>
+          <p:nvPr/>
+        </p:nvSpPr>
+        <p:spPr>
+          <a:xfrm>
+            <a:off x="732920" y="457200"/>
+            <a:ext cx="160000" cy="160000"/>
+          </a:xfrm>
+          <a:prstGeom prst="rect">
+            <a:avLst/>
+          </a:prstGeom>
+          <a:solidFill>
+            <a:srgbClr val="0066FF"/>
+          </a:solidFill>
+          <a:ln>
+            <a:noFill/>
+          </a:ln>
+          <a:effectLst/>
+        </p:spPr>
+        <p:style>
+          <a:lnRef idx="1">
+            <a:schemeClr val="accent1"/>
+          </a:lnRef>
+          <a:fillRef idx="3">
+            <a:schemeClr val="accent1"/>
+          </a:fillRef>
+          <a:effectRef idx="2">
+            <a:schemeClr val="accent1"/>
+          </a:effectRef>
+          <a:fontRef idx="minor">
+            <a:schemeClr val="lt1"/>
+          </a:fontRef>
+        </p:style>
+        <p:txBody>
+          <a:bodyPr rtlCol="0" anchor="ctr"/>
+          <a:lstStyle/>
+          <a:p>
+            <a:pPr algn="ctr"/>
+          </a:p>
+        </p:txBody>
+      </p:sp>
+      <p:sp>
+        <p:nvSpPr>
+          <p:cNvPr id="4" name="Rectangle 3"/>
+          <p:cNvSpPr/>
+          <p:nvPr/>
+        </p:nvSpPr>
+        <p:spPr>
+          <a:xfrm>
+            <a:off x="502920" y="687200"/>
+            <a:ext cx="160000" cy="160000"/>
+          </a:xfrm>
+          <a:prstGeom prst="rect">
+            <a:avLst/>
+          </a:prstGeom>
+          <a:solidFill>
+            <a:srgbClr val="0066FF"/>
+          </a:solidFill>
+          <a:ln>
+            <a:noFill/>
+          </a:ln>
+          <a:effectLst/>
+        </p:spPr>
+        <p:style>
+          <a:lnRef idx="1">
+            <a:schemeClr val="accent1"/>
+          </a:lnRef>
+          <a:fillRef idx="3">
+            <a:schemeClr val="accent1"/>
+          </a:fillRef>
+          <a:effectRef idx="2">
+            <a:schemeClr val="accent1"/>
+          </a:effectRef>
+          <a:fontRef idx="minor">
+            <a:schemeClr val="lt1"/>
+          </a:fontRef>
+        </p:style>
+        <p:txBody>
+          <a:bodyPr rtlCol="0" anchor="ctr"/>
+          <a:lstStyle/>
+          <a:p>
+            <a:pPr algn="ctr"/>
+          </a:p>
+        </p:txBody>
+      </p:sp>
+      <p:sp>
+        <p:nvSpPr>
+          <p:cNvPr id="5" name="Rectangle 4"/>
+          <p:cNvSpPr/>
+          <p:nvPr/>
+        </p:nvSpPr>
+        <p:spPr>
+          <a:xfrm>
+            <a:off x="732920" y="687200"/>
+            <a:ext cx="160000" cy="160000"/>
+          </a:xfrm>
+          <a:prstGeom prst="rect">
+            <a:avLst/>
+          </a:prstGeom>
+          <a:solidFill>
+            <a:srgbClr val="0066FF"/>
+          </a:solidFill>
+          <a:ln>
+            <a:noFill/>
+          </a:ln>
+          <a:effectLst/>
+        </p:spPr>
+        <p:style>
+          <a:lnRef idx="1">
+            <a:schemeClr val="accent1"/>
+          </a:lnRef>
+          <a:fillRef idx="3">
+            <a:schemeClr val="accent1"/>
+          </a:fillRef>
+          <a:effectRef idx="2">
+            <a:schemeClr val="accent1"/>
+          </a:effectRef>
+          <a:fontRef idx="minor">
+            <a:schemeClr val="lt1"/>
+          </a:fontRef>
+        </p:style>
+        <p:txBody>
+          <a:bodyPr rtlCol="0" anchor="ctr"/>
+          <a:lstStyle/>
+          <a:p>
+            <a:pPr algn="ctr"/>
+          </a:p>
+        </p:txBody>
+      </p:sp>
+      <p:sp>
+        <p:nvSpPr>
+          <p:cNvPr id="6" name="TextBox 5"/>
+          <p:cNvSpPr txBox="1"/>
+          <p:nvPr/>
+        </p:nvSpPr>
+        <p:spPr>
+          <a:xfrm>
+            <a:off x="1005840" y="384048"/>
+            <a:ext cx="5486400" cy="320040"/>
+          </a:xfrm>
+          <a:prstGeom prst="rect">
+            <a:avLst/>
+          </a:prstGeom>
+          <a:noFill/>
+        </p:spPr>
+        <p:txBody>
+          <a:bodyPr wrap="square" lIns="0" rIns="0" tIns="0" bIns="0" anchor="t">
+            <a:spAutoFit/>
+          </a:bodyPr>
+          <a:lstStyle/>
+          <a:p>
+            <a:pPr algn="l"/>
+            <a:r>
+              <a:rPr sz="1100" b="0" i="0">
+                <a:solidFill>
+                  <a:srgbClr val="52525B"/>
+                </a:solidFill>
+                <a:latin typeface="Consolas"/>
+              </a:rPr>
               <a:t>12  ·  РЕЗУЛЬТАТЫ</a:t>
             </a:r>
           </a:p>
@@ -8576,7 +9422,7 @@
                 </a:solidFill>
                 <a:latin typeface="Consolas"/>
               </a:rPr>
-              <a:t>02 / 13</a:t>
+              <a:t>02 / 15</a:t>
             </a:r>
           </a:p>
         </p:txBody>
@@ -9050,7 +9896,7 @@
                 </a:solidFill>
                 <a:latin typeface="Segoe UI"/>
               </a:rPr>
-              <a:t>сообщений в день через мессенджеры</a:t>
+              <a:t>сообщений в день по всему миру</a:t>
             </a:r>
           </a:p>
         </p:txBody>
@@ -9208,7 +10054,7 @@
                 </a:solidFill>
                 <a:latin typeface="Segoe UI"/>
               </a:rPr>
-              <a:t>цель по задержке доставки</a:t>
+              <a:t>цель по скорости доставки</a:t>
             </a:r>
           </a:p>
         </p:txBody>
@@ -9331,7 +10177,7 @@
                 </a:solidFill>
                 <a:latin typeface="Segoe UI"/>
               </a:rPr>
-              <a:t>3 транспорта</a:t>
+              <a:t>24 / 7</a:t>
             </a:r>
           </a:p>
         </p:txBody>
@@ -9366,7 +10212,7 @@
                 </a:solidFill>
                 <a:latin typeface="Segoe UI"/>
               </a:rPr>
-              <a:t>WebSocket, gRPC, long polling</a:t>
+              <a:t>круглосуточная доступность</a:t>
             </a:r>
           </a:p>
         </p:txBody>
@@ -9507,7 +10353,7 @@
                 </a:solidFill>
                 <a:latin typeface="Consolas"/>
               </a:rPr>
-              <a:t>03 / 13</a:t>
+              <a:t>03 / 15</a:t>
             </a:r>
           </a:p>
         </p:txBody>
@@ -10153,7 +10999,7 @@
                 </a:solidFill>
                 <a:latin typeface="Consolas"/>
               </a:rPr>
-              <a:t>04 / 13</a:t>
+              <a:t>04 / 15</a:t>
             </a:r>
           </a:p>
         </p:txBody>
@@ -10961,7 +11807,7 @@
                 </a:solidFill>
                 <a:latin typeface="Consolas"/>
               </a:rPr>
-              <a:t>05 / 13</a:t>
+              <a:t>05 / 15</a:t>
             </a:r>
           </a:p>
         </p:txBody>
@@ -11198,7 +12044,7 @@
                 </a:solidFill>
                 <a:latin typeface="Consolas"/>
               </a:rPr>
-              <a:t>04  ·  ОБЗОР АНАЛОГОВ</a:t>
+              <a:t>04  ·  ПОХОЖИЕ СЕРВИСЫ</a:t>
             </a:r>
           </a:p>
         </p:txBody>
@@ -11233,7 +12079,7 @@
                 </a:solidFill>
                 <a:latin typeface="Segoe UI"/>
               </a:rPr>
-              <a:t>Что делают взрослые, а что мы</a:t>
+              <a:t>На что мы ориентировались</a:t>
             </a:r>
           </a:p>
         </p:txBody>
@@ -11290,8 +12136,8 @@
         </p:nvSpPr>
         <p:spPr>
           <a:xfrm>
-            <a:off x="822960" y="2148840"/>
-            <a:ext cx="2286000" cy="457200"/>
+            <a:off x="822960" y="2286000"/>
+            <a:ext cx="2560320" cy="457200"/>
           </a:xfrm>
           <a:prstGeom prst="rect">
             <a:avLst/>
@@ -11306,12 +12152,82 @@
           <a:p>
             <a:pPr algn="l"/>
             <a:r>
-              <a:rPr sz="1600" b="1" i="0">
+              <a:rPr sz="1800" b="1" i="0">
                 <a:solidFill>
                   <a:srgbClr val="0A0A0A"/>
                 </a:solidFill>
                 <a:latin typeface="Segoe UI"/>
               </a:rPr>
+              <a:t>Telegram</a:t>
+            </a:r>
+          </a:p>
+        </p:txBody>
+      </p:sp>
+      <p:sp>
+        <p:nvSpPr>
+          <p:cNvPr id="10" name="TextBox 9"/>
+          <p:cNvSpPr txBox="1"/>
+          <p:nvPr/>
+        </p:nvSpPr>
+        <p:spPr>
+          <a:xfrm>
+            <a:off x="3566160" y="2313432"/>
+            <a:ext cx="8503920" cy="457200"/>
+          </a:xfrm>
+          <a:prstGeom prst="rect">
+            <a:avLst/>
+          </a:prstGeom>
+          <a:noFill/>
+        </p:spPr>
+        <p:txBody>
+          <a:bodyPr wrap="square" lIns="0" rIns="0" tIns="0" bIns="0" anchor="t">
+            <a:spAutoFit/>
+          </a:bodyPr>
+          <a:lstStyle/>
+          <a:p>
+            <a:pPr algn="l"/>
+            <a:r>
+              <a:rPr sz="1500" b="0" i="0">
+                <a:solidFill>
+                  <a:srgbClr val="52525B"/>
+                </a:solidFill>
+                <a:latin typeface="Segoe UI"/>
+              </a:rPr>
+              <a:t>личные и групповые чаты, история, поиск</a:t>
+            </a:r>
+          </a:p>
+        </p:txBody>
+      </p:sp>
+      <p:sp>
+        <p:nvSpPr>
+          <p:cNvPr id="11" name="TextBox 10"/>
+          <p:cNvSpPr txBox="1"/>
+          <p:nvPr/>
+        </p:nvSpPr>
+        <p:spPr>
+          <a:xfrm>
+            <a:off x="822960" y="2926080"/>
+            <a:ext cx="2560320" cy="457200"/>
+          </a:xfrm>
+          <a:prstGeom prst="rect">
+            <a:avLst/>
+          </a:prstGeom>
+          <a:noFill/>
+        </p:spPr>
+        <p:txBody>
+          <a:bodyPr wrap="square" lIns="0" rIns="0" tIns="0" bIns="0" anchor="t">
+            <a:spAutoFit/>
+          </a:bodyPr>
+          <a:lstStyle/>
+          <a:p>
+            <a:pPr algn="l"/>
+            <a:r>
+              <a:rPr sz="1800" b="1" i="0">
+                <a:solidFill>
+                  <a:srgbClr val="0A0A0A"/>
+                </a:solidFill>
+                <a:latin typeface="Segoe UI"/>
+              </a:rPr>
               <a:t>WhatsApp</a:t>
             </a:r>
           </a:p>
@@ -11319,14 +12235,14 @@
       </p:sp>
       <p:sp>
         <p:nvSpPr>
-          <p:cNvPr id="10" name="TextBox 9"/>
-          <p:cNvSpPr txBox="1"/>
-          <p:nvPr/>
-        </p:nvSpPr>
-        <p:spPr>
-          <a:xfrm>
-            <a:off x="3291840" y="2148840"/>
-            <a:ext cx="8778240" cy="457200"/>
+          <p:cNvPr id="12" name="TextBox 11"/>
+          <p:cNvSpPr txBox="1"/>
+          <p:nvPr/>
+        </p:nvSpPr>
+        <p:spPr>
+          <a:xfrm>
+            <a:off x="3566160" y="2953512"/>
+            <a:ext cx="8503920" cy="457200"/>
           </a:xfrm>
           <a:prstGeom prst="rect">
             <a:avLst/>
@@ -11341,27 +12257,27 @@
           <a:p>
             <a:pPr algn="l"/>
             <a:r>
-              <a:rPr sz="1400" b="0" i="0">
+              <a:rPr sz="1500" b="0" i="0">
                 <a:solidFill>
                   <a:srgbClr val="52525B"/>
                 </a:solidFill>
                 <a:latin typeface="Segoe UI"/>
               </a:rPr>
-              <a:t>XMPP-подобный протокол, Signal E2E-шифрование</a:t>
-            </a:r>
-          </a:p>
-        </p:txBody>
-      </p:sp>
-      <p:sp>
-        <p:nvSpPr>
-          <p:cNvPr id="11" name="TextBox 10"/>
-          <p:cNvSpPr txBox="1"/>
-          <p:nvPr/>
-        </p:nvSpPr>
-        <p:spPr>
-          <a:xfrm>
-            <a:off x="822960" y="2651760"/>
-            <a:ext cx="2286000" cy="457200"/>
+              <a:t>мобильный обмен, статусы прочтения</a:t>
+            </a:r>
+          </a:p>
+        </p:txBody>
+      </p:sp>
+      <p:sp>
+        <p:nvSpPr>
+          <p:cNvPr id="13" name="TextBox 12"/>
+          <p:cNvSpPr txBox="1"/>
+          <p:nvPr/>
+        </p:nvSpPr>
+        <p:spPr>
+          <a:xfrm>
+            <a:off x="822960" y="3566160"/>
+            <a:ext cx="2560320" cy="457200"/>
           </a:xfrm>
           <a:prstGeom prst="rect">
             <a:avLst/>
@@ -11376,27 +12292,27 @@
           <a:p>
             <a:pPr algn="l"/>
             <a:r>
-              <a:rPr sz="1600" b="1" i="0">
+              <a:rPr sz="1800" b="1" i="0">
                 <a:solidFill>
                   <a:srgbClr val="0A0A0A"/>
                 </a:solidFill>
                 <a:latin typeface="Segoe UI"/>
               </a:rPr>
-              <a:t>Telegram</a:t>
-            </a:r>
-          </a:p>
-        </p:txBody>
-      </p:sp>
-      <p:sp>
-        <p:nvSpPr>
-          <p:cNvPr id="12" name="TextBox 11"/>
-          <p:cNvSpPr txBox="1"/>
-          <p:nvPr/>
-        </p:nvSpPr>
-        <p:spPr>
-          <a:xfrm>
-            <a:off x="3291840" y="2651760"/>
-            <a:ext cx="8778240" cy="457200"/>
+              <a:t>Discord</a:t>
+            </a:r>
+          </a:p>
+        </p:txBody>
+      </p:sp>
+      <p:sp>
+        <p:nvSpPr>
+          <p:cNvPr id="14" name="TextBox 13"/>
+          <p:cNvSpPr txBox="1"/>
+          <p:nvPr/>
+        </p:nvSpPr>
+        <p:spPr>
+          <a:xfrm>
+            <a:off x="3566160" y="3593592"/>
+            <a:ext cx="8503920" cy="457200"/>
           </a:xfrm>
           <a:prstGeom prst="rect">
             <a:avLst/>
@@ -11411,27 +12327,27 @@
           <a:p>
             <a:pPr algn="l"/>
             <a:r>
-              <a:rPr sz="1400" b="0" i="0">
+              <a:rPr sz="1500" b="0" i="0">
                 <a:solidFill>
                   <a:srgbClr val="52525B"/>
                 </a:solidFill>
                 <a:latin typeface="Segoe UI"/>
               </a:rPr>
-              <a:t>собственный MTProto, распределённые дата-центры</a:t>
-            </a:r>
-          </a:p>
-        </p:txBody>
-      </p:sp>
-      <p:sp>
-        <p:nvSpPr>
-          <p:cNvPr id="13" name="TextBox 12"/>
-          <p:cNvSpPr txBox="1"/>
-          <p:nvPr/>
-        </p:nvSpPr>
-        <p:spPr>
-          <a:xfrm>
-            <a:off x="822960" y="3154680"/>
-            <a:ext cx="2286000" cy="457200"/>
+              <a:t>групповые каналы, живая переписка</a:t>
+            </a:r>
+          </a:p>
+        </p:txBody>
+      </p:sp>
+      <p:sp>
+        <p:nvSpPr>
+          <p:cNvPr id="15" name="TextBox 14"/>
+          <p:cNvSpPr txBox="1"/>
+          <p:nvPr/>
+        </p:nvSpPr>
+        <p:spPr>
+          <a:xfrm>
+            <a:off x="822960" y="4206240"/>
+            <a:ext cx="2560320" cy="457200"/>
           </a:xfrm>
           <a:prstGeom prst="rect">
             <a:avLst/>
@@ -11446,27 +12362,27 @@
           <a:p>
             <a:pPr algn="l"/>
             <a:r>
-              <a:rPr sz="1600" b="1" i="0">
+              <a:rPr sz="1800" b="1" i="0">
                 <a:solidFill>
                   <a:srgbClr val="0A0A0A"/>
                 </a:solidFill>
                 <a:latin typeface="Segoe UI"/>
               </a:rPr>
-              <a:t>Discord</a:t>
-            </a:r>
-          </a:p>
-        </p:txBody>
-      </p:sp>
-      <p:sp>
-        <p:nvSpPr>
-          <p:cNvPr id="14" name="TextBox 13"/>
-          <p:cNvSpPr txBox="1"/>
-          <p:nvPr/>
-        </p:nvSpPr>
-        <p:spPr>
-          <a:xfrm>
-            <a:off x="3291840" y="3154680"/>
-            <a:ext cx="8778240" cy="457200"/>
+              <a:t>VK</a:t>
+            </a:r>
+          </a:p>
+        </p:txBody>
+      </p:sp>
+      <p:sp>
+        <p:nvSpPr>
+          <p:cNvPr id="16" name="TextBox 15"/>
+          <p:cNvSpPr txBox="1"/>
+          <p:nvPr/>
+        </p:nvSpPr>
+        <p:spPr>
+          <a:xfrm>
+            <a:off x="3566160" y="4233672"/>
+            <a:ext cx="8503920" cy="457200"/>
           </a:xfrm>
           <a:prstGeom prst="rect">
             <a:avLst/>
@@ -11481,27 +12397,27 @@
           <a:p>
             <a:pPr algn="l"/>
             <a:r>
-              <a:rPr sz="1400" b="0" i="0">
+              <a:rPr sz="1500" b="0" i="0">
                 <a:solidFill>
                   <a:srgbClr val="52525B"/>
                 </a:solidFill>
                 <a:latin typeface="Segoe UI"/>
               </a:rPr>
-              <a:t>интенсивно использует WebSocket, ориентация на голос</a:t>
-            </a:r>
-          </a:p>
-        </p:txBody>
-      </p:sp>
-      <p:sp>
-        <p:nvSpPr>
-          <p:cNvPr id="15" name="TextBox 14"/>
-          <p:cNvSpPr txBox="1"/>
-          <p:nvPr/>
-        </p:nvSpPr>
-        <p:spPr>
-          <a:xfrm>
-            <a:off x="822960" y="3657600"/>
-            <a:ext cx="2286000" cy="457200"/>
+              <a:t>web-версия и мобильное приложение</a:t>
+            </a:r>
+          </a:p>
+        </p:txBody>
+      </p:sp>
+      <p:sp>
+        <p:nvSpPr>
+          <p:cNvPr id="17" name="TextBox 16"/>
+          <p:cNvSpPr txBox="1"/>
+          <p:nvPr/>
+        </p:nvSpPr>
+        <p:spPr>
+          <a:xfrm>
+            <a:off x="822960" y="4846320"/>
+            <a:ext cx="2560320" cy="457200"/>
           </a:xfrm>
           <a:prstGeom prst="rect">
             <a:avLst/>
@@ -11516,7 +12432,7 @@
           <a:p>
             <a:pPr algn="l"/>
             <a:r>
-              <a:rPr sz="1600" b="1" i="0">
+              <a:rPr sz="1800" b="1" i="0">
                 <a:solidFill>
                   <a:srgbClr val="0A0A0A"/>
                 </a:solidFill>
@@ -11529,14 +12445,14 @@
       </p:sp>
       <p:sp>
         <p:nvSpPr>
-          <p:cNvPr id="16" name="TextBox 15"/>
-          <p:cNvSpPr txBox="1"/>
-          <p:nvPr/>
-        </p:nvSpPr>
-        <p:spPr>
-          <a:xfrm>
-            <a:off x="3291840" y="3657600"/>
-            <a:ext cx="8778240" cy="457200"/>
+          <p:cNvPr id="18" name="TextBox 17"/>
+          <p:cNvSpPr txBox="1"/>
+          <p:nvPr/>
+        </p:nvSpPr>
+        <p:spPr>
+          <a:xfrm>
+            <a:off x="3566160" y="4873752"/>
+            <a:ext cx="8503920" cy="457200"/>
           </a:xfrm>
           <a:prstGeom prst="rect">
             <a:avLst/>
@@ -11551,118 +12467,68 @@
           <a:p>
             <a:pPr algn="l"/>
             <a:r>
-              <a:rPr sz="1400" b="0" i="0">
+              <a:rPr sz="1500" b="0" i="0">
                 <a:solidFill>
                   <a:srgbClr val="52525B"/>
                 </a:solidFill>
                 <a:latin typeface="Segoe UI"/>
               </a:rPr>
-              <a:t>гибрид REST + WebSocket — та же схема, что у нас</a:t>
-            </a:r>
-          </a:p>
-        </p:txBody>
-      </p:sp>
-      <p:sp>
-        <p:nvSpPr>
-          <p:cNvPr id="17" name="TextBox 16"/>
-          <p:cNvSpPr txBox="1"/>
-          <p:nvPr/>
-        </p:nvSpPr>
-        <p:spPr>
-          <a:xfrm>
-            <a:off x="822960" y="4160520"/>
-            <a:ext cx="2286000" cy="457200"/>
-          </a:xfrm>
-          <a:prstGeom prst="rect">
-            <a:avLst/>
-          </a:prstGeom>
-          <a:noFill/>
-        </p:spPr>
-        <p:txBody>
-          <a:bodyPr wrap="square" lIns="0" rIns="0" tIns="0" bIns="0" anchor="t">
-            <a:spAutoFit/>
-          </a:bodyPr>
-          <a:lstStyle/>
-          <a:p>
-            <a:pPr algn="l"/>
-            <a:r>
-              <a:rPr sz="1600" b="1" i="0">
+              <a:t>рабочие чаты, роли и права</a:t>
+            </a:r>
+          </a:p>
+        </p:txBody>
+      </p:sp>
+      <p:sp>
+        <p:nvSpPr>
+          <p:cNvPr id="19" name="TextBox 18"/>
+          <p:cNvSpPr txBox="1"/>
+          <p:nvPr/>
+        </p:nvSpPr>
+        <p:spPr>
+          <a:xfrm>
+            <a:off x="822960" y="5715000"/>
+            <a:ext cx="11247120" cy="822960"/>
+          </a:xfrm>
+          <a:prstGeom prst="rect">
+            <a:avLst/>
+          </a:prstGeom>
+          <a:noFill/>
+        </p:spPr>
+        <p:txBody>
+          <a:bodyPr wrap="square" lIns="0" rIns="0">
+            <a:spAutoFit/>
+          </a:bodyPr>
+          <a:lstStyle/>
+          <a:p>
+            <a:pPr algn="l">
+              <a:lnSpc>
+                <a:spcPct val="135000"/>
+              </a:lnSpc>
+            </a:pPr>
+            <a:r>
+              <a:rPr sz="1400" b="0">
                 <a:solidFill>
                   <a:srgbClr val="0A0A0A"/>
                 </a:solidFill>
                 <a:latin typeface="Segoe UI"/>
               </a:rPr>
-              <a:t>VK</a:t>
-            </a:r>
-          </a:p>
-        </p:txBody>
-      </p:sp>
-      <p:sp>
-        <p:nvSpPr>
-          <p:cNvPr id="18" name="TextBox 17"/>
-          <p:cNvSpPr txBox="1"/>
-          <p:nvPr/>
-        </p:nvSpPr>
-        <p:spPr>
-          <a:xfrm>
-            <a:off x="3291840" y="4160520"/>
-            <a:ext cx="8778240" cy="457200"/>
-          </a:xfrm>
-          <a:prstGeom prst="rect">
-            <a:avLst/>
-          </a:prstGeom>
-          <a:noFill/>
-        </p:spPr>
-        <p:txBody>
-          <a:bodyPr wrap="square" lIns="0" rIns="0" tIns="0" bIns="0" anchor="t">
-            <a:spAutoFit/>
-          </a:bodyPr>
-          <a:lstStyle/>
-          <a:p>
-            <a:pPr algn="l"/>
-            <a:r>
-              <a:rPr sz="1400" b="0" i="0">
-                <a:solidFill>
-                  <a:srgbClr val="52525B"/>
+              <a:t>Мы посмотрели, какие функции есть у популярных мессенджеров,</a:t>
+            </a:r>
+          </a:p>
+          <a:p>
+            <a:pPr algn="l">
+              <a:lnSpc>
+                <a:spcPct val="135000"/>
+              </a:lnSpc>
+            </a:pPr>
+            <a:r>
+              <a:rPr sz="1400" b="0">
+                <a:solidFill>
+                  <a:srgbClr val="0A0A0A"/>
                 </a:solidFill>
                 <a:latin typeface="Segoe UI"/>
               </a:rPr>
-              <a:t>long polling в мобильных, WebSocket в web</a:t>
-            </a:r>
-          </a:p>
-        </p:txBody>
-      </p:sp>
-      <p:sp>
-        <p:nvSpPr>
-          <p:cNvPr id="19" name="TextBox 18"/>
-          <p:cNvSpPr txBox="1"/>
-          <p:nvPr/>
-        </p:nvSpPr>
-        <p:spPr>
-          <a:xfrm>
-            <a:off x="822960" y="4663440"/>
-            <a:ext cx="2286000" cy="457200"/>
-          </a:xfrm>
-          <a:prstGeom prst="rect">
-            <a:avLst/>
-          </a:prstGeom>
-          <a:noFill/>
-        </p:spPr>
-        <p:txBody>
-          <a:bodyPr wrap="square" lIns="0" rIns="0" tIns="0" bIns="0" anchor="t">
-            <a:spAutoFit/>
-          </a:bodyPr>
-          <a:lstStyle/>
-          <a:p>
-            <a:pPr algn="l"/>
-            <a:r>
-              <a:rPr sz="1600" b="1" i="0">
-                <a:solidFill>
-                  <a:srgbClr val="0A0A0A"/>
-                </a:solidFill>
-                <a:latin typeface="Segoe UI"/>
-              </a:rPr>
-              <a:t>Matrix</a:t>
+              <a:t>и собрали свой прототип с тем же набором базовых возможностей.</a:t>
             </a:r>
           </a:p>
         </p:txBody>
@@ -11670,269 +12536,6 @@
       <p:sp>
         <p:nvSpPr>
           <p:cNvPr id="20" name="TextBox 19"/>
-          <p:cNvSpPr txBox="1"/>
-          <p:nvPr/>
-        </p:nvSpPr>
-        <p:spPr>
-          <a:xfrm>
-            <a:off x="3291840" y="4663440"/>
-            <a:ext cx="8778240" cy="457200"/>
-          </a:xfrm>
-          <a:prstGeom prst="rect">
-            <a:avLst/>
-          </a:prstGeom>
-          <a:noFill/>
-        </p:spPr>
-        <p:txBody>
-          <a:bodyPr wrap="square" lIns="0" rIns="0" tIns="0" bIns="0" anchor="t">
-            <a:spAutoFit/>
-          </a:bodyPr>
-          <a:lstStyle/>
-          <a:p>
-            <a:pPr algn="l"/>
-            <a:r>
-              <a:rPr sz="1400" b="0" i="0">
-                <a:solidFill>
-                  <a:srgbClr val="52525B"/>
-                </a:solidFill>
-                <a:latin typeface="Segoe UI"/>
-              </a:rPr>
-              <a:t>открытый федеративный протокол</a:t>
-            </a:r>
-          </a:p>
-        </p:txBody>
-      </p:sp>
-      <p:sp>
-        <p:nvSpPr>
-          <p:cNvPr id="21" name="Rectangle 20"/>
-          <p:cNvSpPr/>
-          <p:nvPr/>
-        </p:nvSpPr>
-        <p:spPr>
-          <a:xfrm>
-            <a:off x="822960" y="5486400"/>
-            <a:ext cx="5486400" cy="822960"/>
-          </a:xfrm>
-          <a:prstGeom prst="rect">
-            <a:avLst/>
-          </a:prstGeom>
-          <a:solidFill>
-            <a:srgbClr val="F5F8FF"/>
-          </a:solidFill>
-          <a:ln>
-            <a:noFill/>
-          </a:ln>
-          <a:effectLst/>
-        </p:spPr>
-        <p:style>
-          <a:lnRef idx="1">
-            <a:schemeClr val="accent1"/>
-          </a:lnRef>
-          <a:fillRef idx="3">
-            <a:schemeClr val="accent1"/>
-          </a:fillRef>
-          <a:effectRef idx="2">
-            <a:schemeClr val="accent1"/>
-          </a:effectRef>
-          <a:fontRef idx="minor">
-            <a:schemeClr val="lt1"/>
-          </a:fontRef>
-        </p:style>
-        <p:txBody>
-          <a:bodyPr rtlCol="0" anchor="ctr"/>
-          <a:lstStyle/>
-          <a:p>
-            <a:pPr algn="ctr"/>
-          </a:p>
-        </p:txBody>
-      </p:sp>
-      <p:sp>
-        <p:nvSpPr>
-          <p:cNvPr id="22" name="TextBox 21"/>
-          <p:cNvSpPr txBox="1"/>
-          <p:nvPr/>
-        </p:nvSpPr>
-        <p:spPr>
-          <a:xfrm>
-            <a:off x="1005840" y="5559552"/>
-            <a:ext cx="5486400" cy="274320"/>
-          </a:xfrm>
-          <a:prstGeom prst="rect">
-            <a:avLst/>
-          </a:prstGeom>
-          <a:noFill/>
-        </p:spPr>
-        <p:txBody>
-          <a:bodyPr wrap="square" lIns="0" rIns="0" tIns="0" bIns="0" anchor="t">
-            <a:spAutoFit/>
-          </a:bodyPr>
-          <a:lstStyle/>
-          <a:p>
-            <a:pPr algn="l"/>
-            <a:r>
-              <a:rPr sz="900" b="0" i="0">
-                <a:solidFill>
-                  <a:srgbClr val="0066FF"/>
-                </a:solidFill>
-                <a:latin typeface="Consolas"/>
-              </a:rPr>
-              <a:t>ВЗЯЛИ ЗА ОСНОВУ</a:t>
-            </a:r>
-          </a:p>
-        </p:txBody>
-      </p:sp>
-      <p:sp>
-        <p:nvSpPr>
-          <p:cNvPr id="23" name="TextBox 22"/>
-          <p:cNvSpPr txBox="1"/>
-          <p:nvPr/>
-        </p:nvSpPr>
-        <p:spPr>
-          <a:xfrm>
-            <a:off x="1005840" y="5815584"/>
-            <a:ext cx="5303520" cy="457200"/>
-          </a:xfrm>
-          <a:prstGeom prst="rect">
-            <a:avLst/>
-          </a:prstGeom>
-          <a:noFill/>
-        </p:spPr>
-        <p:txBody>
-          <a:bodyPr wrap="square" lIns="0" rIns="0" tIns="0" bIns="0" anchor="t">
-            <a:spAutoFit/>
-          </a:bodyPr>
-          <a:lstStyle/>
-          <a:p>
-            <a:pPr algn="l"/>
-            <a:r>
-              <a:rPr sz="1200" b="0" i="0">
-                <a:solidFill>
-                  <a:srgbClr val="0A0A0A"/>
-                </a:solidFill>
-                <a:latin typeface="Segoe UI"/>
-              </a:rPr>
-              <a:t>гибрид REST + WebSocket, роли в чате, идемпотентность</a:t>
-            </a:r>
-          </a:p>
-        </p:txBody>
-      </p:sp>
-      <p:sp>
-        <p:nvSpPr>
-          <p:cNvPr id="24" name="Rectangle 23"/>
-          <p:cNvSpPr/>
-          <p:nvPr/>
-        </p:nvSpPr>
-        <p:spPr>
-          <a:xfrm>
-            <a:off x="6583680" y="5486400"/>
-            <a:ext cx="5486400" cy="822960"/>
-          </a:xfrm>
-          <a:prstGeom prst="rect">
-            <a:avLst/>
-          </a:prstGeom>
-          <a:solidFill>
-            <a:srgbClr val="F5F5F5"/>
-          </a:solidFill>
-          <a:ln>
-            <a:noFill/>
-          </a:ln>
-          <a:effectLst/>
-        </p:spPr>
-        <p:style>
-          <a:lnRef idx="1">
-            <a:schemeClr val="accent1"/>
-          </a:lnRef>
-          <a:fillRef idx="3">
-            <a:schemeClr val="accent1"/>
-          </a:fillRef>
-          <a:effectRef idx="2">
-            <a:schemeClr val="accent1"/>
-          </a:effectRef>
-          <a:fontRef idx="minor">
-            <a:schemeClr val="lt1"/>
-          </a:fontRef>
-        </p:style>
-        <p:txBody>
-          <a:bodyPr rtlCol="0" anchor="ctr"/>
-          <a:lstStyle/>
-          <a:p>
-            <a:pPr algn="ctr"/>
-          </a:p>
-        </p:txBody>
-      </p:sp>
-      <p:sp>
-        <p:nvSpPr>
-          <p:cNvPr id="25" name="TextBox 24"/>
-          <p:cNvSpPr txBox="1"/>
-          <p:nvPr/>
-        </p:nvSpPr>
-        <p:spPr>
-          <a:xfrm>
-            <a:off x="6766560" y="5559552"/>
-            <a:ext cx="5486400" cy="274320"/>
-          </a:xfrm>
-          <a:prstGeom prst="rect">
-            <a:avLst/>
-          </a:prstGeom>
-          <a:noFill/>
-        </p:spPr>
-        <p:txBody>
-          <a:bodyPr wrap="square" lIns="0" rIns="0" tIns="0" bIns="0" anchor="t">
-            <a:spAutoFit/>
-          </a:bodyPr>
-          <a:lstStyle/>
-          <a:p>
-            <a:pPr algn="l"/>
-            <a:r>
-              <a:rPr sz="900" b="0" i="0">
-                <a:solidFill>
-                  <a:srgbClr val="52525B"/>
-                </a:solidFill>
-                <a:latin typeface="Consolas"/>
-              </a:rPr>
-              <a:t>СОЗНАТЕЛЬНО ОТКАЗАЛИСЬ</a:t>
-            </a:r>
-          </a:p>
-        </p:txBody>
-      </p:sp>
-      <p:sp>
-        <p:nvSpPr>
-          <p:cNvPr id="26" name="TextBox 25"/>
-          <p:cNvSpPr txBox="1"/>
-          <p:nvPr/>
-        </p:nvSpPr>
-        <p:spPr>
-          <a:xfrm>
-            <a:off x="6766560" y="5815584"/>
-            <a:ext cx="5303520" cy="457200"/>
-          </a:xfrm>
-          <a:prstGeom prst="rect">
-            <a:avLst/>
-          </a:prstGeom>
-          <a:noFill/>
-        </p:spPr>
-        <p:txBody>
-          <a:bodyPr wrap="square" lIns="0" rIns="0" tIns="0" bIns="0" anchor="t">
-            <a:spAutoFit/>
-          </a:bodyPr>
-          <a:lstStyle/>
-          <a:p>
-            <a:pPr algn="l"/>
-            <a:r>
-              <a:rPr sz="1200" b="0" i="0">
-                <a:solidFill>
-                  <a:srgbClr val="0A0A0A"/>
-                </a:solidFill>
-                <a:latin typeface="Segoe UI"/>
-              </a:rPr>
-              <a:t>E2E-шифрование, федерация, брокер сообщений, шардирование</a:t>
-            </a:r>
-          </a:p>
-        </p:txBody>
-      </p:sp>
-      <p:sp>
-        <p:nvSpPr>
-          <p:cNvPr id="27" name="TextBox 26"/>
           <p:cNvSpPr txBox="1"/>
           <p:nvPr/>
         </p:nvSpPr>
@@ -11967,7 +12570,7 @@
       </p:sp>
       <p:sp>
         <p:nvSpPr>
-          <p:cNvPr id="28" name="TextBox 27"/>
+          <p:cNvPr id="21" name="TextBox 20"/>
           <p:cNvSpPr txBox="1"/>
           <p:nvPr/>
         </p:nvSpPr>
@@ -11995,7 +12598,7 @@
                 </a:solidFill>
                 <a:latin typeface="Consolas"/>
               </a:rPr>
-              <a:t>06 / 13</a:t>
+              <a:t>06 / 15</a:t>
             </a:r>
           </a:p>
         </p:txBody>
@@ -13645,7 +14248,7 @@
                 </a:solidFill>
                 <a:latin typeface="Consolas"/>
               </a:rPr>
-              <a:t>07 / 13</a:t>
+              <a:t>07 / 15</a:t>
             </a:r>
           </a:p>
         </p:txBody>
@@ -14655,7 +15258,7 @@
                 </a:solidFill>
                 <a:latin typeface="Consolas"/>
               </a:rPr>
-              <a:t>08 / 13</a:t>
+              <a:t>08 / 15</a:t>
             </a:r>
           </a:p>
         </p:txBody>
@@ -14927,7 +15530,7 @@
                 </a:solidFill>
                 <a:latin typeface="Segoe UI"/>
               </a:rPr>
-              <a:t>8 таблиц, 3НФ, индексы под задачу</a:t>
+              <a:t>Что и где мы храним</a:t>
             </a:r>
           </a:p>
         </p:txBody>
@@ -14984,8 +15587,8 @@
         </p:nvSpPr>
         <p:spPr>
           <a:xfrm>
-            <a:off x="822960" y="2148840"/>
-            <a:ext cx="3657600" cy="320040"/>
+            <a:off x="822960" y="2194560"/>
+            <a:ext cx="2194560" cy="457200"/>
           </a:xfrm>
           <a:prstGeom prst="rect">
             <a:avLst/>
@@ -15000,178 +15603,517 @@
           <a:p>
             <a:pPr algn="l"/>
             <a:r>
-              <a:rPr sz="1100" b="0" i="0">
+              <a:rPr sz="1500" b="1" i="0">
+                <a:solidFill>
+                  <a:srgbClr val="0A0A0A"/>
+                </a:solidFill>
+                <a:latin typeface="Segoe UI"/>
+              </a:rPr>
+              <a:t>Пользователи</a:t>
+            </a:r>
+          </a:p>
+        </p:txBody>
+      </p:sp>
+      <p:sp>
+        <p:nvSpPr>
+          <p:cNvPr id="10" name="TextBox 9"/>
+          <p:cNvSpPr txBox="1"/>
+          <p:nvPr/>
+        </p:nvSpPr>
+        <p:spPr>
+          <a:xfrm>
+            <a:off x="3108960" y="2221992"/>
+            <a:ext cx="3291840" cy="457200"/>
+          </a:xfrm>
+          <a:prstGeom prst="rect">
+            <a:avLst/>
+          </a:prstGeom>
+          <a:noFill/>
+        </p:spPr>
+        <p:txBody>
+          <a:bodyPr wrap="square" lIns="0" rIns="0" tIns="0" bIns="0" anchor="t">
+            <a:spAutoFit/>
+          </a:bodyPr>
+          <a:lstStyle/>
+          <a:p>
+            <a:pPr algn="l"/>
+            <a:r>
+              <a:rPr sz="1300" b="0" i="0">
                 <a:solidFill>
                   <a:srgbClr val="52525B"/>
                 </a:solidFill>
-                <a:latin typeface="Consolas"/>
-              </a:rPr>
-              <a:t>ТАБЛИЦЫ</a:t>
-            </a:r>
-          </a:p>
-        </p:txBody>
-      </p:sp>
-      <p:sp>
-        <p:nvSpPr>
-          <p:cNvPr id="10" name="TextBox 9"/>
-          <p:cNvSpPr txBox="1"/>
-          <p:nvPr/>
-        </p:nvSpPr>
-        <p:spPr>
-          <a:xfrm>
-            <a:off x="822960" y="2514600"/>
-            <a:ext cx="3657600" cy="3200400"/>
-          </a:xfrm>
-          <a:prstGeom prst="rect">
-            <a:avLst/>
-          </a:prstGeom>
-          <a:noFill/>
-        </p:spPr>
-        <p:txBody>
-          <a:bodyPr wrap="square" lIns="0" rIns="0">
-            <a:spAutoFit/>
-          </a:bodyPr>
-          <a:lstStyle/>
-          <a:p>
-            <a:pPr algn="l">
-              <a:lnSpc>
-                <a:spcPct val="145000"/>
-              </a:lnSpc>
-            </a:pPr>
-            <a:r>
-              <a:rPr sz="1500" b="0">
+                <a:latin typeface="Segoe UI"/>
+              </a:rPr>
+              <a:t>логин, пароль (в виде хэша), имя, аватар</a:t>
+            </a:r>
+          </a:p>
+        </p:txBody>
+      </p:sp>
+      <p:sp>
+        <p:nvSpPr>
+          <p:cNvPr id="11" name="TextBox 10"/>
+          <p:cNvSpPr txBox="1"/>
+          <p:nvPr/>
+        </p:nvSpPr>
+        <p:spPr>
+          <a:xfrm>
+            <a:off x="6492240" y="2194560"/>
+            <a:ext cx="2194560" cy="457200"/>
+          </a:xfrm>
+          <a:prstGeom prst="rect">
+            <a:avLst/>
+          </a:prstGeom>
+          <a:noFill/>
+        </p:spPr>
+        <p:txBody>
+          <a:bodyPr wrap="square" lIns="0" rIns="0" tIns="0" bIns="0" anchor="t">
+            <a:spAutoFit/>
+          </a:bodyPr>
+          <a:lstStyle/>
+          <a:p>
+            <a:pPr algn="l"/>
+            <a:r>
+              <a:rPr sz="1500" b="1" i="0">
                 <a:solidFill>
                   <a:srgbClr val="0A0A0A"/>
                 </a:solidFill>
-                <a:latin typeface="Consolas"/>
-              </a:rPr>
-              <a:t>— users</a:t>
-            </a:r>
-          </a:p>
-          <a:p>
-            <a:pPr algn="l">
-              <a:lnSpc>
-                <a:spcPct val="145000"/>
-              </a:lnSpc>
-            </a:pPr>
-            <a:r>
-              <a:rPr sz="1500" b="0">
+                <a:latin typeface="Segoe UI"/>
+              </a:rPr>
+              <a:t>Чаты</a:t>
+            </a:r>
+          </a:p>
+        </p:txBody>
+      </p:sp>
+      <p:sp>
+        <p:nvSpPr>
+          <p:cNvPr id="12" name="TextBox 11"/>
+          <p:cNvSpPr txBox="1"/>
+          <p:nvPr/>
+        </p:nvSpPr>
+        <p:spPr>
+          <a:xfrm>
+            <a:off x="8778240" y="2221992"/>
+            <a:ext cx="3291840" cy="457200"/>
+          </a:xfrm>
+          <a:prstGeom prst="rect">
+            <a:avLst/>
+          </a:prstGeom>
+          <a:noFill/>
+        </p:spPr>
+        <p:txBody>
+          <a:bodyPr wrap="square" lIns="0" rIns="0" tIns="0" bIns="0" anchor="t">
+            <a:spAutoFit/>
+          </a:bodyPr>
+          <a:lstStyle/>
+          <a:p>
+            <a:pPr algn="l"/>
+            <a:r>
+              <a:rPr sz="1300" b="0" i="0">
+                <a:solidFill>
+                  <a:srgbClr val="52525B"/>
+                </a:solidFill>
+                <a:latin typeface="Segoe UI"/>
+              </a:rPr>
+              <a:t>личные и групповые</a:t>
+            </a:r>
+          </a:p>
+        </p:txBody>
+      </p:sp>
+      <p:sp>
+        <p:nvSpPr>
+          <p:cNvPr id="13" name="TextBox 12"/>
+          <p:cNvSpPr txBox="1"/>
+          <p:nvPr/>
+        </p:nvSpPr>
+        <p:spPr>
+          <a:xfrm>
+            <a:off x="822960" y="2743200"/>
+            <a:ext cx="2194560" cy="457200"/>
+          </a:xfrm>
+          <a:prstGeom prst="rect">
+            <a:avLst/>
+          </a:prstGeom>
+          <a:noFill/>
+        </p:spPr>
+        <p:txBody>
+          <a:bodyPr wrap="square" lIns="0" rIns="0" tIns="0" bIns="0" anchor="t">
+            <a:spAutoFit/>
+          </a:bodyPr>
+          <a:lstStyle/>
+          <a:p>
+            <a:pPr algn="l"/>
+            <a:r>
+              <a:rPr sz="1500" b="1" i="0">
                 <a:solidFill>
                   <a:srgbClr val="0A0A0A"/>
                 </a:solidFill>
-                <a:latin typeface="Consolas"/>
-              </a:rPr>
-              <a:t>— chats</a:t>
-            </a:r>
-          </a:p>
-          <a:p>
-            <a:pPr algn="l">
-              <a:lnSpc>
-                <a:spcPct val="145000"/>
-              </a:lnSpc>
-            </a:pPr>
-            <a:r>
-              <a:rPr sz="1500" b="0">
+                <a:latin typeface="Segoe UI"/>
+              </a:rPr>
+              <a:t>Участники</a:t>
+            </a:r>
+          </a:p>
+        </p:txBody>
+      </p:sp>
+      <p:sp>
+        <p:nvSpPr>
+          <p:cNvPr id="14" name="TextBox 13"/>
+          <p:cNvSpPr txBox="1"/>
+          <p:nvPr/>
+        </p:nvSpPr>
+        <p:spPr>
+          <a:xfrm>
+            <a:off x="3108960" y="2770632"/>
+            <a:ext cx="3291840" cy="457200"/>
+          </a:xfrm>
+          <a:prstGeom prst="rect">
+            <a:avLst/>
+          </a:prstGeom>
+          <a:noFill/>
+        </p:spPr>
+        <p:txBody>
+          <a:bodyPr wrap="square" lIns="0" rIns="0" tIns="0" bIns="0" anchor="t">
+            <a:spAutoFit/>
+          </a:bodyPr>
+          <a:lstStyle/>
+          <a:p>
+            <a:pPr algn="l"/>
+            <a:r>
+              <a:rPr sz="1300" b="0" i="0">
+                <a:solidFill>
+                  <a:srgbClr val="52525B"/>
+                </a:solidFill>
+                <a:latin typeface="Segoe UI"/>
+              </a:rPr>
+              <a:t>кто в каком чате и с какой ролью</a:t>
+            </a:r>
+          </a:p>
+        </p:txBody>
+      </p:sp>
+      <p:sp>
+        <p:nvSpPr>
+          <p:cNvPr id="15" name="TextBox 14"/>
+          <p:cNvSpPr txBox="1"/>
+          <p:nvPr/>
+        </p:nvSpPr>
+        <p:spPr>
+          <a:xfrm>
+            <a:off x="6492240" y="2743200"/>
+            <a:ext cx="2194560" cy="457200"/>
+          </a:xfrm>
+          <a:prstGeom prst="rect">
+            <a:avLst/>
+          </a:prstGeom>
+          <a:noFill/>
+        </p:spPr>
+        <p:txBody>
+          <a:bodyPr wrap="square" lIns="0" rIns="0" tIns="0" bIns="0" anchor="t">
+            <a:spAutoFit/>
+          </a:bodyPr>
+          <a:lstStyle/>
+          <a:p>
+            <a:pPr algn="l"/>
+            <a:r>
+              <a:rPr sz="1500" b="1" i="0">
                 <a:solidFill>
                   <a:srgbClr val="0A0A0A"/>
                 </a:solidFill>
-                <a:latin typeface="Consolas"/>
-              </a:rPr>
-              <a:t>— chat_members</a:t>
-            </a:r>
-          </a:p>
-          <a:p>
-            <a:pPr algn="l">
-              <a:lnSpc>
-                <a:spcPct val="145000"/>
-              </a:lnSpc>
-            </a:pPr>
-            <a:r>
-              <a:rPr sz="1500" b="0">
+                <a:latin typeface="Segoe UI"/>
+              </a:rPr>
+              <a:t>Сообщения</a:t>
+            </a:r>
+          </a:p>
+        </p:txBody>
+      </p:sp>
+      <p:sp>
+        <p:nvSpPr>
+          <p:cNvPr id="16" name="TextBox 15"/>
+          <p:cNvSpPr txBox="1"/>
+          <p:nvPr/>
+        </p:nvSpPr>
+        <p:spPr>
+          <a:xfrm>
+            <a:off x="8778240" y="2770632"/>
+            <a:ext cx="3291840" cy="457200"/>
+          </a:xfrm>
+          <a:prstGeom prst="rect">
+            <a:avLst/>
+          </a:prstGeom>
+          <a:noFill/>
+        </p:spPr>
+        <p:txBody>
+          <a:bodyPr wrap="square" lIns="0" rIns="0" tIns="0" bIns="0" anchor="t">
+            <a:spAutoFit/>
+          </a:bodyPr>
+          <a:lstStyle/>
+          <a:p>
+            <a:pPr algn="l"/>
+            <a:r>
+              <a:rPr sz="1300" b="0" i="0">
+                <a:solidFill>
+                  <a:srgbClr val="52525B"/>
+                </a:solidFill>
+                <a:latin typeface="Segoe UI"/>
+              </a:rPr>
+              <a:t>текст, автор, время, чат</a:t>
+            </a:r>
+          </a:p>
+        </p:txBody>
+      </p:sp>
+      <p:sp>
+        <p:nvSpPr>
+          <p:cNvPr id="17" name="TextBox 16"/>
+          <p:cNvSpPr txBox="1"/>
+          <p:nvPr/>
+        </p:nvSpPr>
+        <p:spPr>
+          <a:xfrm>
+            <a:off x="822960" y="3291840"/>
+            <a:ext cx="2194560" cy="457200"/>
+          </a:xfrm>
+          <a:prstGeom prst="rect">
+            <a:avLst/>
+          </a:prstGeom>
+          <a:noFill/>
+        </p:spPr>
+        <p:txBody>
+          <a:bodyPr wrap="square" lIns="0" rIns="0" tIns="0" bIns="0" anchor="t">
+            <a:spAutoFit/>
+          </a:bodyPr>
+          <a:lstStyle/>
+          <a:p>
+            <a:pPr algn="l"/>
+            <a:r>
+              <a:rPr sz="1500" b="1" i="0">
                 <a:solidFill>
                   <a:srgbClr val="0A0A0A"/>
                 </a:solidFill>
-                <a:latin typeface="Consolas"/>
-              </a:rPr>
-              <a:t>— messages</a:t>
-            </a:r>
-          </a:p>
-          <a:p>
-            <a:pPr algn="l">
-              <a:lnSpc>
-                <a:spcPct val="145000"/>
-              </a:lnSpc>
-            </a:pPr>
-            <a:r>
-              <a:rPr sz="1500" b="0">
+                <a:latin typeface="Segoe UI"/>
+              </a:rPr>
+              <a:t>Статусы</a:t>
+            </a:r>
+          </a:p>
+        </p:txBody>
+      </p:sp>
+      <p:sp>
+        <p:nvSpPr>
+          <p:cNvPr id="18" name="TextBox 17"/>
+          <p:cNvSpPr txBox="1"/>
+          <p:nvPr/>
+        </p:nvSpPr>
+        <p:spPr>
+          <a:xfrm>
+            <a:off x="3108960" y="3319272"/>
+            <a:ext cx="3291840" cy="457200"/>
+          </a:xfrm>
+          <a:prstGeom prst="rect">
+            <a:avLst/>
+          </a:prstGeom>
+          <a:noFill/>
+        </p:spPr>
+        <p:txBody>
+          <a:bodyPr wrap="square" lIns="0" rIns="0" tIns="0" bIns="0" anchor="t">
+            <a:spAutoFit/>
+          </a:bodyPr>
+          <a:lstStyle/>
+          <a:p>
+            <a:pPr algn="l"/>
+            <a:r>
+              <a:rPr sz="1300" b="0" i="0">
+                <a:solidFill>
+                  <a:srgbClr val="52525B"/>
+                </a:solidFill>
+                <a:latin typeface="Segoe UI"/>
+              </a:rPr>
+              <a:t>отправлено / доставлено / прочитано</a:t>
+            </a:r>
+          </a:p>
+        </p:txBody>
+      </p:sp>
+      <p:sp>
+        <p:nvSpPr>
+          <p:cNvPr id="19" name="TextBox 18"/>
+          <p:cNvSpPr txBox="1"/>
+          <p:nvPr/>
+        </p:nvSpPr>
+        <p:spPr>
+          <a:xfrm>
+            <a:off x="6492240" y="3291840"/>
+            <a:ext cx="2194560" cy="457200"/>
+          </a:xfrm>
+          <a:prstGeom prst="rect">
+            <a:avLst/>
+          </a:prstGeom>
+          <a:noFill/>
+        </p:spPr>
+        <p:txBody>
+          <a:bodyPr wrap="square" lIns="0" rIns="0" tIns="0" bIns="0" anchor="t">
+            <a:spAutoFit/>
+          </a:bodyPr>
+          <a:lstStyle/>
+          <a:p>
+            <a:pPr algn="l"/>
+            <a:r>
+              <a:rPr sz="1500" b="1" i="0">
                 <a:solidFill>
                   <a:srgbClr val="0A0A0A"/>
                 </a:solidFill>
-                <a:latin typeface="Consolas"/>
-              </a:rPr>
-              <a:t>— message_status</a:t>
-            </a:r>
-          </a:p>
-          <a:p>
-            <a:pPr algn="l">
-              <a:lnSpc>
-                <a:spcPct val="145000"/>
-              </a:lnSpc>
-            </a:pPr>
-            <a:r>
-              <a:rPr sz="1500" b="0">
+                <a:latin typeface="Segoe UI"/>
+              </a:rPr>
+              <a:t>Вложения</a:t>
+            </a:r>
+          </a:p>
+        </p:txBody>
+      </p:sp>
+      <p:sp>
+        <p:nvSpPr>
+          <p:cNvPr id="20" name="TextBox 19"/>
+          <p:cNvSpPr txBox="1"/>
+          <p:nvPr/>
+        </p:nvSpPr>
+        <p:spPr>
+          <a:xfrm>
+            <a:off x="8778240" y="3319272"/>
+            <a:ext cx="3291840" cy="457200"/>
+          </a:xfrm>
+          <a:prstGeom prst="rect">
+            <a:avLst/>
+          </a:prstGeom>
+          <a:noFill/>
+        </p:spPr>
+        <p:txBody>
+          <a:bodyPr wrap="square" lIns="0" rIns="0" tIns="0" bIns="0" anchor="t">
+            <a:spAutoFit/>
+          </a:bodyPr>
+          <a:lstStyle/>
+          <a:p>
+            <a:pPr algn="l"/>
+            <a:r>
+              <a:rPr sz="1300" b="0" i="0">
+                <a:solidFill>
+                  <a:srgbClr val="52525B"/>
+                </a:solidFill>
+                <a:latin typeface="Segoe UI"/>
+              </a:rPr>
+              <a:t>файлы и картинки, ссылка на S3</a:t>
+            </a:r>
+          </a:p>
+        </p:txBody>
+      </p:sp>
+      <p:sp>
+        <p:nvSpPr>
+          <p:cNvPr id="21" name="TextBox 20"/>
+          <p:cNvSpPr txBox="1"/>
+          <p:nvPr/>
+        </p:nvSpPr>
+        <p:spPr>
+          <a:xfrm>
+            <a:off x="822960" y="3840480"/>
+            <a:ext cx="2194560" cy="457200"/>
+          </a:xfrm>
+          <a:prstGeom prst="rect">
+            <a:avLst/>
+          </a:prstGeom>
+          <a:noFill/>
+        </p:spPr>
+        <p:txBody>
+          <a:bodyPr wrap="square" lIns="0" rIns="0" tIns="0" bIns="0" anchor="t">
+            <a:spAutoFit/>
+          </a:bodyPr>
+          <a:lstStyle/>
+          <a:p>
+            <a:pPr algn="l"/>
+            <a:r>
+              <a:rPr sz="1500" b="1" i="0">
                 <a:solidFill>
                   <a:srgbClr val="0A0A0A"/>
                 </a:solidFill>
-                <a:latin typeface="Consolas"/>
-              </a:rPr>
-              <a:t>— attachments</a:t>
-            </a:r>
-          </a:p>
-          <a:p>
-            <a:pPr algn="l">
-              <a:lnSpc>
-                <a:spcPct val="145000"/>
-              </a:lnSpc>
-            </a:pPr>
-            <a:r>
-              <a:rPr sz="1500" b="0">
+                <a:latin typeface="Segoe UI"/>
+              </a:rPr>
+              <a:t>Токены</a:t>
+            </a:r>
+          </a:p>
+        </p:txBody>
+      </p:sp>
+      <p:sp>
+        <p:nvSpPr>
+          <p:cNvPr id="22" name="TextBox 21"/>
+          <p:cNvSpPr txBox="1"/>
+          <p:nvPr/>
+        </p:nvSpPr>
+        <p:spPr>
+          <a:xfrm>
+            <a:off x="3108960" y="3867912"/>
+            <a:ext cx="3291840" cy="457200"/>
+          </a:xfrm>
+          <a:prstGeom prst="rect">
+            <a:avLst/>
+          </a:prstGeom>
+          <a:noFill/>
+        </p:spPr>
+        <p:txBody>
+          <a:bodyPr wrap="square" lIns="0" rIns="0" tIns="0" bIns="0" anchor="t">
+            <a:spAutoFit/>
+          </a:bodyPr>
+          <a:lstStyle/>
+          <a:p>
+            <a:pPr algn="l"/>
+            <a:r>
+              <a:rPr sz="1300" b="0" i="0">
+                <a:solidFill>
+                  <a:srgbClr val="52525B"/>
+                </a:solidFill>
+                <a:latin typeface="Segoe UI"/>
+              </a:rPr>
+              <a:t>для входа и обновления сессии</a:t>
+            </a:r>
+          </a:p>
+        </p:txBody>
+      </p:sp>
+      <p:sp>
+        <p:nvSpPr>
+          <p:cNvPr id="23" name="TextBox 22"/>
+          <p:cNvSpPr txBox="1"/>
+          <p:nvPr/>
+        </p:nvSpPr>
+        <p:spPr>
+          <a:xfrm>
+            <a:off x="6492240" y="3840480"/>
+            <a:ext cx="2194560" cy="457200"/>
+          </a:xfrm>
+          <a:prstGeom prst="rect">
+            <a:avLst/>
+          </a:prstGeom>
+          <a:noFill/>
+        </p:spPr>
+        <p:txBody>
+          <a:bodyPr wrap="square" lIns="0" rIns="0" tIns="0" bIns="0" anchor="t">
+            <a:spAutoFit/>
+          </a:bodyPr>
+          <a:lstStyle/>
+          <a:p>
+            <a:pPr algn="l"/>
+            <a:r>
+              <a:rPr sz="1500" b="1" i="0">
                 <a:solidFill>
                   <a:srgbClr val="0A0A0A"/>
                 </a:solidFill>
-                <a:latin typeface="Consolas"/>
-              </a:rPr>
-              <a:t>— refresh_tokens</a:t>
-            </a:r>
-          </a:p>
-          <a:p>
-            <a:pPr algn="l">
-              <a:lnSpc>
-                <a:spcPct val="145000"/>
-              </a:lnSpc>
-            </a:pPr>
-            <a:r>
-              <a:rPr sz="1500" b="0">
-                <a:solidFill>
-                  <a:srgbClr val="0A0A0A"/>
-                </a:solidFill>
-                <a:latin typeface="Consolas"/>
-              </a:rPr>
-              <a:t>— audit_log</a:t>
-            </a:r>
-          </a:p>
-        </p:txBody>
-      </p:sp>
-      <p:sp>
-        <p:nvSpPr>
-          <p:cNvPr id="11" name="TextBox 10"/>
-          <p:cNvSpPr txBox="1"/>
-          <p:nvPr/>
-        </p:nvSpPr>
-        <p:spPr>
-          <a:xfrm>
-            <a:off x="5029200" y="2148840"/>
-            <a:ext cx="7132320" cy="320040"/>
+                <a:latin typeface="Segoe UI"/>
+              </a:rPr>
+              <a:t>Журнал</a:t>
+            </a:r>
+          </a:p>
+        </p:txBody>
+      </p:sp>
+      <p:sp>
+        <p:nvSpPr>
+          <p:cNvPr id="24" name="TextBox 23"/>
+          <p:cNvSpPr txBox="1"/>
+          <p:nvPr/>
+        </p:nvSpPr>
+        <p:spPr>
+          <a:xfrm>
+            <a:off x="8778240" y="3867912"/>
+            <a:ext cx="3291840" cy="457200"/>
           </a:xfrm>
           <a:prstGeom prst="rect">
             <a:avLst/>
@@ -15186,158 +16128,55 @@
           <a:p>
             <a:pPr algn="l"/>
             <a:r>
-              <a:rPr sz="1100" b="0" i="0">
+              <a:rPr sz="1300" b="0" i="0">
                 <a:solidFill>
                   <a:srgbClr val="52525B"/>
                 </a:solidFill>
-                <a:latin typeface="Consolas"/>
-              </a:rPr>
-              <a:t>КЛЮЧЕВЫЕ ИНДЕКСЫ</a:t>
-            </a:r>
-          </a:p>
-        </p:txBody>
-      </p:sp>
-      <p:sp>
-        <p:nvSpPr>
-          <p:cNvPr id="12" name="TextBox 11"/>
-          <p:cNvSpPr txBox="1"/>
-          <p:nvPr/>
-        </p:nvSpPr>
-        <p:spPr>
-          <a:xfrm>
-            <a:off x="5029200" y="2514600"/>
-            <a:ext cx="7132320" cy="3657600"/>
-          </a:xfrm>
-          <a:prstGeom prst="rect">
-            <a:avLst/>
-          </a:prstGeom>
-          <a:noFill/>
-        </p:spPr>
-        <p:txBody>
-          <a:bodyPr wrap="square" lIns="0" rIns="0">
-            <a:spAutoFit/>
-          </a:bodyPr>
-          <a:lstStyle/>
-          <a:p>
-            <a:pPr algn="l">
-              <a:lnSpc>
-                <a:spcPct val="145000"/>
-              </a:lnSpc>
-            </a:pPr>
-            <a:r>
-              <a:rPr sz="1300" b="0">
-                <a:solidFill>
-                  <a:srgbClr val="0A0A0A"/>
-                </a:solidFill>
                 <a:latin typeface="Segoe UI"/>
               </a:rPr>
-              <a:t>— (chat_id, id DESC) на messages — пагинация «вверх» O(log n)</a:t>
-            </a:r>
-          </a:p>
-          <a:p>
-            <a:pPr algn="l">
-              <a:lnSpc>
-                <a:spcPct val="145000"/>
-              </a:lnSpc>
-            </a:pPr>
-            <a:r>
-              <a:rPr sz="1300" b="0">
-                <a:solidFill>
-                  <a:srgbClr val="0A0A0A"/>
+              <a:t>кто что делал в системе</a:t>
+            </a:r>
+          </a:p>
+        </p:txBody>
+      </p:sp>
+      <p:sp>
+        <p:nvSpPr>
+          <p:cNvPr id="25" name="TextBox 24"/>
+          <p:cNvSpPr txBox="1"/>
+          <p:nvPr/>
+        </p:nvSpPr>
+        <p:spPr>
+          <a:xfrm>
+            <a:off x="822960" y="6035040"/>
+            <a:ext cx="10972800" cy="365760"/>
+          </a:xfrm>
+          <a:prstGeom prst="rect">
+            <a:avLst/>
+          </a:prstGeom>
+          <a:noFill/>
+        </p:spPr>
+        <p:txBody>
+          <a:bodyPr wrap="square" lIns="0" rIns="0" tIns="0" bIns="0" anchor="t">
+            <a:spAutoFit/>
+          </a:bodyPr>
+          <a:lstStyle/>
+          <a:p>
+            <a:pPr algn="l"/>
+            <a:r>
+              <a:rPr sz="1300" b="0" i="1">
+                <a:solidFill>
+                  <a:srgbClr val="52525B"/>
                 </a:solidFill>
                 <a:latin typeface="Segoe UI"/>
               </a:rPr>
-              <a:t>— GIN to_tsvector('russian', text) на messages — FTS с русской морфологией</a:t>
-            </a:r>
-          </a:p>
-          <a:p>
-            <a:pPr algn="l">
-              <a:lnSpc>
-                <a:spcPct val="145000"/>
-              </a:lnSpc>
-            </a:pPr>
-            <a:r>
-              <a:rPr sz="1300" b="0">
-                <a:solidFill>
-                  <a:srgbClr val="0A0A0A"/>
-                </a:solidFill>
-                <a:latin typeface="Segoe UI"/>
-              </a:rPr>
-              <a:t>— (user_id) на chat_members — быстрая выборка «мои чаты»</a:t>
-            </a:r>
-          </a:p>
-          <a:p>
-            <a:pPr algn="l">
-              <a:lnSpc>
-                <a:spcPct val="145000"/>
-              </a:lnSpc>
-            </a:pPr>
-            <a:r>
-              <a:rPr sz="1300" b="0">
-                <a:solidFill>
-                  <a:srgbClr val="0A0A0A"/>
-                </a:solidFill>
-                <a:latin typeface="Segoe UI"/>
-              </a:rPr>
-              <a:t>— UNIQUE (chat_id, client_msg_id) — механизм идемпотентности</a:t>
-            </a:r>
-          </a:p>
-          <a:p>
-            <a:pPr algn="l">
-              <a:lnSpc>
-                <a:spcPct val="145000"/>
-              </a:lnSpc>
-            </a:pPr>
-            <a:r>
-              <a:rPr sz="1300" b="0">
-                <a:solidFill>
-                  <a:srgbClr val="0A0A0A"/>
-                </a:solidFill>
-                <a:latin typeface="Segoe UI"/>
-              </a:rPr>
-              <a:t>— UNIQUE token_hash на refresh_tokens</a:t>
-            </a:r>
-          </a:p>
-        </p:txBody>
-      </p:sp>
-      <p:sp>
-        <p:nvSpPr>
-          <p:cNvPr id="13" name="TextBox 12"/>
-          <p:cNvSpPr txBox="1"/>
-          <p:nvPr/>
-        </p:nvSpPr>
-        <p:spPr>
-          <a:xfrm>
-            <a:off x="822960" y="5989320"/>
-            <a:ext cx="11247120" cy="320040"/>
-          </a:xfrm>
-          <a:prstGeom prst="rect">
-            <a:avLst/>
-          </a:prstGeom>
-          <a:noFill/>
-        </p:spPr>
-        <p:txBody>
-          <a:bodyPr wrap="square" lIns="0" rIns="0" tIns="0" bIns="0" anchor="t">
-            <a:spAutoFit/>
-          </a:bodyPr>
-          <a:lstStyle/>
-          <a:p>
-            <a:pPr algn="l"/>
-            <a:r>
-              <a:rPr sz="1200" b="0" i="1">
-                <a:solidFill>
-                  <a:srgbClr val="52525B"/>
-                </a:solidFill>
-                <a:latin typeface="Segoe UI"/>
-              </a:rPr>
-              <a:t>ER-диаграмма — в приложении А отчёта (docs/er.png).</a:t>
-            </a:r>
-          </a:p>
-        </p:txBody>
-      </p:sp>
-      <p:sp>
-        <p:nvSpPr>
-          <p:cNvPr id="14" name="TextBox 13"/>
+              <a:t>Всего 8 таблиц в PostgreSQL. Полная схема — в отчёте (приложение А).</a:t>
+            </a:r>
+          </a:p>
+        </p:txBody>
+      </p:sp>
+      <p:sp>
+        <p:nvSpPr>
+          <p:cNvPr id="26" name="TextBox 25"/>
           <p:cNvSpPr txBox="1"/>
           <p:nvPr/>
         </p:nvSpPr>
@@ -15372,7 +16211,7 @@
       </p:sp>
       <p:sp>
         <p:nvSpPr>
-          <p:cNvPr id="15" name="TextBox 14"/>
+          <p:cNvPr id="27" name="TextBox 26"/>
           <p:cNvSpPr txBox="1"/>
           <p:nvPr/>
         </p:nvSpPr>
@@ -15400,7 +16239,7 @@
                 </a:solidFill>
                 <a:latin typeface="Consolas"/>
               </a:rPr>
-              <a:t>09 / 13</a:t>
+              <a:t>09 / 15</a:t>
             </a:r>
           </a:p>
         </p:txBody>

--- a/docs/presentation.pptx
+++ b/docs/presentation.pptx
@@ -5,23 +5,23 @@
     <p:sldMasterId id="2147483648" r:id="rId1"/>
   </p:sldMasterIdLst>
   <p:sldIdLst>
-    <p:sldId id="256" r:id="rId7"/>
-    <p:sldId id="257" r:id="rId8"/>
-    <p:sldId id="258" r:id="rId9"/>
-    <p:sldId id="259" r:id="rId10"/>
-    <p:sldId id="260" r:id="rId11"/>
-    <p:sldId id="261" r:id="rId12"/>
-    <p:sldId id="262" r:id="rId13"/>
-    <p:sldId id="263" r:id="rId14"/>
-    <p:sldId id="264" r:id="rId15"/>
-    <p:sldId id="265" r:id="rId16"/>
-    <p:sldId id="266" r:id="rId17"/>
-    <p:sldId id="267" r:id="rId18"/>
-    <p:sldId id="268" r:id="rId19"/>
-    <p:sldId id="269" r:id="rId20"/>
-    <p:sldId id="270" r:id="rId21"/>
+    <p:sldId id="256" r:id="rId2"/>
+    <p:sldId id="257" r:id="rId3"/>
+    <p:sldId id="258" r:id="rId4"/>
+    <p:sldId id="259" r:id="rId5"/>
+    <p:sldId id="260" r:id="rId6"/>
+    <p:sldId id="261" r:id="rId7"/>
+    <p:sldId id="262" r:id="rId8"/>
+    <p:sldId id="263" r:id="rId9"/>
+    <p:sldId id="264" r:id="rId10"/>
+    <p:sldId id="265" r:id="rId11"/>
+    <p:sldId id="266" r:id="rId12"/>
+    <p:sldId id="267" r:id="rId13"/>
+    <p:sldId id="268" r:id="rId14"/>
+    <p:sldId id="269" r:id="rId15"/>
+    <p:sldId id="270" r:id="rId16"/>
   </p:sldIdLst>
-  <p:sldSz cx="12191695" cy="6858000" type="screen4x3"/>
+  <p:sldSz cx="12192000" cy="6858000"/>
   <p:notesSz cx="6858000" cy="9144000"/>
   <p:defaultTextStyle>
     <a:defPPr>
@@ -118,6 +118,22 @@
       </a:defRPr>
     </a:lvl9pPr>
   </p:defaultTextStyle>
+  <p:extLst>
+    <p:ext uri="{EFAFB233-063F-42B5-8137-9DF3F51BA10A}">
+      <p15:sldGuideLst xmlns:p15="http://schemas.microsoft.com/office/powerpoint/2012/main">
+        <p15:guide id="1" orient="horz" pos="2160">
+          <p15:clr>
+            <a:srgbClr val="A4A3A4"/>
+          </p15:clr>
+        </p15:guide>
+        <p15:guide id="2" pos="2880">
+          <p15:clr>
+            <a:srgbClr val="A4A3A4"/>
+          </p15:clr>
+        </p15:guide>
+      </p15:sldGuideLst>
+    </p:ext>
+  </p:extLst>
 </p:presentation>
 </file>
 
@@ -159,10 +175,9 @@
           <a:lstStyle/>
           <a:p>
             <a:r>
-              <a:rPr lang="en-US" smtClean="0"/>
+              <a:rPr lang="en-US"/>
               <a:t>Click to edit Master title style</a:t>
             </a:r>
-            <a:endParaRPr lang="en-US"/>
           </a:p>
         </p:txBody>
       </p:sp>
@@ -278,10 +293,9 @@
           </a:lstStyle>
           <a:p>
             <a:r>
-              <a:rPr lang="en-US" smtClean="0"/>
+              <a:rPr lang="en-US"/>
               <a:t>Click to edit Master subtitle style</a:t>
             </a:r>
-            <a:endParaRPr lang="en-US"/>
           </a:p>
         </p:txBody>
       </p:sp>
@@ -302,7 +316,7 @@
           <a:p>
             <a:fld id="{5BCAD085-E8A6-8845-BD4E-CB4CCA059FC4}" type="datetimeFigureOut">
               <a:rPr lang="en-US" smtClean="0"/>
-              <a:t>1/27/13</a:t>
+              <a:t>7/16/2026</a:t>
             </a:fld>
             <a:endParaRPr lang="en-US"/>
           </a:p>
@@ -396,10 +410,9 @@
           <a:lstStyle/>
           <a:p>
             <a:r>
-              <a:rPr lang="en-US" smtClean="0"/>
+              <a:rPr lang="en-US"/>
               <a:t>Click to edit Master title style</a:t>
             </a:r>
-            <a:endParaRPr lang="en-US"/>
           </a:p>
         </p:txBody>
       </p:sp>
@@ -420,38 +433,37 @@
           <a:p>
             <a:pPr lvl="0"/>
             <a:r>
-              <a:rPr lang="en-US" smtClean="0"/>
+              <a:rPr lang="en-US"/>
               <a:t>Click to edit Master text styles</a:t>
             </a:r>
           </a:p>
           <a:p>
             <a:pPr lvl="1"/>
             <a:r>
-              <a:rPr lang="en-US" smtClean="0"/>
+              <a:rPr lang="en-US"/>
               <a:t>Second level</a:t>
             </a:r>
           </a:p>
           <a:p>
             <a:pPr lvl="2"/>
             <a:r>
-              <a:rPr lang="en-US" smtClean="0"/>
+              <a:rPr lang="en-US"/>
               <a:t>Third level</a:t>
             </a:r>
           </a:p>
           <a:p>
             <a:pPr lvl="3"/>
             <a:r>
-              <a:rPr lang="en-US" smtClean="0"/>
+              <a:rPr lang="en-US"/>
               <a:t>Fourth level</a:t>
             </a:r>
           </a:p>
           <a:p>
             <a:pPr lvl="4"/>
             <a:r>
-              <a:rPr lang="en-US" smtClean="0"/>
+              <a:rPr lang="en-US"/>
               <a:t>Fifth level</a:t>
             </a:r>
-            <a:endParaRPr lang="en-US"/>
           </a:p>
         </p:txBody>
       </p:sp>
@@ -472,7 +484,7 @@
           <a:p>
             <a:fld id="{5BCAD085-E8A6-8845-BD4E-CB4CCA059FC4}" type="datetimeFigureOut">
               <a:rPr lang="en-US" smtClean="0"/>
-              <a:t>1/27/13</a:t>
+              <a:t>7/16/2026</a:t>
             </a:fld>
             <a:endParaRPr lang="en-US"/>
           </a:p>
@@ -571,10 +583,9 @@
           <a:lstStyle/>
           <a:p>
             <a:r>
-              <a:rPr lang="en-US" smtClean="0"/>
+              <a:rPr lang="en-US"/>
               <a:t>Click to edit Master title style</a:t>
             </a:r>
-            <a:endParaRPr lang="en-US"/>
           </a:p>
         </p:txBody>
       </p:sp>
@@ -600,38 +611,37 @@
           <a:p>
             <a:pPr lvl="0"/>
             <a:r>
-              <a:rPr lang="en-US" smtClean="0"/>
+              <a:rPr lang="en-US"/>
               <a:t>Click to edit Master text styles</a:t>
             </a:r>
           </a:p>
           <a:p>
             <a:pPr lvl="1"/>
             <a:r>
-              <a:rPr lang="en-US" smtClean="0"/>
+              <a:rPr lang="en-US"/>
               <a:t>Second level</a:t>
             </a:r>
           </a:p>
           <a:p>
             <a:pPr lvl="2"/>
             <a:r>
-              <a:rPr lang="en-US" smtClean="0"/>
+              <a:rPr lang="en-US"/>
               <a:t>Third level</a:t>
             </a:r>
           </a:p>
           <a:p>
             <a:pPr lvl="3"/>
             <a:r>
-              <a:rPr lang="en-US" smtClean="0"/>
+              <a:rPr lang="en-US"/>
               <a:t>Fourth level</a:t>
             </a:r>
           </a:p>
           <a:p>
             <a:pPr lvl="4"/>
             <a:r>
-              <a:rPr lang="en-US" smtClean="0"/>
+              <a:rPr lang="en-US"/>
               <a:t>Fifth level</a:t>
             </a:r>
-            <a:endParaRPr lang="en-US"/>
           </a:p>
         </p:txBody>
       </p:sp>
@@ -652,7 +662,7 @@
           <a:p>
             <a:fld id="{5BCAD085-E8A6-8845-BD4E-CB4CCA059FC4}" type="datetimeFigureOut">
               <a:rPr lang="en-US" smtClean="0"/>
-              <a:t>1/27/13</a:t>
+              <a:t>7/16/2026</a:t>
             </a:fld>
             <a:endParaRPr lang="en-US"/>
           </a:p>
@@ -746,10 +756,9 @@
           <a:lstStyle/>
           <a:p>
             <a:r>
-              <a:rPr lang="en-US" smtClean="0"/>
+              <a:rPr lang="en-US"/>
               <a:t>Click to edit Master title style</a:t>
             </a:r>
-            <a:endParaRPr lang="en-US"/>
           </a:p>
         </p:txBody>
       </p:sp>
@@ -770,38 +779,37 @@
           <a:p>
             <a:pPr lvl="0"/>
             <a:r>
-              <a:rPr lang="en-US" smtClean="0"/>
+              <a:rPr lang="en-US"/>
               <a:t>Click to edit Master text styles</a:t>
             </a:r>
           </a:p>
           <a:p>
             <a:pPr lvl="1"/>
             <a:r>
-              <a:rPr lang="en-US" smtClean="0"/>
+              <a:rPr lang="en-US"/>
               <a:t>Second level</a:t>
             </a:r>
           </a:p>
           <a:p>
             <a:pPr lvl="2"/>
             <a:r>
-              <a:rPr lang="en-US" smtClean="0"/>
+              <a:rPr lang="en-US"/>
               <a:t>Third level</a:t>
             </a:r>
           </a:p>
           <a:p>
             <a:pPr lvl="3"/>
             <a:r>
-              <a:rPr lang="en-US" smtClean="0"/>
+              <a:rPr lang="en-US"/>
               <a:t>Fourth level</a:t>
             </a:r>
           </a:p>
           <a:p>
             <a:pPr lvl="4"/>
             <a:r>
-              <a:rPr lang="en-US" smtClean="0"/>
+              <a:rPr lang="en-US"/>
               <a:t>Fifth level</a:t>
             </a:r>
-            <a:endParaRPr lang="en-US"/>
           </a:p>
         </p:txBody>
       </p:sp>
@@ -822,7 +830,7 @@
           <a:p>
             <a:fld id="{5BCAD085-E8A6-8845-BD4E-CB4CCA059FC4}" type="datetimeFigureOut">
               <a:rPr lang="en-US" smtClean="0"/>
-              <a:t>1/27/13</a:t>
+              <a:t>7/16/2026</a:t>
             </a:fld>
             <a:endParaRPr lang="en-US"/>
           </a:p>
@@ -925,10 +933,9 @@
           </a:lstStyle>
           <a:p>
             <a:r>
-              <a:rPr lang="en-US" smtClean="0"/>
+              <a:rPr lang="en-US"/>
               <a:t>Click to edit Master title style</a:t>
             </a:r>
-            <a:endParaRPr lang="en-US"/>
           </a:p>
         </p:txBody>
       </p:sp>
@@ -1045,7 +1052,7 @@
           <a:p>
             <a:pPr lvl="0"/>
             <a:r>
-              <a:rPr lang="en-US" smtClean="0"/>
+              <a:rPr lang="en-US"/>
               <a:t>Click to edit Master text styles</a:t>
             </a:r>
           </a:p>
@@ -1068,7 +1075,7 @@
           <a:p>
             <a:fld id="{5BCAD085-E8A6-8845-BD4E-CB4CCA059FC4}" type="datetimeFigureOut">
               <a:rPr lang="en-US" smtClean="0"/>
-              <a:t>1/27/13</a:t>
+              <a:t>7/16/2026</a:t>
             </a:fld>
             <a:endParaRPr lang="en-US"/>
           </a:p>
@@ -1162,10 +1169,9 @@
           <a:lstStyle/>
           <a:p>
             <a:r>
-              <a:rPr lang="en-US" smtClean="0"/>
+              <a:rPr lang="en-US"/>
               <a:t>Click to edit Master title style</a:t>
             </a:r>
-            <a:endParaRPr lang="en-US"/>
           </a:p>
         </p:txBody>
       </p:sp>
@@ -1219,38 +1225,37 @@
           <a:p>
             <a:pPr lvl="0"/>
             <a:r>
-              <a:rPr lang="en-US" smtClean="0"/>
+              <a:rPr lang="en-US"/>
               <a:t>Click to edit Master text styles</a:t>
             </a:r>
           </a:p>
           <a:p>
             <a:pPr lvl="1"/>
             <a:r>
-              <a:rPr lang="en-US" smtClean="0"/>
+              <a:rPr lang="en-US"/>
               <a:t>Second level</a:t>
             </a:r>
           </a:p>
           <a:p>
             <a:pPr lvl="2"/>
             <a:r>
-              <a:rPr lang="en-US" smtClean="0"/>
+              <a:rPr lang="en-US"/>
               <a:t>Third level</a:t>
             </a:r>
           </a:p>
           <a:p>
             <a:pPr lvl="3"/>
             <a:r>
-              <a:rPr lang="en-US" smtClean="0"/>
+              <a:rPr lang="en-US"/>
               <a:t>Fourth level</a:t>
             </a:r>
           </a:p>
           <a:p>
             <a:pPr lvl="4"/>
             <a:r>
-              <a:rPr lang="en-US" smtClean="0"/>
+              <a:rPr lang="en-US"/>
               <a:t>Fifth level</a:t>
             </a:r>
-            <a:endParaRPr lang="en-US"/>
           </a:p>
         </p:txBody>
       </p:sp>
@@ -1304,38 +1309,37 @@
           <a:p>
             <a:pPr lvl="0"/>
             <a:r>
-              <a:rPr lang="en-US" smtClean="0"/>
+              <a:rPr lang="en-US"/>
               <a:t>Click to edit Master text styles</a:t>
             </a:r>
           </a:p>
           <a:p>
             <a:pPr lvl="1"/>
             <a:r>
-              <a:rPr lang="en-US" smtClean="0"/>
+              <a:rPr lang="en-US"/>
               <a:t>Second level</a:t>
             </a:r>
           </a:p>
           <a:p>
             <a:pPr lvl="2"/>
             <a:r>
-              <a:rPr lang="en-US" smtClean="0"/>
+              <a:rPr lang="en-US"/>
               <a:t>Third level</a:t>
             </a:r>
           </a:p>
           <a:p>
             <a:pPr lvl="3"/>
             <a:r>
-              <a:rPr lang="en-US" smtClean="0"/>
+              <a:rPr lang="en-US"/>
               <a:t>Fourth level</a:t>
             </a:r>
           </a:p>
           <a:p>
             <a:pPr lvl="4"/>
             <a:r>
-              <a:rPr lang="en-US" smtClean="0"/>
+              <a:rPr lang="en-US"/>
               <a:t>Fifth level</a:t>
             </a:r>
-            <a:endParaRPr lang="en-US"/>
           </a:p>
         </p:txBody>
       </p:sp>
@@ -1356,7 +1360,7 @@
           <a:p>
             <a:fld id="{5BCAD085-E8A6-8845-BD4E-CB4CCA059FC4}" type="datetimeFigureOut">
               <a:rPr lang="en-US" smtClean="0"/>
-              <a:t>1/27/13</a:t>
+              <a:t>7/16/2026</a:t>
             </a:fld>
             <a:endParaRPr lang="en-US"/>
           </a:p>
@@ -1454,10 +1458,9 @@
           </a:lstStyle>
           <a:p>
             <a:r>
-              <a:rPr lang="en-US" smtClean="0"/>
+              <a:rPr lang="en-US"/>
               <a:t>Click to edit Master title style</a:t>
             </a:r>
-            <a:endParaRPr lang="en-US"/>
           </a:p>
         </p:txBody>
       </p:sp>
@@ -1520,7 +1523,7 @@
           <a:p>
             <a:pPr lvl="0"/>
             <a:r>
-              <a:rPr lang="en-US" smtClean="0"/>
+              <a:rPr lang="en-US"/>
               <a:t>Click to edit Master text styles</a:t>
             </a:r>
           </a:p>
@@ -1576,38 +1579,37 @@
           <a:p>
             <a:pPr lvl="0"/>
             <a:r>
-              <a:rPr lang="en-US" smtClean="0"/>
+              <a:rPr lang="en-US"/>
               <a:t>Click to edit Master text styles</a:t>
             </a:r>
           </a:p>
           <a:p>
             <a:pPr lvl="1"/>
             <a:r>
-              <a:rPr lang="en-US" smtClean="0"/>
+              <a:rPr lang="en-US"/>
               <a:t>Second level</a:t>
             </a:r>
           </a:p>
           <a:p>
             <a:pPr lvl="2"/>
             <a:r>
-              <a:rPr lang="en-US" smtClean="0"/>
+              <a:rPr lang="en-US"/>
               <a:t>Third level</a:t>
             </a:r>
           </a:p>
           <a:p>
             <a:pPr lvl="3"/>
             <a:r>
-              <a:rPr lang="en-US" smtClean="0"/>
+              <a:rPr lang="en-US"/>
               <a:t>Fourth level</a:t>
             </a:r>
           </a:p>
           <a:p>
             <a:pPr lvl="4"/>
             <a:r>
-              <a:rPr lang="en-US" smtClean="0"/>
+              <a:rPr lang="en-US"/>
               <a:t>Fifth level</a:t>
             </a:r>
-            <a:endParaRPr lang="en-US"/>
           </a:p>
         </p:txBody>
       </p:sp>
@@ -1670,7 +1672,7 @@
           <a:p>
             <a:pPr lvl="0"/>
             <a:r>
-              <a:rPr lang="en-US" smtClean="0"/>
+              <a:rPr lang="en-US"/>
               <a:t>Click to edit Master text styles</a:t>
             </a:r>
           </a:p>
@@ -1726,38 +1728,37 @@
           <a:p>
             <a:pPr lvl="0"/>
             <a:r>
-              <a:rPr lang="en-US" smtClean="0"/>
+              <a:rPr lang="en-US"/>
               <a:t>Click to edit Master text styles</a:t>
             </a:r>
           </a:p>
           <a:p>
             <a:pPr lvl="1"/>
             <a:r>
-              <a:rPr lang="en-US" smtClean="0"/>
+              <a:rPr lang="en-US"/>
               <a:t>Second level</a:t>
             </a:r>
           </a:p>
           <a:p>
             <a:pPr lvl="2"/>
             <a:r>
-              <a:rPr lang="en-US" smtClean="0"/>
+              <a:rPr lang="en-US"/>
               <a:t>Third level</a:t>
             </a:r>
           </a:p>
           <a:p>
             <a:pPr lvl="3"/>
             <a:r>
-              <a:rPr lang="en-US" smtClean="0"/>
+              <a:rPr lang="en-US"/>
               <a:t>Fourth level</a:t>
             </a:r>
           </a:p>
           <a:p>
             <a:pPr lvl="4"/>
             <a:r>
-              <a:rPr lang="en-US" smtClean="0"/>
+              <a:rPr lang="en-US"/>
               <a:t>Fifth level</a:t>
             </a:r>
-            <a:endParaRPr lang="en-US"/>
           </a:p>
         </p:txBody>
       </p:sp>
@@ -1778,7 +1779,7 @@
           <a:p>
             <a:fld id="{5BCAD085-E8A6-8845-BD4E-CB4CCA059FC4}" type="datetimeFigureOut">
               <a:rPr lang="en-US" smtClean="0"/>
-              <a:t>1/27/13</a:t>
+              <a:t>7/16/2026</a:t>
             </a:fld>
             <a:endParaRPr lang="en-US"/>
           </a:p>
@@ -1872,10 +1873,9 @@
           <a:lstStyle/>
           <a:p>
             <a:r>
-              <a:rPr lang="en-US" smtClean="0"/>
+              <a:rPr lang="en-US"/>
               <a:t>Click to edit Master title style</a:t>
             </a:r>
-            <a:endParaRPr lang="en-US"/>
           </a:p>
         </p:txBody>
       </p:sp>
@@ -1896,7 +1896,7 @@
           <a:p>
             <a:fld id="{5BCAD085-E8A6-8845-BD4E-CB4CCA059FC4}" type="datetimeFigureOut">
               <a:rPr lang="en-US" smtClean="0"/>
-              <a:t>1/27/13</a:t>
+              <a:t>7/16/2026</a:t>
             </a:fld>
             <a:endParaRPr lang="en-US"/>
           </a:p>
@@ -1991,7 +1991,7 @@
           <a:p>
             <a:fld id="{5BCAD085-E8A6-8845-BD4E-CB4CCA059FC4}" type="datetimeFigureOut">
               <a:rPr lang="en-US" smtClean="0"/>
-              <a:t>1/27/13</a:t>
+              <a:t>7/16/2026</a:t>
             </a:fld>
             <a:endParaRPr lang="en-US"/>
           </a:p>
@@ -2094,10 +2094,9 @@
           </a:lstStyle>
           <a:p>
             <a:r>
-              <a:rPr lang="en-US" smtClean="0"/>
+              <a:rPr lang="en-US"/>
               <a:t>Click to edit Master title style</a:t>
             </a:r>
-            <a:endParaRPr lang="en-US"/>
           </a:p>
         </p:txBody>
       </p:sp>
@@ -2151,38 +2150,37 @@
           <a:p>
             <a:pPr lvl="0"/>
             <a:r>
-              <a:rPr lang="en-US" smtClean="0"/>
+              <a:rPr lang="en-US"/>
               <a:t>Click to edit Master text styles</a:t>
             </a:r>
           </a:p>
           <a:p>
             <a:pPr lvl="1"/>
             <a:r>
-              <a:rPr lang="en-US" smtClean="0"/>
+              <a:rPr lang="en-US"/>
               <a:t>Second level</a:t>
             </a:r>
           </a:p>
           <a:p>
             <a:pPr lvl="2"/>
             <a:r>
-              <a:rPr lang="en-US" smtClean="0"/>
+              <a:rPr lang="en-US"/>
               <a:t>Third level</a:t>
             </a:r>
           </a:p>
           <a:p>
             <a:pPr lvl="3"/>
             <a:r>
-              <a:rPr lang="en-US" smtClean="0"/>
+              <a:rPr lang="en-US"/>
               <a:t>Fourth level</a:t>
             </a:r>
           </a:p>
           <a:p>
             <a:pPr lvl="4"/>
             <a:r>
-              <a:rPr lang="en-US" smtClean="0"/>
+              <a:rPr lang="en-US"/>
               <a:t>Fifth level</a:t>
             </a:r>
-            <a:endParaRPr lang="en-US"/>
           </a:p>
         </p:txBody>
       </p:sp>
@@ -2245,7 +2243,7 @@
           <a:p>
             <a:pPr lvl="0"/>
             <a:r>
-              <a:rPr lang="en-US" smtClean="0"/>
+              <a:rPr lang="en-US"/>
               <a:t>Click to edit Master text styles</a:t>
             </a:r>
           </a:p>
@@ -2268,7 +2266,7 @@
           <a:p>
             <a:fld id="{5BCAD085-E8A6-8845-BD4E-CB4CCA059FC4}" type="datetimeFigureOut">
               <a:rPr lang="en-US" smtClean="0"/>
-              <a:t>1/27/13</a:t>
+              <a:t>7/16/2026</a:t>
             </a:fld>
             <a:endParaRPr lang="en-US"/>
           </a:p>
@@ -2371,10 +2369,9 @@
           </a:lstStyle>
           <a:p>
             <a:r>
-              <a:rPr lang="en-US" smtClean="0"/>
+              <a:rPr lang="en-US"/>
               <a:t>Click to edit Master title style</a:t>
             </a:r>
-            <a:endParaRPr lang="en-US"/>
           </a:p>
         </p:txBody>
       </p:sp>
@@ -2498,7 +2495,7 @@
           <a:p>
             <a:pPr lvl="0"/>
             <a:r>
-              <a:rPr lang="en-US" smtClean="0"/>
+              <a:rPr lang="en-US"/>
               <a:t>Click to edit Master text styles</a:t>
             </a:r>
           </a:p>
@@ -2521,7 +2518,7 @@
           <a:p>
             <a:fld id="{5BCAD085-E8A6-8845-BD4E-CB4CCA059FC4}" type="datetimeFigureOut">
               <a:rPr lang="en-US" smtClean="0"/>
-              <a:t>1/27/13</a:t>
+              <a:t>7/16/2026</a:t>
             </a:fld>
             <a:endParaRPr lang="en-US"/>
           </a:p>
@@ -2630,10 +2627,9 @@
           <a:lstStyle/>
           <a:p>
             <a:r>
-              <a:rPr lang="en-US" smtClean="0"/>
+              <a:rPr lang="en-US"/>
               <a:t>Click to edit Master title style</a:t>
             </a:r>
-            <a:endParaRPr lang="en-US"/>
           </a:p>
         </p:txBody>
       </p:sp>
@@ -2664,38 +2660,37 @@
           <a:p>
             <a:pPr lvl="0"/>
             <a:r>
-              <a:rPr lang="en-US" smtClean="0"/>
+              <a:rPr lang="en-US"/>
               <a:t>Click to edit Master text styles</a:t>
             </a:r>
           </a:p>
           <a:p>
             <a:pPr lvl="1"/>
             <a:r>
-              <a:rPr lang="en-US" smtClean="0"/>
+              <a:rPr lang="en-US"/>
               <a:t>Second level</a:t>
             </a:r>
           </a:p>
           <a:p>
             <a:pPr lvl="2"/>
             <a:r>
-              <a:rPr lang="en-US" smtClean="0"/>
+              <a:rPr lang="en-US"/>
               <a:t>Third level</a:t>
             </a:r>
           </a:p>
           <a:p>
             <a:pPr lvl="3"/>
             <a:r>
-              <a:rPr lang="en-US" smtClean="0"/>
+              <a:rPr lang="en-US"/>
               <a:t>Fourth level</a:t>
             </a:r>
           </a:p>
           <a:p>
             <a:pPr lvl="4"/>
             <a:r>
-              <a:rPr lang="en-US" smtClean="0"/>
+              <a:rPr lang="en-US"/>
               <a:t>Fifth level</a:t>
             </a:r>
-            <a:endParaRPr lang="en-US"/>
           </a:p>
         </p:txBody>
       </p:sp>
@@ -2734,7 +2729,7 @@
           <a:p>
             <a:fld id="{5BCAD085-E8A6-8845-BD4E-CB4CCA059FC4}" type="datetimeFigureOut">
               <a:rPr lang="en-US" smtClean="0"/>
-              <a:t>1/27/13</a:t>
+              <a:t>7/16/2026</a:t>
             </a:fld>
             <a:endParaRPr lang="en-US"/>
           </a:p>
@@ -3093,7 +3088,7 @@
 </file>
 
 <file path=ppt/slides/slide1.xml><?xml version="1.0" encoding="utf-8"?>
-<p:sld xmlns:a="http://schemas.openxmlformats.org/drawingml/2006/main" xmlns:p="http://schemas.openxmlformats.org/presentationml/2006/main" xmlns:r="http://schemas.openxmlformats.org/officeDocument/2006/relationships">
+<p:sld xmlns:a="http://schemas.openxmlformats.org/drawingml/2006/main" xmlns:r="http://schemas.openxmlformats.org/officeDocument/2006/relationships" xmlns:p="http://schemas.openxmlformats.org/presentationml/2006/main">
   <p:cSld>
     <p:bg>
       <p:bgPr>
@@ -3109,7 +3104,14 @@
         <p:cNvGrpSpPr/>
         <p:nvPr/>
       </p:nvGrpSpPr>
-      <p:grpSpPr/>
+      <p:grpSpPr>
+        <a:xfrm>
+          <a:off x="0" y="0"/>
+          <a:ext cx="0" cy="0"/>
+          <a:chOff x="0" y="0"/>
+          <a:chExt cx="0" cy="0"/>
+        </a:xfrm>
+      </p:grpSpPr>
       <p:sp>
         <p:nvSpPr>
           <p:cNvPr id="2" name="Rectangle 1"/>
@@ -3151,6 +3153,7 @@
           <a:lstStyle/>
           <a:p>
             <a:pPr algn="ctr"/>
+            <a:endParaRPr/>
           </a:p>
         </p:txBody>
       </p:sp>
@@ -3195,6 +3198,7 @@
           <a:lstStyle/>
           <a:p>
             <a:pPr algn="ctr"/>
+            <a:endParaRPr/>
           </a:p>
         </p:txBody>
       </p:sp>
@@ -3239,6 +3243,7 @@
           <a:lstStyle/>
           <a:p>
             <a:pPr algn="ctr"/>
+            <a:endParaRPr/>
           </a:p>
         </p:txBody>
       </p:sp>
@@ -3283,6 +3288,7 @@
           <a:lstStyle/>
           <a:p>
             <a:pPr algn="ctr"/>
+            <a:endParaRPr/>
           </a:p>
         </p:txBody>
       </p:sp>
@@ -3327,6 +3333,7 @@
           <a:lstStyle/>
           <a:p>
             <a:pPr algn="ctr"/>
+            <a:endParaRPr/>
           </a:p>
         </p:txBody>
       </p:sp>
@@ -3347,7 +3354,7 @@
           <a:noFill/>
         </p:spPr>
         <p:txBody>
-          <a:bodyPr wrap="square" lIns="0" rIns="0" tIns="0" bIns="0" anchor="t">
+          <a:bodyPr wrap="square" lIns="0" tIns="0" rIns="0" bIns="0" anchor="t">
             <a:spAutoFit/>
           </a:bodyPr>
           <a:lstStyle/>
@@ -3382,7 +3389,7 @@
           <a:noFill/>
         </p:spPr>
         <p:txBody>
-          <a:bodyPr wrap="square" lIns="0" rIns="0" tIns="0" bIns="0" anchor="t">
+          <a:bodyPr wrap="square" lIns="0" tIns="0" rIns="0" bIns="0" anchor="t">
             <a:spAutoFit/>
           </a:bodyPr>
           <a:lstStyle/>
@@ -3417,7 +3424,7 @@
           <a:noFill/>
         </p:spPr>
         <p:txBody>
-          <a:bodyPr wrap="square" lIns="0" rIns="0" tIns="0" bIns="0" anchor="t">
+          <a:bodyPr wrap="square" lIns="0" tIns="0" rIns="0" bIns="0" anchor="t">
             <a:spAutoFit/>
           </a:bodyPr>
           <a:lstStyle/>
@@ -3452,7 +3459,7 @@
           <a:noFill/>
         </p:spPr>
         <p:txBody>
-          <a:bodyPr wrap="square" lIns="0" rIns="0" tIns="0" bIns="0" anchor="t">
+          <a:bodyPr wrap="square" lIns="0" tIns="0" rIns="0" bIns="0" anchor="t">
             <a:spAutoFit/>
           </a:bodyPr>
           <a:lstStyle/>
@@ -3479,7 +3486,7 @@
         <p:spPr>
           <a:xfrm>
             <a:off x="1097280" y="5806440"/>
-            <a:ext cx="10058400" cy="731520"/>
+            <a:ext cx="10058400" cy="762773"/>
           </a:xfrm>
           <a:prstGeom prst="rect">
             <a:avLst/>
@@ -3498,14 +3505,29 @@
               </a:lnSpc>
             </a:pPr>
             <a:r>
-              <a:rPr sz="1300" b="0">
+              <a:rPr sz="1300" b="0" dirty="0">
                 <a:solidFill>
                   <a:srgbClr val="0A0A0A"/>
                 </a:solidFill>
                 <a:latin typeface="Segoe UI"/>
               </a:rPr>
-              <a:t>Мамонтов Иван Андреевич</a:t>
-            </a:r>
+              <a:t>Мамонтов Иван </a:t>
+            </a:r>
+            <a:r>
+              <a:rPr sz="1300" b="0" dirty="0" err="1">
+                <a:solidFill>
+                  <a:srgbClr val="0A0A0A"/>
+                </a:solidFill>
+                <a:latin typeface="Segoe UI"/>
+              </a:rPr>
+              <a:t>Андреевич</a:t>
+            </a:r>
+            <a:endParaRPr sz="1300" b="0" dirty="0">
+              <a:solidFill>
+                <a:srgbClr val="0A0A0A"/>
+              </a:solidFill>
+              <a:latin typeface="Segoe UI"/>
+            </a:endParaRPr>
           </a:p>
           <a:p>
             <a:pPr algn="l">
@@ -3514,14 +3536,47 @@
               </a:lnSpc>
             </a:pPr>
             <a:r>
-              <a:rPr sz="1300" b="0">
+              <a:rPr sz="1300" b="0" dirty="0" err="1">
                 <a:solidFill>
                   <a:srgbClr val="0A0A0A"/>
                 </a:solidFill>
                 <a:latin typeface="Segoe UI"/>
               </a:rPr>
-              <a:t>Кривонос Никита</a:t>
-            </a:r>
+              <a:t>Кривонос</a:t>
+            </a:r>
+            <a:r>
+              <a:rPr sz="1300" b="0" dirty="0">
+                <a:solidFill>
+                  <a:srgbClr val="0A0A0A"/>
+                </a:solidFill>
+                <a:latin typeface="Segoe UI"/>
+              </a:rPr>
+              <a:t> </a:t>
+            </a:r>
+            <a:r>
+              <a:rPr sz="1300" b="0" dirty="0" err="1">
+                <a:solidFill>
+                  <a:srgbClr val="0A0A0A"/>
+                </a:solidFill>
+                <a:latin typeface="Segoe UI"/>
+              </a:rPr>
+              <a:t>Никита</a:t>
+            </a:r>
+            <a:r>
+              <a:rPr lang="ru-RU" sz="1300" b="0" dirty="0">
+                <a:solidFill>
+                  <a:srgbClr val="0A0A0A"/>
+                </a:solidFill>
+                <a:latin typeface="Segoe UI"/>
+              </a:rPr>
+              <a:t> Николаевич</a:t>
+            </a:r>
+            <a:endParaRPr sz="1300" b="0" dirty="0">
+              <a:solidFill>
+                <a:srgbClr val="0A0A0A"/>
+              </a:solidFill>
+              <a:latin typeface="Segoe UI"/>
+            </a:endParaRPr>
           </a:p>
           <a:p>
             <a:pPr algn="l">
@@ -3530,13 +3585,58 @@
               </a:lnSpc>
             </a:pPr>
             <a:r>
-              <a:rPr sz="1300" b="0">
+              <a:rPr sz="1300" b="0" dirty="0" err="1">
                 <a:solidFill>
                   <a:srgbClr val="0A0A0A"/>
                 </a:solidFill>
                 <a:latin typeface="Segoe UI"/>
               </a:rPr>
-              <a:t>Руководитель практики: Чумакова М. Ю.</a:t>
+              <a:t>Руководитель</a:t>
+            </a:r>
+            <a:r>
+              <a:rPr sz="1300" b="0" dirty="0">
+                <a:solidFill>
+                  <a:srgbClr val="0A0A0A"/>
+                </a:solidFill>
+                <a:latin typeface="Segoe UI"/>
+              </a:rPr>
+              <a:t> </a:t>
+            </a:r>
+            <a:r>
+              <a:rPr sz="1300" b="0" dirty="0" err="1">
+                <a:solidFill>
+                  <a:srgbClr val="0A0A0A"/>
+                </a:solidFill>
+                <a:latin typeface="Segoe UI"/>
+              </a:rPr>
+              <a:t>практики</a:t>
+            </a:r>
+            <a:r>
+              <a:rPr sz="1300" b="0" dirty="0">
+                <a:solidFill>
+                  <a:srgbClr val="0A0A0A"/>
+                </a:solidFill>
+                <a:latin typeface="Segoe UI"/>
+              </a:rPr>
+              <a:t>: </a:t>
+            </a:r>
+            <a:r>
+              <a:rPr sz="1300" b="0" dirty="0" err="1">
+                <a:solidFill>
+                  <a:srgbClr val="0A0A0A"/>
+                </a:solidFill>
+                <a:latin typeface="Segoe UI"/>
+              </a:rPr>
+              <a:t>Чумакова</a:t>
+            </a:r>
+            <a:r>
+              <a:rPr sz="1300" b="0" dirty="0">
+                <a:solidFill>
+                  <a:srgbClr val="0A0A0A"/>
+                </a:solidFill>
+                <a:latin typeface="Segoe UI"/>
+              </a:rPr>
+              <a:t> М. Ю.</a:t>
             </a:r>
           </a:p>
         </p:txBody>
@@ -3550,7 +3650,7 @@
 </file>
 
 <file path=ppt/slides/slide10.xml><?xml version="1.0" encoding="utf-8"?>
-<p:sld xmlns:a="http://schemas.openxmlformats.org/drawingml/2006/main" xmlns:p="http://schemas.openxmlformats.org/presentationml/2006/main" xmlns:r="http://schemas.openxmlformats.org/officeDocument/2006/relationships">
+<p:sld xmlns:a="http://schemas.openxmlformats.org/drawingml/2006/main" xmlns:r="http://schemas.openxmlformats.org/officeDocument/2006/relationships" xmlns:p="http://schemas.openxmlformats.org/presentationml/2006/main">
   <p:cSld>
     <p:bg>
       <p:bgPr>
@@ -3566,7 +3666,14 @@
         <p:cNvGrpSpPr/>
         <p:nvPr/>
       </p:nvGrpSpPr>
-      <p:grpSpPr/>
+      <p:grpSpPr>
+        <a:xfrm>
+          <a:off x="0" y="0"/>
+          <a:ext cx="0" cy="0"/>
+          <a:chOff x="0" y="0"/>
+          <a:chExt cx="0" cy="0"/>
+        </a:xfrm>
+      </p:grpSpPr>
       <p:sp>
         <p:nvSpPr>
           <p:cNvPr id="2" name="Rectangle 1"/>
@@ -3608,6 +3715,7 @@
           <a:lstStyle/>
           <a:p>
             <a:pPr algn="ctr"/>
+            <a:endParaRPr/>
           </a:p>
         </p:txBody>
       </p:sp>
@@ -3652,6 +3760,7 @@
           <a:lstStyle/>
           <a:p>
             <a:pPr algn="ctr"/>
+            <a:endParaRPr/>
           </a:p>
         </p:txBody>
       </p:sp>
@@ -3696,6 +3805,7 @@
           <a:lstStyle/>
           <a:p>
             <a:pPr algn="ctr"/>
+            <a:endParaRPr/>
           </a:p>
         </p:txBody>
       </p:sp>
@@ -3740,6 +3850,7 @@
           <a:lstStyle/>
           <a:p>
             <a:pPr algn="ctr"/>
+            <a:endParaRPr/>
           </a:p>
         </p:txBody>
       </p:sp>
@@ -3760,7 +3871,7 @@
           <a:noFill/>
         </p:spPr>
         <p:txBody>
-          <a:bodyPr wrap="square" lIns="0" rIns="0" tIns="0" bIns="0" anchor="t">
+          <a:bodyPr wrap="square" lIns="0" tIns="0" rIns="0" bIns="0" anchor="t">
             <a:spAutoFit/>
           </a:bodyPr>
           <a:lstStyle/>
@@ -3795,7 +3906,7 @@
           <a:noFill/>
         </p:spPr>
         <p:txBody>
-          <a:bodyPr wrap="square" lIns="0" rIns="0" tIns="0" bIns="0" anchor="t">
+          <a:bodyPr wrap="square" lIns="0" tIns="0" rIns="0" bIns="0" anchor="t">
             <a:spAutoFit/>
           </a:bodyPr>
           <a:lstStyle/>
@@ -3854,6 +3965,7 @@
           <a:lstStyle/>
           <a:p>
             <a:pPr algn="ctr"/>
+            <a:endParaRPr/>
           </a:p>
         </p:txBody>
       </p:sp>
@@ -3969,6 +4081,7 @@
           <a:lstStyle/>
           <a:p>
             <a:pPr algn="ctr"/>
+            <a:endParaRPr/>
           </a:p>
         </p:txBody>
       </p:sp>
@@ -3989,7 +4102,7 @@
           <a:noFill/>
         </p:spPr>
         <p:txBody>
-          <a:bodyPr wrap="square" lIns="0" rIns="0" tIns="0" bIns="0" anchor="t">
+          <a:bodyPr wrap="square" lIns="0" tIns="0" rIns="0" bIns="0" anchor="t">
             <a:spAutoFit/>
           </a:bodyPr>
           <a:lstStyle/>
@@ -4024,7 +4137,7 @@
           <a:noFill/>
         </p:spPr>
         <p:txBody>
-          <a:bodyPr wrap="square" lIns="0" rIns="0" tIns="0" bIns="0" anchor="t">
+          <a:bodyPr wrap="square" lIns="0" tIns="0" rIns="0" bIns="0" anchor="t">
             <a:spAutoFit/>
           </a:bodyPr>
           <a:lstStyle/>
@@ -4083,6 +4196,7 @@
           <a:lstStyle/>
           <a:p>
             <a:pPr algn="ctr"/>
+            <a:endParaRPr/>
           </a:p>
         </p:txBody>
       </p:sp>
@@ -4127,6 +4241,7 @@
           <a:lstStyle/>
           <a:p>
             <a:pPr algn="ctr"/>
+            <a:endParaRPr/>
           </a:p>
         </p:txBody>
       </p:sp>
@@ -4147,7 +4262,7 @@
           <a:noFill/>
         </p:spPr>
         <p:txBody>
-          <a:bodyPr wrap="square" lIns="0" rIns="0" tIns="0" bIns="0" anchor="t">
+          <a:bodyPr wrap="square" lIns="0" tIns="0" rIns="0" bIns="0" anchor="t">
             <a:spAutoFit/>
           </a:bodyPr>
           <a:lstStyle/>
@@ -4182,7 +4297,7 @@
           <a:noFill/>
         </p:spPr>
         <p:txBody>
-          <a:bodyPr wrap="square" lIns="0" rIns="0" tIns="0" bIns="0" anchor="t">
+          <a:bodyPr wrap="square" lIns="0" tIns="0" rIns="0" bIns="0" anchor="t">
             <a:spAutoFit/>
           </a:bodyPr>
           <a:lstStyle/>
@@ -4241,6 +4356,7 @@
           <a:lstStyle/>
           <a:p>
             <a:pPr algn="ctr"/>
+            <a:endParaRPr/>
           </a:p>
         </p:txBody>
       </p:sp>
@@ -4261,7 +4377,7 @@
           <a:noFill/>
         </p:spPr>
         <p:txBody>
-          <a:bodyPr wrap="square" lIns="0" rIns="0" tIns="0" bIns="0" anchor="t">
+          <a:bodyPr wrap="square" lIns="0" tIns="0" rIns="0" bIns="0" anchor="t">
             <a:spAutoFit/>
           </a:bodyPr>
           <a:lstStyle/>
@@ -4296,7 +4412,7 @@
           <a:noFill/>
         </p:spPr>
         <p:txBody>
-          <a:bodyPr wrap="square" lIns="0" rIns="0" tIns="0" bIns="0" anchor="t">
+          <a:bodyPr wrap="square" lIns="0" tIns="0" rIns="0" bIns="0" anchor="t">
             <a:spAutoFit/>
           </a:bodyPr>
           <a:lstStyle/>
@@ -4331,7 +4447,7 @@
           <a:noFill/>
         </p:spPr>
         <p:txBody>
-          <a:bodyPr wrap="square" lIns="0" rIns="0" tIns="0" bIns="0" anchor="t">
+          <a:bodyPr wrap="square" lIns="0" tIns="0" rIns="0" bIns="0" anchor="t">
             <a:spAutoFit/>
           </a:bodyPr>
           <a:lstStyle/>
@@ -4366,7 +4482,7 @@
           <a:noFill/>
         </p:spPr>
         <p:txBody>
-          <a:bodyPr wrap="square" lIns="0" rIns="0" tIns="0" bIns="0" anchor="t">
+          <a:bodyPr wrap="square" lIns="0" tIns="0" rIns="0" bIns="0" anchor="t">
             <a:spAutoFit/>
           </a:bodyPr>
           <a:lstStyle/>
@@ -4393,7 +4509,7 @@
 </file>
 
 <file path=ppt/slides/slide11.xml><?xml version="1.0" encoding="utf-8"?>
-<p:sld xmlns:a="http://schemas.openxmlformats.org/drawingml/2006/main" xmlns:p="http://schemas.openxmlformats.org/presentationml/2006/main" xmlns:r="http://schemas.openxmlformats.org/officeDocument/2006/relationships">
+<p:sld xmlns:a="http://schemas.openxmlformats.org/drawingml/2006/main" xmlns:r="http://schemas.openxmlformats.org/officeDocument/2006/relationships" xmlns:p="http://schemas.openxmlformats.org/presentationml/2006/main">
   <p:cSld>
     <p:bg>
       <p:bgPr>
@@ -4409,7 +4525,14 @@
         <p:cNvGrpSpPr/>
         <p:nvPr/>
       </p:nvGrpSpPr>
-      <p:grpSpPr/>
+      <p:grpSpPr>
+        <a:xfrm>
+          <a:off x="0" y="0"/>
+          <a:ext cx="0" cy="0"/>
+          <a:chOff x="0" y="0"/>
+          <a:chExt cx="0" cy="0"/>
+        </a:xfrm>
+      </p:grpSpPr>
       <p:sp>
         <p:nvSpPr>
           <p:cNvPr id="2" name="Rectangle 1"/>
@@ -4451,6 +4574,7 @@
           <a:lstStyle/>
           <a:p>
             <a:pPr algn="ctr"/>
+            <a:endParaRPr/>
           </a:p>
         </p:txBody>
       </p:sp>
@@ -4495,6 +4619,7 @@
           <a:lstStyle/>
           <a:p>
             <a:pPr algn="ctr"/>
+            <a:endParaRPr/>
           </a:p>
         </p:txBody>
       </p:sp>
@@ -4539,6 +4664,7 @@
           <a:lstStyle/>
           <a:p>
             <a:pPr algn="ctr"/>
+            <a:endParaRPr/>
           </a:p>
         </p:txBody>
       </p:sp>
@@ -4583,6 +4709,7 @@
           <a:lstStyle/>
           <a:p>
             <a:pPr algn="ctr"/>
+            <a:endParaRPr/>
           </a:p>
         </p:txBody>
       </p:sp>
@@ -4603,7 +4730,7 @@
           <a:noFill/>
         </p:spPr>
         <p:txBody>
-          <a:bodyPr wrap="square" lIns="0" rIns="0" tIns="0" bIns="0" anchor="t">
+          <a:bodyPr wrap="square" lIns="0" tIns="0" rIns="0" bIns="0" anchor="t">
             <a:spAutoFit/>
           </a:bodyPr>
           <a:lstStyle/>
@@ -4638,7 +4765,7 @@
           <a:noFill/>
         </p:spPr>
         <p:txBody>
-          <a:bodyPr wrap="square" lIns="0" rIns="0" tIns="0" bIns="0" anchor="t">
+          <a:bodyPr wrap="square" lIns="0" tIns="0" rIns="0" bIns="0" anchor="t">
             <a:spAutoFit/>
           </a:bodyPr>
           <a:lstStyle/>
@@ -4697,6 +4824,7 @@
           <a:lstStyle/>
           <a:p>
             <a:pPr algn="ctr"/>
+            <a:endParaRPr/>
           </a:p>
         </p:txBody>
       </p:sp>
@@ -4788,7 +4916,7 @@
           <a:noFill/>
         </p:spPr>
         <p:txBody>
-          <a:bodyPr wrap="square" lIns="0" rIns="0" tIns="0" bIns="0" anchor="t">
+          <a:bodyPr wrap="square" lIns="0" tIns="0" rIns="0" bIns="0" anchor="t">
             <a:spAutoFit/>
           </a:bodyPr>
           <a:lstStyle/>
@@ -4926,7 +5054,7 @@
           <a:noFill/>
         </p:spPr>
         <p:txBody>
-          <a:bodyPr wrap="square" lIns="0" rIns="0" tIns="0" bIns="0" anchor="t">
+          <a:bodyPr wrap="square" lIns="0" tIns="0" rIns="0" bIns="0" anchor="t">
             <a:spAutoFit/>
           </a:bodyPr>
           <a:lstStyle/>
@@ -4961,7 +5089,7 @@
           <a:noFill/>
         </p:spPr>
         <p:txBody>
-          <a:bodyPr wrap="square" lIns="0" rIns="0" tIns="0" bIns="0" anchor="t">
+          <a:bodyPr wrap="square" lIns="0" tIns="0" rIns="0" bIns="0" anchor="t">
             <a:spAutoFit/>
           </a:bodyPr>
           <a:lstStyle/>
@@ -4988,7 +5116,7 @@
 </file>
 
 <file path=ppt/slides/slide12.xml><?xml version="1.0" encoding="utf-8"?>
-<p:sld xmlns:a="http://schemas.openxmlformats.org/drawingml/2006/main" xmlns:p="http://schemas.openxmlformats.org/presentationml/2006/main" xmlns:r="http://schemas.openxmlformats.org/officeDocument/2006/relationships">
+<p:sld xmlns:a="http://schemas.openxmlformats.org/drawingml/2006/main" xmlns:r="http://schemas.openxmlformats.org/officeDocument/2006/relationships" xmlns:p="http://schemas.openxmlformats.org/presentationml/2006/main">
   <p:cSld>
     <p:bg>
       <p:bgPr>
@@ -5004,7 +5132,14 @@
         <p:cNvGrpSpPr/>
         <p:nvPr/>
       </p:nvGrpSpPr>
-      <p:grpSpPr/>
+      <p:grpSpPr>
+        <a:xfrm>
+          <a:off x="0" y="0"/>
+          <a:ext cx="0" cy="0"/>
+          <a:chOff x="0" y="0"/>
+          <a:chExt cx="0" cy="0"/>
+        </a:xfrm>
+      </p:grpSpPr>
       <p:sp>
         <p:nvSpPr>
           <p:cNvPr id="2" name="Rectangle 1"/>
@@ -5046,6 +5181,7 @@
           <a:lstStyle/>
           <a:p>
             <a:pPr algn="ctr"/>
+            <a:endParaRPr/>
           </a:p>
         </p:txBody>
       </p:sp>
@@ -5090,6 +5226,7 @@
           <a:lstStyle/>
           <a:p>
             <a:pPr algn="ctr"/>
+            <a:endParaRPr/>
           </a:p>
         </p:txBody>
       </p:sp>
@@ -5134,6 +5271,7 @@
           <a:lstStyle/>
           <a:p>
             <a:pPr algn="ctr"/>
+            <a:endParaRPr/>
           </a:p>
         </p:txBody>
       </p:sp>
@@ -5178,6 +5316,7 @@
           <a:lstStyle/>
           <a:p>
             <a:pPr algn="ctr"/>
+            <a:endParaRPr/>
           </a:p>
         </p:txBody>
       </p:sp>
@@ -5198,7 +5337,7 @@
           <a:noFill/>
         </p:spPr>
         <p:txBody>
-          <a:bodyPr wrap="square" lIns="0" rIns="0" tIns="0" bIns="0" anchor="t">
+          <a:bodyPr wrap="square" lIns="0" tIns="0" rIns="0" bIns="0" anchor="t">
             <a:spAutoFit/>
           </a:bodyPr>
           <a:lstStyle/>
@@ -5233,7 +5372,7 @@
           <a:noFill/>
         </p:spPr>
         <p:txBody>
-          <a:bodyPr wrap="square" lIns="0" rIns="0" tIns="0" bIns="0" anchor="t">
+          <a:bodyPr wrap="square" lIns="0" tIns="0" rIns="0" bIns="0" anchor="t">
             <a:spAutoFit/>
           </a:bodyPr>
           <a:lstStyle/>
@@ -5292,6 +5431,7 @@
           <a:lstStyle/>
           <a:p>
             <a:pPr algn="ctr"/>
+            <a:endParaRPr/>
           </a:p>
         </p:txBody>
       </p:sp>
@@ -5338,6 +5478,7 @@
           <a:lstStyle/>
           <a:p>
             <a:pPr algn="ctr"/>
+            <a:endParaRPr/>
           </a:p>
         </p:txBody>
       </p:sp>
@@ -5382,7 +5523,7 @@
           <a:noFill/>
         </p:spPr>
         <p:txBody>
-          <a:bodyPr wrap="square" lIns="0" rIns="0" tIns="0" bIns="0" anchor="t">
+          <a:bodyPr wrap="square" lIns="0" tIns="0" rIns="0" bIns="0" anchor="t">
             <a:spAutoFit/>
           </a:bodyPr>
           <a:lstStyle/>
@@ -5443,6 +5584,7 @@
           <a:lstStyle/>
           <a:p>
             <a:pPr algn="ctr"/>
+            <a:endParaRPr/>
           </a:p>
         </p:txBody>
       </p:sp>
@@ -5487,7 +5629,7 @@
           <a:noFill/>
         </p:spPr>
         <p:txBody>
-          <a:bodyPr wrap="square" lIns="0" rIns="0" tIns="0" bIns="0" anchor="t">
+          <a:bodyPr wrap="square" lIns="0" tIns="0" rIns="0" bIns="0" anchor="t">
             <a:spAutoFit/>
           </a:bodyPr>
           <a:lstStyle/>
@@ -5548,6 +5690,7 @@
           <a:lstStyle/>
           <a:p>
             <a:pPr algn="ctr"/>
+            <a:endParaRPr/>
           </a:p>
         </p:txBody>
       </p:sp>
@@ -5592,7 +5735,7 @@
           <a:noFill/>
         </p:spPr>
         <p:txBody>
-          <a:bodyPr wrap="square" lIns="0" rIns="0" tIns="0" bIns="0" anchor="t">
+          <a:bodyPr wrap="square" lIns="0" tIns="0" rIns="0" bIns="0" anchor="t">
             <a:spAutoFit/>
           </a:bodyPr>
           <a:lstStyle/>
@@ -5653,6 +5796,7 @@
           <a:lstStyle/>
           <a:p>
             <a:pPr algn="ctr"/>
+            <a:endParaRPr/>
           </a:p>
         </p:txBody>
       </p:sp>
@@ -5697,7 +5841,7 @@
           <a:noFill/>
         </p:spPr>
         <p:txBody>
-          <a:bodyPr wrap="square" lIns="0" rIns="0" tIns="0" bIns="0" anchor="t">
+          <a:bodyPr wrap="square" lIns="0" tIns="0" rIns="0" bIns="0" anchor="t">
             <a:spAutoFit/>
           </a:bodyPr>
           <a:lstStyle/>
@@ -5732,7 +5876,7 @@
           <a:noFill/>
         </p:spPr>
         <p:txBody>
-          <a:bodyPr wrap="square" lIns="0" rIns="0" tIns="0" bIns="0" anchor="t">
+          <a:bodyPr wrap="square" lIns="0" tIns="0" rIns="0" bIns="0" anchor="t">
             <a:spAutoFit/>
           </a:bodyPr>
           <a:lstStyle/>
@@ -5767,7 +5911,7 @@
           <a:noFill/>
         </p:spPr>
         <p:txBody>
-          <a:bodyPr wrap="square" lIns="0" rIns="0" tIns="0" bIns="0" anchor="t">
+          <a:bodyPr wrap="square" lIns="0" tIns="0" rIns="0" bIns="0" anchor="t">
             <a:spAutoFit/>
           </a:bodyPr>
           <a:lstStyle/>
@@ -5794,7 +5938,7 @@
 </file>
 
 <file path=ppt/slides/slide13.xml><?xml version="1.0" encoding="utf-8"?>
-<p:sld xmlns:a="http://schemas.openxmlformats.org/drawingml/2006/main" xmlns:p="http://schemas.openxmlformats.org/presentationml/2006/main" xmlns:r="http://schemas.openxmlformats.org/officeDocument/2006/relationships">
+<p:sld xmlns:a="http://schemas.openxmlformats.org/drawingml/2006/main" xmlns:r="http://schemas.openxmlformats.org/officeDocument/2006/relationships" xmlns:p="http://schemas.openxmlformats.org/presentationml/2006/main">
   <p:cSld>
     <p:bg>
       <p:bgPr>
@@ -5810,7 +5954,14 @@
         <p:cNvGrpSpPr/>
         <p:nvPr/>
       </p:nvGrpSpPr>
-      <p:grpSpPr/>
+      <p:grpSpPr>
+        <a:xfrm>
+          <a:off x="0" y="0"/>
+          <a:ext cx="0" cy="0"/>
+          <a:chOff x="0" y="0"/>
+          <a:chExt cx="0" cy="0"/>
+        </a:xfrm>
+      </p:grpSpPr>
       <p:sp>
         <p:nvSpPr>
           <p:cNvPr id="2" name="Rectangle 1"/>
@@ -5852,6 +6003,7 @@
           <a:lstStyle/>
           <a:p>
             <a:pPr algn="ctr"/>
+            <a:endParaRPr/>
           </a:p>
         </p:txBody>
       </p:sp>
@@ -5896,6 +6048,7 @@
           <a:lstStyle/>
           <a:p>
             <a:pPr algn="ctr"/>
+            <a:endParaRPr/>
           </a:p>
         </p:txBody>
       </p:sp>
@@ -5940,6 +6093,7 @@
           <a:lstStyle/>
           <a:p>
             <a:pPr algn="ctr"/>
+            <a:endParaRPr/>
           </a:p>
         </p:txBody>
       </p:sp>
@@ -5984,6 +6138,7 @@
           <a:lstStyle/>
           <a:p>
             <a:pPr algn="ctr"/>
+            <a:endParaRPr/>
           </a:p>
         </p:txBody>
       </p:sp>
@@ -5996,28 +6151,46 @@
         <p:spPr>
           <a:xfrm>
             <a:off x="1005840" y="384048"/>
-            <a:ext cx="5486400" cy="320040"/>
-          </a:xfrm>
-          <a:prstGeom prst="rect">
-            <a:avLst/>
-          </a:prstGeom>
-          <a:noFill/>
-        </p:spPr>
-        <p:txBody>
-          <a:bodyPr wrap="square" lIns="0" rIns="0" tIns="0" bIns="0" anchor="t">
+            <a:ext cx="5486400" cy="169277"/>
+          </a:xfrm>
+          <a:prstGeom prst="rect">
+            <a:avLst/>
+          </a:prstGeom>
+          <a:noFill/>
+        </p:spPr>
+        <p:txBody>
+          <a:bodyPr wrap="square" lIns="0" tIns="0" rIns="0" bIns="0" anchor="t">
             <a:spAutoFit/>
           </a:bodyPr>
           <a:lstStyle/>
           <a:p>
             <a:pPr algn="l"/>
             <a:r>
-              <a:rPr sz="1100" b="0" i="0">
+              <a:rPr sz="1100" b="0" i="0" dirty="0">
                 <a:solidFill>
                   <a:srgbClr val="52525B"/>
                 </a:solidFill>
                 <a:latin typeface="Consolas"/>
               </a:rPr>
-              <a:t>12  ·  КАК МЫ РАБОТАЛИ</a:t>
+              <a:t>1</a:t>
+            </a:r>
+            <a:r>
+              <a:rPr lang="en-US" sz="1100" b="0" i="0" dirty="0">
+                <a:solidFill>
+                  <a:srgbClr val="52525B"/>
+                </a:solidFill>
+                <a:latin typeface="Consolas"/>
+              </a:rPr>
+              <a:t>1</a:t>
+            </a:r>
+            <a:r>
+              <a:rPr sz="1100" b="0" i="0" dirty="0">
+                <a:solidFill>
+                  <a:srgbClr val="52525B"/>
+                </a:solidFill>
+                <a:latin typeface="Consolas"/>
+              </a:rPr>
+              <a:t>  ·  КАК МЫ РАБОТАЛИ</a:t>
             </a:r>
           </a:p>
         </p:txBody>
@@ -6039,7 +6212,7 @@
           <a:noFill/>
         </p:spPr>
         <p:txBody>
-          <a:bodyPr wrap="square" lIns="0" rIns="0" tIns="0" bIns="0" anchor="t">
+          <a:bodyPr wrap="square" lIns="0" tIns="0" rIns="0" bIns="0" anchor="t">
             <a:spAutoFit/>
           </a:bodyPr>
           <a:lstStyle/>
@@ -6098,6 +6271,7 @@
           <a:lstStyle/>
           <a:p>
             <a:pPr algn="ctr"/>
+            <a:endParaRPr/>
           </a:p>
         </p:txBody>
       </p:sp>
@@ -6142,6 +6316,7 @@
           <a:lstStyle/>
           <a:p>
             <a:pPr algn="ctr"/>
+            <a:endParaRPr/>
           </a:p>
         </p:txBody>
       </p:sp>
@@ -6162,7 +6337,7 @@
           <a:noFill/>
         </p:spPr>
         <p:txBody>
-          <a:bodyPr wrap="square" lIns="0" rIns="0" tIns="0" bIns="0" anchor="t">
+          <a:bodyPr wrap="square" lIns="0" tIns="0" rIns="0" bIns="0" anchor="t">
             <a:spAutoFit/>
           </a:bodyPr>
           <a:lstStyle/>
@@ -6197,7 +6372,7 @@
           <a:noFill/>
         </p:spPr>
         <p:txBody>
-          <a:bodyPr wrap="square" lIns="0" rIns="0" tIns="0" bIns="0" anchor="t">
+          <a:bodyPr wrap="square" lIns="0" tIns="0" rIns="0" bIns="0" anchor="t">
             <a:spAutoFit/>
           </a:bodyPr>
           <a:lstStyle/>
@@ -6232,7 +6407,7 @@
           <a:noFill/>
         </p:spPr>
         <p:txBody>
-          <a:bodyPr wrap="square" lIns="0" rIns="0" tIns="0" bIns="0" anchor="t">
+          <a:bodyPr wrap="square" lIns="0" tIns="0" rIns="0" bIns="0" anchor="t">
             <a:spAutoFit/>
           </a:bodyPr>
           <a:lstStyle/>
@@ -6291,6 +6466,7 @@
           <a:lstStyle/>
           <a:p>
             <a:pPr algn="ctr"/>
+            <a:endParaRPr/>
           </a:p>
         </p:txBody>
       </p:sp>
@@ -6311,7 +6487,7 @@
           <a:noFill/>
         </p:spPr>
         <p:txBody>
-          <a:bodyPr wrap="square" lIns="0" rIns="0" tIns="0" bIns="0" anchor="t">
+          <a:bodyPr wrap="square" lIns="0" tIns="0" rIns="0" bIns="0" anchor="t">
             <a:spAutoFit/>
           </a:bodyPr>
           <a:lstStyle/>
@@ -6346,7 +6522,7 @@
           <a:noFill/>
         </p:spPr>
         <p:txBody>
-          <a:bodyPr wrap="square" lIns="0" rIns="0" tIns="0" bIns="0" anchor="t">
+          <a:bodyPr wrap="square" lIns="0" tIns="0" rIns="0" bIns="0" anchor="t">
             <a:spAutoFit/>
           </a:bodyPr>
           <a:lstStyle/>
@@ -6381,7 +6557,7 @@
           <a:noFill/>
         </p:spPr>
         <p:txBody>
-          <a:bodyPr wrap="square" lIns="0" rIns="0" tIns="0" bIns="0" anchor="t">
+          <a:bodyPr wrap="square" lIns="0" tIns="0" rIns="0" bIns="0" anchor="t">
             <a:spAutoFit/>
           </a:bodyPr>
           <a:lstStyle/>
@@ -6440,6 +6616,7 @@
           <a:lstStyle/>
           <a:p>
             <a:pPr algn="ctr"/>
+            <a:endParaRPr/>
           </a:p>
         </p:txBody>
       </p:sp>
@@ -6460,7 +6637,7 @@
           <a:noFill/>
         </p:spPr>
         <p:txBody>
-          <a:bodyPr wrap="square" lIns="0" rIns="0" tIns="0" bIns="0" anchor="t">
+          <a:bodyPr wrap="square" lIns="0" tIns="0" rIns="0" bIns="0" anchor="t">
             <a:spAutoFit/>
           </a:bodyPr>
           <a:lstStyle/>
@@ -6495,7 +6672,7 @@
           <a:noFill/>
         </p:spPr>
         <p:txBody>
-          <a:bodyPr wrap="square" lIns="0" rIns="0" tIns="0" bIns="0" anchor="t">
+          <a:bodyPr wrap="square" lIns="0" tIns="0" rIns="0" bIns="0" anchor="t">
             <a:spAutoFit/>
           </a:bodyPr>
           <a:lstStyle/>
@@ -6530,7 +6707,7 @@
           <a:noFill/>
         </p:spPr>
         <p:txBody>
-          <a:bodyPr wrap="square" lIns="0" rIns="0" tIns="0" bIns="0" anchor="t">
+          <a:bodyPr wrap="square" lIns="0" tIns="0" rIns="0" bIns="0" anchor="t">
             <a:spAutoFit/>
           </a:bodyPr>
           <a:lstStyle/>
@@ -6589,6 +6766,7 @@
           <a:lstStyle/>
           <a:p>
             <a:pPr algn="ctr"/>
+            <a:endParaRPr/>
           </a:p>
         </p:txBody>
       </p:sp>
@@ -6609,7 +6787,7 @@
           <a:noFill/>
         </p:spPr>
         <p:txBody>
-          <a:bodyPr wrap="square" lIns="0" rIns="0" tIns="0" bIns="0" anchor="t">
+          <a:bodyPr wrap="square" lIns="0" tIns="0" rIns="0" bIns="0" anchor="t">
             <a:spAutoFit/>
           </a:bodyPr>
           <a:lstStyle/>
@@ -6644,7 +6822,7 @@
           <a:noFill/>
         </p:spPr>
         <p:txBody>
-          <a:bodyPr wrap="square" lIns="0" rIns="0" tIns="0" bIns="0" anchor="t">
+          <a:bodyPr wrap="square" lIns="0" tIns="0" rIns="0" bIns="0" anchor="t">
             <a:spAutoFit/>
           </a:bodyPr>
           <a:lstStyle/>
@@ -6679,7 +6857,7 @@
           <a:noFill/>
         </p:spPr>
         <p:txBody>
-          <a:bodyPr wrap="square" lIns="0" rIns="0" tIns="0" bIns="0" anchor="t">
+          <a:bodyPr wrap="square" lIns="0" tIns="0" rIns="0" bIns="0" anchor="t">
             <a:spAutoFit/>
           </a:bodyPr>
           <a:lstStyle/>
@@ -6738,6 +6916,7 @@
           <a:lstStyle/>
           <a:p>
             <a:pPr algn="ctr"/>
+            <a:endParaRPr/>
           </a:p>
         </p:txBody>
       </p:sp>
@@ -6758,7 +6937,7 @@
           <a:noFill/>
         </p:spPr>
         <p:txBody>
-          <a:bodyPr wrap="square" lIns="0" rIns="0" tIns="0" bIns="0" anchor="t">
+          <a:bodyPr wrap="square" lIns="0" tIns="0" rIns="0" bIns="0" anchor="t">
             <a:spAutoFit/>
           </a:bodyPr>
           <a:lstStyle/>
@@ -6793,7 +6972,7 @@
           <a:noFill/>
         </p:spPr>
         <p:txBody>
-          <a:bodyPr wrap="square" lIns="0" rIns="0" tIns="0" bIns="0" anchor="t">
+          <a:bodyPr wrap="square" lIns="0" tIns="0" rIns="0" bIns="0" anchor="t">
             <a:spAutoFit/>
           </a:bodyPr>
           <a:lstStyle/>
@@ -6828,7 +7007,7 @@
           <a:noFill/>
         </p:spPr>
         <p:txBody>
-          <a:bodyPr wrap="square" lIns="0" rIns="0" tIns="0" bIns="0" anchor="t">
+          <a:bodyPr wrap="square" lIns="0" tIns="0" rIns="0" bIns="0" anchor="t">
             <a:spAutoFit/>
           </a:bodyPr>
           <a:lstStyle/>
@@ -6887,6 +7066,7 @@
           <a:lstStyle/>
           <a:p>
             <a:pPr algn="ctr"/>
+            <a:endParaRPr/>
           </a:p>
         </p:txBody>
       </p:sp>
@@ -6907,7 +7087,7 @@
           <a:noFill/>
         </p:spPr>
         <p:txBody>
-          <a:bodyPr wrap="square" lIns="0" rIns="0" tIns="0" bIns="0" anchor="t">
+          <a:bodyPr wrap="square" lIns="0" tIns="0" rIns="0" bIns="0" anchor="t">
             <a:spAutoFit/>
           </a:bodyPr>
           <a:lstStyle/>
@@ -6942,7 +7122,7 @@
           <a:noFill/>
         </p:spPr>
         <p:txBody>
-          <a:bodyPr wrap="square" lIns="0" rIns="0" tIns="0" bIns="0" anchor="t">
+          <a:bodyPr wrap="square" lIns="0" tIns="0" rIns="0" bIns="0" anchor="t">
             <a:spAutoFit/>
           </a:bodyPr>
           <a:lstStyle/>
@@ -6977,7 +7157,7 @@
           <a:noFill/>
         </p:spPr>
         <p:txBody>
-          <a:bodyPr wrap="square" lIns="0" rIns="0" tIns="0" bIns="0" anchor="t">
+          <a:bodyPr wrap="square" lIns="0" tIns="0" rIns="0" bIns="0" anchor="t">
             <a:spAutoFit/>
           </a:bodyPr>
           <a:lstStyle/>
@@ -7036,6 +7216,7 @@
           <a:lstStyle/>
           <a:p>
             <a:pPr algn="ctr"/>
+            <a:endParaRPr/>
           </a:p>
         </p:txBody>
       </p:sp>
@@ -7056,7 +7237,7 @@
           <a:noFill/>
         </p:spPr>
         <p:txBody>
-          <a:bodyPr wrap="square" lIns="0" rIns="0" tIns="0" bIns="0" anchor="t">
+          <a:bodyPr wrap="square" lIns="0" tIns="0" rIns="0" bIns="0" anchor="t">
             <a:spAutoFit/>
           </a:bodyPr>
           <a:lstStyle/>
@@ -7091,7 +7272,7 @@
           <a:noFill/>
         </p:spPr>
         <p:txBody>
-          <a:bodyPr wrap="square" lIns="0" rIns="0" tIns="0" bIns="0" anchor="t">
+          <a:bodyPr wrap="square" lIns="0" tIns="0" rIns="0" bIns="0" anchor="t">
             <a:spAutoFit/>
           </a:bodyPr>
           <a:lstStyle/>
@@ -7126,7 +7307,7 @@
           <a:noFill/>
         </p:spPr>
         <p:txBody>
-          <a:bodyPr wrap="square" lIns="0" rIns="0" tIns="0" bIns="0" anchor="t">
+          <a:bodyPr wrap="square" lIns="0" tIns="0" rIns="0" bIns="0" anchor="t">
             <a:spAutoFit/>
           </a:bodyPr>
           <a:lstStyle/>
@@ -7161,7 +7342,7 @@
           <a:noFill/>
         </p:spPr>
         <p:txBody>
-          <a:bodyPr wrap="square" lIns="0" rIns="0" tIns="0" bIns="0" anchor="t">
+          <a:bodyPr wrap="square" lIns="0" tIns="0" rIns="0" bIns="0" anchor="t">
             <a:spAutoFit/>
           </a:bodyPr>
           <a:lstStyle/>
@@ -7196,7 +7377,7 @@
           <a:noFill/>
         </p:spPr>
         <p:txBody>
-          <a:bodyPr wrap="square" lIns="0" rIns="0" tIns="0" bIns="0" anchor="t">
+          <a:bodyPr wrap="square" lIns="0" tIns="0" rIns="0" bIns="0" anchor="t">
             <a:spAutoFit/>
           </a:bodyPr>
           <a:lstStyle/>
@@ -7223,7 +7404,7 @@
 </file>
 
 <file path=ppt/slides/slide14.xml><?xml version="1.0" encoding="utf-8"?>
-<p:sld xmlns:a="http://schemas.openxmlformats.org/drawingml/2006/main" xmlns:p="http://schemas.openxmlformats.org/presentationml/2006/main" xmlns:r="http://schemas.openxmlformats.org/officeDocument/2006/relationships">
+<p:sld xmlns:a="http://schemas.openxmlformats.org/drawingml/2006/main" xmlns:r="http://schemas.openxmlformats.org/officeDocument/2006/relationships" xmlns:p="http://schemas.openxmlformats.org/presentationml/2006/main">
   <p:cSld>
     <p:bg>
       <p:bgPr>
@@ -7239,7 +7420,14 @@
         <p:cNvGrpSpPr/>
         <p:nvPr/>
       </p:nvGrpSpPr>
-      <p:grpSpPr/>
+      <p:grpSpPr>
+        <a:xfrm>
+          <a:off x="0" y="0"/>
+          <a:ext cx="0" cy="0"/>
+          <a:chOff x="0" y="0"/>
+          <a:chExt cx="0" cy="0"/>
+        </a:xfrm>
+      </p:grpSpPr>
       <p:sp>
         <p:nvSpPr>
           <p:cNvPr id="2" name="Rectangle 1"/>
@@ -7281,6 +7469,7 @@
           <a:lstStyle/>
           <a:p>
             <a:pPr algn="ctr"/>
+            <a:endParaRPr/>
           </a:p>
         </p:txBody>
       </p:sp>
@@ -7325,6 +7514,7 @@
           <a:lstStyle/>
           <a:p>
             <a:pPr algn="ctr"/>
+            <a:endParaRPr/>
           </a:p>
         </p:txBody>
       </p:sp>
@@ -7369,6 +7559,7 @@
           <a:lstStyle/>
           <a:p>
             <a:pPr algn="ctr"/>
+            <a:endParaRPr/>
           </a:p>
         </p:txBody>
       </p:sp>
@@ -7413,6 +7604,7 @@
           <a:lstStyle/>
           <a:p>
             <a:pPr algn="ctr"/>
+            <a:endParaRPr/>
           </a:p>
         </p:txBody>
       </p:sp>
@@ -7425,28 +7617,46 @@
         <p:spPr>
           <a:xfrm>
             <a:off x="1005840" y="384048"/>
-            <a:ext cx="5486400" cy="320040"/>
-          </a:xfrm>
-          <a:prstGeom prst="rect">
-            <a:avLst/>
-          </a:prstGeom>
-          <a:noFill/>
-        </p:spPr>
-        <p:txBody>
-          <a:bodyPr wrap="square" lIns="0" rIns="0" tIns="0" bIns="0" anchor="t">
+            <a:ext cx="5486400" cy="169277"/>
+          </a:xfrm>
+          <a:prstGeom prst="rect">
+            <a:avLst/>
+          </a:prstGeom>
+          <a:noFill/>
+        </p:spPr>
+        <p:txBody>
+          <a:bodyPr wrap="square" lIns="0" tIns="0" rIns="0" bIns="0" anchor="t">
             <a:spAutoFit/>
           </a:bodyPr>
           <a:lstStyle/>
           <a:p>
             <a:pPr algn="l"/>
             <a:r>
-              <a:rPr sz="1100" b="0" i="0">
+              <a:rPr sz="1100" b="0" i="0" dirty="0">
                 <a:solidFill>
                   <a:srgbClr val="52525B"/>
                 </a:solidFill>
                 <a:latin typeface="Consolas"/>
               </a:rPr>
-              <a:t>11  ·  ТЕСТИРОВАНИЕ</a:t>
+              <a:t>1</a:t>
+            </a:r>
+            <a:r>
+              <a:rPr lang="en-US" sz="1100" b="0" i="0" dirty="0">
+                <a:solidFill>
+                  <a:srgbClr val="52525B"/>
+                </a:solidFill>
+                <a:latin typeface="Consolas"/>
+              </a:rPr>
+              <a:t>2</a:t>
+            </a:r>
+            <a:r>
+              <a:rPr sz="1100" b="0" i="0" dirty="0">
+                <a:solidFill>
+                  <a:srgbClr val="52525B"/>
+                </a:solidFill>
+                <a:latin typeface="Consolas"/>
+              </a:rPr>
+              <a:t>  ·  ТЕСТИРОВАНИЕ</a:t>
             </a:r>
           </a:p>
         </p:txBody>
@@ -7468,7 +7678,7 @@
           <a:noFill/>
         </p:spPr>
         <p:txBody>
-          <a:bodyPr wrap="square" lIns="0" rIns="0" tIns="0" bIns="0" anchor="t">
+          <a:bodyPr wrap="square" lIns="0" tIns="0" rIns="0" bIns="0" anchor="t">
             <a:spAutoFit/>
           </a:bodyPr>
           <a:lstStyle/>
@@ -7527,6 +7737,7 @@
           <a:lstStyle/>
           <a:p>
             <a:pPr algn="ctr"/>
+            <a:endParaRPr/>
           </a:p>
         </p:txBody>
       </p:sp>
@@ -7571,6 +7782,7 @@
           <a:lstStyle/>
           <a:p>
             <a:pPr algn="ctr"/>
+            <a:endParaRPr/>
           </a:p>
         </p:txBody>
       </p:sp>
@@ -7615,6 +7827,7 @@
           <a:lstStyle/>
           <a:p>
             <a:pPr algn="ctr"/>
+            <a:endParaRPr/>
           </a:p>
         </p:txBody>
       </p:sp>
@@ -7635,7 +7848,7 @@
           <a:noFill/>
         </p:spPr>
         <p:txBody>
-          <a:bodyPr wrap="square" lIns="0" rIns="0" tIns="0" bIns="0" anchor="t">
+          <a:bodyPr wrap="square" lIns="0" tIns="0" rIns="0" bIns="0" anchor="t">
             <a:spAutoFit/>
           </a:bodyPr>
           <a:lstStyle/>
@@ -7670,7 +7883,7 @@
           <a:noFill/>
         </p:spPr>
         <p:txBody>
-          <a:bodyPr wrap="square" lIns="0" rIns="0" tIns="0" bIns="0" anchor="t">
+          <a:bodyPr wrap="square" lIns="0" tIns="0" rIns="0" bIns="0" anchor="t">
             <a:spAutoFit/>
           </a:bodyPr>
           <a:lstStyle/>
@@ -7729,6 +7942,7 @@
           <a:lstStyle/>
           <a:p>
             <a:pPr algn="ctr"/>
+            <a:endParaRPr/>
           </a:p>
         </p:txBody>
       </p:sp>
@@ -7773,6 +7987,7 @@
           <a:lstStyle/>
           <a:p>
             <a:pPr algn="ctr"/>
+            <a:endParaRPr/>
           </a:p>
         </p:txBody>
       </p:sp>
@@ -7793,7 +8008,7 @@
           <a:noFill/>
         </p:spPr>
         <p:txBody>
-          <a:bodyPr wrap="square" lIns="0" rIns="0" tIns="0" bIns="0" anchor="t">
+          <a:bodyPr wrap="square" lIns="0" tIns="0" rIns="0" bIns="0" anchor="t">
             <a:spAutoFit/>
           </a:bodyPr>
           <a:lstStyle/>
@@ -7828,7 +8043,7 @@
           <a:noFill/>
         </p:spPr>
         <p:txBody>
-          <a:bodyPr wrap="square" lIns="0" rIns="0" tIns="0" bIns="0" anchor="t">
+          <a:bodyPr wrap="square" lIns="0" tIns="0" rIns="0" bIns="0" anchor="t">
             <a:spAutoFit/>
           </a:bodyPr>
           <a:lstStyle/>
@@ -7887,6 +8102,7 @@
           <a:lstStyle/>
           <a:p>
             <a:pPr algn="ctr"/>
+            <a:endParaRPr/>
           </a:p>
         </p:txBody>
       </p:sp>
@@ -7931,6 +8147,7 @@
           <a:lstStyle/>
           <a:p>
             <a:pPr algn="ctr"/>
+            <a:endParaRPr/>
           </a:p>
         </p:txBody>
       </p:sp>
@@ -7951,7 +8168,7 @@
           <a:noFill/>
         </p:spPr>
         <p:txBody>
-          <a:bodyPr wrap="square" lIns="0" rIns="0" tIns="0" bIns="0" anchor="t">
+          <a:bodyPr wrap="square" lIns="0" tIns="0" rIns="0" bIns="0" anchor="t">
             <a:spAutoFit/>
           </a:bodyPr>
           <a:lstStyle/>
@@ -7986,7 +8203,7 @@
           <a:noFill/>
         </p:spPr>
         <p:txBody>
-          <a:bodyPr wrap="square" lIns="0" rIns="0" tIns="0" bIns="0" anchor="t">
+          <a:bodyPr wrap="square" lIns="0" tIns="0" rIns="0" bIns="0" anchor="t">
             <a:spAutoFit/>
           </a:bodyPr>
           <a:lstStyle/>
@@ -8021,7 +8238,7 @@
           <a:noFill/>
         </p:spPr>
         <p:txBody>
-          <a:bodyPr wrap="square" lIns="0" rIns="0" tIns="0" bIns="0" anchor="t">
+          <a:bodyPr wrap="square" lIns="0" tIns="0" rIns="0" bIns="0" anchor="t">
             <a:spAutoFit/>
           </a:bodyPr>
           <a:lstStyle/>
@@ -8175,7 +8392,7 @@
           <a:noFill/>
         </p:spPr>
         <p:txBody>
-          <a:bodyPr wrap="square" lIns="0" rIns="0" tIns="0" bIns="0" anchor="t">
+          <a:bodyPr wrap="square" lIns="0" tIns="0" rIns="0" bIns="0" anchor="t">
             <a:spAutoFit/>
           </a:bodyPr>
           <a:lstStyle/>
@@ -8210,7 +8427,7 @@
           <a:noFill/>
         </p:spPr>
         <p:txBody>
-          <a:bodyPr wrap="square" lIns="0" rIns="0" tIns="0" bIns="0" anchor="t">
+          <a:bodyPr wrap="square" lIns="0" tIns="0" rIns="0" bIns="0" anchor="t">
             <a:spAutoFit/>
           </a:bodyPr>
           <a:lstStyle/>
@@ -8237,7 +8454,7 @@
 </file>
 
 <file path=ppt/slides/slide15.xml><?xml version="1.0" encoding="utf-8"?>
-<p:sld xmlns:a="http://schemas.openxmlformats.org/drawingml/2006/main" xmlns:p="http://schemas.openxmlformats.org/presentationml/2006/main" xmlns:r="http://schemas.openxmlformats.org/officeDocument/2006/relationships">
+<p:sld xmlns:a="http://schemas.openxmlformats.org/drawingml/2006/main" xmlns:r="http://schemas.openxmlformats.org/officeDocument/2006/relationships" xmlns:p="http://schemas.openxmlformats.org/presentationml/2006/main">
   <p:cSld>
     <p:bg>
       <p:bgPr>
@@ -8253,7 +8470,14 @@
         <p:cNvGrpSpPr/>
         <p:nvPr/>
       </p:nvGrpSpPr>
-      <p:grpSpPr/>
+      <p:grpSpPr>
+        <a:xfrm>
+          <a:off x="0" y="0"/>
+          <a:ext cx="0" cy="0"/>
+          <a:chOff x="0" y="0"/>
+          <a:chExt cx="0" cy="0"/>
+        </a:xfrm>
+      </p:grpSpPr>
       <p:sp>
         <p:nvSpPr>
           <p:cNvPr id="2" name="Rectangle 1"/>
@@ -8295,6 +8519,7 @@
           <a:lstStyle/>
           <a:p>
             <a:pPr algn="ctr"/>
+            <a:endParaRPr/>
           </a:p>
         </p:txBody>
       </p:sp>
@@ -8339,6 +8564,7 @@
           <a:lstStyle/>
           <a:p>
             <a:pPr algn="ctr"/>
+            <a:endParaRPr/>
           </a:p>
         </p:txBody>
       </p:sp>
@@ -8383,6 +8609,7 @@
           <a:lstStyle/>
           <a:p>
             <a:pPr algn="ctr"/>
+            <a:endParaRPr/>
           </a:p>
         </p:txBody>
       </p:sp>
@@ -8427,6 +8654,7 @@
           <a:lstStyle/>
           <a:p>
             <a:pPr algn="ctr"/>
+            <a:endParaRPr/>
           </a:p>
         </p:txBody>
       </p:sp>
@@ -8439,28 +8667,46 @@
         <p:spPr>
           <a:xfrm>
             <a:off x="1005840" y="384048"/>
-            <a:ext cx="5486400" cy="320040"/>
-          </a:xfrm>
-          <a:prstGeom prst="rect">
-            <a:avLst/>
-          </a:prstGeom>
-          <a:noFill/>
-        </p:spPr>
-        <p:txBody>
-          <a:bodyPr wrap="square" lIns="0" rIns="0" tIns="0" bIns="0" anchor="t">
+            <a:ext cx="5486400" cy="169277"/>
+          </a:xfrm>
+          <a:prstGeom prst="rect">
+            <a:avLst/>
+          </a:prstGeom>
+          <a:noFill/>
+        </p:spPr>
+        <p:txBody>
+          <a:bodyPr wrap="square" lIns="0" tIns="0" rIns="0" bIns="0" anchor="t">
             <a:spAutoFit/>
           </a:bodyPr>
           <a:lstStyle/>
           <a:p>
             <a:pPr algn="l"/>
             <a:r>
-              <a:rPr sz="1100" b="0" i="0">
+              <a:rPr sz="1100" b="0" i="0" dirty="0">
                 <a:solidFill>
                   <a:srgbClr val="52525B"/>
                 </a:solidFill>
                 <a:latin typeface="Consolas"/>
               </a:rPr>
-              <a:t>12  ·  РЕЗУЛЬТАТЫ</a:t>
+              <a:t>1</a:t>
+            </a:r>
+            <a:r>
+              <a:rPr lang="en-US" sz="1100" b="0" i="0" dirty="0">
+                <a:solidFill>
+                  <a:srgbClr val="52525B"/>
+                </a:solidFill>
+                <a:latin typeface="Consolas"/>
+              </a:rPr>
+              <a:t>3</a:t>
+            </a:r>
+            <a:r>
+              <a:rPr sz="1100" b="0" i="0" dirty="0">
+                <a:solidFill>
+                  <a:srgbClr val="52525B"/>
+                </a:solidFill>
+                <a:latin typeface="Consolas"/>
+              </a:rPr>
+              <a:t>  ·  РЕЗУЛЬТАТЫ</a:t>
             </a:r>
           </a:p>
         </p:txBody>
@@ -8482,7 +8728,7 @@
           <a:noFill/>
         </p:spPr>
         <p:txBody>
-          <a:bodyPr wrap="square" lIns="0" rIns="0" tIns="0" bIns="0" anchor="t">
+          <a:bodyPr wrap="square" lIns="0" tIns="0" rIns="0" bIns="0" anchor="t">
             <a:spAutoFit/>
           </a:bodyPr>
           <a:lstStyle/>
@@ -8541,6 +8787,7 @@
           <a:lstStyle/>
           <a:p>
             <a:pPr algn="ctr"/>
+            <a:endParaRPr/>
           </a:p>
         </p:txBody>
       </p:sp>
@@ -8561,7 +8808,7 @@
           <a:noFill/>
         </p:spPr>
         <p:txBody>
-          <a:bodyPr wrap="square" lIns="0" rIns="0" tIns="0" bIns="0" anchor="t">
+          <a:bodyPr wrap="square" lIns="0" tIns="0" rIns="0" bIns="0" anchor="t">
             <a:spAutoFit/>
           </a:bodyPr>
           <a:lstStyle/>
@@ -8699,7 +8946,7 @@
           <a:noFill/>
         </p:spPr>
         <p:txBody>
-          <a:bodyPr wrap="square" lIns="0" rIns="0" tIns="0" bIns="0" anchor="t">
+          <a:bodyPr wrap="square" lIns="0" tIns="0" rIns="0" bIns="0" anchor="t">
             <a:spAutoFit/>
           </a:bodyPr>
           <a:lstStyle/>
@@ -8829,6 +9076,7 @@
           <a:lstStyle/>
           <a:p>
             <a:pPr algn="ctr"/>
+            <a:endParaRPr/>
           </a:p>
         </p:txBody>
       </p:sp>
@@ -8849,7 +9097,7 @@
           <a:noFill/>
         </p:spPr>
         <p:txBody>
-          <a:bodyPr wrap="square" lIns="0" rIns="0" tIns="0" bIns="0" anchor="t">
+          <a:bodyPr wrap="square" lIns="0" tIns="0" rIns="0" bIns="0" anchor="t">
             <a:spAutoFit/>
           </a:bodyPr>
           <a:lstStyle/>
@@ -8876,7 +9124,7 @@
 </file>
 
 <file path=ppt/slides/slide2.xml><?xml version="1.0" encoding="utf-8"?>
-<p:sld xmlns:a="http://schemas.openxmlformats.org/drawingml/2006/main" xmlns:p="http://schemas.openxmlformats.org/presentationml/2006/main" xmlns:r="http://schemas.openxmlformats.org/officeDocument/2006/relationships">
+<p:sld xmlns:a="http://schemas.openxmlformats.org/drawingml/2006/main" xmlns:r="http://schemas.openxmlformats.org/officeDocument/2006/relationships" xmlns:p="http://schemas.openxmlformats.org/presentationml/2006/main">
   <p:cSld>
     <p:bg>
       <p:bgPr>
@@ -8892,7 +9140,14 @@
         <p:cNvGrpSpPr/>
         <p:nvPr/>
       </p:nvGrpSpPr>
-      <p:grpSpPr/>
+      <p:grpSpPr>
+        <a:xfrm>
+          <a:off x="0" y="0"/>
+          <a:ext cx="0" cy="0"/>
+          <a:chOff x="0" y="0"/>
+          <a:chExt cx="0" cy="0"/>
+        </a:xfrm>
+      </p:grpSpPr>
       <p:sp>
         <p:nvSpPr>
           <p:cNvPr id="2" name="Rectangle 1"/>
@@ -8934,6 +9189,7 @@
           <a:lstStyle/>
           <a:p>
             <a:pPr algn="ctr"/>
+            <a:endParaRPr/>
           </a:p>
         </p:txBody>
       </p:sp>
@@ -8978,6 +9234,7 @@
           <a:lstStyle/>
           <a:p>
             <a:pPr algn="ctr"/>
+            <a:endParaRPr/>
           </a:p>
         </p:txBody>
       </p:sp>
@@ -9022,6 +9279,7 @@
           <a:lstStyle/>
           <a:p>
             <a:pPr algn="ctr"/>
+            <a:endParaRPr/>
           </a:p>
         </p:txBody>
       </p:sp>
@@ -9066,6 +9324,7 @@
           <a:lstStyle/>
           <a:p>
             <a:pPr algn="ctr"/>
+            <a:endParaRPr/>
           </a:p>
         </p:txBody>
       </p:sp>
@@ -9086,7 +9345,7 @@
           <a:noFill/>
         </p:spPr>
         <p:txBody>
-          <a:bodyPr wrap="square" lIns="0" rIns="0" tIns="0" bIns="0" anchor="t">
+          <a:bodyPr wrap="square" lIns="0" tIns="0" rIns="0" bIns="0" anchor="t">
             <a:spAutoFit/>
           </a:bodyPr>
           <a:lstStyle/>
@@ -9121,7 +9380,7 @@
           <a:noFill/>
         </p:spPr>
         <p:txBody>
-          <a:bodyPr wrap="square" lIns="0" rIns="0" tIns="0" bIns="0" anchor="t">
+          <a:bodyPr wrap="square" lIns="0" tIns="0" rIns="0" bIns="0" anchor="t">
             <a:spAutoFit/>
           </a:bodyPr>
           <a:lstStyle/>
@@ -9180,6 +9439,7 @@
           <a:lstStyle/>
           <a:p>
             <a:pPr algn="ctr"/>
+            <a:endParaRPr/>
           </a:p>
         </p:txBody>
       </p:sp>
@@ -9374,7 +9634,7 @@
           <a:noFill/>
         </p:spPr>
         <p:txBody>
-          <a:bodyPr wrap="square" lIns="0" rIns="0" tIns="0" bIns="0" anchor="t">
+          <a:bodyPr wrap="square" lIns="0" tIns="0" rIns="0" bIns="0" anchor="t">
             <a:spAutoFit/>
           </a:bodyPr>
           <a:lstStyle/>
@@ -9409,7 +9669,7 @@
           <a:noFill/>
         </p:spPr>
         <p:txBody>
-          <a:bodyPr wrap="square" lIns="0" rIns="0" tIns="0" bIns="0" anchor="t">
+          <a:bodyPr wrap="square" lIns="0" tIns="0" rIns="0" bIns="0" anchor="t">
             <a:spAutoFit/>
           </a:bodyPr>
           <a:lstStyle/>
@@ -9436,7 +9696,7 @@
 </file>
 
 <file path=ppt/slides/slide3.xml><?xml version="1.0" encoding="utf-8"?>
-<p:sld xmlns:a="http://schemas.openxmlformats.org/drawingml/2006/main" xmlns:p="http://schemas.openxmlformats.org/presentationml/2006/main" xmlns:r="http://schemas.openxmlformats.org/officeDocument/2006/relationships">
+<p:sld xmlns:a="http://schemas.openxmlformats.org/drawingml/2006/main" xmlns:r="http://schemas.openxmlformats.org/officeDocument/2006/relationships" xmlns:p="http://schemas.openxmlformats.org/presentationml/2006/main">
   <p:cSld>
     <p:bg>
       <p:bgPr>
@@ -9452,7 +9712,14 @@
         <p:cNvGrpSpPr/>
         <p:nvPr/>
       </p:nvGrpSpPr>
-      <p:grpSpPr/>
+      <p:grpSpPr>
+        <a:xfrm>
+          <a:off x="0" y="0"/>
+          <a:ext cx="0" cy="0"/>
+          <a:chOff x="0" y="0"/>
+          <a:chExt cx="0" cy="0"/>
+        </a:xfrm>
+      </p:grpSpPr>
       <p:sp>
         <p:nvSpPr>
           <p:cNvPr id="2" name="Rectangle 1"/>
@@ -9494,6 +9761,7 @@
           <a:lstStyle/>
           <a:p>
             <a:pPr algn="ctr"/>
+            <a:endParaRPr/>
           </a:p>
         </p:txBody>
       </p:sp>
@@ -9538,6 +9806,7 @@
           <a:lstStyle/>
           <a:p>
             <a:pPr algn="ctr"/>
+            <a:endParaRPr/>
           </a:p>
         </p:txBody>
       </p:sp>
@@ -9582,6 +9851,7 @@
           <a:lstStyle/>
           <a:p>
             <a:pPr algn="ctr"/>
+            <a:endParaRPr/>
           </a:p>
         </p:txBody>
       </p:sp>
@@ -9626,6 +9896,7 @@
           <a:lstStyle/>
           <a:p>
             <a:pPr algn="ctr"/>
+            <a:endParaRPr/>
           </a:p>
         </p:txBody>
       </p:sp>
@@ -9646,7 +9917,7 @@
           <a:noFill/>
         </p:spPr>
         <p:txBody>
-          <a:bodyPr wrap="square" lIns="0" rIns="0" tIns="0" bIns="0" anchor="t">
+          <a:bodyPr wrap="square" lIns="0" tIns="0" rIns="0" bIns="0" anchor="t">
             <a:spAutoFit/>
           </a:bodyPr>
           <a:lstStyle/>
@@ -9681,7 +9952,7 @@
           <a:noFill/>
         </p:spPr>
         <p:txBody>
-          <a:bodyPr wrap="square" lIns="0" rIns="0" tIns="0" bIns="0" anchor="t">
+          <a:bodyPr wrap="square" lIns="0" tIns="0" rIns="0" bIns="0" anchor="t">
             <a:spAutoFit/>
           </a:bodyPr>
           <a:lstStyle/>
@@ -9740,6 +10011,7 @@
           <a:lstStyle/>
           <a:p>
             <a:pPr algn="ctr"/>
+            <a:endParaRPr/>
           </a:p>
         </p:txBody>
       </p:sp>
@@ -9784,6 +10056,7 @@
           <a:lstStyle/>
           <a:p>
             <a:pPr algn="ctr"/>
+            <a:endParaRPr/>
           </a:p>
         </p:txBody>
       </p:sp>
@@ -9828,6 +10101,7 @@
           <a:lstStyle/>
           <a:p>
             <a:pPr algn="ctr"/>
+            <a:endParaRPr/>
           </a:p>
         </p:txBody>
       </p:sp>
@@ -9848,7 +10122,7 @@
           <a:noFill/>
         </p:spPr>
         <p:txBody>
-          <a:bodyPr wrap="square" lIns="0" rIns="0" tIns="0" bIns="0" anchor="t">
+          <a:bodyPr wrap="square" lIns="0" tIns="0" rIns="0" bIns="0" anchor="t">
             <a:spAutoFit/>
           </a:bodyPr>
           <a:lstStyle/>
@@ -9883,7 +10157,7 @@
           <a:noFill/>
         </p:spPr>
         <p:txBody>
-          <a:bodyPr wrap="square" lIns="0" rIns="0" tIns="0" bIns="0" anchor="t">
+          <a:bodyPr wrap="square" lIns="0" tIns="0" rIns="0" bIns="0" anchor="t">
             <a:spAutoFit/>
           </a:bodyPr>
           <a:lstStyle/>
@@ -9942,6 +10216,7 @@
           <a:lstStyle/>
           <a:p>
             <a:pPr algn="ctr"/>
+            <a:endParaRPr/>
           </a:p>
         </p:txBody>
       </p:sp>
@@ -9986,6 +10261,7 @@
           <a:lstStyle/>
           <a:p>
             <a:pPr algn="ctr"/>
+            <a:endParaRPr/>
           </a:p>
         </p:txBody>
       </p:sp>
@@ -10006,7 +10282,7 @@
           <a:noFill/>
         </p:spPr>
         <p:txBody>
-          <a:bodyPr wrap="square" lIns="0" rIns="0" tIns="0" bIns="0" anchor="t">
+          <a:bodyPr wrap="square" lIns="0" tIns="0" rIns="0" bIns="0" anchor="t">
             <a:spAutoFit/>
           </a:bodyPr>
           <a:lstStyle/>
@@ -10041,7 +10317,7 @@
           <a:noFill/>
         </p:spPr>
         <p:txBody>
-          <a:bodyPr wrap="square" lIns="0" rIns="0" tIns="0" bIns="0" anchor="t">
+          <a:bodyPr wrap="square" lIns="0" tIns="0" rIns="0" bIns="0" anchor="t">
             <a:spAutoFit/>
           </a:bodyPr>
           <a:lstStyle/>
@@ -10100,6 +10376,7 @@
           <a:lstStyle/>
           <a:p>
             <a:pPr algn="ctr"/>
+            <a:endParaRPr/>
           </a:p>
         </p:txBody>
       </p:sp>
@@ -10144,6 +10421,7 @@
           <a:lstStyle/>
           <a:p>
             <a:pPr algn="ctr"/>
+            <a:endParaRPr/>
           </a:p>
         </p:txBody>
       </p:sp>
@@ -10164,7 +10442,7 @@
           <a:noFill/>
         </p:spPr>
         <p:txBody>
-          <a:bodyPr wrap="square" lIns="0" rIns="0" tIns="0" bIns="0" anchor="t">
+          <a:bodyPr wrap="square" lIns="0" tIns="0" rIns="0" bIns="0" anchor="t">
             <a:spAutoFit/>
           </a:bodyPr>
           <a:lstStyle/>
@@ -10199,7 +10477,7 @@
           <a:noFill/>
         </p:spPr>
         <p:txBody>
-          <a:bodyPr wrap="square" lIns="0" rIns="0" tIns="0" bIns="0" anchor="t">
+          <a:bodyPr wrap="square" lIns="0" tIns="0" rIns="0" bIns="0" anchor="t">
             <a:spAutoFit/>
           </a:bodyPr>
           <a:lstStyle/>
@@ -10305,7 +10583,7 @@
           <a:noFill/>
         </p:spPr>
         <p:txBody>
-          <a:bodyPr wrap="square" lIns="0" rIns="0" tIns="0" bIns="0" anchor="t">
+          <a:bodyPr wrap="square" lIns="0" tIns="0" rIns="0" bIns="0" anchor="t">
             <a:spAutoFit/>
           </a:bodyPr>
           <a:lstStyle/>
@@ -10340,7 +10618,7 @@
           <a:noFill/>
         </p:spPr>
         <p:txBody>
-          <a:bodyPr wrap="square" lIns="0" rIns="0" tIns="0" bIns="0" anchor="t">
+          <a:bodyPr wrap="square" lIns="0" tIns="0" rIns="0" bIns="0" anchor="t">
             <a:spAutoFit/>
           </a:bodyPr>
           <a:lstStyle/>
@@ -10367,7 +10645,7 @@
 </file>
 
 <file path=ppt/slides/slide4.xml><?xml version="1.0" encoding="utf-8"?>
-<p:sld xmlns:a="http://schemas.openxmlformats.org/drawingml/2006/main" xmlns:p="http://schemas.openxmlformats.org/presentationml/2006/main" xmlns:r="http://schemas.openxmlformats.org/officeDocument/2006/relationships">
+<p:sld xmlns:a="http://schemas.openxmlformats.org/drawingml/2006/main" xmlns:r="http://schemas.openxmlformats.org/officeDocument/2006/relationships" xmlns:p="http://schemas.openxmlformats.org/presentationml/2006/main">
   <p:cSld>
     <p:bg>
       <p:bgPr>
@@ -10383,7 +10661,14 @@
         <p:cNvGrpSpPr/>
         <p:nvPr/>
       </p:nvGrpSpPr>
-      <p:grpSpPr/>
+      <p:grpSpPr>
+        <a:xfrm>
+          <a:off x="0" y="0"/>
+          <a:ext cx="0" cy="0"/>
+          <a:chOff x="0" y="0"/>
+          <a:chExt cx="0" cy="0"/>
+        </a:xfrm>
+      </p:grpSpPr>
       <p:sp>
         <p:nvSpPr>
           <p:cNvPr id="2" name="Rectangle 1"/>
@@ -10425,6 +10710,7 @@
           <a:lstStyle/>
           <a:p>
             <a:pPr algn="ctr"/>
+            <a:endParaRPr/>
           </a:p>
         </p:txBody>
       </p:sp>
@@ -10469,6 +10755,7 @@
           <a:lstStyle/>
           <a:p>
             <a:pPr algn="ctr"/>
+            <a:endParaRPr/>
           </a:p>
         </p:txBody>
       </p:sp>
@@ -10513,6 +10800,7 @@
           <a:lstStyle/>
           <a:p>
             <a:pPr algn="ctr"/>
+            <a:endParaRPr/>
           </a:p>
         </p:txBody>
       </p:sp>
@@ -10557,6 +10845,7 @@
           <a:lstStyle/>
           <a:p>
             <a:pPr algn="ctr"/>
+            <a:endParaRPr/>
           </a:p>
         </p:txBody>
       </p:sp>
@@ -10577,7 +10866,7 @@
           <a:noFill/>
         </p:spPr>
         <p:txBody>
-          <a:bodyPr wrap="square" lIns="0" rIns="0" tIns="0" bIns="0" anchor="t">
+          <a:bodyPr wrap="square" lIns="0" tIns="0" rIns="0" bIns="0" anchor="t">
             <a:spAutoFit/>
           </a:bodyPr>
           <a:lstStyle/>
@@ -10612,7 +10901,7 @@
           <a:noFill/>
         </p:spPr>
         <p:txBody>
-          <a:bodyPr wrap="square" lIns="0" rIns="0" tIns="0" bIns="0" anchor="t">
+          <a:bodyPr wrap="square" lIns="0" tIns="0" rIns="0" bIns="0" anchor="t">
             <a:spAutoFit/>
           </a:bodyPr>
           <a:lstStyle/>
@@ -10671,6 +10960,7 @@
           <a:lstStyle/>
           <a:p>
             <a:pPr algn="ctr"/>
+            <a:endParaRPr/>
           </a:p>
         </p:txBody>
       </p:sp>
@@ -10691,7 +10981,7 @@
           <a:noFill/>
         </p:spPr>
         <p:txBody>
-          <a:bodyPr wrap="square" lIns="0" rIns="0" tIns="0" bIns="0" anchor="t">
+          <a:bodyPr wrap="square" lIns="0" tIns="0" rIns="0" bIns="0" anchor="t">
             <a:spAutoFit/>
           </a:bodyPr>
           <a:lstStyle/>
@@ -10781,7 +11071,7 @@
           <a:noFill/>
         </p:spPr>
         <p:txBody>
-          <a:bodyPr wrap="square" lIns="0" rIns="0" tIns="0" bIns="0" anchor="t">
+          <a:bodyPr wrap="square" lIns="0" tIns="0" rIns="0" bIns="0" anchor="t">
             <a:spAutoFit/>
           </a:bodyPr>
           <a:lstStyle/>
@@ -10951,7 +11241,7 @@
           <a:noFill/>
         </p:spPr>
         <p:txBody>
-          <a:bodyPr wrap="square" lIns="0" rIns="0" tIns="0" bIns="0" anchor="t">
+          <a:bodyPr wrap="square" lIns="0" tIns="0" rIns="0" bIns="0" anchor="t">
             <a:spAutoFit/>
           </a:bodyPr>
           <a:lstStyle/>
@@ -10986,7 +11276,7 @@
           <a:noFill/>
         </p:spPr>
         <p:txBody>
-          <a:bodyPr wrap="square" lIns="0" rIns="0" tIns="0" bIns="0" anchor="t">
+          <a:bodyPr wrap="square" lIns="0" tIns="0" rIns="0" bIns="0" anchor="t">
             <a:spAutoFit/>
           </a:bodyPr>
           <a:lstStyle/>
@@ -11013,7 +11303,7 @@
 </file>
 
 <file path=ppt/slides/slide5.xml><?xml version="1.0" encoding="utf-8"?>
-<p:sld xmlns:a="http://schemas.openxmlformats.org/drawingml/2006/main" xmlns:p="http://schemas.openxmlformats.org/presentationml/2006/main" xmlns:r="http://schemas.openxmlformats.org/officeDocument/2006/relationships">
+<p:sld xmlns:a="http://schemas.openxmlformats.org/drawingml/2006/main" xmlns:r="http://schemas.openxmlformats.org/officeDocument/2006/relationships" xmlns:p="http://schemas.openxmlformats.org/presentationml/2006/main">
   <p:cSld>
     <p:bg>
       <p:bgPr>
@@ -11029,7 +11319,14 @@
         <p:cNvGrpSpPr/>
         <p:nvPr/>
       </p:nvGrpSpPr>
-      <p:grpSpPr/>
+      <p:grpSpPr>
+        <a:xfrm>
+          <a:off x="0" y="0"/>
+          <a:ext cx="0" cy="0"/>
+          <a:chOff x="0" y="0"/>
+          <a:chExt cx="0" cy="0"/>
+        </a:xfrm>
+      </p:grpSpPr>
       <p:sp>
         <p:nvSpPr>
           <p:cNvPr id="2" name="Rectangle 1"/>
@@ -11071,6 +11368,7 @@
           <a:lstStyle/>
           <a:p>
             <a:pPr algn="ctr"/>
+            <a:endParaRPr/>
           </a:p>
         </p:txBody>
       </p:sp>
@@ -11115,6 +11413,7 @@
           <a:lstStyle/>
           <a:p>
             <a:pPr algn="ctr"/>
+            <a:endParaRPr/>
           </a:p>
         </p:txBody>
       </p:sp>
@@ -11159,6 +11458,7 @@
           <a:lstStyle/>
           <a:p>
             <a:pPr algn="ctr"/>
+            <a:endParaRPr/>
           </a:p>
         </p:txBody>
       </p:sp>
@@ -11203,6 +11503,7 @@
           <a:lstStyle/>
           <a:p>
             <a:pPr algn="ctr"/>
+            <a:endParaRPr/>
           </a:p>
         </p:txBody>
       </p:sp>
@@ -11223,7 +11524,7 @@
           <a:noFill/>
         </p:spPr>
         <p:txBody>
-          <a:bodyPr wrap="square" lIns="0" rIns="0" tIns="0" bIns="0" anchor="t">
+          <a:bodyPr wrap="square" lIns="0" tIns="0" rIns="0" bIns="0" anchor="t">
             <a:spAutoFit/>
           </a:bodyPr>
           <a:lstStyle/>
@@ -11258,7 +11559,7 @@
           <a:noFill/>
         </p:spPr>
         <p:txBody>
-          <a:bodyPr wrap="square" lIns="0" rIns="0" tIns="0" bIns="0" anchor="t">
+          <a:bodyPr wrap="square" lIns="0" tIns="0" rIns="0" bIns="0" anchor="t">
             <a:spAutoFit/>
           </a:bodyPr>
           <a:lstStyle/>
@@ -11317,6 +11618,7 @@
           <a:lstStyle/>
           <a:p>
             <a:pPr algn="ctr"/>
+            <a:endParaRPr/>
           </a:p>
         </p:txBody>
       </p:sp>
@@ -11337,7 +11639,7 @@
           <a:noFill/>
         </p:spPr>
         <p:txBody>
-          <a:bodyPr wrap="square" lIns="0" rIns="0" tIns="0" bIns="0" anchor="t">
+          <a:bodyPr wrap="square" lIns="0" tIns="0" rIns="0" bIns="0" anchor="t">
             <a:spAutoFit/>
           </a:bodyPr>
           <a:lstStyle/>
@@ -11507,7 +11809,7 @@
           <a:noFill/>
         </p:spPr>
         <p:txBody>
-          <a:bodyPr wrap="square" lIns="0" rIns="0" tIns="0" bIns="0" anchor="t">
+          <a:bodyPr wrap="square" lIns="0" tIns="0" rIns="0" bIns="0" anchor="t">
             <a:spAutoFit/>
           </a:bodyPr>
           <a:lstStyle/>
@@ -11669,6 +11971,7 @@
           <a:lstStyle/>
           <a:p>
             <a:pPr algn="ctr"/>
+            <a:endParaRPr/>
           </a:p>
         </p:txBody>
       </p:sp>
@@ -11689,7 +11992,7 @@
           <a:noFill/>
         </p:spPr>
         <p:txBody>
-          <a:bodyPr wrap="square" lIns="0" rIns="0" tIns="0" bIns="0" anchor="t">
+          <a:bodyPr wrap="square" lIns="0" tIns="0" rIns="0" bIns="0" anchor="t">
             <a:spAutoFit/>
           </a:bodyPr>
           <a:lstStyle/>
@@ -11724,7 +12027,7 @@
           <a:noFill/>
         </p:spPr>
         <p:txBody>
-          <a:bodyPr wrap="square" lIns="0" rIns="0" tIns="0" bIns="0" anchor="t">
+          <a:bodyPr wrap="square" lIns="0" tIns="0" rIns="0" bIns="0" anchor="t">
             <a:spAutoFit/>
           </a:bodyPr>
           <a:lstStyle/>
@@ -11759,7 +12062,7 @@
           <a:noFill/>
         </p:spPr>
         <p:txBody>
-          <a:bodyPr wrap="square" lIns="0" rIns="0" tIns="0" bIns="0" anchor="t">
+          <a:bodyPr wrap="square" lIns="0" tIns="0" rIns="0" bIns="0" anchor="t">
             <a:spAutoFit/>
           </a:bodyPr>
           <a:lstStyle/>
@@ -11794,7 +12097,7 @@
           <a:noFill/>
         </p:spPr>
         <p:txBody>
-          <a:bodyPr wrap="square" lIns="0" rIns="0" tIns="0" bIns="0" anchor="t">
+          <a:bodyPr wrap="square" lIns="0" tIns="0" rIns="0" bIns="0" anchor="t">
             <a:spAutoFit/>
           </a:bodyPr>
           <a:lstStyle/>
@@ -11821,7 +12124,7 @@
 </file>
 
 <file path=ppt/slides/slide6.xml><?xml version="1.0" encoding="utf-8"?>
-<p:sld xmlns:a="http://schemas.openxmlformats.org/drawingml/2006/main" xmlns:p="http://schemas.openxmlformats.org/presentationml/2006/main" xmlns:r="http://schemas.openxmlformats.org/officeDocument/2006/relationships">
+<p:sld xmlns:a="http://schemas.openxmlformats.org/drawingml/2006/main" xmlns:r="http://schemas.openxmlformats.org/officeDocument/2006/relationships" xmlns:p="http://schemas.openxmlformats.org/presentationml/2006/main">
   <p:cSld>
     <p:bg>
       <p:bgPr>
@@ -11837,7 +12140,14 @@
         <p:cNvGrpSpPr/>
         <p:nvPr/>
       </p:nvGrpSpPr>
-      <p:grpSpPr/>
+      <p:grpSpPr>
+        <a:xfrm>
+          <a:off x="0" y="0"/>
+          <a:ext cx="0" cy="0"/>
+          <a:chOff x="0" y="0"/>
+          <a:chExt cx="0" cy="0"/>
+        </a:xfrm>
+      </p:grpSpPr>
       <p:sp>
         <p:nvSpPr>
           <p:cNvPr id="2" name="Rectangle 1"/>
@@ -11879,6 +12189,7 @@
           <a:lstStyle/>
           <a:p>
             <a:pPr algn="ctr"/>
+            <a:endParaRPr/>
           </a:p>
         </p:txBody>
       </p:sp>
@@ -11923,6 +12234,7 @@
           <a:lstStyle/>
           <a:p>
             <a:pPr algn="ctr"/>
+            <a:endParaRPr/>
           </a:p>
         </p:txBody>
       </p:sp>
@@ -11967,6 +12279,7 @@
           <a:lstStyle/>
           <a:p>
             <a:pPr algn="ctr"/>
+            <a:endParaRPr/>
           </a:p>
         </p:txBody>
       </p:sp>
@@ -12011,6 +12324,7 @@
           <a:lstStyle/>
           <a:p>
             <a:pPr algn="ctr"/>
+            <a:endParaRPr/>
           </a:p>
         </p:txBody>
       </p:sp>
@@ -12031,7 +12345,7 @@
           <a:noFill/>
         </p:spPr>
         <p:txBody>
-          <a:bodyPr wrap="square" lIns="0" rIns="0" tIns="0" bIns="0" anchor="t">
+          <a:bodyPr wrap="square" lIns="0" tIns="0" rIns="0" bIns="0" anchor="t">
             <a:spAutoFit/>
           </a:bodyPr>
           <a:lstStyle/>
@@ -12066,7 +12380,7 @@
           <a:noFill/>
         </p:spPr>
         <p:txBody>
-          <a:bodyPr wrap="square" lIns="0" rIns="0" tIns="0" bIns="0" anchor="t">
+          <a:bodyPr wrap="square" lIns="0" tIns="0" rIns="0" bIns="0" anchor="t">
             <a:spAutoFit/>
           </a:bodyPr>
           <a:lstStyle/>
@@ -12125,6 +12439,7 @@
           <a:lstStyle/>
           <a:p>
             <a:pPr algn="ctr"/>
+            <a:endParaRPr/>
           </a:p>
         </p:txBody>
       </p:sp>
@@ -12145,7 +12460,7 @@
           <a:noFill/>
         </p:spPr>
         <p:txBody>
-          <a:bodyPr wrap="square" lIns="0" rIns="0" tIns="0" bIns="0" anchor="t">
+          <a:bodyPr wrap="square" lIns="0" tIns="0" rIns="0" bIns="0" anchor="t">
             <a:spAutoFit/>
           </a:bodyPr>
           <a:lstStyle/>
@@ -12180,7 +12495,7 @@
           <a:noFill/>
         </p:spPr>
         <p:txBody>
-          <a:bodyPr wrap="square" lIns="0" rIns="0" tIns="0" bIns="0" anchor="t">
+          <a:bodyPr wrap="square" lIns="0" tIns="0" rIns="0" bIns="0" anchor="t">
             <a:spAutoFit/>
           </a:bodyPr>
           <a:lstStyle/>
@@ -12215,7 +12530,7 @@
           <a:noFill/>
         </p:spPr>
         <p:txBody>
-          <a:bodyPr wrap="square" lIns="0" rIns="0" tIns="0" bIns="0" anchor="t">
+          <a:bodyPr wrap="square" lIns="0" tIns="0" rIns="0" bIns="0" anchor="t">
             <a:spAutoFit/>
           </a:bodyPr>
           <a:lstStyle/>
@@ -12250,7 +12565,7 @@
           <a:noFill/>
         </p:spPr>
         <p:txBody>
-          <a:bodyPr wrap="square" lIns="0" rIns="0" tIns="0" bIns="0" anchor="t">
+          <a:bodyPr wrap="square" lIns="0" tIns="0" rIns="0" bIns="0" anchor="t">
             <a:spAutoFit/>
           </a:bodyPr>
           <a:lstStyle/>
@@ -12285,7 +12600,7 @@
           <a:noFill/>
         </p:spPr>
         <p:txBody>
-          <a:bodyPr wrap="square" lIns="0" rIns="0" tIns="0" bIns="0" anchor="t">
+          <a:bodyPr wrap="square" lIns="0" tIns="0" rIns="0" bIns="0" anchor="t">
             <a:spAutoFit/>
           </a:bodyPr>
           <a:lstStyle/>
@@ -12320,7 +12635,7 @@
           <a:noFill/>
         </p:spPr>
         <p:txBody>
-          <a:bodyPr wrap="square" lIns="0" rIns="0" tIns="0" bIns="0" anchor="t">
+          <a:bodyPr wrap="square" lIns="0" tIns="0" rIns="0" bIns="0" anchor="t">
             <a:spAutoFit/>
           </a:bodyPr>
           <a:lstStyle/>
@@ -12355,7 +12670,7 @@
           <a:noFill/>
         </p:spPr>
         <p:txBody>
-          <a:bodyPr wrap="square" lIns="0" rIns="0" tIns="0" bIns="0" anchor="t">
+          <a:bodyPr wrap="square" lIns="0" tIns="0" rIns="0" bIns="0" anchor="t">
             <a:spAutoFit/>
           </a:bodyPr>
           <a:lstStyle/>
@@ -12390,7 +12705,7 @@
           <a:noFill/>
         </p:spPr>
         <p:txBody>
-          <a:bodyPr wrap="square" lIns="0" rIns="0" tIns="0" bIns="0" anchor="t">
+          <a:bodyPr wrap="square" lIns="0" tIns="0" rIns="0" bIns="0" anchor="t">
             <a:spAutoFit/>
           </a:bodyPr>
           <a:lstStyle/>
@@ -12425,7 +12740,7 @@
           <a:noFill/>
         </p:spPr>
         <p:txBody>
-          <a:bodyPr wrap="square" lIns="0" rIns="0" tIns="0" bIns="0" anchor="t">
+          <a:bodyPr wrap="square" lIns="0" tIns="0" rIns="0" bIns="0" anchor="t">
             <a:spAutoFit/>
           </a:bodyPr>
           <a:lstStyle/>
@@ -12460,7 +12775,7 @@
           <a:noFill/>
         </p:spPr>
         <p:txBody>
-          <a:bodyPr wrap="square" lIns="0" rIns="0" tIns="0" bIns="0" anchor="t">
+          <a:bodyPr wrap="square" lIns="0" tIns="0" rIns="0" bIns="0" anchor="t">
             <a:spAutoFit/>
           </a:bodyPr>
           <a:lstStyle/>
@@ -12550,7 +12865,7 @@
           <a:noFill/>
         </p:spPr>
         <p:txBody>
-          <a:bodyPr wrap="square" lIns="0" rIns="0" tIns="0" bIns="0" anchor="t">
+          <a:bodyPr wrap="square" lIns="0" tIns="0" rIns="0" bIns="0" anchor="t">
             <a:spAutoFit/>
           </a:bodyPr>
           <a:lstStyle/>
@@ -12585,7 +12900,7 @@
           <a:noFill/>
         </p:spPr>
         <p:txBody>
-          <a:bodyPr wrap="square" lIns="0" rIns="0" tIns="0" bIns="0" anchor="t">
+          <a:bodyPr wrap="square" lIns="0" tIns="0" rIns="0" bIns="0" anchor="t">
             <a:spAutoFit/>
           </a:bodyPr>
           <a:lstStyle/>
@@ -12612,7 +12927,7 @@
 </file>
 
 <file path=ppt/slides/slide7.xml><?xml version="1.0" encoding="utf-8"?>
-<p:sld xmlns:a="http://schemas.openxmlformats.org/drawingml/2006/main" xmlns:p="http://schemas.openxmlformats.org/presentationml/2006/main" xmlns:r="http://schemas.openxmlformats.org/officeDocument/2006/relationships">
+<p:sld xmlns:a="http://schemas.openxmlformats.org/drawingml/2006/main" xmlns:r="http://schemas.openxmlformats.org/officeDocument/2006/relationships" xmlns:p="http://schemas.openxmlformats.org/presentationml/2006/main">
   <p:cSld>
     <p:bg>
       <p:bgPr>
@@ -12628,7 +12943,14 @@
         <p:cNvGrpSpPr/>
         <p:nvPr/>
       </p:nvGrpSpPr>
-      <p:grpSpPr/>
+      <p:grpSpPr>
+        <a:xfrm>
+          <a:off x="0" y="0"/>
+          <a:ext cx="0" cy="0"/>
+          <a:chOff x="0" y="0"/>
+          <a:chExt cx="0" cy="0"/>
+        </a:xfrm>
+      </p:grpSpPr>
       <p:sp>
         <p:nvSpPr>
           <p:cNvPr id="2" name="Rectangle 1"/>
@@ -12670,6 +12992,7 @@
           <a:lstStyle/>
           <a:p>
             <a:pPr algn="ctr"/>
+            <a:endParaRPr/>
           </a:p>
         </p:txBody>
       </p:sp>
@@ -12714,6 +13037,7 @@
           <a:lstStyle/>
           <a:p>
             <a:pPr algn="ctr"/>
+            <a:endParaRPr/>
           </a:p>
         </p:txBody>
       </p:sp>
@@ -12758,6 +13082,7 @@
           <a:lstStyle/>
           <a:p>
             <a:pPr algn="ctr"/>
+            <a:endParaRPr/>
           </a:p>
         </p:txBody>
       </p:sp>
@@ -12802,6 +13127,7 @@
           <a:lstStyle/>
           <a:p>
             <a:pPr algn="ctr"/>
+            <a:endParaRPr/>
           </a:p>
         </p:txBody>
       </p:sp>
@@ -12822,7 +13148,7 @@
           <a:noFill/>
         </p:spPr>
         <p:txBody>
-          <a:bodyPr wrap="square" lIns="0" rIns="0" tIns="0" bIns="0" anchor="t">
+          <a:bodyPr wrap="square" lIns="0" tIns="0" rIns="0" bIns="0" anchor="t">
             <a:spAutoFit/>
           </a:bodyPr>
           <a:lstStyle/>
@@ -12857,7 +13183,7 @@
           <a:noFill/>
         </p:spPr>
         <p:txBody>
-          <a:bodyPr wrap="square" lIns="0" rIns="0" tIns="0" bIns="0" anchor="t">
+          <a:bodyPr wrap="square" lIns="0" tIns="0" rIns="0" bIns="0" anchor="t">
             <a:spAutoFit/>
           </a:bodyPr>
           <a:lstStyle/>
@@ -12916,6 +13242,7 @@
           <a:lstStyle/>
           <a:p>
             <a:pPr algn="ctr"/>
+            <a:endParaRPr/>
           </a:p>
         </p:txBody>
       </p:sp>
@@ -12960,6 +13287,7 @@
           <a:lstStyle/>
           <a:p>
             <a:pPr algn="ctr"/>
+            <a:endParaRPr/>
           </a:p>
         </p:txBody>
       </p:sp>
@@ -13004,6 +13332,7 @@
           <a:lstStyle/>
           <a:p>
             <a:pPr algn="ctr"/>
+            <a:endParaRPr/>
           </a:p>
         </p:txBody>
       </p:sp>
@@ -13024,7 +13353,7 @@
           <a:noFill/>
         </p:spPr>
         <p:txBody>
-          <a:bodyPr wrap="square" lIns="0" rIns="0" tIns="0" bIns="0" anchor="t">
+          <a:bodyPr wrap="square" lIns="0" tIns="0" rIns="0" bIns="0" anchor="t">
             <a:spAutoFit/>
           </a:bodyPr>
           <a:lstStyle/>
@@ -13059,7 +13388,7 @@
           <a:noFill/>
         </p:spPr>
         <p:txBody>
-          <a:bodyPr wrap="square" lIns="0" rIns="0" tIns="0" bIns="0" anchor="t">
+          <a:bodyPr wrap="square" lIns="0" tIns="0" rIns="0" bIns="0" anchor="t">
             <a:spAutoFit/>
           </a:bodyPr>
           <a:lstStyle/>
@@ -13118,6 +13447,7 @@
           <a:lstStyle/>
           <a:p>
             <a:pPr algn="ctr"/>
+            <a:endParaRPr/>
           </a:p>
         </p:txBody>
       </p:sp>
@@ -13162,6 +13492,7 @@
           <a:lstStyle/>
           <a:p>
             <a:pPr algn="ctr"/>
+            <a:endParaRPr/>
           </a:p>
         </p:txBody>
       </p:sp>
@@ -13182,7 +13513,7 @@
           <a:noFill/>
         </p:spPr>
         <p:txBody>
-          <a:bodyPr wrap="square" lIns="0" rIns="0" tIns="0" bIns="0" anchor="t">
+          <a:bodyPr wrap="square" lIns="0" tIns="0" rIns="0" bIns="0" anchor="t">
             <a:spAutoFit/>
           </a:bodyPr>
           <a:lstStyle/>
@@ -13217,7 +13548,7 @@
           <a:noFill/>
         </p:spPr>
         <p:txBody>
-          <a:bodyPr wrap="square" lIns="0" rIns="0" tIns="0" bIns="0" anchor="t">
+          <a:bodyPr wrap="square" lIns="0" tIns="0" rIns="0" bIns="0" anchor="t">
             <a:spAutoFit/>
           </a:bodyPr>
           <a:lstStyle/>
@@ -13276,6 +13607,7 @@
           <a:lstStyle/>
           <a:p>
             <a:pPr algn="ctr"/>
+            <a:endParaRPr/>
           </a:p>
         </p:txBody>
       </p:sp>
@@ -13320,6 +13652,7 @@
           <a:lstStyle/>
           <a:p>
             <a:pPr algn="ctr"/>
+            <a:endParaRPr/>
           </a:p>
         </p:txBody>
       </p:sp>
@@ -13340,7 +13673,7 @@
           <a:noFill/>
         </p:spPr>
         <p:txBody>
-          <a:bodyPr wrap="square" lIns="0" rIns="0" tIns="0" bIns="0" anchor="t">
+          <a:bodyPr wrap="square" lIns="0" tIns="0" rIns="0" bIns="0" anchor="t">
             <a:spAutoFit/>
           </a:bodyPr>
           <a:lstStyle/>
@@ -13375,7 +13708,7 @@
           <a:noFill/>
         </p:spPr>
         <p:txBody>
-          <a:bodyPr wrap="square" lIns="0" rIns="0" tIns="0" bIns="0" anchor="t">
+          <a:bodyPr wrap="square" lIns="0" tIns="0" rIns="0" bIns="0" anchor="t">
             <a:spAutoFit/>
           </a:bodyPr>
           <a:lstStyle/>
@@ -13434,6 +13767,7 @@
           <a:lstStyle/>
           <a:p>
             <a:pPr algn="ctr"/>
+            <a:endParaRPr/>
           </a:p>
         </p:txBody>
       </p:sp>
@@ -13478,6 +13812,7 @@
           <a:lstStyle/>
           <a:p>
             <a:pPr algn="ctr"/>
+            <a:endParaRPr/>
           </a:p>
         </p:txBody>
       </p:sp>
@@ -13498,7 +13833,7 @@
           <a:noFill/>
         </p:spPr>
         <p:txBody>
-          <a:bodyPr wrap="square" lIns="0" rIns="0" tIns="0" bIns="0" anchor="t">
+          <a:bodyPr wrap="square" lIns="0" tIns="0" rIns="0" bIns="0" anchor="t">
             <a:spAutoFit/>
           </a:bodyPr>
           <a:lstStyle/>
@@ -13533,7 +13868,7 @@
           <a:noFill/>
         </p:spPr>
         <p:txBody>
-          <a:bodyPr wrap="square" lIns="0" rIns="0" tIns="0" bIns="0" anchor="t">
+          <a:bodyPr wrap="square" lIns="0" tIns="0" rIns="0" bIns="0" anchor="t">
             <a:spAutoFit/>
           </a:bodyPr>
           <a:lstStyle/>
@@ -13592,6 +13927,7 @@
           <a:lstStyle/>
           <a:p>
             <a:pPr algn="ctr"/>
+            <a:endParaRPr/>
           </a:p>
         </p:txBody>
       </p:sp>
@@ -13636,6 +13972,7 @@
           <a:lstStyle/>
           <a:p>
             <a:pPr algn="ctr"/>
+            <a:endParaRPr/>
           </a:p>
         </p:txBody>
       </p:sp>
@@ -13656,7 +13993,7 @@
           <a:noFill/>
         </p:spPr>
         <p:txBody>
-          <a:bodyPr wrap="square" lIns="0" rIns="0" tIns="0" bIns="0" anchor="t">
+          <a:bodyPr wrap="square" lIns="0" tIns="0" rIns="0" bIns="0" anchor="t">
             <a:spAutoFit/>
           </a:bodyPr>
           <a:lstStyle/>
@@ -13691,7 +14028,7 @@
           <a:noFill/>
         </p:spPr>
         <p:txBody>
-          <a:bodyPr wrap="square" lIns="0" rIns="0" tIns="0" bIns="0" anchor="t">
+          <a:bodyPr wrap="square" lIns="0" tIns="0" rIns="0" bIns="0" anchor="t">
             <a:spAutoFit/>
           </a:bodyPr>
           <a:lstStyle/>
@@ -13750,6 +14087,7 @@
           <a:lstStyle/>
           <a:p>
             <a:pPr algn="ctr"/>
+            <a:endParaRPr/>
           </a:p>
         </p:txBody>
       </p:sp>
@@ -13794,6 +14132,7 @@
           <a:lstStyle/>
           <a:p>
             <a:pPr algn="ctr"/>
+            <a:endParaRPr/>
           </a:p>
         </p:txBody>
       </p:sp>
@@ -13814,7 +14153,7 @@
           <a:noFill/>
         </p:spPr>
         <p:txBody>
-          <a:bodyPr wrap="square" lIns="0" rIns="0" tIns="0" bIns="0" anchor="t">
+          <a:bodyPr wrap="square" lIns="0" tIns="0" rIns="0" bIns="0" anchor="t">
             <a:spAutoFit/>
           </a:bodyPr>
           <a:lstStyle/>
@@ -13849,7 +14188,7 @@
           <a:noFill/>
         </p:spPr>
         <p:txBody>
-          <a:bodyPr wrap="square" lIns="0" rIns="0" tIns="0" bIns="0" anchor="t">
+          <a:bodyPr wrap="square" lIns="0" tIns="0" rIns="0" bIns="0" anchor="t">
             <a:spAutoFit/>
           </a:bodyPr>
           <a:lstStyle/>
@@ -13908,6 +14247,7 @@
           <a:lstStyle/>
           <a:p>
             <a:pPr algn="ctr"/>
+            <a:endParaRPr/>
           </a:p>
         </p:txBody>
       </p:sp>
@@ -13952,6 +14292,7 @@
           <a:lstStyle/>
           <a:p>
             <a:pPr algn="ctr"/>
+            <a:endParaRPr/>
           </a:p>
         </p:txBody>
       </p:sp>
@@ -13972,7 +14313,7 @@
           <a:noFill/>
         </p:spPr>
         <p:txBody>
-          <a:bodyPr wrap="square" lIns="0" rIns="0" tIns="0" bIns="0" anchor="t">
+          <a:bodyPr wrap="square" lIns="0" tIns="0" rIns="0" bIns="0" anchor="t">
             <a:spAutoFit/>
           </a:bodyPr>
           <a:lstStyle/>
@@ -14007,7 +14348,7 @@
           <a:noFill/>
         </p:spPr>
         <p:txBody>
-          <a:bodyPr wrap="square" lIns="0" rIns="0" tIns="0" bIns="0" anchor="t">
+          <a:bodyPr wrap="square" lIns="0" tIns="0" rIns="0" bIns="0" anchor="t">
             <a:spAutoFit/>
           </a:bodyPr>
           <a:lstStyle/>
@@ -14066,6 +14407,7 @@
           <a:lstStyle/>
           <a:p>
             <a:pPr algn="ctr"/>
+            <a:endParaRPr/>
           </a:p>
         </p:txBody>
       </p:sp>
@@ -14110,6 +14452,7 @@
           <a:lstStyle/>
           <a:p>
             <a:pPr algn="ctr"/>
+            <a:endParaRPr/>
           </a:p>
         </p:txBody>
       </p:sp>
@@ -14130,7 +14473,7 @@
           <a:noFill/>
         </p:spPr>
         <p:txBody>
-          <a:bodyPr wrap="square" lIns="0" rIns="0" tIns="0" bIns="0" anchor="t">
+          <a:bodyPr wrap="square" lIns="0" tIns="0" rIns="0" bIns="0" anchor="t">
             <a:spAutoFit/>
           </a:bodyPr>
           <a:lstStyle/>
@@ -14165,7 +14508,7 @@
           <a:noFill/>
         </p:spPr>
         <p:txBody>
-          <a:bodyPr wrap="square" lIns="0" rIns="0" tIns="0" bIns="0" anchor="t">
+          <a:bodyPr wrap="square" lIns="0" tIns="0" rIns="0" bIns="0" anchor="t">
             <a:spAutoFit/>
           </a:bodyPr>
           <a:lstStyle/>
@@ -14200,7 +14543,7 @@
           <a:noFill/>
         </p:spPr>
         <p:txBody>
-          <a:bodyPr wrap="square" lIns="0" rIns="0" tIns="0" bIns="0" anchor="t">
+          <a:bodyPr wrap="square" lIns="0" tIns="0" rIns="0" bIns="0" anchor="t">
             <a:spAutoFit/>
           </a:bodyPr>
           <a:lstStyle/>
@@ -14235,7 +14578,7 @@
           <a:noFill/>
         </p:spPr>
         <p:txBody>
-          <a:bodyPr wrap="square" lIns="0" rIns="0" tIns="0" bIns="0" anchor="t">
+          <a:bodyPr wrap="square" lIns="0" tIns="0" rIns="0" bIns="0" anchor="t">
             <a:spAutoFit/>
           </a:bodyPr>
           <a:lstStyle/>
@@ -14262,7 +14605,7 @@
 </file>
 
 <file path=ppt/slides/slide8.xml><?xml version="1.0" encoding="utf-8"?>
-<p:sld xmlns:a="http://schemas.openxmlformats.org/drawingml/2006/main" xmlns:p="http://schemas.openxmlformats.org/presentationml/2006/main" xmlns:r="http://schemas.openxmlformats.org/officeDocument/2006/relationships">
+<p:sld xmlns:a="http://schemas.openxmlformats.org/drawingml/2006/main" xmlns:r="http://schemas.openxmlformats.org/officeDocument/2006/relationships" xmlns:p="http://schemas.openxmlformats.org/presentationml/2006/main">
   <p:cSld>
     <p:bg>
       <p:bgPr>
@@ -14278,7 +14621,14 @@
         <p:cNvGrpSpPr/>
         <p:nvPr/>
       </p:nvGrpSpPr>
-      <p:grpSpPr/>
+      <p:grpSpPr>
+        <a:xfrm>
+          <a:off x="0" y="0"/>
+          <a:ext cx="0" cy="0"/>
+          <a:chOff x="0" y="0"/>
+          <a:chExt cx="0" cy="0"/>
+        </a:xfrm>
+      </p:grpSpPr>
       <p:sp>
         <p:nvSpPr>
           <p:cNvPr id="2" name="Rectangle 1"/>
@@ -14320,6 +14670,7 @@
           <a:lstStyle/>
           <a:p>
             <a:pPr algn="ctr"/>
+            <a:endParaRPr/>
           </a:p>
         </p:txBody>
       </p:sp>
@@ -14364,6 +14715,7 @@
           <a:lstStyle/>
           <a:p>
             <a:pPr algn="ctr"/>
+            <a:endParaRPr/>
           </a:p>
         </p:txBody>
       </p:sp>
@@ -14408,6 +14760,7 @@
           <a:lstStyle/>
           <a:p>
             <a:pPr algn="ctr"/>
+            <a:endParaRPr/>
           </a:p>
         </p:txBody>
       </p:sp>
@@ -14452,6 +14805,7 @@
           <a:lstStyle/>
           <a:p>
             <a:pPr algn="ctr"/>
+            <a:endParaRPr/>
           </a:p>
         </p:txBody>
       </p:sp>
@@ -14472,7 +14826,7 @@
           <a:noFill/>
         </p:spPr>
         <p:txBody>
-          <a:bodyPr wrap="square" lIns="0" rIns="0" tIns="0" bIns="0" anchor="t">
+          <a:bodyPr wrap="square" lIns="0" tIns="0" rIns="0" bIns="0" anchor="t">
             <a:spAutoFit/>
           </a:bodyPr>
           <a:lstStyle/>
@@ -14507,7 +14861,7 @@
           <a:noFill/>
         </p:spPr>
         <p:txBody>
-          <a:bodyPr wrap="square" lIns="0" rIns="0" tIns="0" bIns="0" anchor="t">
+          <a:bodyPr wrap="square" lIns="0" tIns="0" rIns="0" bIns="0" anchor="t">
             <a:spAutoFit/>
           </a:bodyPr>
           <a:lstStyle/>
@@ -14566,6 +14920,7 @@
           <a:lstStyle/>
           <a:p>
             <a:pPr algn="ctr"/>
+            <a:endParaRPr/>
           </a:p>
         </p:txBody>
       </p:sp>
@@ -14612,6 +14967,7 @@
           <a:lstStyle/>
           <a:p>
             <a:pPr algn="ctr"/>
+            <a:endParaRPr/>
           </a:p>
         </p:txBody>
       </p:sp>
@@ -14632,7 +14988,7 @@
           <a:noFill/>
         </p:spPr>
         <p:txBody>
-          <a:bodyPr wrap="square" lIns="0" rIns="0" tIns="0" bIns="0" anchor="t">
+          <a:bodyPr wrap="square" lIns="0" tIns="0" rIns="0" bIns="0" anchor="t">
             <a:spAutoFit/>
           </a:bodyPr>
           <a:lstStyle/>
@@ -14667,7 +15023,7 @@
           <a:noFill/>
         </p:spPr>
         <p:txBody>
-          <a:bodyPr wrap="square" lIns="0" rIns="0" tIns="0" bIns="0" anchor="t">
+          <a:bodyPr wrap="square" lIns="0" tIns="0" rIns="0" bIns="0" anchor="t">
             <a:spAutoFit/>
           </a:bodyPr>
           <a:lstStyle/>
@@ -14728,6 +15084,7 @@
           <a:lstStyle/>
           <a:p>
             <a:pPr algn="ctr"/>
+            <a:endParaRPr/>
           </a:p>
         </p:txBody>
       </p:sp>
@@ -14748,7 +15105,7 @@
           <a:noFill/>
         </p:spPr>
         <p:txBody>
-          <a:bodyPr wrap="square" lIns="0" rIns="0" tIns="0" bIns="0" anchor="t">
+          <a:bodyPr wrap="square" lIns="0" tIns="0" rIns="0" bIns="0" anchor="t">
             <a:spAutoFit/>
           </a:bodyPr>
           <a:lstStyle/>
@@ -14783,7 +15140,7 @@
           <a:noFill/>
         </p:spPr>
         <p:txBody>
-          <a:bodyPr wrap="square" lIns="0" rIns="0" tIns="0" bIns="0" anchor="t">
+          <a:bodyPr wrap="square" lIns="0" tIns="0" rIns="0" bIns="0" anchor="t">
             <a:spAutoFit/>
           </a:bodyPr>
           <a:lstStyle/>
@@ -14844,6 +15201,7 @@
           <a:lstStyle/>
           <a:p>
             <a:pPr algn="ctr"/>
+            <a:endParaRPr/>
           </a:p>
         </p:txBody>
       </p:sp>
@@ -14864,7 +15222,7 @@
           <a:noFill/>
         </p:spPr>
         <p:txBody>
-          <a:bodyPr wrap="square" lIns="0" rIns="0" tIns="0" bIns="0" anchor="t">
+          <a:bodyPr wrap="square" lIns="0" tIns="0" rIns="0" bIns="0" anchor="t">
             <a:spAutoFit/>
           </a:bodyPr>
           <a:lstStyle/>
@@ -14899,7 +15257,7 @@
           <a:noFill/>
         </p:spPr>
         <p:txBody>
-          <a:bodyPr wrap="square" lIns="0" rIns="0" tIns="0" bIns="0" anchor="t">
+          <a:bodyPr wrap="square" lIns="0" tIns="0" rIns="0" bIns="0" anchor="t">
             <a:spAutoFit/>
           </a:bodyPr>
           <a:lstStyle/>
@@ -14934,7 +15292,7 @@
           <a:noFill/>
         </p:spPr>
         <p:txBody>
-          <a:bodyPr wrap="square" lIns="0" rIns="0" tIns="0" bIns="0" anchor="t">
+          <a:bodyPr wrap="square" lIns="0" tIns="0" rIns="0" bIns="0" anchor="t">
             <a:spAutoFit/>
           </a:bodyPr>
           <a:lstStyle/>
@@ -14969,7 +15327,7 @@
           <a:noFill/>
         </p:spPr>
         <p:txBody>
-          <a:bodyPr wrap="square" lIns="0" rIns="0" tIns="0" bIns="0" anchor="t">
+          <a:bodyPr wrap="square" lIns="0" tIns="0" rIns="0" bIns="0" anchor="t">
             <a:spAutoFit/>
           </a:bodyPr>
           <a:lstStyle/>
@@ -15030,6 +15388,7 @@
           <a:lstStyle/>
           <a:p>
             <a:pPr algn="ctr"/>
+            <a:endParaRPr/>
           </a:p>
         </p:txBody>
       </p:sp>
@@ -15050,7 +15409,7 @@
           <a:noFill/>
         </p:spPr>
         <p:txBody>
-          <a:bodyPr wrap="square" lIns="0" rIns="0" tIns="0" bIns="0" anchor="t">
+          <a:bodyPr wrap="square" lIns="0" tIns="0" rIns="0" bIns="0" anchor="t">
             <a:spAutoFit/>
           </a:bodyPr>
           <a:lstStyle/>
@@ -15085,7 +15444,7 @@
           <a:noFill/>
         </p:spPr>
         <p:txBody>
-          <a:bodyPr wrap="square" lIns="0" rIns="0" tIns="0" bIns="0" anchor="t">
+          <a:bodyPr wrap="square" lIns="0" tIns="0" rIns="0" bIns="0" anchor="t">
             <a:spAutoFit/>
           </a:bodyPr>
           <a:lstStyle/>
@@ -15120,7 +15479,7 @@
           <a:noFill/>
         </p:spPr>
         <p:txBody>
-          <a:bodyPr wrap="square" lIns="0" rIns="0" tIns="0" bIns="0" anchor="t">
+          <a:bodyPr wrap="square" lIns="0" tIns="0" rIns="0" bIns="0" anchor="t">
             <a:spAutoFit/>
           </a:bodyPr>
           <a:lstStyle/>
@@ -15210,7 +15569,7 @@
           <a:noFill/>
         </p:spPr>
         <p:txBody>
-          <a:bodyPr wrap="square" lIns="0" rIns="0" tIns="0" bIns="0" anchor="t">
+          <a:bodyPr wrap="square" lIns="0" tIns="0" rIns="0" bIns="0" anchor="t">
             <a:spAutoFit/>
           </a:bodyPr>
           <a:lstStyle/>
@@ -15245,7 +15604,7 @@
           <a:noFill/>
         </p:spPr>
         <p:txBody>
-          <a:bodyPr wrap="square" lIns="0" rIns="0" tIns="0" bIns="0" anchor="t">
+          <a:bodyPr wrap="square" lIns="0" tIns="0" rIns="0" bIns="0" anchor="t">
             <a:spAutoFit/>
           </a:bodyPr>
           <a:lstStyle/>
@@ -15272,7 +15631,7 @@
 </file>
 
 <file path=ppt/slides/slide9.xml><?xml version="1.0" encoding="utf-8"?>
-<p:sld xmlns:a="http://schemas.openxmlformats.org/drawingml/2006/main" xmlns:p="http://schemas.openxmlformats.org/presentationml/2006/main" xmlns:r="http://schemas.openxmlformats.org/officeDocument/2006/relationships">
+<p:sld xmlns:a="http://schemas.openxmlformats.org/drawingml/2006/main" xmlns:r="http://schemas.openxmlformats.org/officeDocument/2006/relationships" xmlns:p="http://schemas.openxmlformats.org/presentationml/2006/main">
   <p:cSld>
     <p:bg>
       <p:bgPr>
@@ -15288,7 +15647,14 @@
         <p:cNvGrpSpPr/>
         <p:nvPr/>
       </p:nvGrpSpPr>
-      <p:grpSpPr/>
+      <p:grpSpPr>
+        <a:xfrm>
+          <a:off x="0" y="0"/>
+          <a:ext cx="0" cy="0"/>
+          <a:chOff x="0" y="0"/>
+          <a:chExt cx="0" cy="0"/>
+        </a:xfrm>
+      </p:grpSpPr>
       <p:sp>
         <p:nvSpPr>
           <p:cNvPr id="2" name="Rectangle 1"/>
@@ -15330,6 +15696,7 @@
           <a:lstStyle/>
           <a:p>
             <a:pPr algn="ctr"/>
+            <a:endParaRPr/>
           </a:p>
         </p:txBody>
       </p:sp>
@@ -15374,6 +15741,7 @@
           <a:lstStyle/>
           <a:p>
             <a:pPr algn="ctr"/>
+            <a:endParaRPr/>
           </a:p>
         </p:txBody>
       </p:sp>
@@ -15418,6 +15786,7 @@
           <a:lstStyle/>
           <a:p>
             <a:pPr algn="ctr"/>
+            <a:endParaRPr/>
           </a:p>
         </p:txBody>
       </p:sp>
@@ -15462,6 +15831,7 @@
           <a:lstStyle/>
           <a:p>
             <a:pPr algn="ctr"/>
+            <a:endParaRPr/>
           </a:p>
         </p:txBody>
       </p:sp>
@@ -15482,7 +15852,7 @@
           <a:noFill/>
         </p:spPr>
         <p:txBody>
-          <a:bodyPr wrap="square" lIns="0" rIns="0" tIns="0" bIns="0" anchor="t">
+          <a:bodyPr wrap="square" lIns="0" tIns="0" rIns="0" bIns="0" anchor="t">
             <a:spAutoFit/>
           </a:bodyPr>
           <a:lstStyle/>
@@ -15517,7 +15887,7 @@
           <a:noFill/>
         </p:spPr>
         <p:txBody>
-          <a:bodyPr wrap="square" lIns="0" rIns="0" tIns="0" bIns="0" anchor="t">
+          <a:bodyPr wrap="square" lIns="0" tIns="0" rIns="0" bIns="0" anchor="t">
             <a:spAutoFit/>
           </a:bodyPr>
           <a:lstStyle/>
@@ -15576,6 +15946,7 @@
           <a:lstStyle/>
           <a:p>
             <a:pPr algn="ctr"/>
+            <a:endParaRPr/>
           </a:p>
         </p:txBody>
       </p:sp>
@@ -15596,7 +15967,7 @@
           <a:noFill/>
         </p:spPr>
         <p:txBody>
-          <a:bodyPr wrap="square" lIns="0" rIns="0" tIns="0" bIns="0" anchor="t">
+          <a:bodyPr wrap="square" lIns="0" tIns="0" rIns="0" bIns="0" anchor="t">
             <a:spAutoFit/>
           </a:bodyPr>
           <a:lstStyle/>
@@ -15631,7 +16002,7 @@
           <a:noFill/>
         </p:spPr>
         <p:txBody>
-          <a:bodyPr wrap="square" lIns="0" rIns="0" tIns="0" bIns="0" anchor="t">
+          <a:bodyPr wrap="square" lIns="0" tIns="0" rIns="0" bIns="0" anchor="t">
             <a:spAutoFit/>
           </a:bodyPr>
           <a:lstStyle/>
@@ -15666,7 +16037,7 @@
           <a:noFill/>
         </p:spPr>
         <p:txBody>
-          <a:bodyPr wrap="square" lIns="0" rIns="0" tIns="0" bIns="0" anchor="t">
+          <a:bodyPr wrap="square" lIns="0" tIns="0" rIns="0" bIns="0" anchor="t">
             <a:spAutoFit/>
           </a:bodyPr>
           <a:lstStyle/>
@@ -15701,7 +16072,7 @@
           <a:noFill/>
         </p:spPr>
         <p:txBody>
-          <a:bodyPr wrap="square" lIns="0" rIns="0" tIns="0" bIns="0" anchor="t">
+          <a:bodyPr wrap="square" lIns="0" tIns="0" rIns="0" bIns="0" anchor="t">
             <a:spAutoFit/>
           </a:bodyPr>
           <a:lstStyle/>
@@ -15736,7 +16107,7 @@
           <a:noFill/>
         </p:spPr>
         <p:txBody>
-          <a:bodyPr wrap="square" lIns="0" rIns="0" tIns="0" bIns="0" anchor="t">
+          <a:bodyPr wrap="square" lIns="0" tIns="0" rIns="0" bIns="0" anchor="t">
             <a:spAutoFit/>
           </a:bodyPr>
           <a:lstStyle/>
@@ -15771,7 +16142,7 @@
           <a:noFill/>
         </p:spPr>
         <p:txBody>
-          <a:bodyPr wrap="square" lIns="0" rIns="0" tIns="0" bIns="0" anchor="t">
+          <a:bodyPr wrap="square" lIns="0" tIns="0" rIns="0" bIns="0" anchor="t">
             <a:spAutoFit/>
           </a:bodyPr>
           <a:lstStyle/>
@@ -15806,7 +16177,7 @@
           <a:noFill/>
         </p:spPr>
         <p:txBody>
-          <a:bodyPr wrap="square" lIns="0" rIns="0" tIns="0" bIns="0" anchor="t">
+          <a:bodyPr wrap="square" lIns="0" tIns="0" rIns="0" bIns="0" anchor="t">
             <a:spAutoFit/>
           </a:bodyPr>
           <a:lstStyle/>
@@ -15841,7 +16212,7 @@
           <a:noFill/>
         </p:spPr>
         <p:txBody>
-          <a:bodyPr wrap="square" lIns="0" rIns="0" tIns="0" bIns="0" anchor="t">
+          <a:bodyPr wrap="square" lIns="0" tIns="0" rIns="0" bIns="0" anchor="t">
             <a:spAutoFit/>
           </a:bodyPr>
           <a:lstStyle/>
@@ -15876,7 +16247,7 @@
           <a:noFill/>
         </p:spPr>
         <p:txBody>
-          <a:bodyPr wrap="square" lIns="0" rIns="0" tIns="0" bIns="0" anchor="t">
+          <a:bodyPr wrap="square" lIns="0" tIns="0" rIns="0" bIns="0" anchor="t">
             <a:spAutoFit/>
           </a:bodyPr>
           <a:lstStyle/>
@@ -15911,7 +16282,7 @@
           <a:noFill/>
         </p:spPr>
         <p:txBody>
-          <a:bodyPr wrap="square" lIns="0" rIns="0" tIns="0" bIns="0" anchor="t">
+          <a:bodyPr wrap="square" lIns="0" tIns="0" rIns="0" bIns="0" anchor="t">
             <a:spAutoFit/>
           </a:bodyPr>
           <a:lstStyle/>
@@ -15946,7 +16317,7 @@
           <a:noFill/>
         </p:spPr>
         <p:txBody>
-          <a:bodyPr wrap="square" lIns="0" rIns="0" tIns="0" bIns="0" anchor="t">
+          <a:bodyPr wrap="square" lIns="0" tIns="0" rIns="0" bIns="0" anchor="t">
             <a:spAutoFit/>
           </a:bodyPr>
           <a:lstStyle/>
@@ -15981,7 +16352,7 @@
           <a:noFill/>
         </p:spPr>
         <p:txBody>
-          <a:bodyPr wrap="square" lIns="0" rIns="0" tIns="0" bIns="0" anchor="t">
+          <a:bodyPr wrap="square" lIns="0" tIns="0" rIns="0" bIns="0" anchor="t">
             <a:spAutoFit/>
           </a:bodyPr>
           <a:lstStyle/>
@@ -16016,7 +16387,7 @@
           <a:noFill/>
         </p:spPr>
         <p:txBody>
-          <a:bodyPr wrap="square" lIns="0" rIns="0" tIns="0" bIns="0" anchor="t">
+          <a:bodyPr wrap="square" lIns="0" tIns="0" rIns="0" bIns="0" anchor="t">
             <a:spAutoFit/>
           </a:bodyPr>
           <a:lstStyle/>
@@ -16051,7 +16422,7 @@
           <a:noFill/>
         </p:spPr>
         <p:txBody>
-          <a:bodyPr wrap="square" lIns="0" rIns="0" tIns="0" bIns="0" anchor="t">
+          <a:bodyPr wrap="square" lIns="0" tIns="0" rIns="0" bIns="0" anchor="t">
             <a:spAutoFit/>
           </a:bodyPr>
           <a:lstStyle/>
@@ -16086,7 +16457,7 @@
           <a:noFill/>
         </p:spPr>
         <p:txBody>
-          <a:bodyPr wrap="square" lIns="0" rIns="0" tIns="0" bIns="0" anchor="t">
+          <a:bodyPr wrap="square" lIns="0" tIns="0" rIns="0" bIns="0" anchor="t">
             <a:spAutoFit/>
           </a:bodyPr>
           <a:lstStyle/>
@@ -16121,7 +16492,7 @@
           <a:noFill/>
         </p:spPr>
         <p:txBody>
-          <a:bodyPr wrap="square" lIns="0" rIns="0" tIns="0" bIns="0" anchor="t">
+          <a:bodyPr wrap="square" lIns="0" tIns="0" rIns="0" bIns="0" anchor="t">
             <a:spAutoFit/>
           </a:bodyPr>
           <a:lstStyle/>
@@ -16156,7 +16527,7 @@
           <a:noFill/>
         </p:spPr>
         <p:txBody>
-          <a:bodyPr wrap="square" lIns="0" rIns="0" tIns="0" bIns="0" anchor="t">
+          <a:bodyPr wrap="square" lIns="0" tIns="0" rIns="0" bIns="0" anchor="t">
             <a:spAutoFit/>
           </a:bodyPr>
           <a:lstStyle/>
@@ -16191,7 +16562,7 @@
           <a:noFill/>
         </p:spPr>
         <p:txBody>
-          <a:bodyPr wrap="square" lIns="0" rIns="0" tIns="0" bIns="0" anchor="t">
+          <a:bodyPr wrap="square" lIns="0" tIns="0" rIns="0" bIns="0" anchor="t">
             <a:spAutoFit/>
           </a:bodyPr>
           <a:lstStyle/>
@@ -16226,7 +16597,7 @@
           <a:noFill/>
         </p:spPr>
         <p:txBody>
-          <a:bodyPr wrap="square" lIns="0" rIns="0" tIns="0" bIns="0" anchor="t">
+          <a:bodyPr wrap="square" lIns="0" tIns="0" rIns="0" bIns="0" anchor="t">
             <a:spAutoFit/>
           </a:bodyPr>
           <a:lstStyle/>

--- a/docs/presentation.pptx
+++ b/docs/presentation.pptx
@@ -5,23 +5,23 @@
     <p:sldMasterId id="2147483648" r:id="rId1"/>
   </p:sldMasterIdLst>
   <p:sldIdLst>
-    <p:sldId id="256" r:id="rId2"/>
-    <p:sldId id="257" r:id="rId3"/>
-    <p:sldId id="258" r:id="rId4"/>
-    <p:sldId id="259" r:id="rId5"/>
-    <p:sldId id="260" r:id="rId6"/>
-    <p:sldId id="261" r:id="rId7"/>
-    <p:sldId id="262" r:id="rId8"/>
-    <p:sldId id="263" r:id="rId9"/>
-    <p:sldId id="264" r:id="rId10"/>
-    <p:sldId id="265" r:id="rId11"/>
-    <p:sldId id="266" r:id="rId12"/>
-    <p:sldId id="267" r:id="rId13"/>
-    <p:sldId id="268" r:id="rId14"/>
-    <p:sldId id="269" r:id="rId15"/>
-    <p:sldId id="270" r:id="rId16"/>
+    <p:sldId id="256" r:id="rId7"/>
+    <p:sldId id="257" r:id="rId8"/>
+    <p:sldId id="258" r:id="rId9"/>
+    <p:sldId id="259" r:id="rId10"/>
+    <p:sldId id="260" r:id="rId11"/>
+    <p:sldId id="261" r:id="rId12"/>
+    <p:sldId id="262" r:id="rId13"/>
+    <p:sldId id="263" r:id="rId14"/>
+    <p:sldId id="264" r:id="rId15"/>
+    <p:sldId id="265" r:id="rId16"/>
+    <p:sldId id="266" r:id="rId17"/>
+    <p:sldId id="267" r:id="rId18"/>
+    <p:sldId id="268" r:id="rId19"/>
+    <p:sldId id="269" r:id="rId20"/>
+    <p:sldId id="270" r:id="rId21"/>
   </p:sldIdLst>
-  <p:sldSz cx="12192000" cy="6858000"/>
+  <p:sldSz cx="12191695" cy="6858000" type="screen4x3"/>
   <p:notesSz cx="6858000" cy="9144000"/>
   <p:defaultTextStyle>
     <a:defPPr>
@@ -118,22 +118,6 @@
       </a:defRPr>
     </a:lvl9pPr>
   </p:defaultTextStyle>
-  <p:extLst>
-    <p:ext uri="{EFAFB233-063F-42B5-8137-9DF3F51BA10A}">
-      <p15:sldGuideLst xmlns:p15="http://schemas.microsoft.com/office/powerpoint/2012/main">
-        <p15:guide id="1" orient="horz" pos="2160">
-          <p15:clr>
-            <a:srgbClr val="A4A3A4"/>
-          </p15:clr>
-        </p15:guide>
-        <p15:guide id="2" pos="2880">
-          <p15:clr>
-            <a:srgbClr val="A4A3A4"/>
-          </p15:clr>
-        </p15:guide>
-      </p15:sldGuideLst>
-    </p:ext>
-  </p:extLst>
 </p:presentation>
 </file>
 
@@ -175,9 +159,10 @@
           <a:lstStyle/>
           <a:p>
             <a:r>
-              <a:rPr lang="en-US"/>
+              <a:rPr lang="en-US" smtClean="0"/>
               <a:t>Click to edit Master title style</a:t>
             </a:r>
+            <a:endParaRPr lang="en-US"/>
           </a:p>
         </p:txBody>
       </p:sp>
@@ -293,9 +278,10 @@
           </a:lstStyle>
           <a:p>
             <a:r>
-              <a:rPr lang="en-US"/>
+              <a:rPr lang="en-US" smtClean="0"/>
               <a:t>Click to edit Master subtitle style</a:t>
             </a:r>
+            <a:endParaRPr lang="en-US"/>
           </a:p>
         </p:txBody>
       </p:sp>
@@ -316,7 +302,7 @@
           <a:p>
             <a:fld id="{5BCAD085-E8A6-8845-BD4E-CB4CCA059FC4}" type="datetimeFigureOut">
               <a:rPr lang="en-US" smtClean="0"/>
-              <a:t>7/16/2026</a:t>
+              <a:t>1/27/13</a:t>
             </a:fld>
             <a:endParaRPr lang="en-US"/>
           </a:p>
@@ -410,9 +396,10 @@
           <a:lstStyle/>
           <a:p>
             <a:r>
-              <a:rPr lang="en-US"/>
+              <a:rPr lang="en-US" smtClean="0"/>
               <a:t>Click to edit Master title style</a:t>
             </a:r>
+            <a:endParaRPr lang="en-US"/>
           </a:p>
         </p:txBody>
       </p:sp>
@@ -433,37 +420,38 @@
           <a:p>
             <a:pPr lvl="0"/>
             <a:r>
-              <a:rPr lang="en-US"/>
+              <a:rPr lang="en-US" smtClean="0"/>
               <a:t>Click to edit Master text styles</a:t>
             </a:r>
           </a:p>
           <a:p>
             <a:pPr lvl="1"/>
             <a:r>
-              <a:rPr lang="en-US"/>
+              <a:rPr lang="en-US" smtClean="0"/>
               <a:t>Second level</a:t>
             </a:r>
           </a:p>
           <a:p>
             <a:pPr lvl="2"/>
             <a:r>
-              <a:rPr lang="en-US"/>
+              <a:rPr lang="en-US" smtClean="0"/>
               <a:t>Third level</a:t>
             </a:r>
           </a:p>
           <a:p>
             <a:pPr lvl="3"/>
             <a:r>
-              <a:rPr lang="en-US"/>
+              <a:rPr lang="en-US" smtClean="0"/>
               <a:t>Fourth level</a:t>
             </a:r>
           </a:p>
           <a:p>
             <a:pPr lvl="4"/>
             <a:r>
-              <a:rPr lang="en-US"/>
+              <a:rPr lang="en-US" smtClean="0"/>
               <a:t>Fifth level</a:t>
             </a:r>
+            <a:endParaRPr lang="en-US"/>
           </a:p>
         </p:txBody>
       </p:sp>
@@ -484,7 +472,7 @@
           <a:p>
             <a:fld id="{5BCAD085-E8A6-8845-BD4E-CB4CCA059FC4}" type="datetimeFigureOut">
               <a:rPr lang="en-US" smtClean="0"/>
-              <a:t>7/16/2026</a:t>
+              <a:t>1/27/13</a:t>
             </a:fld>
             <a:endParaRPr lang="en-US"/>
           </a:p>
@@ -583,9 +571,10 @@
           <a:lstStyle/>
           <a:p>
             <a:r>
-              <a:rPr lang="en-US"/>
+              <a:rPr lang="en-US" smtClean="0"/>
               <a:t>Click to edit Master title style</a:t>
             </a:r>
+            <a:endParaRPr lang="en-US"/>
           </a:p>
         </p:txBody>
       </p:sp>
@@ -611,37 +600,38 @@
           <a:p>
             <a:pPr lvl="0"/>
             <a:r>
-              <a:rPr lang="en-US"/>
+              <a:rPr lang="en-US" smtClean="0"/>
               <a:t>Click to edit Master text styles</a:t>
             </a:r>
           </a:p>
           <a:p>
             <a:pPr lvl="1"/>
             <a:r>
-              <a:rPr lang="en-US"/>
+              <a:rPr lang="en-US" smtClean="0"/>
               <a:t>Second level</a:t>
             </a:r>
           </a:p>
           <a:p>
             <a:pPr lvl="2"/>
             <a:r>
-              <a:rPr lang="en-US"/>
+              <a:rPr lang="en-US" smtClean="0"/>
               <a:t>Third level</a:t>
             </a:r>
           </a:p>
           <a:p>
             <a:pPr lvl="3"/>
             <a:r>
-              <a:rPr lang="en-US"/>
+              <a:rPr lang="en-US" smtClean="0"/>
               <a:t>Fourth level</a:t>
             </a:r>
           </a:p>
           <a:p>
             <a:pPr lvl="4"/>
             <a:r>
-              <a:rPr lang="en-US"/>
+              <a:rPr lang="en-US" smtClean="0"/>
               <a:t>Fifth level</a:t>
             </a:r>
+            <a:endParaRPr lang="en-US"/>
           </a:p>
         </p:txBody>
       </p:sp>
@@ -662,7 +652,7 @@
           <a:p>
             <a:fld id="{5BCAD085-E8A6-8845-BD4E-CB4CCA059FC4}" type="datetimeFigureOut">
               <a:rPr lang="en-US" smtClean="0"/>
-              <a:t>7/16/2026</a:t>
+              <a:t>1/27/13</a:t>
             </a:fld>
             <a:endParaRPr lang="en-US"/>
           </a:p>
@@ -756,9 +746,10 @@
           <a:lstStyle/>
           <a:p>
             <a:r>
-              <a:rPr lang="en-US"/>
+              <a:rPr lang="en-US" smtClean="0"/>
               <a:t>Click to edit Master title style</a:t>
             </a:r>
+            <a:endParaRPr lang="en-US"/>
           </a:p>
         </p:txBody>
       </p:sp>
@@ -779,37 +770,38 @@
           <a:p>
             <a:pPr lvl="0"/>
             <a:r>
-              <a:rPr lang="en-US"/>
+              <a:rPr lang="en-US" smtClean="0"/>
               <a:t>Click to edit Master text styles</a:t>
             </a:r>
           </a:p>
           <a:p>
             <a:pPr lvl="1"/>
             <a:r>
-              <a:rPr lang="en-US"/>
+              <a:rPr lang="en-US" smtClean="0"/>
               <a:t>Second level</a:t>
             </a:r>
           </a:p>
           <a:p>
             <a:pPr lvl="2"/>
             <a:r>
-              <a:rPr lang="en-US"/>
+              <a:rPr lang="en-US" smtClean="0"/>
               <a:t>Third level</a:t>
             </a:r>
           </a:p>
           <a:p>
             <a:pPr lvl="3"/>
             <a:r>
-              <a:rPr lang="en-US"/>
+              <a:rPr lang="en-US" smtClean="0"/>
               <a:t>Fourth level</a:t>
             </a:r>
           </a:p>
           <a:p>
             <a:pPr lvl="4"/>
             <a:r>
-              <a:rPr lang="en-US"/>
+              <a:rPr lang="en-US" smtClean="0"/>
               <a:t>Fifth level</a:t>
             </a:r>
+            <a:endParaRPr lang="en-US"/>
           </a:p>
         </p:txBody>
       </p:sp>
@@ -830,7 +822,7 @@
           <a:p>
             <a:fld id="{5BCAD085-E8A6-8845-BD4E-CB4CCA059FC4}" type="datetimeFigureOut">
               <a:rPr lang="en-US" smtClean="0"/>
-              <a:t>7/16/2026</a:t>
+              <a:t>1/27/13</a:t>
             </a:fld>
             <a:endParaRPr lang="en-US"/>
           </a:p>
@@ -933,9 +925,10 @@
           </a:lstStyle>
           <a:p>
             <a:r>
-              <a:rPr lang="en-US"/>
+              <a:rPr lang="en-US" smtClean="0"/>
               <a:t>Click to edit Master title style</a:t>
             </a:r>
+            <a:endParaRPr lang="en-US"/>
           </a:p>
         </p:txBody>
       </p:sp>
@@ -1052,7 +1045,7 @@
           <a:p>
             <a:pPr lvl="0"/>
             <a:r>
-              <a:rPr lang="en-US"/>
+              <a:rPr lang="en-US" smtClean="0"/>
               <a:t>Click to edit Master text styles</a:t>
             </a:r>
           </a:p>
@@ -1075,7 +1068,7 @@
           <a:p>
             <a:fld id="{5BCAD085-E8A6-8845-BD4E-CB4CCA059FC4}" type="datetimeFigureOut">
               <a:rPr lang="en-US" smtClean="0"/>
-              <a:t>7/16/2026</a:t>
+              <a:t>1/27/13</a:t>
             </a:fld>
             <a:endParaRPr lang="en-US"/>
           </a:p>
@@ -1169,9 +1162,10 @@
           <a:lstStyle/>
           <a:p>
             <a:r>
-              <a:rPr lang="en-US"/>
+              <a:rPr lang="en-US" smtClean="0"/>
               <a:t>Click to edit Master title style</a:t>
             </a:r>
+            <a:endParaRPr lang="en-US"/>
           </a:p>
         </p:txBody>
       </p:sp>
@@ -1225,37 +1219,38 @@
           <a:p>
             <a:pPr lvl="0"/>
             <a:r>
-              <a:rPr lang="en-US"/>
+              <a:rPr lang="en-US" smtClean="0"/>
               <a:t>Click to edit Master text styles</a:t>
             </a:r>
           </a:p>
           <a:p>
             <a:pPr lvl="1"/>
             <a:r>
-              <a:rPr lang="en-US"/>
+              <a:rPr lang="en-US" smtClean="0"/>
               <a:t>Second level</a:t>
             </a:r>
           </a:p>
           <a:p>
             <a:pPr lvl="2"/>
             <a:r>
-              <a:rPr lang="en-US"/>
+              <a:rPr lang="en-US" smtClean="0"/>
               <a:t>Third level</a:t>
             </a:r>
           </a:p>
           <a:p>
             <a:pPr lvl="3"/>
             <a:r>
-              <a:rPr lang="en-US"/>
+              <a:rPr lang="en-US" smtClean="0"/>
               <a:t>Fourth level</a:t>
             </a:r>
           </a:p>
           <a:p>
             <a:pPr lvl="4"/>
             <a:r>
-              <a:rPr lang="en-US"/>
+              <a:rPr lang="en-US" smtClean="0"/>
               <a:t>Fifth level</a:t>
             </a:r>
+            <a:endParaRPr lang="en-US"/>
           </a:p>
         </p:txBody>
       </p:sp>
@@ -1309,37 +1304,38 @@
           <a:p>
             <a:pPr lvl="0"/>
             <a:r>
-              <a:rPr lang="en-US"/>
+              <a:rPr lang="en-US" smtClean="0"/>
               <a:t>Click to edit Master text styles</a:t>
             </a:r>
           </a:p>
           <a:p>
             <a:pPr lvl="1"/>
             <a:r>
-              <a:rPr lang="en-US"/>
+              <a:rPr lang="en-US" smtClean="0"/>
               <a:t>Second level</a:t>
             </a:r>
           </a:p>
           <a:p>
             <a:pPr lvl="2"/>
             <a:r>
-              <a:rPr lang="en-US"/>
+              <a:rPr lang="en-US" smtClean="0"/>
               <a:t>Third level</a:t>
             </a:r>
           </a:p>
           <a:p>
             <a:pPr lvl="3"/>
             <a:r>
-              <a:rPr lang="en-US"/>
+              <a:rPr lang="en-US" smtClean="0"/>
               <a:t>Fourth level</a:t>
             </a:r>
           </a:p>
           <a:p>
             <a:pPr lvl="4"/>
             <a:r>
-              <a:rPr lang="en-US"/>
+              <a:rPr lang="en-US" smtClean="0"/>
               <a:t>Fifth level</a:t>
             </a:r>
+            <a:endParaRPr lang="en-US"/>
           </a:p>
         </p:txBody>
       </p:sp>
@@ -1360,7 +1356,7 @@
           <a:p>
             <a:fld id="{5BCAD085-E8A6-8845-BD4E-CB4CCA059FC4}" type="datetimeFigureOut">
               <a:rPr lang="en-US" smtClean="0"/>
-              <a:t>7/16/2026</a:t>
+              <a:t>1/27/13</a:t>
             </a:fld>
             <a:endParaRPr lang="en-US"/>
           </a:p>
@@ -1458,9 +1454,10 @@
           </a:lstStyle>
           <a:p>
             <a:r>
-              <a:rPr lang="en-US"/>
+              <a:rPr lang="en-US" smtClean="0"/>
               <a:t>Click to edit Master title style</a:t>
             </a:r>
+            <a:endParaRPr lang="en-US"/>
           </a:p>
         </p:txBody>
       </p:sp>
@@ -1523,7 +1520,7 @@
           <a:p>
             <a:pPr lvl="0"/>
             <a:r>
-              <a:rPr lang="en-US"/>
+              <a:rPr lang="en-US" smtClean="0"/>
               <a:t>Click to edit Master text styles</a:t>
             </a:r>
           </a:p>
@@ -1579,37 +1576,38 @@
           <a:p>
             <a:pPr lvl="0"/>
             <a:r>
-              <a:rPr lang="en-US"/>
+              <a:rPr lang="en-US" smtClean="0"/>
               <a:t>Click to edit Master text styles</a:t>
             </a:r>
           </a:p>
           <a:p>
             <a:pPr lvl="1"/>
             <a:r>
-              <a:rPr lang="en-US"/>
+              <a:rPr lang="en-US" smtClean="0"/>
               <a:t>Second level</a:t>
             </a:r>
           </a:p>
           <a:p>
             <a:pPr lvl="2"/>
             <a:r>
-              <a:rPr lang="en-US"/>
+              <a:rPr lang="en-US" smtClean="0"/>
               <a:t>Third level</a:t>
             </a:r>
           </a:p>
           <a:p>
             <a:pPr lvl="3"/>
             <a:r>
-              <a:rPr lang="en-US"/>
+              <a:rPr lang="en-US" smtClean="0"/>
               <a:t>Fourth level</a:t>
             </a:r>
           </a:p>
           <a:p>
             <a:pPr lvl="4"/>
             <a:r>
-              <a:rPr lang="en-US"/>
+              <a:rPr lang="en-US" smtClean="0"/>
               <a:t>Fifth level</a:t>
             </a:r>
+            <a:endParaRPr lang="en-US"/>
           </a:p>
         </p:txBody>
       </p:sp>
@@ -1672,7 +1670,7 @@
           <a:p>
             <a:pPr lvl="0"/>
             <a:r>
-              <a:rPr lang="en-US"/>
+              <a:rPr lang="en-US" smtClean="0"/>
               <a:t>Click to edit Master text styles</a:t>
             </a:r>
           </a:p>
@@ -1728,37 +1726,38 @@
           <a:p>
             <a:pPr lvl="0"/>
             <a:r>
-              <a:rPr lang="en-US"/>
+              <a:rPr lang="en-US" smtClean="0"/>
               <a:t>Click to edit Master text styles</a:t>
             </a:r>
           </a:p>
           <a:p>
             <a:pPr lvl="1"/>
             <a:r>
-              <a:rPr lang="en-US"/>
+              <a:rPr lang="en-US" smtClean="0"/>
               <a:t>Second level</a:t>
             </a:r>
           </a:p>
           <a:p>
             <a:pPr lvl="2"/>
             <a:r>
-              <a:rPr lang="en-US"/>
+              <a:rPr lang="en-US" smtClean="0"/>
               <a:t>Third level</a:t>
             </a:r>
           </a:p>
           <a:p>
             <a:pPr lvl="3"/>
             <a:r>
-              <a:rPr lang="en-US"/>
+              <a:rPr lang="en-US" smtClean="0"/>
               <a:t>Fourth level</a:t>
             </a:r>
           </a:p>
           <a:p>
             <a:pPr lvl="4"/>
             <a:r>
-              <a:rPr lang="en-US"/>
+              <a:rPr lang="en-US" smtClean="0"/>
               <a:t>Fifth level</a:t>
             </a:r>
+            <a:endParaRPr lang="en-US"/>
           </a:p>
         </p:txBody>
       </p:sp>
@@ -1779,7 +1778,7 @@
           <a:p>
             <a:fld id="{5BCAD085-E8A6-8845-BD4E-CB4CCA059FC4}" type="datetimeFigureOut">
               <a:rPr lang="en-US" smtClean="0"/>
-              <a:t>7/16/2026</a:t>
+              <a:t>1/27/13</a:t>
             </a:fld>
             <a:endParaRPr lang="en-US"/>
           </a:p>
@@ -1873,9 +1872,10 @@
           <a:lstStyle/>
           <a:p>
             <a:r>
-              <a:rPr lang="en-US"/>
+              <a:rPr lang="en-US" smtClean="0"/>
               <a:t>Click to edit Master title style</a:t>
             </a:r>
+            <a:endParaRPr lang="en-US"/>
           </a:p>
         </p:txBody>
       </p:sp>
@@ -1896,7 +1896,7 @@
           <a:p>
             <a:fld id="{5BCAD085-E8A6-8845-BD4E-CB4CCA059FC4}" type="datetimeFigureOut">
               <a:rPr lang="en-US" smtClean="0"/>
-              <a:t>7/16/2026</a:t>
+              <a:t>1/27/13</a:t>
             </a:fld>
             <a:endParaRPr lang="en-US"/>
           </a:p>
@@ -1991,7 +1991,7 @@
           <a:p>
             <a:fld id="{5BCAD085-E8A6-8845-BD4E-CB4CCA059FC4}" type="datetimeFigureOut">
               <a:rPr lang="en-US" smtClean="0"/>
-              <a:t>7/16/2026</a:t>
+              <a:t>1/27/13</a:t>
             </a:fld>
             <a:endParaRPr lang="en-US"/>
           </a:p>
@@ -2094,9 +2094,10 @@
           </a:lstStyle>
           <a:p>
             <a:r>
-              <a:rPr lang="en-US"/>
+              <a:rPr lang="en-US" smtClean="0"/>
               <a:t>Click to edit Master title style</a:t>
             </a:r>
+            <a:endParaRPr lang="en-US"/>
           </a:p>
         </p:txBody>
       </p:sp>
@@ -2150,37 +2151,38 @@
           <a:p>
             <a:pPr lvl="0"/>
             <a:r>
-              <a:rPr lang="en-US"/>
+              <a:rPr lang="en-US" smtClean="0"/>
               <a:t>Click to edit Master text styles</a:t>
             </a:r>
           </a:p>
           <a:p>
             <a:pPr lvl="1"/>
             <a:r>
-              <a:rPr lang="en-US"/>
+              <a:rPr lang="en-US" smtClean="0"/>
               <a:t>Second level</a:t>
             </a:r>
           </a:p>
           <a:p>
             <a:pPr lvl="2"/>
             <a:r>
-              <a:rPr lang="en-US"/>
+              <a:rPr lang="en-US" smtClean="0"/>
               <a:t>Third level</a:t>
             </a:r>
           </a:p>
           <a:p>
             <a:pPr lvl="3"/>
             <a:r>
-              <a:rPr lang="en-US"/>
+              <a:rPr lang="en-US" smtClean="0"/>
               <a:t>Fourth level</a:t>
             </a:r>
           </a:p>
           <a:p>
             <a:pPr lvl="4"/>
             <a:r>
-              <a:rPr lang="en-US"/>
+              <a:rPr lang="en-US" smtClean="0"/>
               <a:t>Fifth level</a:t>
             </a:r>
+            <a:endParaRPr lang="en-US"/>
           </a:p>
         </p:txBody>
       </p:sp>
@@ -2243,7 +2245,7 @@
           <a:p>
             <a:pPr lvl="0"/>
             <a:r>
-              <a:rPr lang="en-US"/>
+              <a:rPr lang="en-US" smtClean="0"/>
               <a:t>Click to edit Master text styles</a:t>
             </a:r>
           </a:p>
@@ -2266,7 +2268,7 @@
           <a:p>
             <a:fld id="{5BCAD085-E8A6-8845-BD4E-CB4CCA059FC4}" type="datetimeFigureOut">
               <a:rPr lang="en-US" smtClean="0"/>
-              <a:t>7/16/2026</a:t>
+              <a:t>1/27/13</a:t>
             </a:fld>
             <a:endParaRPr lang="en-US"/>
           </a:p>
@@ -2369,9 +2371,10 @@
           </a:lstStyle>
           <a:p>
             <a:r>
-              <a:rPr lang="en-US"/>
+              <a:rPr lang="en-US" smtClean="0"/>
               <a:t>Click to edit Master title style</a:t>
             </a:r>
+            <a:endParaRPr lang="en-US"/>
           </a:p>
         </p:txBody>
       </p:sp>
@@ -2495,7 +2498,7 @@
           <a:p>
             <a:pPr lvl="0"/>
             <a:r>
-              <a:rPr lang="en-US"/>
+              <a:rPr lang="en-US" smtClean="0"/>
               <a:t>Click to edit Master text styles</a:t>
             </a:r>
           </a:p>
@@ -2518,7 +2521,7 @@
           <a:p>
             <a:fld id="{5BCAD085-E8A6-8845-BD4E-CB4CCA059FC4}" type="datetimeFigureOut">
               <a:rPr lang="en-US" smtClean="0"/>
-              <a:t>7/16/2026</a:t>
+              <a:t>1/27/13</a:t>
             </a:fld>
             <a:endParaRPr lang="en-US"/>
           </a:p>
@@ -2627,9 +2630,10 @@
           <a:lstStyle/>
           <a:p>
             <a:r>
-              <a:rPr lang="en-US"/>
+              <a:rPr lang="en-US" smtClean="0"/>
               <a:t>Click to edit Master title style</a:t>
             </a:r>
+            <a:endParaRPr lang="en-US"/>
           </a:p>
         </p:txBody>
       </p:sp>
@@ -2660,37 +2664,38 @@
           <a:p>
             <a:pPr lvl="0"/>
             <a:r>
-              <a:rPr lang="en-US"/>
+              <a:rPr lang="en-US" smtClean="0"/>
               <a:t>Click to edit Master text styles</a:t>
             </a:r>
           </a:p>
           <a:p>
             <a:pPr lvl="1"/>
             <a:r>
-              <a:rPr lang="en-US"/>
+              <a:rPr lang="en-US" smtClean="0"/>
               <a:t>Second level</a:t>
             </a:r>
           </a:p>
           <a:p>
             <a:pPr lvl="2"/>
             <a:r>
-              <a:rPr lang="en-US"/>
+              <a:rPr lang="en-US" smtClean="0"/>
               <a:t>Third level</a:t>
             </a:r>
           </a:p>
           <a:p>
             <a:pPr lvl="3"/>
             <a:r>
-              <a:rPr lang="en-US"/>
+              <a:rPr lang="en-US" smtClean="0"/>
               <a:t>Fourth level</a:t>
             </a:r>
           </a:p>
           <a:p>
             <a:pPr lvl="4"/>
             <a:r>
-              <a:rPr lang="en-US"/>
+              <a:rPr lang="en-US" smtClean="0"/>
               <a:t>Fifth level</a:t>
             </a:r>
+            <a:endParaRPr lang="en-US"/>
           </a:p>
         </p:txBody>
       </p:sp>
@@ -2729,7 +2734,7 @@
           <a:p>
             <a:fld id="{5BCAD085-E8A6-8845-BD4E-CB4CCA059FC4}" type="datetimeFigureOut">
               <a:rPr lang="en-US" smtClean="0"/>
-              <a:t>7/16/2026</a:t>
+              <a:t>1/27/13</a:t>
             </a:fld>
             <a:endParaRPr lang="en-US"/>
           </a:p>
@@ -3088,7 +3093,7 @@
 </file>
 
 <file path=ppt/slides/slide1.xml><?xml version="1.0" encoding="utf-8"?>
-<p:sld xmlns:a="http://schemas.openxmlformats.org/drawingml/2006/main" xmlns:r="http://schemas.openxmlformats.org/officeDocument/2006/relationships" xmlns:p="http://schemas.openxmlformats.org/presentationml/2006/main">
+<p:sld xmlns:a="http://schemas.openxmlformats.org/drawingml/2006/main" xmlns:p="http://schemas.openxmlformats.org/presentationml/2006/main" xmlns:r="http://schemas.openxmlformats.org/officeDocument/2006/relationships">
   <p:cSld>
     <p:bg>
       <p:bgPr>
@@ -3104,14 +3109,7 @@
         <p:cNvGrpSpPr/>
         <p:nvPr/>
       </p:nvGrpSpPr>
-      <p:grpSpPr>
-        <a:xfrm>
-          <a:off x="0" y="0"/>
-          <a:ext cx="0" cy="0"/>
-          <a:chOff x="0" y="0"/>
-          <a:chExt cx="0" cy="0"/>
-        </a:xfrm>
-      </p:grpSpPr>
+      <p:grpSpPr/>
       <p:sp>
         <p:nvSpPr>
           <p:cNvPr id="2" name="Rectangle 1"/>
@@ -3153,7 +3151,6 @@
           <a:lstStyle/>
           <a:p>
             <a:pPr algn="ctr"/>
-            <a:endParaRPr/>
           </a:p>
         </p:txBody>
       </p:sp>
@@ -3198,7 +3195,6 @@
           <a:lstStyle/>
           <a:p>
             <a:pPr algn="ctr"/>
-            <a:endParaRPr/>
           </a:p>
         </p:txBody>
       </p:sp>
@@ -3243,7 +3239,6 @@
           <a:lstStyle/>
           <a:p>
             <a:pPr algn="ctr"/>
-            <a:endParaRPr/>
           </a:p>
         </p:txBody>
       </p:sp>
@@ -3288,7 +3283,6 @@
           <a:lstStyle/>
           <a:p>
             <a:pPr algn="ctr"/>
-            <a:endParaRPr/>
           </a:p>
         </p:txBody>
       </p:sp>
@@ -3333,7 +3327,6 @@
           <a:lstStyle/>
           <a:p>
             <a:pPr algn="ctr"/>
-            <a:endParaRPr/>
           </a:p>
         </p:txBody>
       </p:sp>
@@ -3354,7 +3347,7 @@
           <a:noFill/>
         </p:spPr>
         <p:txBody>
-          <a:bodyPr wrap="square" lIns="0" tIns="0" rIns="0" bIns="0" anchor="t">
+          <a:bodyPr wrap="square" lIns="0" rIns="0" tIns="0" bIns="0" anchor="t">
             <a:spAutoFit/>
           </a:bodyPr>
           <a:lstStyle/>
@@ -3389,7 +3382,7 @@
           <a:noFill/>
         </p:spPr>
         <p:txBody>
-          <a:bodyPr wrap="square" lIns="0" tIns="0" rIns="0" bIns="0" anchor="t">
+          <a:bodyPr wrap="square" lIns="0" rIns="0" tIns="0" bIns="0" anchor="t">
             <a:spAutoFit/>
           </a:bodyPr>
           <a:lstStyle/>
@@ -3424,7 +3417,7 @@
           <a:noFill/>
         </p:spPr>
         <p:txBody>
-          <a:bodyPr wrap="square" lIns="0" tIns="0" rIns="0" bIns="0" anchor="t">
+          <a:bodyPr wrap="square" lIns="0" rIns="0" tIns="0" bIns="0" anchor="t">
             <a:spAutoFit/>
           </a:bodyPr>
           <a:lstStyle/>
@@ -3459,7 +3452,7 @@
           <a:noFill/>
         </p:spPr>
         <p:txBody>
-          <a:bodyPr wrap="square" lIns="0" tIns="0" rIns="0" bIns="0" anchor="t">
+          <a:bodyPr wrap="square" lIns="0" rIns="0" tIns="0" bIns="0" anchor="t">
             <a:spAutoFit/>
           </a:bodyPr>
           <a:lstStyle/>
@@ -3486,7 +3479,7 @@
         <p:spPr>
           <a:xfrm>
             <a:off x="1097280" y="5806440"/>
-            <a:ext cx="10058400" cy="762773"/>
+            <a:ext cx="10058400" cy="731520"/>
           </a:xfrm>
           <a:prstGeom prst="rect">
             <a:avLst/>
@@ -3505,29 +3498,14 @@
               </a:lnSpc>
             </a:pPr>
             <a:r>
-              <a:rPr sz="1300" b="0" dirty="0">
+              <a:rPr sz="1300" b="0">
                 <a:solidFill>
                   <a:srgbClr val="0A0A0A"/>
                 </a:solidFill>
                 <a:latin typeface="Segoe UI"/>
               </a:rPr>
-              <a:t>Мамонтов Иван </a:t>
-            </a:r>
-            <a:r>
-              <a:rPr sz="1300" b="0" dirty="0" err="1">
-                <a:solidFill>
-                  <a:srgbClr val="0A0A0A"/>
-                </a:solidFill>
-                <a:latin typeface="Segoe UI"/>
-              </a:rPr>
-              <a:t>Андреевич</a:t>
-            </a:r>
-            <a:endParaRPr sz="1300" b="0" dirty="0">
-              <a:solidFill>
-                <a:srgbClr val="0A0A0A"/>
-              </a:solidFill>
-              <a:latin typeface="Segoe UI"/>
-            </a:endParaRPr>
+              <a:t>Мамонтов Иван Андреевич</a:t>
+            </a:r>
           </a:p>
           <a:p>
             <a:pPr algn="l">
@@ -3536,47 +3514,14 @@
               </a:lnSpc>
             </a:pPr>
             <a:r>
-              <a:rPr sz="1300" b="0" dirty="0" err="1">
+              <a:rPr sz="1300" b="0">
                 <a:solidFill>
                   <a:srgbClr val="0A0A0A"/>
                 </a:solidFill>
                 <a:latin typeface="Segoe UI"/>
               </a:rPr>
-              <a:t>Кривонос</a:t>
-            </a:r>
-            <a:r>
-              <a:rPr sz="1300" b="0" dirty="0">
-                <a:solidFill>
-                  <a:srgbClr val="0A0A0A"/>
-                </a:solidFill>
-                <a:latin typeface="Segoe UI"/>
-              </a:rPr>
-              <a:t> </a:t>
-            </a:r>
-            <a:r>
-              <a:rPr sz="1300" b="0" dirty="0" err="1">
-                <a:solidFill>
-                  <a:srgbClr val="0A0A0A"/>
-                </a:solidFill>
-                <a:latin typeface="Segoe UI"/>
-              </a:rPr>
-              <a:t>Никита</a:t>
-            </a:r>
-            <a:r>
-              <a:rPr lang="ru-RU" sz="1300" b="0" dirty="0">
-                <a:solidFill>
-                  <a:srgbClr val="0A0A0A"/>
-                </a:solidFill>
-                <a:latin typeface="Segoe UI"/>
-              </a:rPr>
-              <a:t> Николаевич</a:t>
-            </a:r>
-            <a:endParaRPr sz="1300" b="0" dirty="0">
-              <a:solidFill>
-                <a:srgbClr val="0A0A0A"/>
-              </a:solidFill>
-              <a:latin typeface="Segoe UI"/>
-            </a:endParaRPr>
+              <a:t>Кривонос Никита</a:t>
+            </a:r>
           </a:p>
           <a:p>
             <a:pPr algn="l">
@@ -3585,58 +3530,13 @@
               </a:lnSpc>
             </a:pPr>
             <a:r>
-              <a:rPr sz="1300" b="0" dirty="0" err="1">
+              <a:rPr sz="1300" b="0">
                 <a:solidFill>
                   <a:srgbClr val="0A0A0A"/>
                 </a:solidFill>
                 <a:latin typeface="Segoe UI"/>
               </a:rPr>
-              <a:t>Руководитель</a:t>
-            </a:r>
-            <a:r>
-              <a:rPr sz="1300" b="0" dirty="0">
-                <a:solidFill>
-                  <a:srgbClr val="0A0A0A"/>
-                </a:solidFill>
-                <a:latin typeface="Segoe UI"/>
-              </a:rPr>
-              <a:t> </a:t>
-            </a:r>
-            <a:r>
-              <a:rPr sz="1300" b="0" dirty="0" err="1">
-                <a:solidFill>
-                  <a:srgbClr val="0A0A0A"/>
-                </a:solidFill>
-                <a:latin typeface="Segoe UI"/>
-              </a:rPr>
-              <a:t>практики</a:t>
-            </a:r>
-            <a:r>
-              <a:rPr sz="1300" b="0" dirty="0">
-                <a:solidFill>
-                  <a:srgbClr val="0A0A0A"/>
-                </a:solidFill>
-                <a:latin typeface="Segoe UI"/>
-              </a:rPr>
-              <a:t>: </a:t>
-            </a:r>
-            <a:r>
-              <a:rPr sz="1300" b="0" dirty="0" err="1">
-                <a:solidFill>
-                  <a:srgbClr val="0A0A0A"/>
-                </a:solidFill>
-                <a:latin typeface="Segoe UI"/>
-              </a:rPr>
-              <a:t>Чумакова</a:t>
-            </a:r>
-            <a:r>
-              <a:rPr sz="1300" b="0" dirty="0">
-                <a:solidFill>
-                  <a:srgbClr val="0A0A0A"/>
-                </a:solidFill>
-                <a:latin typeface="Segoe UI"/>
-              </a:rPr>
-              <a:t> М. Ю.</a:t>
+              <a:t>Руководитель практики: Чумакова М. Ю.</a:t>
             </a:r>
           </a:p>
         </p:txBody>
@@ -3650,7 +3550,7 @@
 </file>
 
 <file path=ppt/slides/slide10.xml><?xml version="1.0" encoding="utf-8"?>
-<p:sld xmlns:a="http://schemas.openxmlformats.org/drawingml/2006/main" xmlns:r="http://schemas.openxmlformats.org/officeDocument/2006/relationships" xmlns:p="http://schemas.openxmlformats.org/presentationml/2006/main">
+<p:sld xmlns:a="http://schemas.openxmlformats.org/drawingml/2006/main" xmlns:p="http://schemas.openxmlformats.org/presentationml/2006/main" xmlns:r="http://schemas.openxmlformats.org/officeDocument/2006/relationships">
   <p:cSld>
     <p:bg>
       <p:bgPr>
@@ -3666,14 +3566,7 @@
         <p:cNvGrpSpPr/>
         <p:nvPr/>
       </p:nvGrpSpPr>
-      <p:grpSpPr>
-        <a:xfrm>
-          <a:off x="0" y="0"/>
-          <a:ext cx="0" cy="0"/>
-          <a:chOff x="0" y="0"/>
-          <a:chExt cx="0" cy="0"/>
-        </a:xfrm>
-      </p:grpSpPr>
+      <p:grpSpPr/>
       <p:sp>
         <p:nvSpPr>
           <p:cNvPr id="2" name="Rectangle 1"/>
@@ -3715,7 +3608,6 @@
           <a:lstStyle/>
           <a:p>
             <a:pPr algn="ctr"/>
-            <a:endParaRPr/>
           </a:p>
         </p:txBody>
       </p:sp>
@@ -3760,7 +3652,6 @@
           <a:lstStyle/>
           <a:p>
             <a:pPr algn="ctr"/>
-            <a:endParaRPr/>
           </a:p>
         </p:txBody>
       </p:sp>
@@ -3805,7 +3696,6 @@
           <a:lstStyle/>
           <a:p>
             <a:pPr algn="ctr"/>
-            <a:endParaRPr/>
           </a:p>
         </p:txBody>
       </p:sp>
@@ -3850,7 +3740,6 @@
           <a:lstStyle/>
           <a:p>
             <a:pPr algn="ctr"/>
-            <a:endParaRPr/>
           </a:p>
         </p:txBody>
       </p:sp>
@@ -3871,7 +3760,7 @@
           <a:noFill/>
         </p:spPr>
         <p:txBody>
-          <a:bodyPr wrap="square" lIns="0" tIns="0" rIns="0" bIns="0" anchor="t">
+          <a:bodyPr wrap="square" lIns="0" rIns="0" tIns="0" bIns="0" anchor="t">
             <a:spAutoFit/>
           </a:bodyPr>
           <a:lstStyle/>
@@ -3884,7 +3773,7 @@
                 </a:solidFill>
                 <a:latin typeface="Consolas"/>
               </a:rPr>
-              <a:t>08  ·  ПОИСК ПО СООБЩЕНИЯМ</a:t>
+              <a:t>10  ·  ПОИСК ПО СООБЩЕНИЯМ</a:t>
             </a:r>
           </a:p>
         </p:txBody>
@@ -3906,7 +3795,7 @@
           <a:noFill/>
         </p:spPr>
         <p:txBody>
-          <a:bodyPr wrap="square" lIns="0" tIns="0" rIns="0" bIns="0" anchor="t">
+          <a:bodyPr wrap="square" lIns="0" rIns="0" tIns="0" bIns="0" anchor="t">
             <a:spAutoFit/>
           </a:bodyPr>
           <a:lstStyle/>
@@ -3965,7 +3854,6 @@
           <a:lstStyle/>
           <a:p>
             <a:pPr algn="ctr"/>
-            <a:endParaRPr/>
           </a:p>
         </p:txBody>
       </p:sp>
@@ -4081,7 +3969,6 @@
           <a:lstStyle/>
           <a:p>
             <a:pPr algn="ctr"/>
-            <a:endParaRPr/>
           </a:p>
         </p:txBody>
       </p:sp>
@@ -4102,7 +3989,7 @@
           <a:noFill/>
         </p:spPr>
         <p:txBody>
-          <a:bodyPr wrap="square" lIns="0" tIns="0" rIns="0" bIns="0" anchor="t">
+          <a:bodyPr wrap="square" lIns="0" rIns="0" tIns="0" bIns="0" anchor="t">
             <a:spAutoFit/>
           </a:bodyPr>
           <a:lstStyle/>
@@ -4137,7 +4024,7 @@
           <a:noFill/>
         </p:spPr>
         <p:txBody>
-          <a:bodyPr wrap="square" lIns="0" tIns="0" rIns="0" bIns="0" anchor="t">
+          <a:bodyPr wrap="square" lIns="0" rIns="0" tIns="0" bIns="0" anchor="t">
             <a:spAutoFit/>
           </a:bodyPr>
           <a:lstStyle/>
@@ -4196,7 +4083,6 @@
           <a:lstStyle/>
           <a:p>
             <a:pPr algn="ctr"/>
-            <a:endParaRPr/>
           </a:p>
         </p:txBody>
       </p:sp>
@@ -4241,7 +4127,6 @@
           <a:lstStyle/>
           <a:p>
             <a:pPr algn="ctr"/>
-            <a:endParaRPr/>
           </a:p>
         </p:txBody>
       </p:sp>
@@ -4262,7 +4147,7 @@
           <a:noFill/>
         </p:spPr>
         <p:txBody>
-          <a:bodyPr wrap="square" lIns="0" tIns="0" rIns="0" bIns="0" anchor="t">
+          <a:bodyPr wrap="square" lIns="0" rIns="0" tIns="0" bIns="0" anchor="t">
             <a:spAutoFit/>
           </a:bodyPr>
           <a:lstStyle/>
@@ -4297,7 +4182,7 @@
           <a:noFill/>
         </p:spPr>
         <p:txBody>
-          <a:bodyPr wrap="square" lIns="0" tIns="0" rIns="0" bIns="0" anchor="t">
+          <a:bodyPr wrap="square" lIns="0" rIns="0" tIns="0" bIns="0" anchor="t">
             <a:spAutoFit/>
           </a:bodyPr>
           <a:lstStyle/>
@@ -4356,7 +4241,6 @@
           <a:lstStyle/>
           <a:p>
             <a:pPr algn="ctr"/>
-            <a:endParaRPr/>
           </a:p>
         </p:txBody>
       </p:sp>
@@ -4377,7 +4261,7 @@
           <a:noFill/>
         </p:spPr>
         <p:txBody>
-          <a:bodyPr wrap="square" lIns="0" tIns="0" rIns="0" bIns="0" anchor="t">
+          <a:bodyPr wrap="square" lIns="0" rIns="0" tIns="0" bIns="0" anchor="t">
             <a:spAutoFit/>
           </a:bodyPr>
           <a:lstStyle/>
@@ -4412,7 +4296,7 @@
           <a:noFill/>
         </p:spPr>
         <p:txBody>
-          <a:bodyPr wrap="square" lIns="0" tIns="0" rIns="0" bIns="0" anchor="t">
+          <a:bodyPr wrap="square" lIns="0" rIns="0" tIns="0" bIns="0" anchor="t">
             <a:spAutoFit/>
           </a:bodyPr>
           <a:lstStyle/>
@@ -4447,7 +4331,7 @@
           <a:noFill/>
         </p:spPr>
         <p:txBody>
-          <a:bodyPr wrap="square" lIns="0" tIns="0" rIns="0" bIns="0" anchor="t">
+          <a:bodyPr wrap="square" lIns="0" rIns="0" tIns="0" bIns="0" anchor="t">
             <a:spAutoFit/>
           </a:bodyPr>
           <a:lstStyle/>
@@ -4482,7 +4366,7 @@
           <a:noFill/>
         </p:spPr>
         <p:txBody>
-          <a:bodyPr wrap="square" lIns="0" tIns="0" rIns="0" bIns="0" anchor="t">
+          <a:bodyPr wrap="square" lIns="0" rIns="0" tIns="0" bIns="0" anchor="t">
             <a:spAutoFit/>
           </a:bodyPr>
           <a:lstStyle/>
@@ -4509,7 +4393,7 @@
 </file>
 
 <file path=ppt/slides/slide11.xml><?xml version="1.0" encoding="utf-8"?>
-<p:sld xmlns:a="http://schemas.openxmlformats.org/drawingml/2006/main" xmlns:r="http://schemas.openxmlformats.org/officeDocument/2006/relationships" xmlns:p="http://schemas.openxmlformats.org/presentationml/2006/main">
+<p:sld xmlns:a="http://schemas.openxmlformats.org/drawingml/2006/main" xmlns:p="http://schemas.openxmlformats.org/presentationml/2006/main" xmlns:r="http://schemas.openxmlformats.org/officeDocument/2006/relationships">
   <p:cSld>
     <p:bg>
       <p:bgPr>
@@ -4525,14 +4409,7 @@
         <p:cNvGrpSpPr/>
         <p:nvPr/>
       </p:nvGrpSpPr>
-      <p:grpSpPr>
-        <a:xfrm>
-          <a:off x="0" y="0"/>
-          <a:ext cx="0" cy="0"/>
-          <a:chOff x="0" y="0"/>
-          <a:chExt cx="0" cy="0"/>
-        </a:xfrm>
-      </p:grpSpPr>
+      <p:grpSpPr/>
       <p:sp>
         <p:nvSpPr>
           <p:cNvPr id="2" name="Rectangle 1"/>
@@ -4574,7 +4451,6 @@
           <a:lstStyle/>
           <a:p>
             <a:pPr algn="ctr"/>
-            <a:endParaRPr/>
           </a:p>
         </p:txBody>
       </p:sp>
@@ -4619,7 +4495,6 @@
           <a:lstStyle/>
           <a:p>
             <a:pPr algn="ctr"/>
-            <a:endParaRPr/>
           </a:p>
         </p:txBody>
       </p:sp>
@@ -4664,7 +4539,6 @@
           <a:lstStyle/>
           <a:p>
             <a:pPr algn="ctr"/>
-            <a:endParaRPr/>
           </a:p>
         </p:txBody>
       </p:sp>
@@ -4709,7 +4583,6 @@
           <a:lstStyle/>
           <a:p>
             <a:pPr algn="ctr"/>
-            <a:endParaRPr/>
           </a:p>
         </p:txBody>
       </p:sp>
@@ -4730,7 +4603,7 @@
           <a:noFill/>
         </p:spPr>
         <p:txBody>
-          <a:bodyPr wrap="square" lIns="0" tIns="0" rIns="0" bIns="0" anchor="t">
+          <a:bodyPr wrap="square" lIns="0" rIns="0" tIns="0" bIns="0" anchor="t">
             <a:spAutoFit/>
           </a:bodyPr>
           <a:lstStyle/>
@@ -4743,7 +4616,7 @@
                 </a:solidFill>
                 <a:latin typeface="Consolas"/>
               </a:rPr>
-              <a:t>09  ·  ВХОД И БЕЗОПАСНОСТЬ</a:t>
+              <a:t>11  ·  ВХОД И БЕЗОПАСНОСТЬ</a:t>
             </a:r>
           </a:p>
         </p:txBody>
@@ -4765,7 +4638,7 @@
           <a:noFill/>
         </p:spPr>
         <p:txBody>
-          <a:bodyPr wrap="square" lIns="0" tIns="0" rIns="0" bIns="0" anchor="t">
+          <a:bodyPr wrap="square" lIns="0" rIns="0" tIns="0" bIns="0" anchor="t">
             <a:spAutoFit/>
           </a:bodyPr>
           <a:lstStyle/>
@@ -4824,7 +4697,6 @@
           <a:lstStyle/>
           <a:p>
             <a:pPr algn="ctr"/>
-            <a:endParaRPr/>
           </a:p>
         </p:txBody>
       </p:sp>
@@ -4916,7 +4788,7 @@
           <a:noFill/>
         </p:spPr>
         <p:txBody>
-          <a:bodyPr wrap="square" lIns="0" tIns="0" rIns="0" bIns="0" anchor="t">
+          <a:bodyPr wrap="square" lIns="0" rIns="0" tIns="0" bIns="0" anchor="t">
             <a:spAutoFit/>
           </a:bodyPr>
           <a:lstStyle/>
@@ -5054,7 +4926,7 @@
           <a:noFill/>
         </p:spPr>
         <p:txBody>
-          <a:bodyPr wrap="square" lIns="0" tIns="0" rIns="0" bIns="0" anchor="t">
+          <a:bodyPr wrap="square" lIns="0" rIns="0" tIns="0" bIns="0" anchor="t">
             <a:spAutoFit/>
           </a:bodyPr>
           <a:lstStyle/>
@@ -5089,7 +4961,7 @@
           <a:noFill/>
         </p:spPr>
         <p:txBody>
-          <a:bodyPr wrap="square" lIns="0" tIns="0" rIns="0" bIns="0" anchor="t">
+          <a:bodyPr wrap="square" lIns="0" rIns="0" tIns="0" bIns="0" anchor="t">
             <a:spAutoFit/>
           </a:bodyPr>
           <a:lstStyle/>
@@ -5116,7 +4988,7 @@
 </file>
 
 <file path=ppt/slides/slide12.xml><?xml version="1.0" encoding="utf-8"?>
-<p:sld xmlns:a="http://schemas.openxmlformats.org/drawingml/2006/main" xmlns:r="http://schemas.openxmlformats.org/officeDocument/2006/relationships" xmlns:p="http://schemas.openxmlformats.org/presentationml/2006/main">
+<p:sld xmlns:a="http://schemas.openxmlformats.org/drawingml/2006/main" xmlns:p="http://schemas.openxmlformats.org/presentationml/2006/main" xmlns:r="http://schemas.openxmlformats.org/officeDocument/2006/relationships">
   <p:cSld>
     <p:bg>
       <p:bgPr>
@@ -5132,14 +5004,7 @@
         <p:cNvGrpSpPr/>
         <p:nvPr/>
       </p:nvGrpSpPr>
-      <p:grpSpPr>
-        <a:xfrm>
-          <a:off x="0" y="0"/>
-          <a:ext cx="0" cy="0"/>
-          <a:chOff x="0" y="0"/>
-          <a:chExt cx="0" cy="0"/>
-        </a:xfrm>
-      </p:grpSpPr>
+      <p:grpSpPr/>
       <p:sp>
         <p:nvSpPr>
           <p:cNvPr id="2" name="Rectangle 1"/>
@@ -5181,7 +5046,6 @@
           <a:lstStyle/>
           <a:p>
             <a:pPr algn="ctr"/>
-            <a:endParaRPr/>
           </a:p>
         </p:txBody>
       </p:sp>
@@ -5226,7 +5090,6 @@
           <a:lstStyle/>
           <a:p>
             <a:pPr algn="ctr"/>
-            <a:endParaRPr/>
           </a:p>
         </p:txBody>
       </p:sp>
@@ -5271,7 +5134,6 @@
           <a:lstStyle/>
           <a:p>
             <a:pPr algn="ctr"/>
-            <a:endParaRPr/>
           </a:p>
         </p:txBody>
       </p:sp>
@@ -5316,7 +5178,6 @@
           <a:lstStyle/>
           <a:p>
             <a:pPr algn="ctr"/>
-            <a:endParaRPr/>
           </a:p>
         </p:txBody>
       </p:sp>
@@ -5337,7 +5198,7 @@
           <a:noFill/>
         </p:spPr>
         <p:txBody>
-          <a:bodyPr wrap="square" lIns="0" tIns="0" rIns="0" bIns="0" anchor="t">
+          <a:bodyPr wrap="square" lIns="0" rIns="0" tIns="0" bIns="0" anchor="t">
             <a:spAutoFit/>
           </a:bodyPr>
           <a:lstStyle/>
@@ -5350,7 +5211,7 @@
                 </a:solidFill>
                 <a:latin typeface="Consolas"/>
               </a:rPr>
-              <a:t>10  ·  ИНТЕРФЕЙС</a:t>
+              <a:t>12  ·  ИНТЕРФЕЙС</a:t>
             </a:r>
           </a:p>
         </p:txBody>
@@ -5372,7 +5233,7 @@
           <a:noFill/>
         </p:spPr>
         <p:txBody>
-          <a:bodyPr wrap="square" lIns="0" tIns="0" rIns="0" bIns="0" anchor="t">
+          <a:bodyPr wrap="square" lIns="0" rIns="0" tIns="0" bIns="0" anchor="t">
             <a:spAutoFit/>
           </a:bodyPr>
           <a:lstStyle/>
@@ -5431,7 +5292,6 @@
           <a:lstStyle/>
           <a:p>
             <a:pPr algn="ctr"/>
-            <a:endParaRPr/>
           </a:p>
         </p:txBody>
       </p:sp>
@@ -5478,7 +5338,6 @@
           <a:lstStyle/>
           <a:p>
             <a:pPr algn="ctr"/>
-            <a:endParaRPr/>
           </a:p>
         </p:txBody>
       </p:sp>
@@ -5523,7 +5382,7 @@
           <a:noFill/>
         </p:spPr>
         <p:txBody>
-          <a:bodyPr wrap="square" lIns="0" tIns="0" rIns="0" bIns="0" anchor="t">
+          <a:bodyPr wrap="square" lIns="0" rIns="0" tIns="0" bIns="0" anchor="t">
             <a:spAutoFit/>
           </a:bodyPr>
           <a:lstStyle/>
@@ -5584,7 +5443,6 @@
           <a:lstStyle/>
           <a:p>
             <a:pPr algn="ctr"/>
-            <a:endParaRPr/>
           </a:p>
         </p:txBody>
       </p:sp>
@@ -5629,7 +5487,7 @@
           <a:noFill/>
         </p:spPr>
         <p:txBody>
-          <a:bodyPr wrap="square" lIns="0" tIns="0" rIns="0" bIns="0" anchor="t">
+          <a:bodyPr wrap="square" lIns="0" rIns="0" tIns="0" bIns="0" anchor="t">
             <a:spAutoFit/>
           </a:bodyPr>
           <a:lstStyle/>
@@ -5690,7 +5548,6 @@
           <a:lstStyle/>
           <a:p>
             <a:pPr algn="ctr"/>
-            <a:endParaRPr/>
           </a:p>
         </p:txBody>
       </p:sp>
@@ -5735,7 +5592,7 @@
           <a:noFill/>
         </p:spPr>
         <p:txBody>
-          <a:bodyPr wrap="square" lIns="0" tIns="0" rIns="0" bIns="0" anchor="t">
+          <a:bodyPr wrap="square" lIns="0" rIns="0" tIns="0" bIns="0" anchor="t">
             <a:spAutoFit/>
           </a:bodyPr>
           <a:lstStyle/>
@@ -5796,7 +5653,6 @@
           <a:lstStyle/>
           <a:p>
             <a:pPr algn="ctr"/>
-            <a:endParaRPr/>
           </a:p>
         </p:txBody>
       </p:sp>
@@ -5841,7 +5697,7 @@
           <a:noFill/>
         </p:spPr>
         <p:txBody>
-          <a:bodyPr wrap="square" lIns="0" tIns="0" rIns="0" bIns="0" anchor="t">
+          <a:bodyPr wrap="square" lIns="0" rIns="0" tIns="0" bIns="0" anchor="t">
             <a:spAutoFit/>
           </a:bodyPr>
           <a:lstStyle/>
@@ -5876,7 +5732,7 @@
           <a:noFill/>
         </p:spPr>
         <p:txBody>
-          <a:bodyPr wrap="square" lIns="0" tIns="0" rIns="0" bIns="0" anchor="t">
+          <a:bodyPr wrap="square" lIns="0" rIns="0" tIns="0" bIns="0" anchor="t">
             <a:spAutoFit/>
           </a:bodyPr>
           <a:lstStyle/>
@@ -5911,7 +5767,7 @@
           <a:noFill/>
         </p:spPr>
         <p:txBody>
-          <a:bodyPr wrap="square" lIns="0" tIns="0" rIns="0" bIns="0" anchor="t">
+          <a:bodyPr wrap="square" lIns="0" rIns="0" tIns="0" bIns="0" anchor="t">
             <a:spAutoFit/>
           </a:bodyPr>
           <a:lstStyle/>
@@ -5938,7 +5794,7 @@
 </file>
 
 <file path=ppt/slides/slide13.xml><?xml version="1.0" encoding="utf-8"?>
-<p:sld xmlns:a="http://schemas.openxmlformats.org/drawingml/2006/main" xmlns:r="http://schemas.openxmlformats.org/officeDocument/2006/relationships" xmlns:p="http://schemas.openxmlformats.org/presentationml/2006/main">
+<p:sld xmlns:a="http://schemas.openxmlformats.org/drawingml/2006/main" xmlns:p="http://schemas.openxmlformats.org/presentationml/2006/main" xmlns:r="http://schemas.openxmlformats.org/officeDocument/2006/relationships">
   <p:cSld>
     <p:bg>
       <p:bgPr>
@@ -5954,14 +5810,7 @@
         <p:cNvGrpSpPr/>
         <p:nvPr/>
       </p:nvGrpSpPr>
-      <p:grpSpPr>
-        <a:xfrm>
-          <a:off x="0" y="0"/>
-          <a:ext cx="0" cy="0"/>
-          <a:chOff x="0" y="0"/>
-          <a:chExt cx="0" cy="0"/>
-        </a:xfrm>
-      </p:grpSpPr>
+      <p:grpSpPr/>
       <p:sp>
         <p:nvSpPr>
           <p:cNvPr id="2" name="Rectangle 1"/>
@@ -6003,7 +5852,6 @@
           <a:lstStyle/>
           <a:p>
             <a:pPr algn="ctr"/>
-            <a:endParaRPr/>
           </a:p>
         </p:txBody>
       </p:sp>
@@ -6048,7 +5896,6 @@
           <a:lstStyle/>
           <a:p>
             <a:pPr algn="ctr"/>
-            <a:endParaRPr/>
           </a:p>
         </p:txBody>
       </p:sp>
@@ -6093,7 +5940,6 @@
           <a:lstStyle/>
           <a:p>
             <a:pPr algn="ctr"/>
-            <a:endParaRPr/>
           </a:p>
         </p:txBody>
       </p:sp>
@@ -6138,7 +5984,6 @@
           <a:lstStyle/>
           <a:p>
             <a:pPr algn="ctr"/>
-            <a:endParaRPr/>
           </a:p>
         </p:txBody>
       </p:sp>
@@ -6151,46 +5996,28 @@
         <p:spPr>
           <a:xfrm>
             <a:off x="1005840" y="384048"/>
-            <a:ext cx="5486400" cy="169277"/>
-          </a:xfrm>
-          <a:prstGeom prst="rect">
-            <a:avLst/>
-          </a:prstGeom>
-          <a:noFill/>
-        </p:spPr>
-        <p:txBody>
-          <a:bodyPr wrap="square" lIns="0" tIns="0" rIns="0" bIns="0" anchor="t">
+            <a:ext cx="5486400" cy="320040"/>
+          </a:xfrm>
+          <a:prstGeom prst="rect">
+            <a:avLst/>
+          </a:prstGeom>
+          <a:noFill/>
+        </p:spPr>
+        <p:txBody>
+          <a:bodyPr wrap="square" lIns="0" rIns="0" tIns="0" bIns="0" anchor="t">
             <a:spAutoFit/>
           </a:bodyPr>
           <a:lstStyle/>
           <a:p>
             <a:pPr algn="l"/>
             <a:r>
-              <a:rPr sz="1100" b="0" i="0" dirty="0">
+              <a:rPr sz="1100" b="0" i="0">
                 <a:solidFill>
                   <a:srgbClr val="52525B"/>
                 </a:solidFill>
                 <a:latin typeface="Consolas"/>
               </a:rPr>
-              <a:t>1</a:t>
-            </a:r>
-            <a:r>
-              <a:rPr lang="en-US" sz="1100" b="0" i="0" dirty="0">
-                <a:solidFill>
-                  <a:srgbClr val="52525B"/>
-                </a:solidFill>
-                <a:latin typeface="Consolas"/>
-              </a:rPr>
-              <a:t>1</a:t>
-            </a:r>
-            <a:r>
-              <a:rPr sz="1100" b="0" i="0" dirty="0">
-                <a:solidFill>
-                  <a:srgbClr val="52525B"/>
-                </a:solidFill>
-                <a:latin typeface="Consolas"/>
-              </a:rPr>
-              <a:t>  ·  КАК МЫ РАБОТАЛИ</a:t>
+              <a:t>13  ·  КАК МЫ РАБОТАЛИ</a:t>
             </a:r>
           </a:p>
         </p:txBody>
@@ -6212,7 +6039,7 @@
           <a:noFill/>
         </p:spPr>
         <p:txBody>
-          <a:bodyPr wrap="square" lIns="0" tIns="0" rIns="0" bIns="0" anchor="t">
+          <a:bodyPr wrap="square" lIns="0" rIns="0" tIns="0" bIns="0" anchor="t">
             <a:spAutoFit/>
           </a:bodyPr>
           <a:lstStyle/>
@@ -6271,7 +6098,6 @@
           <a:lstStyle/>
           <a:p>
             <a:pPr algn="ctr"/>
-            <a:endParaRPr/>
           </a:p>
         </p:txBody>
       </p:sp>
@@ -6316,7 +6142,6 @@
           <a:lstStyle/>
           <a:p>
             <a:pPr algn="ctr"/>
-            <a:endParaRPr/>
           </a:p>
         </p:txBody>
       </p:sp>
@@ -6337,7 +6162,7 @@
           <a:noFill/>
         </p:spPr>
         <p:txBody>
-          <a:bodyPr wrap="square" lIns="0" tIns="0" rIns="0" bIns="0" anchor="t">
+          <a:bodyPr wrap="square" lIns="0" rIns="0" tIns="0" bIns="0" anchor="t">
             <a:spAutoFit/>
           </a:bodyPr>
           <a:lstStyle/>
@@ -6372,7 +6197,7 @@
           <a:noFill/>
         </p:spPr>
         <p:txBody>
-          <a:bodyPr wrap="square" lIns="0" tIns="0" rIns="0" bIns="0" anchor="t">
+          <a:bodyPr wrap="square" lIns="0" rIns="0" tIns="0" bIns="0" anchor="t">
             <a:spAutoFit/>
           </a:bodyPr>
           <a:lstStyle/>
@@ -6407,7 +6232,7 @@
           <a:noFill/>
         </p:spPr>
         <p:txBody>
-          <a:bodyPr wrap="square" lIns="0" tIns="0" rIns="0" bIns="0" anchor="t">
+          <a:bodyPr wrap="square" lIns="0" rIns="0" tIns="0" bIns="0" anchor="t">
             <a:spAutoFit/>
           </a:bodyPr>
           <a:lstStyle/>
@@ -6466,7 +6291,6 @@
           <a:lstStyle/>
           <a:p>
             <a:pPr algn="ctr"/>
-            <a:endParaRPr/>
           </a:p>
         </p:txBody>
       </p:sp>
@@ -6487,7 +6311,7 @@
           <a:noFill/>
         </p:spPr>
         <p:txBody>
-          <a:bodyPr wrap="square" lIns="0" tIns="0" rIns="0" bIns="0" anchor="t">
+          <a:bodyPr wrap="square" lIns="0" rIns="0" tIns="0" bIns="0" anchor="t">
             <a:spAutoFit/>
           </a:bodyPr>
           <a:lstStyle/>
@@ -6522,7 +6346,7 @@
           <a:noFill/>
         </p:spPr>
         <p:txBody>
-          <a:bodyPr wrap="square" lIns="0" tIns="0" rIns="0" bIns="0" anchor="t">
+          <a:bodyPr wrap="square" lIns="0" rIns="0" tIns="0" bIns="0" anchor="t">
             <a:spAutoFit/>
           </a:bodyPr>
           <a:lstStyle/>
@@ -6557,7 +6381,7 @@
           <a:noFill/>
         </p:spPr>
         <p:txBody>
-          <a:bodyPr wrap="square" lIns="0" tIns="0" rIns="0" bIns="0" anchor="t">
+          <a:bodyPr wrap="square" lIns="0" rIns="0" tIns="0" bIns="0" anchor="t">
             <a:spAutoFit/>
           </a:bodyPr>
           <a:lstStyle/>
@@ -6616,7 +6440,6 @@
           <a:lstStyle/>
           <a:p>
             <a:pPr algn="ctr"/>
-            <a:endParaRPr/>
           </a:p>
         </p:txBody>
       </p:sp>
@@ -6637,7 +6460,7 @@
           <a:noFill/>
         </p:spPr>
         <p:txBody>
-          <a:bodyPr wrap="square" lIns="0" tIns="0" rIns="0" bIns="0" anchor="t">
+          <a:bodyPr wrap="square" lIns="0" rIns="0" tIns="0" bIns="0" anchor="t">
             <a:spAutoFit/>
           </a:bodyPr>
           <a:lstStyle/>
@@ -6672,7 +6495,7 @@
           <a:noFill/>
         </p:spPr>
         <p:txBody>
-          <a:bodyPr wrap="square" lIns="0" tIns="0" rIns="0" bIns="0" anchor="t">
+          <a:bodyPr wrap="square" lIns="0" rIns="0" tIns="0" bIns="0" anchor="t">
             <a:spAutoFit/>
           </a:bodyPr>
           <a:lstStyle/>
@@ -6707,7 +6530,7 @@
           <a:noFill/>
         </p:spPr>
         <p:txBody>
-          <a:bodyPr wrap="square" lIns="0" tIns="0" rIns="0" bIns="0" anchor="t">
+          <a:bodyPr wrap="square" lIns="0" rIns="0" tIns="0" bIns="0" anchor="t">
             <a:spAutoFit/>
           </a:bodyPr>
           <a:lstStyle/>
@@ -6766,7 +6589,6 @@
           <a:lstStyle/>
           <a:p>
             <a:pPr algn="ctr"/>
-            <a:endParaRPr/>
           </a:p>
         </p:txBody>
       </p:sp>
@@ -6787,7 +6609,7 @@
           <a:noFill/>
         </p:spPr>
         <p:txBody>
-          <a:bodyPr wrap="square" lIns="0" tIns="0" rIns="0" bIns="0" anchor="t">
+          <a:bodyPr wrap="square" lIns="0" rIns="0" tIns="0" bIns="0" anchor="t">
             <a:spAutoFit/>
           </a:bodyPr>
           <a:lstStyle/>
@@ -6822,7 +6644,7 @@
           <a:noFill/>
         </p:spPr>
         <p:txBody>
-          <a:bodyPr wrap="square" lIns="0" tIns="0" rIns="0" bIns="0" anchor="t">
+          <a:bodyPr wrap="square" lIns="0" rIns="0" tIns="0" bIns="0" anchor="t">
             <a:spAutoFit/>
           </a:bodyPr>
           <a:lstStyle/>
@@ -6857,7 +6679,7 @@
           <a:noFill/>
         </p:spPr>
         <p:txBody>
-          <a:bodyPr wrap="square" lIns="0" tIns="0" rIns="0" bIns="0" anchor="t">
+          <a:bodyPr wrap="square" lIns="0" rIns="0" tIns="0" bIns="0" anchor="t">
             <a:spAutoFit/>
           </a:bodyPr>
           <a:lstStyle/>
@@ -6916,7 +6738,6 @@
           <a:lstStyle/>
           <a:p>
             <a:pPr algn="ctr"/>
-            <a:endParaRPr/>
           </a:p>
         </p:txBody>
       </p:sp>
@@ -6937,7 +6758,7 @@
           <a:noFill/>
         </p:spPr>
         <p:txBody>
-          <a:bodyPr wrap="square" lIns="0" tIns="0" rIns="0" bIns="0" anchor="t">
+          <a:bodyPr wrap="square" lIns="0" rIns="0" tIns="0" bIns="0" anchor="t">
             <a:spAutoFit/>
           </a:bodyPr>
           <a:lstStyle/>
@@ -6972,7 +6793,7 @@
           <a:noFill/>
         </p:spPr>
         <p:txBody>
-          <a:bodyPr wrap="square" lIns="0" tIns="0" rIns="0" bIns="0" anchor="t">
+          <a:bodyPr wrap="square" lIns="0" rIns="0" tIns="0" bIns="0" anchor="t">
             <a:spAutoFit/>
           </a:bodyPr>
           <a:lstStyle/>
@@ -7007,7 +6828,7 @@
           <a:noFill/>
         </p:spPr>
         <p:txBody>
-          <a:bodyPr wrap="square" lIns="0" tIns="0" rIns="0" bIns="0" anchor="t">
+          <a:bodyPr wrap="square" lIns="0" rIns="0" tIns="0" bIns="0" anchor="t">
             <a:spAutoFit/>
           </a:bodyPr>
           <a:lstStyle/>
@@ -7066,7 +6887,6 @@
           <a:lstStyle/>
           <a:p>
             <a:pPr algn="ctr"/>
-            <a:endParaRPr/>
           </a:p>
         </p:txBody>
       </p:sp>
@@ -7087,7 +6907,7 @@
           <a:noFill/>
         </p:spPr>
         <p:txBody>
-          <a:bodyPr wrap="square" lIns="0" tIns="0" rIns="0" bIns="0" anchor="t">
+          <a:bodyPr wrap="square" lIns="0" rIns="0" tIns="0" bIns="0" anchor="t">
             <a:spAutoFit/>
           </a:bodyPr>
           <a:lstStyle/>
@@ -7122,7 +6942,7 @@
           <a:noFill/>
         </p:spPr>
         <p:txBody>
-          <a:bodyPr wrap="square" lIns="0" tIns="0" rIns="0" bIns="0" anchor="t">
+          <a:bodyPr wrap="square" lIns="0" rIns="0" tIns="0" bIns="0" anchor="t">
             <a:spAutoFit/>
           </a:bodyPr>
           <a:lstStyle/>
@@ -7157,7 +6977,7 @@
           <a:noFill/>
         </p:spPr>
         <p:txBody>
-          <a:bodyPr wrap="square" lIns="0" tIns="0" rIns="0" bIns="0" anchor="t">
+          <a:bodyPr wrap="square" lIns="0" rIns="0" tIns="0" bIns="0" anchor="t">
             <a:spAutoFit/>
           </a:bodyPr>
           <a:lstStyle/>
@@ -7216,7 +7036,6 @@
           <a:lstStyle/>
           <a:p>
             <a:pPr algn="ctr"/>
-            <a:endParaRPr/>
           </a:p>
         </p:txBody>
       </p:sp>
@@ -7237,7 +7056,7 @@
           <a:noFill/>
         </p:spPr>
         <p:txBody>
-          <a:bodyPr wrap="square" lIns="0" tIns="0" rIns="0" bIns="0" anchor="t">
+          <a:bodyPr wrap="square" lIns="0" rIns="0" tIns="0" bIns="0" anchor="t">
             <a:spAutoFit/>
           </a:bodyPr>
           <a:lstStyle/>
@@ -7272,7 +7091,7 @@
           <a:noFill/>
         </p:spPr>
         <p:txBody>
-          <a:bodyPr wrap="square" lIns="0" tIns="0" rIns="0" bIns="0" anchor="t">
+          <a:bodyPr wrap="square" lIns="0" rIns="0" tIns="0" bIns="0" anchor="t">
             <a:spAutoFit/>
           </a:bodyPr>
           <a:lstStyle/>
@@ -7307,7 +7126,7 @@
           <a:noFill/>
         </p:spPr>
         <p:txBody>
-          <a:bodyPr wrap="square" lIns="0" tIns="0" rIns="0" bIns="0" anchor="t">
+          <a:bodyPr wrap="square" lIns="0" rIns="0" tIns="0" bIns="0" anchor="t">
             <a:spAutoFit/>
           </a:bodyPr>
           <a:lstStyle/>
@@ -7342,7 +7161,7 @@
           <a:noFill/>
         </p:spPr>
         <p:txBody>
-          <a:bodyPr wrap="square" lIns="0" tIns="0" rIns="0" bIns="0" anchor="t">
+          <a:bodyPr wrap="square" lIns="0" rIns="0" tIns="0" bIns="0" anchor="t">
             <a:spAutoFit/>
           </a:bodyPr>
           <a:lstStyle/>
@@ -7377,7 +7196,7 @@
           <a:noFill/>
         </p:spPr>
         <p:txBody>
-          <a:bodyPr wrap="square" lIns="0" tIns="0" rIns="0" bIns="0" anchor="t">
+          <a:bodyPr wrap="square" lIns="0" rIns="0" tIns="0" bIns="0" anchor="t">
             <a:spAutoFit/>
           </a:bodyPr>
           <a:lstStyle/>
@@ -7390,7 +7209,7 @@
                 </a:solidFill>
                 <a:latin typeface="Consolas"/>
               </a:rPr>
-              <a:t>14 / 15</a:t>
+              <a:t>13 / 15</a:t>
             </a:r>
           </a:p>
         </p:txBody>
@@ -7404,7 +7223,7 @@
 </file>
 
 <file path=ppt/slides/slide14.xml><?xml version="1.0" encoding="utf-8"?>
-<p:sld xmlns:a="http://schemas.openxmlformats.org/drawingml/2006/main" xmlns:r="http://schemas.openxmlformats.org/officeDocument/2006/relationships" xmlns:p="http://schemas.openxmlformats.org/presentationml/2006/main">
+<p:sld xmlns:a="http://schemas.openxmlformats.org/drawingml/2006/main" xmlns:p="http://schemas.openxmlformats.org/presentationml/2006/main" xmlns:r="http://schemas.openxmlformats.org/officeDocument/2006/relationships">
   <p:cSld>
     <p:bg>
       <p:bgPr>
@@ -7420,14 +7239,7 @@
         <p:cNvGrpSpPr/>
         <p:nvPr/>
       </p:nvGrpSpPr>
-      <p:grpSpPr>
-        <a:xfrm>
-          <a:off x="0" y="0"/>
-          <a:ext cx="0" cy="0"/>
-          <a:chOff x="0" y="0"/>
-          <a:chExt cx="0" cy="0"/>
-        </a:xfrm>
-      </p:grpSpPr>
+      <p:grpSpPr/>
       <p:sp>
         <p:nvSpPr>
           <p:cNvPr id="2" name="Rectangle 1"/>
@@ -7469,7 +7281,6 @@
           <a:lstStyle/>
           <a:p>
             <a:pPr algn="ctr"/>
-            <a:endParaRPr/>
           </a:p>
         </p:txBody>
       </p:sp>
@@ -7514,7 +7325,6 @@
           <a:lstStyle/>
           <a:p>
             <a:pPr algn="ctr"/>
-            <a:endParaRPr/>
           </a:p>
         </p:txBody>
       </p:sp>
@@ -7559,7 +7369,6 @@
           <a:lstStyle/>
           <a:p>
             <a:pPr algn="ctr"/>
-            <a:endParaRPr/>
           </a:p>
         </p:txBody>
       </p:sp>
@@ -7604,7 +7413,6 @@
           <a:lstStyle/>
           <a:p>
             <a:pPr algn="ctr"/>
-            <a:endParaRPr/>
           </a:p>
         </p:txBody>
       </p:sp>
@@ -7617,46 +7425,28 @@
         <p:spPr>
           <a:xfrm>
             <a:off x="1005840" y="384048"/>
-            <a:ext cx="5486400" cy="169277"/>
-          </a:xfrm>
-          <a:prstGeom prst="rect">
-            <a:avLst/>
-          </a:prstGeom>
-          <a:noFill/>
-        </p:spPr>
-        <p:txBody>
-          <a:bodyPr wrap="square" lIns="0" tIns="0" rIns="0" bIns="0" anchor="t">
+            <a:ext cx="5486400" cy="320040"/>
+          </a:xfrm>
+          <a:prstGeom prst="rect">
+            <a:avLst/>
+          </a:prstGeom>
+          <a:noFill/>
+        </p:spPr>
+        <p:txBody>
+          <a:bodyPr wrap="square" lIns="0" rIns="0" tIns="0" bIns="0" anchor="t">
             <a:spAutoFit/>
           </a:bodyPr>
           <a:lstStyle/>
           <a:p>
             <a:pPr algn="l"/>
             <a:r>
-              <a:rPr sz="1100" b="0" i="0" dirty="0">
+              <a:rPr sz="1100" b="0" i="0">
                 <a:solidFill>
                   <a:srgbClr val="52525B"/>
                 </a:solidFill>
                 <a:latin typeface="Consolas"/>
               </a:rPr>
-              <a:t>1</a:t>
-            </a:r>
-            <a:r>
-              <a:rPr lang="en-US" sz="1100" b="0" i="0" dirty="0">
-                <a:solidFill>
-                  <a:srgbClr val="52525B"/>
-                </a:solidFill>
-                <a:latin typeface="Consolas"/>
-              </a:rPr>
-              <a:t>2</a:t>
-            </a:r>
-            <a:r>
-              <a:rPr sz="1100" b="0" i="0" dirty="0">
-                <a:solidFill>
-                  <a:srgbClr val="52525B"/>
-                </a:solidFill>
-                <a:latin typeface="Consolas"/>
-              </a:rPr>
-              <a:t>  ·  ТЕСТИРОВАНИЕ</a:t>
+              <a:t>14  ·  ТЕСТИРОВАНИЕ</a:t>
             </a:r>
           </a:p>
         </p:txBody>
@@ -7678,7 +7468,7 @@
           <a:noFill/>
         </p:spPr>
         <p:txBody>
-          <a:bodyPr wrap="square" lIns="0" tIns="0" rIns="0" bIns="0" anchor="t">
+          <a:bodyPr wrap="square" lIns="0" rIns="0" tIns="0" bIns="0" anchor="t">
             <a:spAutoFit/>
           </a:bodyPr>
           <a:lstStyle/>
@@ -7737,7 +7527,6 @@
           <a:lstStyle/>
           <a:p>
             <a:pPr algn="ctr"/>
-            <a:endParaRPr/>
           </a:p>
         </p:txBody>
       </p:sp>
@@ -7782,7 +7571,6 @@
           <a:lstStyle/>
           <a:p>
             <a:pPr algn="ctr"/>
-            <a:endParaRPr/>
           </a:p>
         </p:txBody>
       </p:sp>
@@ -7827,7 +7615,6 @@
           <a:lstStyle/>
           <a:p>
             <a:pPr algn="ctr"/>
-            <a:endParaRPr/>
           </a:p>
         </p:txBody>
       </p:sp>
@@ -7848,7 +7635,7 @@
           <a:noFill/>
         </p:spPr>
         <p:txBody>
-          <a:bodyPr wrap="square" lIns="0" tIns="0" rIns="0" bIns="0" anchor="t">
+          <a:bodyPr wrap="square" lIns="0" rIns="0" tIns="0" bIns="0" anchor="t">
             <a:spAutoFit/>
           </a:bodyPr>
           <a:lstStyle/>
@@ -7883,7 +7670,7 @@
           <a:noFill/>
         </p:spPr>
         <p:txBody>
-          <a:bodyPr wrap="square" lIns="0" tIns="0" rIns="0" bIns="0" anchor="t">
+          <a:bodyPr wrap="square" lIns="0" rIns="0" tIns="0" bIns="0" anchor="t">
             <a:spAutoFit/>
           </a:bodyPr>
           <a:lstStyle/>
@@ -7942,7 +7729,6 @@
           <a:lstStyle/>
           <a:p>
             <a:pPr algn="ctr"/>
-            <a:endParaRPr/>
           </a:p>
         </p:txBody>
       </p:sp>
@@ -7987,7 +7773,6 @@
           <a:lstStyle/>
           <a:p>
             <a:pPr algn="ctr"/>
-            <a:endParaRPr/>
           </a:p>
         </p:txBody>
       </p:sp>
@@ -8008,7 +7793,7 @@
           <a:noFill/>
         </p:spPr>
         <p:txBody>
-          <a:bodyPr wrap="square" lIns="0" tIns="0" rIns="0" bIns="0" anchor="t">
+          <a:bodyPr wrap="square" lIns="0" rIns="0" tIns="0" bIns="0" anchor="t">
             <a:spAutoFit/>
           </a:bodyPr>
           <a:lstStyle/>
@@ -8043,7 +7828,7 @@
           <a:noFill/>
         </p:spPr>
         <p:txBody>
-          <a:bodyPr wrap="square" lIns="0" tIns="0" rIns="0" bIns="0" anchor="t">
+          <a:bodyPr wrap="square" lIns="0" rIns="0" tIns="0" bIns="0" anchor="t">
             <a:spAutoFit/>
           </a:bodyPr>
           <a:lstStyle/>
@@ -8102,7 +7887,6 @@
           <a:lstStyle/>
           <a:p>
             <a:pPr algn="ctr"/>
-            <a:endParaRPr/>
           </a:p>
         </p:txBody>
       </p:sp>
@@ -8147,7 +7931,6 @@
           <a:lstStyle/>
           <a:p>
             <a:pPr algn="ctr"/>
-            <a:endParaRPr/>
           </a:p>
         </p:txBody>
       </p:sp>
@@ -8168,7 +7951,7 @@
           <a:noFill/>
         </p:spPr>
         <p:txBody>
-          <a:bodyPr wrap="square" lIns="0" tIns="0" rIns="0" bIns="0" anchor="t">
+          <a:bodyPr wrap="square" lIns="0" rIns="0" tIns="0" bIns="0" anchor="t">
             <a:spAutoFit/>
           </a:bodyPr>
           <a:lstStyle/>
@@ -8203,7 +7986,7 @@
           <a:noFill/>
         </p:spPr>
         <p:txBody>
-          <a:bodyPr wrap="square" lIns="0" tIns="0" rIns="0" bIns="0" anchor="t">
+          <a:bodyPr wrap="square" lIns="0" rIns="0" tIns="0" bIns="0" anchor="t">
             <a:spAutoFit/>
           </a:bodyPr>
           <a:lstStyle/>
@@ -8238,7 +8021,7 @@
           <a:noFill/>
         </p:spPr>
         <p:txBody>
-          <a:bodyPr wrap="square" lIns="0" tIns="0" rIns="0" bIns="0" anchor="t">
+          <a:bodyPr wrap="square" lIns="0" rIns="0" tIns="0" bIns="0" anchor="t">
             <a:spAutoFit/>
           </a:bodyPr>
           <a:lstStyle/>
@@ -8392,7 +8175,7 @@
           <a:noFill/>
         </p:spPr>
         <p:txBody>
-          <a:bodyPr wrap="square" lIns="0" tIns="0" rIns="0" bIns="0" anchor="t">
+          <a:bodyPr wrap="square" lIns="0" rIns="0" tIns="0" bIns="0" anchor="t">
             <a:spAutoFit/>
           </a:bodyPr>
           <a:lstStyle/>
@@ -8427,7 +8210,7 @@
           <a:noFill/>
         </p:spPr>
         <p:txBody>
-          <a:bodyPr wrap="square" lIns="0" tIns="0" rIns="0" bIns="0" anchor="t">
+          <a:bodyPr wrap="square" lIns="0" rIns="0" tIns="0" bIns="0" anchor="t">
             <a:spAutoFit/>
           </a:bodyPr>
           <a:lstStyle/>
@@ -8440,7 +8223,7 @@
                 </a:solidFill>
                 <a:latin typeface="Consolas"/>
               </a:rPr>
-              <a:t>13 / 15</a:t>
+              <a:t>14 / 15</a:t>
             </a:r>
           </a:p>
         </p:txBody>
@@ -8454,7 +8237,7 @@
 </file>
 
 <file path=ppt/slides/slide15.xml><?xml version="1.0" encoding="utf-8"?>
-<p:sld xmlns:a="http://schemas.openxmlformats.org/drawingml/2006/main" xmlns:r="http://schemas.openxmlformats.org/officeDocument/2006/relationships" xmlns:p="http://schemas.openxmlformats.org/presentationml/2006/main">
+<p:sld xmlns:a="http://schemas.openxmlformats.org/drawingml/2006/main" xmlns:p="http://schemas.openxmlformats.org/presentationml/2006/main" xmlns:r="http://schemas.openxmlformats.org/officeDocument/2006/relationships">
   <p:cSld>
     <p:bg>
       <p:bgPr>
@@ -8470,14 +8253,7 @@
         <p:cNvGrpSpPr/>
         <p:nvPr/>
       </p:nvGrpSpPr>
-      <p:grpSpPr>
-        <a:xfrm>
-          <a:off x="0" y="0"/>
-          <a:ext cx="0" cy="0"/>
-          <a:chOff x="0" y="0"/>
-          <a:chExt cx="0" cy="0"/>
-        </a:xfrm>
-      </p:grpSpPr>
+      <p:grpSpPr/>
       <p:sp>
         <p:nvSpPr>
           <p:cNvPr id="2" name="Rectangle 1"/>
@@ -8519,7 +8295,6 @@
           <a:lstStyle/>
           <a:p>
             <a:pPr algn="ctr"/>
-            <a:endParaRPr/>
           </a:p>
         </p:txBody>
       </p:sp>
@@ -8564,7 +8339,6 @@
           <a:lstStyle/>
           <a:p>
             <a:pPr algn="ctr"/>
-            <a:endParaRPr/>
           </a:p>
         </p:txBody>
       </p:sp>
@@ -8609,7 +8383,6 @@
           <a:lstStyle/>
           <a:p>
             <a:pPr algn="ctr"/>
-            <a:endParaRPr/>
           </a:p>
         </p:txBody>
       </p:sp>
@@ -8654,7 +8427,6 @@
           <a:lstStyle/>
           <a:p>
             <a:pPr algn="ctr"/>
-            <a:endParaRPr/>
           </a:p>
         </p:txBody>
       </p:sp>
@@ -8667,46 +8439,28 @@
         <p:spPr>
           <a:xfrm>
             <a:off x="1005840" y="384048"/>
-            <a:ext cx="5486400" cy="169277"/>
-          </a:xfrm>
-          <a:prstGeom prst="rect">
-            <a:avLst/>
-          </a:prstGeom>
-          <a:noFill/>
-        </p:spPr>
-        <p:txBody>
-          <a:bodyPr wrap="square" lIns="0" tIns="0" rIns="0" bIns="0" anchor="t">
+            <a:ext cx="5486400" cy="320040"/>
+          </a:xfrm>
+          <a:prstGeom prst="rect">
+            <a:avLst/>
+          </a:prstGeom>
+          <a:noFill/>
+        </p:spPr>
+        <p:txBody>
+          <a:bodyPr wrap="square" lIns="0" rIns="0" tIns="0" bIns="0" anchor="t">
             <a:spAutoFit/>
           </a:bodyPr>
           <a:lstStyle/>
           <a:p>
             <a:pPr algn="l"/>
             <a:r>
-              <a:rPr sz="1100" b="0" i="0" dirty="0">
+              <a:rPr sz="1100" b="0" i="0">
                 <a:solidFill>
                   <a:srgbClr val="52525B"/>
                 </a:solidFill>
                 <a:latin typeface="Consolas"/>
               </a:rPr>
-              <a:t>1</a:t>
-            </a:r>
-            <a:r>
-              <a:rPr lang="en-US" sz="1100" b="0" i="0" dirty="0">
-                <a:solidFill>
-                  <a:srgbClr val="52525B"/>
-                </a:solidFill>
-                <a:latin typeface="Consolas"/>
-              </a:rPr>
-              <a:t>3</a:t>
-            </a:r>
-            <a:r>
-              <a:rPr sz="1100" b="0" i="0" dirty="0">
-                <a:solidFill>
-                  <a:srgbClr val="52525B"/>
-                </a:solidFill>
-                <a:latin typeface="Consolas"/>
-              </a:rPr>
-              <a:t>  ·  РЕЗУЛЬТАТЫ</a:t>
+              <a:t>15  ·  РЕЗУЛЬТАТЫ</a:t>
             </a:r>
           </a:p>
         </p:txBody>
@@ -8728,7 +8482,7 @@
           <a:noFill/>
         </p:spPr>
         <p:txBody>
-          <a:bodyPr wrap="square" lIns="0" tIns="0" rIns="0" bIns="0" anchor="t">
+          <a:bodyPr wrap="square" lIns="0" rIns="0" tIns="0" bIns="0" anchor="t">
             <a:spAutoFit/>
           </a:bodyPr>
           <a:lstStyle/>
@@ -8787,7 +8541,6 @@
           <a:lstStyle/>
           <a:p>
             <a:pPr algn="ctr"/>
-            <a:endParaRPr/>
           </a:p>
         </p:txBody>
       </p:sp>
@@ -8808,7 +8561,7 @@
           <a:noFill/>
         </p:spPr>
         <p:txBody>
-          <a:bodyPr wrap="square" lIns="0" tIns="0" rIns="0" bIns="0" anchor="t">
+          <a:bodyPr wrap="square" lIns="0" rIns="0" tIns="0" bIns="0" anchor="t">
             <a:spAutoFit/>
           </a:bodyPr>
           <a:lstStyle/>
@@ -8946,7 +8699,7 @@
           <a:noFill/>
         </p:spPr>
         <p:txBody>
-          <a:bodyPr wrap="square" lIns="0" tIns="0" rIns="0" bIns="0" anchor="t">
+          <a:bodyPr wrap="square" lIns="0" rIns="0" tIns="0" bIns="0" anchor="t">
             <a:spAutoFit/>
           </a:bodyPr>
           <a:lstStyle/>
@@ -9076,7 +8829,6 @@
           <a:lstStyle/>
           <a:p>
             <a:pPr algn="ctr"/>
-            <a:endParaRPr/>
           </a:p>
         </p:txBody>
       </p:sp>
@@ -9097,7 +8849,7 @@
           <a:noFill/>
         </p:spPr>
         <p:txBody>
-          <a:bodyPr wrap="square" lIns="0" tIns="0" rIns="0" bIns="0" anchor="t">
+          <a:bodyPr wrap="square" lIns="0" rIns="0" tIns="0" bIns="0" anchor="t">
             <a:spAutoFit/>
           </a:bodyPr>
           <a:lstStyle/>
@@ -9111,6 +8863,76 @@
                 <a:latin typeface="Consolas"/>
               </a:rPr>
               <a:t>github.com/lilwavedrill/messenger</a:t>
+            </a:r>
+          </a:p>
+        </p:txBody>
+      </p:sp>
+      <p:sp>
+        <p:nvSpPr>
+          <p:cNvPr id="15" name="TextBox 14"/>
+          <p:cNvSpPr txBox="1"/>
+          <p:nvPr/>
+        </p:nvSpPr>
+        <p:spPr>
+          <a:xfrm>
+            <a:off x="502920" y="6446520"/>
+            <a:ext cx="5486400" cy="274320"/>
+          </a:xfrm>
+          <a:prstGeom prst="rect">
+            <a:avLst/>
+          </a:prstGeom>
+          <a:noFill/>
+        </p:spPr>
+        <p:txBody>
+          <a:bodyPr wrap="square" lIns="0" rIns="0" tIns="0" bIns="0" anchor="t">
+            <a:spAutoFit/>
+          </a:bodyPr>
+          <a:lstStyle/>
+          <a:p>
+            <a:pPr algn="l"/>
+            <a:r>
+              <a:rPr sz="900" b="0" i="0">
+                <a:solidFill>
+                  <a:srgbClr val="52525B"/>
+                </a:solidFill>
+                <a:latin typeface="Consolas"/>
+              </a:rPr>
+              <a:t>MESSENGER  ·  VK Education / Case #1</a:t>
+            </a:r>
+          </a:p>
+        </p:txBody>
+      </p:sp>
+      <p:sp>
+        <p:nvSpPr>
+          <p:cNvPr id="16" name="TextBox 15"/>
+          <p:cNvSpPr txBox="1"/>
+          <p:nvPr/>
+        </p:nvSpPr>
+        <p:spPr>
+          <a:xfrm>
+            <a:off x="10561320" y="6446520"/>
+            <a:ext cx="1554480" cy="274320"/>
+          </a:xfrm>
+          <a:prstGeom prst="rect">
+            <a:avLst/>
+          </a:prstGeom>
+          <a:noFill/>
+        </p:spPr>
+        <p:txBody>
+          <a:bodyPr wrap="square" lIns="0" rIns="0" tIns="0" bIns="0" anchor="t">
+            <a:spAutoFit/>
+          </a:bodyPr>
+          <a:lstStyle/>
+          <a:p>
+            <a:pPr algn="r"/>
+            <a:r>
+              <a:rPr sz="900" b="0" i="0">
+                <a:solidFill>
+                  <a:srgbClr val="52525B"/>
+                </a:solidFill>
+                <a:latin typeface="Consolas"/>
+              </a:rPr>
+              <a:t>15 / 15</a:t>
             </a:r>
           </a:p>
         </p:txBody>
@@ -9124,7 +8946,7 @@
 </file>
 
 <file path=ppt/slides/slide2.xml><?xml version="1.0" encoding="utf-8"?>
-<p:sld xmlns:a="http://schemas.openxmlformats.org/drawingml/2006/main" xmlns:r="http://schemas.openxmlformats.org/officeDocument/2006/relationships" xmlns:p="http://schemas.openxmlformats.org/presentationml/2006/main">
+<p:sld xmlns:a="http://schemas.openxmlformats.org/drawingml/2006/main" xmlns:p="http://schemas.openxmlformats.org/presentationml/2006/main" xmlns:r="http://schemas.openxmlformats.org/officeDocument/2006/relationships">
   <p:cSld>
     <p:bg>
       <p:bgPr>
@@ -9140,14 +8962,7 @@
         <p:cNvGrpSpPr/>
         <p:nvPr/>
       </p:nvGrpSpPr>
-      <p:grpSpPr>
-        <a:xfrm>
-          <a:off x="0" y="0"/>
-          <a:ext cx="0" cy="0"/>
-          <a:chOff x="0" y="0"/>
-          <a:chExt cx="0" cy="0"/>
-        </a:xfrm>
-      </p:grpSpPr>
+      <p:grpSpPr/>
       <p:sp>
         <p:nvSpPr>
           <p:cNvPr id="2" name="Rectangle 1"/>
@@ -9189,7 +9004,6 @@
           <a:lstStyle/>
           <a:p>
             <a:pPr algn="ctr"/>
-            <a:endParaRPr/>
           </a:p>
         </p:txBody>
       </p:sp>
@@ -9234,7 +9048,6 @@
           <a:lstStyle/>
           <a:p>
             <a:pPr algn="ctr"/>
-            <a:endParaRPr/>
           </a:p>
         </p:txBody>
       </p:sp>
@@ -9279,7 +9092,6 @@
           <a:lstStyle/>
           <a:p>
             <a:pPr algn="ctr"/>
-            <a:endParaRPr/>
           </a:p>
         </p:txBody>
       </p:sp>
@@ -9324,7 +9136,6 @@
           <a:lstStyle/>
           <a:p>
             <a:pPr algn="ctr"/>
-            <a:endParaRPr/>
           </a:p>
         </p:txBody>
       </p:sp>
@@ -9345,7 +9156,7 @@
           <a:noFill/>
         </p:spPr>
         <p:txBody>
-          <a:bodyPr wrap="square" lIns="0" tIns="0" rIns="0" bIns="0" anchor="t">
+          <a:bodyPr wrap="square" lIns="0" rIns="0" tIns="0" bIns="0" anchor="t">
             <a:spAutoFit/>
           </a:bodyPr>
           <a:lstStyle/>
@@ -9380,7 +9191,7 @@
           <a:noFill/>
         </p:spPr>
         <p:txBody>
-          <a:bodyPr wrap="square" lIns="0" tIns="0" rIns="0" bIns="0" anchor="t">
+          <a:bodyPr wrap="square" lIns="0" rIns="0" tIns="0" bIns="0" anchor="t">
             <a:spAutoFit/>
           </a:bodyPr>
           <a:lstStyle/>
@@ -9439,7 +9250,6 @@
           <a:lstStyle/>
           <a:p>
             <a:pPr algn="ctr"/>
-            <a:endParaRPr/>
           </a:p>
         </p:txBody>
       </p:sp>
@@ -9634,7 +9444,7 @@
           <a:noFill/>
         </p:spPr>
         <p:txBody>
-          <a:bodyPr wrap="square" lIns="0" tIns="0" rIns="0" bIns="0" anchor="t">
+          <a:bodyPr wrap="square" lIns="0" rIns="0" tIns="0" bIns="0" anchor="t">
             <a:spAutoFit/>
           </a:bodyPr>
           <a:lstStyle/>
@@ -9669,7 +9479,7 @@
           <a:noFill/>
         </p:spPr>
         <p:txBody>
-          <a:bodyPr wrap="square" lIns="0" tIns="0" rIns="0" bIns="0" anchor="t">
+          <a:bodyPr wrap="square" lIns="0" rIns="0" tIns="0" bIns="0" anchor="t">
             <a:spAutoFit/>
           </a:bodyPr>
           <a:lstStyle/>
@@ -9696,7 +9506,7 @@
 </file>
 
 <file path=ppt/slides/slide3.xml><?xml version="1.0" encoding="utf-8"?>
-<p:sld xmlns:a="http://schemas.openxmlformats.org/drawingml/2006/main" xmlns:r="http://schemas.openxmlformats.org/officeDocument/2006/relationships" xmlns:p="http://schemas.openxmlformats.org/presentationml/2006/main">
+<p:sld xmlns:a="http://schemas.openxmlformats.org/drawingml/2006/main" xmlns:p="http://schemas.openxmlformats.org/presentationml/2006/main" xmlns:r="http://schemas.openxmlformats.org/officeDocument/2006/relationships">
   <p:cSld>
     <p:bg>
       <p:bgPr>
@@ -9712,14 +9522,7 @@
         <p:cNvGrpSpPr/>
         <p:nvPr/>
       </p:nvGrpSpPr>
-      <p:grpSpPr>
-        <a:xfrm>
-          <a:off x="0" y="0"/>
-          <a:ext cx="0" cy="0"/>
-          <a:chOff x="0" y="0"/>
-          <a:chExt cx="0" cy="0"/>
-        </a:xfrm>
-      </p:grpSpPr>
+      <p:grpSpPr/>
       <p:sp>
         <p:nvSpPr>
           <p:cNvPr id="2" name="Rectangle 1"/>
@@ -9761,7 +9564,6 @@
           <a:lstStyle/>
           <a:p>
             <a:pPr algn="ctr"/>
-            <a:endParaRPr/>
           </a:p>
         </p:txBody>
       </p:sp>
@@ -9806,7 +9608,6 @@
           <a:lstStyle/>
           <a:p>
             <a:pPr algn="ctr"/>
-            <a:endParaRPr/>
           </a:p>
         </p:txBody>
       </p:sp>
@@ -9851,7 +9652,6 @@
           <a:lstStyle/>
           <a:p>
             <a:pPr algn="ctr"/>
-            <a:endParaRPr/>
           </a:p>
         </p:txBody>
       </p:sp>
@@ -9896,7 +9696,6 @@
           <a:lstStyle/>
           <a:p>
             <a:pPr algn="ctr"/>
-            <a:endParaRPr/>
           </a:p>
         </p:txBody>
       </p:sp>
@@ -9917,7 +9716,7 @@
           <a:noFill/>
         </p:spPr>
         <p:txBody>
-          <a:bodyPr wrap="square" lIns="0" tIns="0" rIns="0" bIns="0" anchor="t">
+          <a:bodyPr wrap="square" lIns="0" rIns="0" tIns="0" bIns="0" anchor="t">
             <a:spAutoFit/>
           </a:bodyPr>
           <a:lstStyle/>
@@ -9930,7 +9729,7 @@
                 </a:solidFill>
                 <a:latin typeface="Consolas"/>
               </a:rPr>
-              <a:t>01  ·  АКТУАЛЬНОСТЬ</a:t>
+              <a:t>03  ·  АКТУАЛЬНОСТЬ</a:t>
             </a:r>
           </a:p>
         </p:txBody>
@@ -9952,7 +9751,7 @@
           <a:noFill/>
         </p:spPr>
         <p:txBody>
-          <a:bodyPr wrap="square" lIns="0" tIns="0" rIns="0" bIns="0" anchor="t">
+          <a:bodyPr wrap="square" lIns="0" rIns="0" tIns="0" bIns="0" anchor="t">
             <a:spAutoFit/>
           </a:bodyPr>
           <a:lstStyle/>
@@ -10011,7 +9810,6 @@
           <a:lstStyle/>
           <a:p>
             <a:pPr algn="ctr"/>
-            <a:endParaRPr/>
           </a:p>
         </p:txBody>
       </p:sp>
@@ -10056,7 +9854,6 @@
           <a:lstStyle/>
           <a:p>
             <a:pPr algn="ctr"/>
-            <a:endParaRPr/>
           </a:p>
         </p:txBody>
       </p:sp>
@@ -10101,7 +9898,6 @@
           <a:lstStyle/>
           <a:p>
             <a:pPr algn="ctr"/>
-            <a:endParaRPr/>
           </a:p>
         </p:txBody>
       </p:sp>
@@ -10122,7 +9918,7 @@
           <a:noFill/>
         </p:spPr>
         <p:txBody>
-          <a:bodyPr wrap="square" lIns="0" tIns="0" rIns="0" bIns="0" anchor="t">
+          <a:bodyPr wrap="square" lIns="0" rIns="0" tIns="0" bIns="0" anchor="t">
             <a:spAutoFit/>
           </a:bodyPr>
           <a:lstStyle/>
@@ -10135,7 +9931,7 @@
                 </a:solidFill>
                 <a:latin typeface="Segoe UI"/>
               </a:rPr>
-              <a:t>100+ млрд</a:t>
+              <a:t>Десятки млрд</a:t>
             </a:r>
           </a:p>
         </p:txBody>
@@ -10157,7 +9953,7 @@
           <a:noFill/>
         </p:spPr>
         <p:txBody>
-          <a:bodyPr wrap="square" lIns="0" tIns="0" rIns="0" bIns="0" anchor="t">
+          <a:bodyPr wrap="square" lIns="0" rIns="0" tIns="0" bIns="0" anchor="t">
             <a:spAutoFit/>
           </a:bodyPr>
           <a:lstStyle/>
@@ -10216,7 +10012,6 @@
           <a:lstStyle/>
           <a:p>
             <a:pPr algn="ctr"/>
-            <a:endParaRPr/>
           </a:p>
         </p:txBody>
       </p:sp>
@@ -10261,7 +10056,6 @@
           <a:lstStyle/>
           <a:p>
             <a:pPr algn="ctr"/>
-            <a:endParaRPr/>
           </a:p>
         </p:txBody>
       </p:sp>
@@ -10282,7 +10076,7 @@
           <a:noFill/>
         </p:spPr>
         <p:txBody>
-          <a:bodyPr wrap="square" lIns="0" tIns="0" rIns="0" bIns="0" anchor="t">
+          <a:bodyPr wrap="square" lIns="0" rIns="0" tIns="0" bIns="0" anchor="t">
             <a:spAutoFit/>
           </a:bodyPr>
           <a:lstStyle/>
@@ -10317,7 +10111,7 @@
           <a:noFill/>
         </p:spPr>
         <p:txBody>
-          <a:bodyPr wrap="square" lIns="0" tIns="0" rIns="0" bIns="0" anchor="t">
+          <a:bodyPr wrap="square" lIns="0" rIns="0" tIns="0" bIns="0" anchor="t">
             <a:spAutoFit/>
           </a:bodyPr>
           <a:lstStyle/>
@@ -10376,7 +10170,6 @@
           <a:lstStyle/>
           <a:p>
             <a:pPr algn="ctr"/>
-            <a:endParaRPr/>
           </a:p>
         </p:txBody>
       </p:sp>
@@ -10421,7 +10214,6 @@
           <a:lstStyle/>
           <a:p>
             <a:pPr algn="ctr"/>
-            <a:endParaRPr/>
           </a:p>
         </p:txBody>
       </p:sp>
@@ -10442,7 +10234,7 @@
           <a:noFill/>
         </p:spPr>
         <p:txBody>
-          <a:bodyPr wrap="square" lIns="0" tIns="0" rIns="0" bIns="0" anchor="t">
+          <a:bodyPr wrap="square" lIns="0" rIns="0" tIns="0" bIns="0" anchor="t">
             <a:spAutoFit/>
           </a:bodyPr>
           <a:lstStyle/>
@@ -10477,7 +10269,7 @@
           <a:noFill/>
         </p:spPr>
         <p:txBody>
-          <a:bodyPr wrap="square" lIns="0" tIns="0" rIns="0" bIns="0" anchor="t">
+          <a:bodyPr wrap="square" lIns="0" rIns="0" tIns="0" bIns="0" anchor="t">
             <a:spAutoFit/>
           </a:bodyPr>
           <a:lstStyle/>
@@ -10583,7 +10375,7 @@
           <a:noFill/>
         </p:spPr>
         <p:txBody>
-          <a:bodyPr wrap="square" lIns="0" tIns="0" rIns="0" bIns="0" anchor="t">
+          <a:bodyPr wrap="square" lIns="0" rIns="0" tIns="0" bIns="0" anchor="t">
             <a:spAutoFit/>
           </a:bodyPr>
           <a:lstStyle/>
@@ -10618,7 +10410,7 @@
           <a:noFill/>
         </p:spPr>
         <p:txBody>
-          <a:bodyPr wrap="square" lIns="0" tIns="0" rIns="0" bIns="0" anchor="t">
+          <a:bodyPr wrap="square" lIns="0" rIns="0" tIns="0" bIns="0" anchor="t">
             <a:spAutoFit/>
           </a:bodyPr>
           <a:lstStyle/>
@@ -10645,7 +10437,7 @@
 </file>
 
 <file path=ppt/slides/slide4.xml><?xml version="1.0" encoding="utf-8"?>
-<p:sld xmlns:a="http://schemas.openxmlformats.org/drawingml/2006/main" xmlns:r="http://schemas.openxmlformats.org/officeDocument/2006/relationships" xmlns:p="http://schemas.openxmlformats.org/presentationml/2006/main">
+<p:sld xmlns:a="http://schemas.openxmlformats.org/drawingml/2006/main" xmlns:p="http://schemas.openxmlformats.org/presentationml/2006/main" xmlns:r="http://schemas.openxmlformats.org/officeDocument/2006/relationships">
   <p:cSld>
     <p:bg>
       <p:bgPr>
@@ -10661,14 +10453,7 @@
         <p:cNvGrpSpPr/>
         <p:nvPr/>
       </p:nvGrpSpPr>
-      <p:grpSpPr>
-        <a:xfrm>
-          <a:off x="0" y="0"/>
-          <a:ext cx="0" cy="0"/>
-          <a:chOff x="0" y="0"/>
-          <a:chExt cx="0" cy="0"/>
-        </a:xfrm>
-      </p:grpSpPr>
+      <p:grpSpPr/>
       <p:sp>
         <p:nvSpPr>
           <p:cNvPr id="2" name="Rectangle 1"/>
@@ -10710,7 +10495,6 @@
           <a:lstStyle/>
           <a:p>
             <a:pPr algn="ctr"/>
-            <a:endParaRPr/>
           </a:p>
         </p:txBody>
       </p:sp>
@@ -10755,7 +10539,6 @@
           <a:lstStyle/>
           <a:p>
             <a:pPr algn="ctr"/>
-            <a:endParaRPr/>
           </a:p>
         </p:txBody>
       </p:sp>
@@ -10800,7 +10583,6 @@
           <a:lstStyle/>
           <a:p>
             <a:pPr algn="ctr"/>
-            <a:endParaRPr/>
           </a:p>
         </p:txBody>
       </p:sp>
@@ -10845,7 +10627,6 @@
           <a:lstStyle/>
           <a:p>
             <a:pPr algn="ctr"/>
-            <a:endParaRPr/>
           </a:p>
         </p:txBody>
       </p:sp>
@@ -10866,7 +10647,7 @@
           <a:noFill/>
         </p:spPr>
         <p:txBody>
-          <a:bodyPr wrap="square" lIns="0" tIns="0" rIns="0" bIns="0" anchor="t">
+          <a:bodyPr wrap="square" lIns="0" rIns="0" tIns="0" bIns="0" anchor="t">
             <a:spAutoFit/>
           </a:bodyPr>
           <a:lstStyle/>
@@ -10879,7 +10660,7 @@
                 </a:solidFill>
                 <a:latin typeface="Consolas"/>
               </a:rPr>
-              <a:t>02  ·  ЦЕЛЬ И ЗАДАЧИ</a:t>
+              <a:t>04  ·  ЦЕЛЬ И ЗАДАЧИ</a:t>
             </a:r>
           </a:p>
         </p:txBody>
@@ -10901,7 +10682,7 @@
           <a:noFill/>
         </p:spPr>
         <p:txBody>
-          <a:bodyPr wrap="square" lIns="0" tIns="0" rIns="0" bIns="0" anchor="t">
+          <a:bodyPr wrap="square" lIns="0" rIns="0" tIns="0" bIns="0" anchor="t">
             <a:spAutoFit/>
           </a:bodyPr>
           <a:lstStyle/>
@@ -10960,7 +10741,6 @@
           <a:lstStyle/>
           <a:p>
             <a:pPr algn="ctr"/>
-            <a:endParaRPr/>
           </a:p>
         </p:txBody>
       </p:sp>
@@ -10981,7 +10761,7 @@
           <a:noFill/>
         </p:spPr>
         <p:txBody>
-          <a:bodyPr wrap="square" lIns="0" tIns="0" rIns="0" bIns="0" anchor="t">
+          <a:bodyPr wrap="square" lIns="0" rIns="0" tIns="0" bIns="0" anchor="t">
             <a:spAutoFit/>
           </a:bodyPr>
           <a:lstStyle/>
@@ -11071,7 +10851,7 @@
           <a:noFill/>
         </p:spPr>
         <p:txBody>
-          <a:bodyPr wrap="square" lIns="0" tIns="0" rIns="0" bIns="0" anchor="t">
+          <a:bodyPr wrap="square" lIns="0" rIns="0" tIns="0" bIns="0" anchor="t">
             <a:spAutoFit/>
           </a:bodyPr>
           <a:lstStyle/>
@@ -11241,7 +11021,7 @@
           <a:noFill/>
         </p:spPr>
         <p:txBody>
-          <a:bodyPr wrap="square" lIns="0" tIns="0" rIns="0" bIns="0" anchor="t">
+          <a:bodyPr wrap="square" lIns="0" rIns="0" tIns="0" bIns="0" anchor="t">
             <a:spAutoFit/>
           </a:bodyPr>
           <a:lstStyle/>
@@ -11276,7 +11056,7 @@
           <a:noFill/>
         </p:spPr>
         <p:txBody>
-          <a:bodyPr wrap="square" lIns="0" tIns="0" rIns="0" bIns="0" anchor="t">
+          <a:bodyPr wrap="square" lIns="0" rIns="0" tIns="0" bIns="0" anchor="t">
             <a:spAutoFit/>
           </a:bodyPr>
           <a:lstStyle/>
@@ -11303,7 +11083,7 @@
 </file>
 
 <file path=ppt/slides/slide5.xml><?xml version="1.0" encoding="utf-8"?>
-<p:sld xmlns:a="http://schemas.openxmlformats.org/drawingml/2006/main" xmlns:r="http://schemas.openxmlformats.org/officeDocument/2006/relationships" xmlns:p="http://schemas.openxmlformats.org/presentationml/2006/main">
+<p:sld xmlns:a="http://schemas.openxmlformats.org/drawingml/2006/main" xmlns:p="http://schemas.openxmlformats.org/presentationml/2006/main" xmlns:r="http://schemas.openxmlformats.org/officeDocument/2006/relationships">
   <p:cSld>
     <p:bg>
       <p:bgPr>
@@ -11319,14 +11099,7 @@
         <p:cNvGrpSpPr/>
         <p:nvPr/>
       </p:nvGrpSpPr>
-      <p:grpSpPr>
-        <a:xfrm>
-          <a:off x="0" y="0"/>
-          <a:ext cx="0" cy="0"/>
-          <a:chOff x="0" y="0"/>
-          <a:chExt cx="0" cy="0"/>
-        </a:xfrm>
-      </p:grpSpPr>
+      <p:grpSpPr/>
       <p:sp>
         <p:nvSpPr>
           <p:cNvPr id="2" name="Rectangle 1"/>
@@ -11368,7 +11141,6 @@
           <a:lstStyle/>
           <a:p>
             <a:pPr algn="ctr"/>
-            <a:endParaRPr/>
           </a:p>
         </p:txBody>
       </p:sp>
@@ -11413,7 +11185,6 @@
           <a:lstStyle/>
           <a:p>
             <a:pPr algn="ctr"/>
-            <a:endParaRPr/>
           </a:p>
         </p:txBody>
       </p:sp>
@@ -11458,7 +11229,6 @@
           <a:lstStyle/>
           <a:p>
             <a:pPr algn="ctr"/>
-            <a:endParaRPr/>
           </a:p>
         </p:txBody>
       </p:sp>
@@ -11503,7 +11273,6 @@
           <a:lstStyle/>
           <a:p>
             <a:pPr algn="ctr"/>
-            <a:endParaRPr/>
           </a:p>
         </p:txBody>
       </p:sp>
@@ -11524,7 +11293,7 @@
           <a:noFill/>
         </p:spPr>
         <p:txBody>
-          <a:bodyPr wrap="square" lIns="0" tIns="0" rIns="0" bIns="0" anchor="t">
+          <a:bodyPr wrap="square" lIns="0" rIns="0" tIns="0" bIns="0" anchor="t">
             <a:spAutoFit/>
           </a:bodyPr>
           <a:lstStyle/>
@@ -11537,7 +11306,7 @@
                 </a:solidFill>
                 <a:latin typeface="Consolas"/>
               </a:rPr>
-              <a:t>03  ·  ТРЕБОВАНИЯ</a:t>
+              <a:t>05  ·  ТРЕБОВАНИЯ</a:t>
             </a:r>
           </a:p>
         </p:txBody>
@@ -11559,7 +11328,7 @@
           <a:noFill/>
         </p:spPr>
         <p:txBody>
-          <a:bodyPr wrap="square" lIns="0" tIns="0" rIns="0" bIns="0" anchor="t">
+          <a:bodyPr wrap="square" lIns="0" rIns="0" tIns="0" bIns="0" anchor="t">
             <a:spAutoFit/>
           </a:bodyPr>
           <a:lstStyle/>
@@ -11618,7 +11387,6 @@
           <a:lstStyle/>
           <a:p>
             <a:pPr algn="ctr"/>
-            <a:endParaRPr/>
           </a:p>
         </p:txBody>
       </p:sp>
@@ -11639,7 +11407,7 @@
           <a:noFill/>
         </p:spPr>
         <p:txBody>
-          <a:bodyPr wrap="square" lIns="0" tIns="0" rIns="0" bIns="0" anchor="t">
+          <a:bodyPr wrap="square" lIns="0" rIns="0" tIns="0" bIns="0" anchor="t">
             <a:spAutoFit/>
           </a:bodyPr>
           <a:lstStyle/>
@@ -11809,7 +11577,7 @@
           <a:noFill/>
         </p:spPr>
         <p:txBody>
-          <a:bodyPr wrap="square" lIns="0" tIns="0" rIns="0" bIns="0" anchor="t">
+          <a:bodyPr wrap="square" lIns="0" rIns="0" tIns="0" bIns="0" anchor="t">
             <a:spAutoFit/>
           </a:bodyPr>
           <a:lstStyle/>
@@ -11971,7 +11739,6 @@
           <a:lstStyle/>
           <a:p>
             <a:pPr algn="ctr"/>
-            <a:endParaRPr/>
           </a:p>
         </p:txBody>
       </p:sp>
@@ -11992,7 +11759,7 @@
           <a:noFill/>
         </p:spPr>
         <p:txBody>
-          <a:bodyPr wrap="square" lIns="0" tIns="0" rIns="0" bIns="0" anchor="t">
+          <a:bodyPr wrap="square" lIns="0" rIns="0" tIns="0" bIns="0" anchor="t">
             <a:spAutoFit/>
           </a:bodyPr>
           <a:lstStyle/>
@@ -12027,7 +11794,7 @@
           <a:noFill/>
         </p:spPr>
         <p:txBody>
-          <a:bodyPr wrap="square" lIns="0" tIns="0" rIns="0" bIns="0" anchor="t">
+          <a:bodyPr wrap="square" lIns="0" rIns="0" tIns="0" bIns="0" anchor="t">
             <a:spAutoFit/>
           </a:bodyPr>
           <a:lstStyle/>
@@ -12062,7 +11829,7 @@
           <a:noFill/>
         </p:spPr>
         <p:txBody>
-          <a:bodyPr wrap="square" lIns="0" tIns="0" rIns="0" bIns="0" anchor="t">
+          <a:bodyPr wrap="square" lIns="0" rIns="0" tIns="0" bIns="0" anchor="t">
             <a:spAutoFit/>
           </a:bodyPr>
           <a:lstStyle/>
@@ -12097,7 +11864,7 @@
           <a:noFill/>
         </p:spPr>
         <p:txBody>
-          <a:bodyPr wrap="square" lIns="0" tIns="0" rIns="0" bIns="0" anchor="t">
+          <a:bodyPr wrap="square" lIns="0" rIns="0" tIns="0" bIns="0" anchor="t">
             <a:spAutoFit/>
           </a:bodyPr>
           <a:lstStyle/>
@@ -12124,7 +11891,7 @@
 </file>
 
 <file path=ppt/slides/slide6.xml><?xml version="1.0" encoding="utf-8"?>
-<p:sld xmlns:a="http://schemas.openxmlformats.org/drawingml/2006/main" xmlns:r="http://schemas.openxmlformats.org/officeDocument/2006/relationships" xmlns:p="http://schemas.openxmlformats.org/presentationml/2006/main">
+<p:sld xmlns:a="http://schemas.openxmlformats.org/drawingml/2006/main" xmlns:p="http://schemas.openxmlformats.org/presentationml/2006/main" xmlns:r="http://schemas.openxmlformats.org/officeDocument/2006/relationships">
   <p:cSld>
     <p:bg>
       <p:bgPr>
@@ -12140,14 +11907,7 @@
         <p:cNvGrpSpPr/>
         <p:nvPr/>
       </p:nvGrpSpPr>
-      <p:grpSpPr>
-        <a:xfrm>
-          <a:off x="0" y="0"/>
-          <a:ext cx="0" cy="0"/>
-          <a:chOff x="0" y="0"/>
-          <a:chExt cx="0" cy="0"/>
-        </a:xfrm>
-      </p:grpSpPr>
+      <p:grpSpPr/>
       <p:sp>
         <p:nvSpPr>
           <p:cNvPr id="2" name="Rectangle 1"/>
@@ -12189,7 +11949,6 @@
           <a:lstStyle/>
           <a:p>
             <a:pPr algn="ctr"/>
-            <a:endParaRPr/>
           </a:p>
         </p:txBody>
       </p:sp>
@@ -12234,7 +11993,6 @@
           <a:lstStyle/>
           <a:p>
             <a:pPr algn="ctr"/>
-            <a:endParaRPr/>
           </a:p>
         </p:txBody>
       </p:sp>
@@ -12279,7 +12037,6 @@
           <a:lstStyle/>
           <a:p>
             <a:pPr algn="ctr"/>
-            <a:endParaRPr/>
           </a:p>
         </p:txBody>
       </p:sp>
@@ -12324,7 +12081,6 @@
           <a:lstStyle/>
           <a:p>
             <a:pPr algn="ctr"/>
-            <a:endParaRPr/>
           </a:p>
         </p:txBody>
       </p:sp>
@@ -12345,7 +12101,7 @@
           <a:noFill/>
         </p:spPr>
         <p:txBody>
-          <a:bodyPr wrap="square" lIns="0" tIns="0" rIns="0" bIns="0" anchor="t">
+          <a:bodyPr wrap="square" lIns="0" rIns="0" tIns="0" bIns="0" anchor="t">
             <a:spAutoFit/>
           </a:bodyPr>
           <a:lstStyle/>
@@ -12358,7 +12114,7 @@
                 </a:solidFill>
                 <a:latin typeface="Consolas"/>
               </a:rPr>
-              <a:t>04  ·  ПОХОЖИЕ СЕРВИСЫ</a:t>
+              <a:t>06  ·  ПОХОЖИЕ СЕРВИСЫ</a:t>
             </a:r>
           </a:p>
         </p:txBody>
@@ -12380,7 +12136,7 @@
           <a:noFill/>
         </p:spPr>
         <p:txBody>
-          <a:bodyPr wrap="square" lIns="0" tIns="0" rIns="0" bIns="0" anchor="t">
+          <a:bodyPr wrap="square" lIns="0" rIns="0" tIns="0" bIns="0" anchor="t">
             <a:spAutoFit/>
           </a:bodyPr>
           <a:lstStyle/>
@@ -12439,7 +12195,6 @@
           <a:lstStyle/>
           <a:p>
             <a:pPr algn="ctr"/>
-            <a:endParaRPr/>
           </a:p>
         </p:txBody>
       </p:sp>
@@ -12460,7 +12215,7 @@
           <a:noFill/>
         </p:spPr>
         <p:txBody>
-          <a:bodyPr wrap="square" lIns="0" tIns="0" rIns="0" bIns="0" anchor="t">
+          <a:bodyPr wrap="square" lIns="0" rIns="0" tIns="0" bIns="0" anchor="t">
             <a:spAutoFit/>
           </a:bodyPr>
           <a:lstStyle/>
@@ -12495,7 +12250,7 @@
           <a:noFill/>
         </p:spPr>
         <p:txBody>
-          <a:bodyPr wrap="square" lIns="0" tIns="0" rIns="0" bIns="0" anchor="t">
+          <a:bodyPr wrap="square" lIns="0" rIns="0" tIns="0" bIns="0" anchor="t">
             <a:spAutoFit/>
           </a:bodyPr>
           <a:lstStyle/>
@@ -12530,7 +12285,7 @@
           <a:noFill/>
         </p:spPr>
         <p:txBody>
-          <a:bodyPr wrap="square" lIns="0" tIns="0" rIns="0" bIns="0" anchor="t">
+          <a:bodyPr wrap="square" lIns="0" rIns="0" tIns="0" bIns="0" anchor="t">
             <a:spAutoFit/>
           </a:bodyPr>
           <a:lstStyle/>
@@ -12565,7 +12320,7 @@
           <a:noFill/>
         </p:spPr>
         <p:txBody>
-          <a:bodyPr wrap="square" lIns="0" tIns="0" rIns="0" bIns="0" anchor="t">
+          <a:bodyPr wrap="square" lIns="0" rIns="0" tIns="0" bIns="0" anchor="t">
             <a:spAutoFit/>
           </a:bodyPr>
           <a:lstStyle/>
@@ -12600,7 +12355,7 @@
           <a:noFill/>
         </p:spPr>
         <p:txBody>
-          <a:bodyPr wrap="square" lIns="0" tIns="0" rIns="0" bIns="0" anchor="t">
+          <a:bodyPr wrap="square" lIns="0" rIns="0" tIns="0" bIns="0" anchor="t">
             <a:spAutoFit/>
           </a:bodyPr>
           <a:lstStyle/>
@@ -12635,7 +12390,7 @@
           <a:noFill/>
         </p:spPr>
         <p:txBody>
-          <a:bodyPr wrap="square" lIns="0" tIns="0" rIns="0" bIns="0" anchor="t">
+          <a:bodyPr wrap="square" lIns="0" rIns="0" tIns="0" bIns="0" anchor="t">
             <a:spAutoFit/>
           </a:bodyPr>
           <a:lstStyle/>
@@ -12670,7 +12425,7 @@
           <a:noFill/>
         </p:spPr>
         <p:txBody>
-          <a:bodyPr wrap="square" lIns="0" tIns="0" rIns="0" bIns="0" anchor="t">
+          <a:bodyPr wrap="square" lIns="0" rIns="0" tIns="0" bIns="0" anchor="t">
             <a:spAutoFit/>
           </a:bodyPr>
           <a:lstStyle/>
@@ -12705,7 +12460,7 @@
           <a:noFill/>
         </p:spPr>
         <p:txBody>
-          <a:bodyPr wrap="square" lIns="0" tIns="0" rIns="0" bIns="0" anchor="t">
+          <a:bodyPr wrap="square" lIns="0" rIns="0" tIns="0" bIns="0" anchor="t">
             <a:spAutoFit/>
           </a:bodyPr>
           <a:lstStyle/>
@@ -12740,7 +12495,7 @@
           <a:noFill/>
         </p:spPr>
         <p:txBody>
-          <a:bodyPr wrap="square" lIns="0" tIns="0" rIns="0" bIns="0" anchor="t">
+          <a:bodyPr wrap="square" lIns="0" rIns="0" tIns="0" bIns="0" anchor="t">
             <a:spAutoFit/>
           </a:bodyPr>
           <a:lstStyle/>
@@ -12775,7 +12530,7 @@
           <a:noFill/>
         </p:spPr>
         <p:txBody>
-          <a:bodyPr wrap="square" lIns="0" tIns="0" rIns="0" bIns="0" anchor="t">
+          <a:bodyPr wrap="square" lIns="0" rIns="0" tIns="0" bIns="0" anchor="t">
             <a:spAutoFit/>
           </a:bodyPr>
           <a:lstStyle/>
@@ -12865,7 +12620,7 @@
           <a:noFill/>
         </p:spPr>
         <p:txBody>
-          <a:bodyPr wrap="square" lIns="0" tIns="0" rIns="0" bIns="0" anchor="t">
+          <a:bodyPr wrap="square" lIns="0" rIns="0" tIns="0" bIns="0" anchor="t">
             <a:spAutoFit/>
           </a:bodyPr>
           <a:lstStyle/>
@@ -12900,7 +12655,7 @@
           <a:noFill/>
         </p:spPr>
         <p:txBody>
-          <a:bodyPr wrap="square" lIns="0" tIns="0" rIns="0" bIns="0" anchor="t">
+          <a:bodyPr wrap="square" lIns="0" rIns="0" tIns="0" bIns="0" anchor="t">
             <a:spAutoFit/>
           </a:bodyPr>
           <a:lstStyle/>
@@ -12927,7 +12682,7 @@
 </file>
 
 <file path=ppt/slides/slide7.xml><?xml version="1.0" encoding="utf-8"?>
-<p:sld xmlns:a="http://schemas.openxmlformats.org/drawingml/2006/main" xmlns:r="http://schemas.openxmlformats.org/officeDocument/2006/relationships" xmlns:p="http://schemas.openxmlformats.org/presentationml/2006/main">
+<p:sld xmlns:a="http://schemas.openxmlformats.org/drawingml/2006/main" xmlns:p="http://schemas.openxmlformats.org/presentationml/2006/main" xmlns:r="http://schemas.openxmlformats.org/officeDocument/2006/relationships">
   <p:cSld>
     <p:bg>
       <p:bgPr>
@@ -12943,14 +12698,7 @@
         <p:cNvGrpSpPr/>
         <p:nvPr/>
       </p:nvGrpSpPr>
-      <p:grpSpPr>
-        <a:xfrm>
-          <a:off x="0" y="0"/>
-          <a:ext cx="0" cy="0"/>
-          <a:chOff x="0" y="0"/>
-          <a:chExt cx="0" cy="0"/>
-        </a:xfrm>
-      </p:grpSpPr>
+      <p:grpSpPr/>
       <p:sp>
         <p:nvSpPr>
           <p:cNvPr id="2" name="Rectangle 1"/>
@@ -12992,7 +12740,6 @@
           <a:lstStyle/>
           <a:p>
             <a:pPr algn="ctr"/>
-            <a:endParaRPr/>
           </a:p>
         </p:txBody>
       </p:sp>
@@ -13037,7 +12784,6 @@
           <a:lstStyle/>
           <a:p>
             <a:pPr algn="ctr"/>
-            <a:endParaRPr/>
           </a:p>
         </p:txBody>
       </p:sp>
@@ -13082,7 +12828,6 @@
           <a:lstStyle/>
           <a:p>
             <a:pPr algn="ctr"/>
-            <a:endParaRPr/>
           </a:p>
         </p:txBody>
       </p:sp>
@@ -13127,7 +12872,6 @@
           <a:lstStyle/>
           <a:p>
             <a:pPr algn="ctr"/>
-            <a:endParaRPr/>
           </a:p>
         </p:txBody>
       </p:sp>
@@ -13148,7 +12892,7 @@
           <a:noFill/>
         </p:spPr>
         <p:txBody>
-          <a:bodyPr wrap="square" lIns="0" tIns="0" rIns="0" bIns="0" anchor="t">
+          <a:bodyPr wrap="square" lIns="0" rIns="0" tIns="0" bIns="0" anchor="t">
             <a:spAutoFit/>
           </a:bodyPr>
           <a:lstStyle/>
@@ -13161,7 +12905,7 @@
                 </a:solidFill>
                 <a:latin typeface="Consolas"/>
               </a:rPr>
-              <a:t>05  ·  СТЕК</a:t>
+              <a:t>07  ·  СТЕК</a:t>
             </a:r>
           </a:p>
         </p:txBody>
@@ -13183,7 +12927,7 @@
           <a:noFill/>
         </p:spPr>
         <p:txBody>
-          <a:bodyPr wrap="square" lIns="0" tIns="0" rIns="0" bIns="0" anchor="t">
+          <a:bodyPr wrap="square" lIns="0" rIns="0" tIns="0" bIns="0" anchor="t">
             <a:spAutoFit/>
           </a:bodyPr>
           <a:lstStyle/>
@@ -13242,7 +12986,6 @@
           <a:lstStyle/>
           <a:p>
             <a:pPr algn="ctr"/>
-            <a:endParaRPr/>
           </a:p>
         </p:txBody>
       </p:sp>
@@ -13287,7 +13030,6 @@
           <a:lstStyle/>
           <a:p>
             <a:pPr algn="ctr"/>
-            <a:endParaRPr/>
           </a:p>
         </p:txBody>
       </p:sp>
@@ -13332,7 +13074,6 @@
           <a:lstStyle/>
           <a:p>
             <a:pPr algn="ctr"/>
-            <a:endParaRPr/>
           </a:p>
         </p:txBody>
       </p:sp>
@@ -13353,7 +13094,7 @@
           <a:noFill/>
         </p:spPr>
         <p:txBody>
-          <a:bodyPr wrap="square" lIns="0" tIns="0" rIns="0" bIns="0" anchor="t">
+          <a:bodyPr wrap="square" lIns="0" rIns="0" tIns="0" bIns="0" anchor="t">
             <a:spAutoFit/>
           </a:bodyPr>
           <a:lstStyle/>
@@ -13388,7 +13129,7 @@
           <a:noFill/>
         </p:spPr>
         <p:txBody>
-          <a:bodyPr wrap="square" lIns="0" tIns="0" rIns="0" bIns="0" anchor="t">
+          <a:bodyPr wrap="square" lIns="0" rIns="0" tIns="0" bIns="0" anchor="t">
             <a:spAutoFit/>
           </a:bodyPr>
           <a:lstStyle/>
@@ -13447,7 +13188,6 @@
           <a:lstStyle/>
           <a:p>
             <a:pPr algn="ctr"/>
-            <a:endParaRPr/>
           </a:p>
         </p:txBody>
       </p:sp>
@@ -13492,7 +13232,6 @@
           <a:lstStyle/>
           <a:p>
             <a:pPr algn="ctr"/>
-            <a:endParaRPr/>
           </a:p>
         </p:txBody>
       </p:sp>
@@ -13513,7 +13252,7 @@
           <a:noFill/>
         </p:spPr>
         <p:txBody>
-          <a:bodyPr wrap="square" lIns="0" tIns="0" rIns="0" bIns="0" anchor="t">
+          <a:bodyPr wrap="square" lIns="0" rIns="0" tIns="0" bIns="0" anchor="t">
             <a:spAutoFit/>
           </a:bodyPr>
           <a:lstStyle/>
@@ -13548,7 +13287,7 @@
           <a:noFill/>
         </p:spPr>
         <p:txBody>
-          <a:bodyPr wrap="square" lIns="0" tIns="0" rIns="0" bIns="0" anchor="t">
+          <a:bodyPr wrap="square" lIns="0" rIns="0" tIns="0" bIns="0" anchor="t">
             <a:spAutoFit/>
           </a:bodyPr>
           <a:lstStyle/>
@@ -13607,7 +13346,6 @@
           <a:lstStyle/>
           <a:p>
             <a:pPr algn="ctr"/>
-            <a:endParaRPr/>
           </a:p>
         </p:txBody>
       </p:sp>
@@ -13652,7 +13390,6 @@
           <a:lstStyle/>
           <a:p>
             <a:pPr algn="ctr"/>
-            <a:endParaRPr/>
           </a:p>
         </p:txBody>
       </p:sp>
@@ -13673,7 +13410,7 @@
           <a:noFill/>
         </p:spPr>
         <p:txBody>
-          <a:bodyPr wrap="square" lIns="0" tIns="0" rIns="0" bIns="0" anchor="t">
+          <a:bodyPr wrap="square" lIns="0" rIns="0" tIns="0" bIns="0" anchor="t">
             <a:spAutoFit/>
           </a:bodyPr>
           <a:lstStyle/>
@@ -13708,7 +13445,7 @@
           <a:noFill/>
         </p:spPr>
         <p:txBody>
-          <a:bodyPr wrap="square" lIns="0" tIns="0" rIns="0" bIns="0" anchor="t">
+          <a:bodyPr wrap="square" lIns="0" rIns="0" tIns="0" bIns="0" anchor="t">
             <a:spAutoFit/>
           </a:bodyPr>
           <a:lstStyle/>
@@ -13767,7 +13504,6 @@
           <a:lstStyle/>
           <a:p>
             <a:pPr algn="ctr"/>
-            <a:endParaRPr/>
           </a:p>
         </p:txBody>
       </p:sp>
@@ -13812,7 +13548,6 @@
           <a:lstStyle/>
           <a:p>
             <a:pPr algn="ctr"/>
-            <a:endParaRPr/>
           </a:p>
         </p:txBody>
       </p:sp>
@@ -13833,7 +13568,7 @@
           <a:noFill/>
         </p:spPr>
         <p:txBody>
-          <a:bodyPr wrap="square" lIns="0" tIns="0" rIns="0" bIns="0" anchor="t">
+          <a:bodyPr wrap="square" lIns="0" rIns="0" tIns="0" bIns="0" anchor="t">
             <a:spAutoFit/>
           </a:bodyPr>
           <a:lstStyle/>
@@ -13868,7 +13603,7 @@
           <a:noFill/>
         </p:spPr>
         <p:txBody>
-          <a:bodyPr wrap="square" lIns="0" tIns="0" rIns="0" bIns="0" anchor="t">
+          <a:bodyPr wrap="square" lIns="0" rIns="0" tIns="0" bIns="0" anchor="t">
             <a:spAutoFit/>
           </a:bodyPr>
           <a:lstStyle/>
@@ -13927,7 +13662,6 @@
           <a:lstStyle/>
           <a:p>
             <a:pPr algn="ctr"/>
-            <a:endParaRPr/>
           </a:p>
         </p:txBody>
       </p:sp>
@@ -13972,7 +13706,6 @@
           <a:lstStyle/>
           <a:p>
             <a:pPr algn="ctr"/>
-            <a:endParaRPr/>
           </a:p>
         </p:txBody>
       </p:sp>
@@ -13993,7 +13726,7 @@
           <a:noFill/>
         </p:spPr>
         <p:txBody>
-          <a:bodyPr wrap="square" lIns="0" tIns="0" rIns="0" bIns="0" anchor="t">
+          <a:bodyPr wrap="square" lIns="0" rIns="0" tIns="0" bIns="0" anchor="t">
             <a:spAutoFit/>
           </a:bodyPr>
           <a:lstStyle/>
@@ -14028,7 +13761,7 @@
           <a:noFill/>
         </p:spPr>
         <p:txBody>
-          <a:bodyPr wrap="square" lIns="0" tIns="0" rIns="0" bIns="0" anchor="t">
+          <a:bodyPr wrap="square" lIns="0" rIns="0" tIns="0" bIns="0" anchor="t">
             <a:spAutoFit/>
           </a:bodyPr>
           <a:lstStyle/>
@@ -14087,7 +13820,6 @@
           <a:lstStyle/>
           <a:p>
             <a:pPr algn="ctr"/>
-            <a:endParaRPr/>
           </a:p>
         </p:txBody>
       </p:sp>
@@ -14132,7 +13864,6 @@
           <a:lstStyle/>
           <a:p>
             <a:pPr algn="ctr"/>
-            <a:endParaRPr/>
           </a:p>
         </p:txBody>
       </p:sp>
@@ -14153,7 +13884,7 @@
           <a:noFill/>
         </p:spPr>
         <p:txBody>
-          <a:bodyPr wrap="square" lIns="0" tIns="0" rIns="0" bIns="0" anchor="t">
+          <a:bodyPr wrap="square" lIns="0" rIns="0" tIns="0" bIns="0" anchor="t">
             <a:spAutoFit/>
           </a:bodyPr>
           <a:lstStyle/>
@@ -14188,7 +13919,7 @@
           <a:noFill/>
         </p:spPr>
         <p:txBody>
-          <a:bodyPr wrap="square" lIns="0" tIns="0" rIns="0" bIns="0" anchor="t">
+          <a:bodyPr wrap="square" lIns="0" rIns="0" tIns="0" bIns="0" anchor="t">
             <a:spAutoFit/>
           </a:bodyPr>
           <a:lstStyle/>
@@ -14247,7 +13978,6 @@
           <a:lstStyle/>
           <a:p>
             <a:pPr algn="ctr"/>
-            <a:endParaRPr/>
           </a:p>
         </p:txBody>
       </p:sp>
@@ -14292,7 +14022,6 @@
           <a:lstStyle/>
           <a:p>
             <a:pPr algn="ctr"/>
-            <a:endParaRPr/>
           </a:p>
         </p:txBody>
       </p:sp>
@@ -14313,7 +14042,7 @@
           <a:noFill/>
         </p:spPr>
         <p:txBody>
-          <a:bodyPr wrap="square" lIns="0" tIns="0" rIns="0" bIns="0" anchor="t">
+          <a:bodyPr wrap="square" lIns="0" rIns="0" tIns="0" bIns="0" anchor="t">
             <a:spAutoFit/>
           </a:bodyPr>
           <a:lstStyle/>
@@ -14348,7 +14077,7 @@
           <a:noFill/>
         </p:spPr>
         <p:txBody>
-          <a:bodyPr wrap="square" lIns="0" tIns="0" rIns="0" bIns="0" anchor="t">
+          <a:bodyPr wrap="square" lIns="0" rIns="0" tIns="0" bIns="0" anchor="t">
             <a:spAutoFit/>
           </a:bodyPr>
           <a:lstStyle/>
@@ -14407,7 +14136,6 @@
           <a:lstStyle/>
           <a:p>
             <a:pPr algn="ctr"/>
-            <a:endParaRPr/>
           </a:p>
         </p:txBody>
       </p:sp>
@@ -14452,7 +14180,6 @@
           <a:lstStyle/>
           <a:p>
             <a:pPr algn="ctr"/>
-            <a:endParaRPr/>
           </a:p>
         </p:txBody>
       </p:sp>
@@ -14473,7 +14200,7 @@
           <a:noFill/>
         </p:spPr>
         <p:txBody>
-          <a:bodyPr wrap="square" lIns="0" tIns="0" rIns="0" bIns="0" anchor="t">
+          <a:bodyPr wrap="square" lIns="0" rIns="0" tIns="0" bIns="0" anchor="t">
             <a:spAutoFit/>
           </a:bodyPr>
           <a:lstStyle/>
@@ -14508,7 +14235,7 @@
           <a:noFill/>
         </p:spPr>
         <p:txBody>
-          <a:bodyPr wrap="square" lIns="0" tIns="0" rIns="0" bIns="0" anchor="t">
+          <a:bodyPr wrap="square" lIns="0" rIns="0" tIns="0" bIns="0" anchor="t">
             <a:spAutoFit/>
           </a:bodyPr>
           <a:lstStyle/>
@@ -14543,7 +14270,7 @@
           <a:noFill/>
         </p:spPr>
         <p:txBody>
-          <a:bodyPr wrap="square" lIns="0" tIns="0" rIns="0" bIns="0" anchor="t">
+          <a:bodyPr wrap="square" lIns="0" rIns="0" tIns="0" bIns="0" anchor="t">
             <a:spAutoFit/>
           </a:bodyPr>
           <a:lstStyle/>
@@ -14578,7 +14305,7 @@
           <a:noFill/>
         </p:spPr>
         <p:txBody>
-          <a:bodyPr wrap="square" lIns="0" tIns="0" rIns="0" bIns="0" anchor="t">
+          <a:bodyPr wrap="square" lIns="0" rIns="0" tIns="0" bIns="0" anchor="t">
             <a:spAutoFit/>
           </a:bodyPr>
           <a:lstStyle/>
@@ -14605,7 +14332,7 @@
 </file>
 
 <file path=ppt/slides/slide8.xml><?xml version="1.0" encoding="utf-8"?>
-<p:sld xmlns:a="http://schemas.openxmlformats.org/drawingml/2006/main" xmlns:r="http://schemas.openxmlformats.org/officeDocument/2006/relationships" xmlns:p="http://schemas.openxmlformats.org/presentationml/2006/main">
+<p:sld xmlns:a="http://schemas.openxmlformats.org/drawingml/2006/main" xmlns:p="http://schemas.openxmlformats.org/presentationml/2006/main" xmlns:r="http://schemas.openxmlformats.org/officeDocument/2006/relationships">
   <p:cSld>
     <p:bg>
       <p:bgPr>
@@ -14621,14 +14348,7 @@
         <p:cNvGrpSpPr/>
         <p:nvPr/>
       </p:nvGrpSpPr>
-      <p:grpSpPr>
-        <a:xfrm>
-          <a:off x="0" y="0"/>
-          <a:ext cx="0" cy="0"/>
-          <a:chOff x="0" y="0"/>
-          <a:chExt cx="0" cy="0"/>
-        </a:xfrm>
-      </p:grpSpPr>
+      <p:grpSpPr/>
       <p:sp>
         <p:nvSpPr>
           <p:cNvPr id="2" name="Rectangle 1"/>
@@ -14670,7 +14390,6 @@
           <a:lstStyle/>
           <a:p>
             <a:pPr algn="ctr"/>
-            <a:endParaRPr/>
           </a:p>
         </p:txBody>
       </p:sp>
@@ -14715,7 +14434,6 @@
           <a:lstStyle/>
           <a:p>
             <a:pPr algn="ctr"/>
-            <a:endParaRPr/>
           </a:p>
         </p:txBody>
       </p:sp>
@@ -14760,7 +14478,6 @@
           <a:lstStyle/>
           <a:p>
             <a:pPr algn="ctr"/>
-            <a:endParaRPr/>
           </a:p>
         </p:txBody>
       </p:sp>
@@ -14805,7 +14522,6 @@
           <a:lstStyle/>
           <a:p>
             <a:pPr algn="ctr"/>
-            <a:endParaRPr/>
           </a:p>
         </p:txBody>
       </p:sp>
@@ -14826,7 +14542,7 @@
           <a:noFill/>
         </p:spPr>
         <p:txBody>
-          <a:bodyPr wrap="square" lIns="0" tIns="0" rIns="0" bIns="0" anchor="t">
+          <a:bodyPr wrap="square" lIns="0" rIns="0" tIns="0" bIns="0" anchor="t">
             <a:spAutoFit/>
           </a:bodyPr>
           <a:lstStyle/>
@@ -14839,7 +14555,7 @@
                 </a:solidFill>
                 <a:latin typeface="Consolas"/>
               </a:rPr>
-              <a:t>06  ·  АРХИТЕКТУРА</a:t>
+              <a:t>08  ·  АРХИТЕКТУРА</a:t>
             </a:r>
           </a:p>
         </p:txBody>
@@ -14861,7 +14577,7 @@
           <a:noFill/>
         </p:spPr>
         <p:txBody>
-          <a:bodyPr wrap="square" lIns="0" tIns="0" rIns="0" bIns="0" anchor="t">
+          <a:bodyPr wrap="square" lIns="0" rIns="0" tIns="0" bIns="0" anchor="t">
             <a:spAutoFit/>
           </a:bodyPr>
           <a:lstStyle/>
@@ -14920,7 +14636,6 @@
           <a:lstStyle/>
           <a:p>
             <a:pPr algn="ctr"/>
-            <a:endParaRPr/>
           </a:p>
         </p:txBody>
       </p:sp>
@@ -14967,7 +14682,6 @@
           <a:lstStyle/>
           <a:p>
             <a:pPr algn="ctr"/>
-            <a:endParaRPr/>
           </a:p>
         </p:txBody>
       </p:sp>
@@ -14988,7 +14702,7 @@
           <a:noFill/>
         </p:spPr>
         <p:txBody>
-          <a:bodyPr wrap="square" lIns="0" tIns="0" rIns="0" bIns="0" anchor="t">
+          <a:bodyPr wrap="square" lIns="0" rIns="0" tIns="0" bIns="0" anchor="t">
             <a:spAutoFit/>
           </a:bodyPr>
           <a:lstStyle/>
@@ -15023,7 +14737,7 @@
           <a:noFill/>
         </p:spPr>
         <p:txBody>
-          <a:bodyPr wrap="square" lIns="0" tIns="0" rIns="0" bIns="0" anchor="t">
+          <a:bodyPr wrap="square" lIns="0" rIns="0" tIns="0" bIns="0" anchor="t">
             <a:spAutoFit/>
           </a:bodyPr>
           <a:lstStyle/>
@@ -15084,7 +14798,6 @@
           <a:lstStyle/>
           <a:p>
             <a:pPr algn="ctr"/>
-            <a:endParaRPr/>
           </a:p>
         </p:txBody>
       </p:sp>
@@ -15105,7 +14818,7 @@
           <a:noFill/>
         </p:spPr>
         <p:txBody>
-          <a:bodyPr wrap="square" lIns="0" tIns="0" rIns="0" bIns="0" anchor="t">
+          <a:bodyPr wrap="square" lIns="0" rIns="0" tIns="0" bIns="0" anchor="t">
             <a:spAutoFit/>
           </a:bodyPr>
           <a:lstStyle/>
@@ -15140,7 +14853,7 @@
           <a:noFill/>
         </p:spPr>
         <p:txBody>
-          <a:bodyPr wrap="square" lIns="0" tIns="0" rIns="0" bIns="0" anchor="t">
+          <a:bodyPr wrap="square" lIns="0" rIns="0" tIns="0" bIns="0" anchor="t">
             <a:spAutoFit/>
           </a:bodyPr>
           <a:lstStyle/>
@@ -15201,7 +14914,6 @@
           <a:lstStyle/>
           <a:p>
             <a:pPr algn="ctr"/>
-            <a:endParaRPr/>
           </a:p>
         </p:txBody>
       </p:sp>
@@ -15222,7 +14934,7 @@
           <a:noFill/>
         </p:spPr>
         <p:txBody>
-          <a:bodyPr wrap="square" lIns="0" tIns="0" rIns="0" bIns="0" anchor="t">
+          <a:bodyPr wrap="square" lIns="0" rIns="0" tIns="0" bIns="0" anchor="t">
             <a:spAutoFit/>
           </a:bodyPr>
           <a:lstStyle/>
@@ -15257,7 +14969,7 @@
           <a:noFill/>
         </p:spPr>
         <p:txBody>
-          <a:bodyPr wrap="square" lIns="0" tIns="0" rIns="0" bIns="0" anchor="t">
+          <a:bodyPr wrap="square" lIns="0" rIns="0" tIns="0" bIns="0" anchor="t">
             <a:spAutoFit/>
           </a:bodyPr>
           <a:lstStyle/>
@@ -15292,7 +15004,7 @@
           <a:noFill/>
         </p:spPr>
         <p:txBody>
-          <a:bodyPr wrap="square" lIns="0" tIns="0" rIns="0" bIns="0" anchor="t">
+          <a:bodyPr wrap="square" lIns="0" rIns="0" tIns="0" bIns="0" anchor="t">
             <a:spAutoFit/>
           </a:bodyPr>
           <a:lstStyle/>
@@ -15327,7 +15039,7 @@
           <a:noFill/>
         </p:spPr>
         <p:txBody>
-          <a:bodyPr wrap="square" lIns="0" tIns="0" rIns="0" bIns="0" anchor="t">
+          <a:bodyPr wrap="square" lIns="0" rIns="0" tIns="0" bIns="0" anchor="t">
             <a:spAutoFit/>
           </a:bodyPr>
           <a:lstStyle/>
@@ -15388,7 +15100,6 @@
           <a:lstStyle/>
           <a:p>
             <a:pPr algn="ctr"/>
-            <a:endParaRPr/>
           </a:p>
         </p:txBody>
       </p:sp>
@@ -15409,7 +15120,7 @@
           <a:noFill/>
         </p:spPr>
         <p:txBody>
-          <a:bodyPr wrap="square" lIns="0" tIns="0" rIns="0" bIns="0" anchor="t">
+          <a:bodyPr wrap="square" lIns="0" rIns="0" tIns="0" bIns="0" anchor="t">
             <a:spAutoFit/>
           </a:bodyPr>
           <a:lstStyle/>
@@ -15444,7 +15155,7 @@
           <a:noFill/>
         </p:spPr>
         <p:txBody>
-          <a:bodyPr wrap="square" lIns="0" tIns="0" rIns="0" bIns="0" anchor="t">
+          <a:bodyPr wrap="square" lIns="0" rIns="0" tIns="0" bIns="0" anchor="t">
             <a:spAutoFit/>
           </a:bodyPr>
           <a:lstStyle/>
@@ -15479,7 +15190,7 @@
           <a:noFill/>
         </p:spPr>
         <p:txBody>
-          <a:bodyPr wrap="square" lIns="0" tIns="0" rIns="0" bIns="0" anchor="t">
+          <a:bodyPr wrap="square" lIns="0" rIns="0" tIns="0" bIns="0" anchor="t">
             <a:spAutoFit/>
           </a:bodyPr>
           <a:lstStyle/>
@@ -15569,7 +15280,7 @@
           <a:noFill/>
         </p:spPr>
         <p:txBody>
-          <a:bodyPr wrap="square" lIns="0" tIns="0" rIns="0" bIns="0" anchor="t">
+          <a:bodyPr wrap="square" lIns="0" rIns="0" tIns="0" bIns="0" anchor="t">
             <a:spAutoFit/>
           </a:bodyPr>
           <a:lstStyle/>
@@ -15604,7 +15315,7 @@
           <a:noFill/>
         </p:spPr>
         <p:txBody>
-          <a:bodyPr wrap="square" lIns="0" tIns="0" rIns="0" bIns="0" anchor="t">
+          <a:bodyPr wrap="square" lIns="0" rIns="0" tIns="0" bIns="0" anchor="t">
             <a:spAutoFit/>
           </a:bodyPr>
           <a:lstStyle/>
@@ -15631,7 +15342,7 @@
 </file>
 
 <file path=ppt/slides/slide9.xml><?xml version="1.0" encoding="utf-8"?>
-<p:sld xmlns:a="http://schemas.openxmlformats.org/drawingml/2006/main" xmlns:r="http://schemas.openxmlformats.org/officeDocument/2006/relationships" xmlns:p="http://schemas.openxmlformats.org/presentationml/2006/main">
+<p:sld xmlns:a="http://schemas.openxmlformats.org/drawingml/2006/main" xmlns:p="http://schemas.openxmlformats.org/presentationml/2006/main" xmlns:r="http://schemas.openxmlformats.org/officeDocument/2006/relationships">
   <p:cSld>
     <p:bg>
       <p:bgPr>
@@ -15647,14 +15358,7 @@
         <p:cNvGrpSpPr/>
         <p:nvPr/>
       </p:nvGrpSpPr>
-      <p:grpSpPr>
-        <a:xfrm>
-          <a:off x="0" y="0"/>
-          <a:ext cx="0" cy="0"/>
-          <a:chOff x="0" y="0"/>
-          <a:chExt cx="0" cy="0"/>
-        </a:xfrm>
-      </p:grpSpPr>
+      <p:grpSpPr/>
       <p:sp>
         <p:nvSpPr>
           <p:cNvPr id="2" name="Rectangle 1"/>
@@ -15696,7 +15400,6 @@
           <a:lstStyle/>
           <a:p>
             <a:pPr algn="ctr"/>
-            <a:endParaRPr/>
           </a:p>
         </p:txBody>
       </p:sp>
@@ -15741,7 +15444,6 @@
           <a:lstStyle/>
           <a:p>
             <a:pPr algn="ctr"/>
-            <a:endParaRPr/>
           </a:p>
         </p:txBody>
       </p:sp>
@@ -15786,7 +15488,6 @@
           <a:lstStyle/>
           <a:p>
             <a:pPr algn="ctr"/>
-            <a:endParaRPr/>
           </a:p>
         </p:txBody>
       </p:sp>
@@ -15831,7 +15532,6 @@
           <a:lstStyle/>
           <a:p>
             <a:pPr algn="ctr"/>
-            <a:endParaRPr/>
           </a:p>
         </p:txBody>
       </p:sp>
@@ -15852,7 +15552,7 @@
           <a:noFill/>
         </p:spPr>
         <p:txBody>
-          <a:bodyPr wrap="square" lIns="0" tIns="0" rIns="0" bIns="0" anchor="t">
+          <a:bodyPr wrap="square" lIns="0" rIns="0" tIns="0" bIns="0" anchor="t">
             <a:spAutoFit/>
           </a:bodyPr>
           <a:lstStyle/>
@@ -15865,7 +15565,7 @@
                 </a:solidFill>
                 <a:latin typeface="Consolas"/>
               </a:rPr>
-              <a:t>07  ·  БАЗА ДАННЫХ</a:t>
+              <a:t>09  ·  БАЗА ДАННЫХ</a:t>
             </a:r>
           </a:p>
         </p:txBody>
@@ -15887,7 +15587,7 @@
           <a:noFill/>
         </p:spPr>
         <p:txBody>
-          <a:bodyPr wrap="square" lIns="0" tIns="0" rIns="0" bIns="0" anchor="t">
+          <a:bodyPr wrap="square" lIns="0" rIns="0" tIns="0" bIns="0" anchor="t">
             <a:spAutoFit/>
           </a:bodyPr>
           <a:lstStyle/>
@@ -15946,7 +15646,6 @@
           <a:lstStyle/>
           <a:p>
             <a:pPr algn="ctr"/>
-            <a:endParaRPr/>
           </a:p>
         </p:txBody>
       </p:sp>
@@ -15967,7 +15666,7 @@
           <a:noFill/>
         </p:spPr>
         <p:txBody>
-          <a:bodyPr wrap="square" lIns="0" tIns="0" rIns="0" bIns="0" anchor="t">
+          <a:bodyPr wrap="square" lIns="0" rIns="0" tIns="0" bIns="0" anchor="t">
             <a:spAutoFit/>
           </a:bodyPr>
           <a:lstStyle/>
@@ -16002,7 +15701,7 @@
           <a:noFill/>
         </p:spPr>
         <p:txBody>
-          <a:bodyPr wrap="square" lIns="0" tIns="0" rIns="0" bIns="0" anchor="t">
+          <a:bodyPr wrap="square" lIns="0" rIns="0" tIns="0" bIns="0" anchor="t">
             <a:spAutoFit/>
           </a:bodyPr>
           <a:lstStyle/>
@@ -16037,7 +15736,7 @@
           <a:noFill/>
         </p:spPr>
         <p:txBody>
-          <a:bodyPr wrap="square" lIns="0" tIns="0" rIns="0" bIns="0" anchor="t">
+          <a:bodyPr wrap="square" lIns="0" rIns="0" tIns="0" bIns="0" anchor="t">
             <a:spAutoFit/>
           </a:bodyPr>
           <a:lstStyle/>
@@ -16072,7 +15771,7 @@
           <a:noFill/>
         </p:spPr>
         <p:txBody>
-          <a:bodyPr wrap="square" lIns="0" tIns="0" rIns="0" bIns="0" anchor="t">
+          <a:bodyPr wrap="square" lIns="0" rIns="0" tIns="0" bIns="0" anchor="t">
             <a:spAutoFit/>
           </a:bodyPr>
           <a:lstStyle/>
@@ -16107,7 +15806,7 @@
           <a:noFill/>
         </p:spPr>
         <p:txBody>
-          <a:bodyPr wrap="square" lIns="0" tIns="0" rIns="0" bIns="0" anchor="t">
+          <a:bodyPr wrap="square" lIns="0" rIns="0" tIns="0" bIns="0" anchor="t">
             <a:spAutoFit/>
           </a:bodyPr>
           <a:lstStyle/>
@@ -16142,7 +15841,7 @@
           <a:noFill/>
         </p:spPr>
         <p:txBody>
-          <a:bodyPr wrap="square" lIns="0" tIns="0" rIns="0" bIns="0" anchor="t">
+          <a:bodyPr wrap="square" lIns="0" rIns="0" tIns="0" bIns="0" anchor="t">
             <a:spAutoFit/>
           </a:bodyPr>
           <a:lstStyle/>
@@ -16177,7 +15876,7 @@
           <a:noFill/>
         </p:spPr>
         <p:txBody>
-          <a:bodyPr wrap="square" lIns="0" tIns="0" rIns="0" bIns="0" anchor="t">
+          <a:bodyPr wrap="square" lIns="0" rIns="0" tIns="0" bIns="0" anchor="t">
             <a:spAutoFit/>
           </a:bodyPr>
           <a:lstStyle/>
@@ -16212,7 +15911,7 @@
           <a:noFill/>
         </p:spPr>
         <p:txBody>
-          <a:bodyPr wrap="square" lIns="0" tIns="0" rIns="0" bIns="0" anchor="t">
+          <a:bodyPr wrap="square" lIns="0" rIns="0" tIns="0" bIns="0" anchor="t">
             <a:spAutoFit/>
           </a:bodyPr>
           <a:lstStyle/>
@@ -16247,7 +15946,7 @@
           <a:noFill/>
         </p:spPr>
         <p:txBody>
-          <a:bodyPr wrap="square" lIns="0" tIns="0" rIns="0" bIns="0" anchor="t">
+          <a:bodyPr wrap="square" lIns="0" rIns="0" tIns="0" bIns="0" anchor="t">
             <a:spAutoFit/>
           </a:bodyPr>
           <a:lstStyle/>
@@ -16282,7 +15981,7 @@
           <a:noFill/>
         </p:spPr>
         <p:txBody>
-          <a:bodyPr wrap="square" lIns="0" tIns="0" rIns="0" bIns="0" anchor="t">
+          <a:bodyPr wrap="square" lIns="0" rIns="0" tIns="0" bIns="0" anchor="t">
             <a:spAutoFit/>
           </a:bodyPr>
           <a:lstStyle/>
@@ -16317,7 +16016,7 @@
           <a:noFill/>
         </p:spPr>
         <p:txBody>
-          <a:bodyPr wrap="square" lIns="0" tIns="0" rIns="0" bIns="0" anchor="t">
+          <a:bodyPr wrap="square" lIns="0" rIns="0" tIns="0" bIns="0" anchor="t">
             <a:spAutoFit/>
           </a:bodyPr>
           <a:lstStyle/>
@@ -16352,7 +16051,7 @@
           <a:noFill/>
         </p:spPr>
         <p:txBody>
-          <a:bodyPr wrap="square" lIns="0" tIns="0" rIns="0" bIns="0" anchor="t">
+          <a:bodyPr wrap="square" lIns="0" rIns="0" tIns="0" bIns="0" anchor="t">
             <a:spAutoFit/>
           </a:bodyPr>
           <a:lstStyle/>
@@ -16387,7 +16086,7 @@
           <a:noFill/>
         </p:spPr>
         <p:txBody>
-          <a:bodyPr wrap="square" lIns="0" tIns="0" rIns="0" bIns="0" anchor="t">
+          <a:bodyPr wrap="square" lIns="0" rIns="0" tIns="0" bIns="0" anchor="t">
             <a:spAutoFit/>
           </a:bodyPr>
           <a:lstStyle/>
@@ -16422,7 +16121,7 @@
           <a:noFill/>
         </p:spPr>
         <p:txBody>
-          <a:bodyPr wrap="square" lIns="0" tIns="0" rIns="0" bIns="0" anchor="t">
+          <a:bodyPr wrap="square" lIns="0" rIns="0" tIns="0" bIns="0" anchor="t">
             <a:spAutoFit/>
           </a:bodyPr>
           <a:lstStyle/>
@@ -16457,7 +16156,7 @@
           <a:noFill/>
         </p:spPr>
         <p:txBody>
-          <a:bodyPr wrap="square" lIns="0" tIns="0" rIns="0" bIns="0" anchor="t">
+          <a:bodyPr wrap="square" lIns="0" rIns="0" tIns="0" bIns="0" anchor="t">
             <a:spAutoFit/>
           </a:bodyPr>
           <a:lstStyle/>
@@ -16492,7 +16191,7 @@
           <a:noFill/>
         </p:spPr>
         <p:txBody>
-          <a:bodyPr wrap="square" lIns="0" tIns="0" rIns="0" bIns="0" anchor="t">
+          <a:bodyPr wrap="square" lIns="0" rIns="0" tIns="0" bIns="0" anchor="t">
             <a:spAutoFit/>
           </a:bodyPr>
           <a:lstStyle/>
@@ -16527,7 +16226,7 @@
           <a:noFill/>
         </p:spPr>
         <p:txBody>
-          <a:bodyPr wrap="square" lIns="0" tIns="0" rIns="0" bIns="0" anchor="t">
+          <a:bodyPr wrap="square" lIns="0" rIns="0" tIns="0" bIns="0" anchor="t">
             <a:spAutoFit/>
           </a:bodyPr>
           <a:lstStyle/>
@@ -16562,7 +16261,7 @@
           <a:noFill/>
         </p:spPr>
         <p:txBody>
-          <a:bodyPr wrap="square" lIns="0" tIns="0" rIns="0" bIns="0" anchor="t">
+          <a:bodyPr wrap="square" lIns="0" rIns="0" tIns="0" bIns="0" anchor="t">
             <a:spAutoFit/>
           </a:bodyPr>
           <a:lstStyle/>
@@ -16597,7 +16296,7 @@
           <a:noFill/>
         </p:spPr>
         <p:txBody>
-          <a:bodyPr wrap="square" lIns="0" tIns="0" rIns="0" bIns="0" anchor="t">
+          <a:bodyPr wrap="square" lIns="0" rIns="0" tIns="0" bIns="0" anchor="t">
             <a:spAutoFit/>
           </a:bodyPr>
           <a:lstStyle/>

--- a/docs/presentation.pptx
+++ b/docs/presentation.pptx
@@ -20,6 +20,9 @@
     <p:sldId id="268" r:id="rId19"/>
     <p:sldId id="269" r:id="rId20"/>
     <p:sldId id="270" r:id="rId21"/>
+    <p:sldId id="271" r:id="rId22"/>
+    <p:sldId id="272" r:id="rId23"/>
+    <p:sldId id="273" r:id="rId24"/>
   </p:sldIdLst>
   <p:sldSz cx="12191695" cy="6858000" type="screen4x3"/>
   <p:notesSz cx="6858000" cy="9144000"/>
@@ -4379,7 +4382,7 @@
                 </a:solidFill>
                 <a:latin typeface="Consolas"/>
               </a:rPr>
-              <a:t>10 / 15</a:t>
+              <a:t>10 / 18</a:t>
             </a:r>
           </a:p>
         </p:txBody>
@@ -4974,7 +4977,7 @@
                 </a:solidFill>
                 <a:latin typeface="Consolas"/>
               </a:rPr>
-              <a:t>11 / 15</a:t>
+              <a:t>11 / 18</a:t>
             </a:r>
           </a:p>
         </p:txBody>
@@ -5246,7 +5249,7 @@
                 </a:solidFill>
                 <a:latin typeface="Segoe UI"/>
               </a:rPr>
-              <a:t>Скриншоты работающего клиента</a:t>
+              <a:t>Форма входа</a:t>
             </a:r>
           </a:p>
         </p:txBody>
@@ -5295,55 +5298,9 @@
           </a:p>
         </p:txBody>
       </p:sp>
-      <p:sp>
-        <p:nvSpPr>
-          <p:cNvPr id="9" name="Rectangle 8"/>
-          <p:cNvSpPr/>
-          <p:nvPr/>
-        </p:nvSpPr>
-        <p:spPr>
-          <a:xfrm>
-            <a:off x="822960" y="2103120"/>
-            <a:ext cx="5577840" cy="1920240"/>
-          </a:xfrm>
-          <a:prstGeom prst="rect">
-            <a:avLst/>
-          </a:prstGeom>
-          <a:solidFill>
-            <a:srgbClr val="F5F5F5"/>
-          </a:solidFill>
-          <a:ln w="9525">
-            <a:solidFill>
-              <a:srgbClr val="E5E5E5"/>
-            </a:solidFill>
-          </a:ln>
-          <a:effectLst/>
-        </p:spPr>
-        <p:style>
-          <a:lnRef idx="1">
-            <a:schemeClr val="accent1"/>
-          </a:lnRef>
-          <a:fillRef idx="3">
-            <a:schemeClr val="accent1"/>
-          </a:fillRef>
-          <a:effectRef idx="2">
-            <a:schemeClr val="accent1"/>
-          </a:effectRef>
-          <a:fontRef idx="minor">
-            <a:schemeClr val="lt1"/>
-          </a:fontRef>
-        </p:style>
-        <p:txBody>
-          <a:bodyPr rtlCol="0" anchor="ctr"/>
-          <a:lstStyle/>
-          <a:p>
-            <a:pPr algn="ctr"/>
-          </a:p>
-        </p:txBody>
-      </p:sp>
       <p:pic>
         <p:nvPicPr>
-          <p:cNvPr id="10" name="Picture 9" descr="01-login.png"/>
+          <p:cNvPr id="9" name="Picture 8" descr="01-login.png"/>
           <p:cNvPicPr>
             <a:picLocks noChangeAspect="1"/>
           </p:cNvPicPr>
@@ -5357,8 +5314,8 @@
         </p:blipFill>
         <p:spPr>
           <a:xfrm>
-            <a:off x="2986312" y="2240280"/>
-            <a:ext cx="1251135" cy="1417320"/>
+            <a:off x="4224237" y="1965960"/>
+            <a:ext cx="3713046" cy="4206240"/>
           </a:xfrm>
           <a:prstGeom prst="rect">
             <a:avLst/>
@@ -5367,357 +5324,42 @@
       </p:pic>
       <p:sp>
         <p:nvSpPr>
+          <p:cNvPr id="10" name="TextBox 9"/>
+          <p:cNvSpPr txBox="1"/>
+          <p:nvPr/>
+        </p:nvSpPr>
+        <p:spPr>
+          <a:xfrm>
+            <a:off x="822960" y="6172200"/>
+            <a:ext cx="10972800" cy="274320"/>
+          </a:xfrm>
+          <a:prstGeom prst="rect">
+            <a:avLst/>
+          </a:prstGeom>
+          <a:noFill/>
+        </p:spPr>
+        <p:txBody>
+          <a:bodyPr wrap="square" lIns="0" rIns="0" tIns="0" bIns="0" anchor="t">
+            <a:spAutoFit/>
+          </a:bodyPr>
+          <a:lstStyle/>
+          <a:p>
+            <a:pPr algn="ctr"/>
+            <a:r>
+              <a:rPr sz="1300" b="0" i="1">
+                <a:solidFill>
+                  <a:srgbClr val="52525B"/>
+                </a:solidFill>
+                <a:latin typeface="Segoe UI"/>
+              </a:rPr>
+              <a:t>Регистрация и вход по логину и паролю</a:t>
+            </a:r>
+          </a:p>
+        </p:txBody>
+      </p:sp>
+      <p:sp>
+        <p:nvSpPr>
           <p:cNvPr id="11" name="TextBox 10"/>
-          <p:cNvSpPr txBox="1"/>
-          <p:nvPr/>
-        </p:nvSpPr>
-        <p:spPr>
-          <a:xfrm>
-            <a:off x="822960" y="3703320"/>
-            <a:ext cx="5577840" cy="274320"/>
-          </a:xfrm>
-          <a:prstGeom prst="rect">
-            <a:avLst/>
-          </a:prstGeom>
-          <a:noFill/>
-        </p:spPr>
-        <p:txBody>
-          <a:bodyPr wrap="square" lIns="0" rIns="0" tIns="0" bIns="0" anchor="t">
-            <a:spAutoFit/>
-          </a:bodyPr>
-          <a:lstStyle/>
-          <a:p>
-            <a:pPr algn="ctr"/>
-            <a:r>
-              <a:rPr sz="1000" b="0" i="0">
-                <a:solidFill>
-                  <a:srgbClr val="52525B"/>
-                </a:solidFill>
-                <a:latin typeface="Consolas"/>
-              </a:rPr>
-              <a:t>Форма входа</a:t>
-            </a:r>
-          </a:p>
-        </p:txBody>
-      </p:sp>
-      <p:sp>
-        <p:nvSpPr>
-          <p:cNvPr id="12" name="Rectangle 11"/>
-          <p:cNvSpPr/>
-          <p:nvPr/>
-        </p:nvSpPr>
-        <p:spPr>
-          <a:xfrm>
-            <a:off x="6537960" y="2103120"/>
-            <a:ext cx="5577840" cy="1920240"/>
-          </a:xfrm>
-          <a:prstGeom prst="rect">
-            <a:avLst/>
-          </a:prstGeom>
-          <a:solidFill>
-            <a:srgbClr val="F5F5F5"/>
-          </a:solidFill>
-          <a:ln w="9525">
-            <a:solidFill>
-              <a:srgbClr val="E5E5E5"/>
-            </a:solidFill>
-          </a:ln>
-          <a:effectLst/>
-        </p:spPr>
-        <p:style>
-          <a:lnRef idx="1">
-            <a:schemeClr val="accent1"/>
-          </a:lnRef>
-          <a:fillRef idx="3">
-            <a:schemeClr val="accent1"/>
-          </a:fillRef>
-          <a:effectRef idx="2">
-            <a:schemeClr val="accent1"/>
-          </a:effectRef>
-          <a:fontRef idx="minor">
-            <a:schemeClr val="lt1"/>
-          </a:fontRef>
-        </p:style>
-        <p:txBody>
-          <a:bodyPr rtlCol="0" anchor="ctr"/>
-          <a:lstStyle/>
-          <a:p>
-            <a:pPr algn="ctr"/>
-          </a:p>
-        </p:txBody>
-      </p:sp>
-      <p:pic>
-        <p:nvPicPr>
-          <p:cNvPr id="13" name="Picture 12" descr="02-main.png"/>
-          <p:cNvPicPr>
-            <a:picLocks noChangeAspect="1"/>
-          </p:cNvPicPr>
-          <p:nvPr/>
-        </p:nvPicPr>
-        <p:blipFill>
-          <a:blip r:embed="rId3"/>
-          <a:stretch>
-            <a:fillRect/>
-          </a:stretch>
-        </p:blipFill>
-        <p:spPr>
-          <a:xfrm>
-            <a:off x="7853451" y="2240280"/>
-            <a:ext cx="2946857" cy="1417320"/>
-          </a:xfrm>
-          <a:prstGeom prst="rect">
-            <a:avLst/>
-          </a:prstGeom>
-        </p:spPr>
-      </p:pic>
-      <p:sp>
-        <p:nvSpPr>
-          <p:cNvPr id="14" name="TextBox 13"/>
-          <p:cNvSpPr txBox="1"/>
-          <p:nvPr/>
-        </p:nvSpPr>
-        <p:spPr>
-          <a:xfrm>
-            <a:off x="6537960" y="3703320"/>
-            <a:ext cx="5577840" cy="274320"/>
-          </a:xfrm>
-          <a:prstGeom prst="rect">
-            <a:avLst/>
-          </a:prstGeom>
-          <a:noFill/>
-        </p:spPr>
-        <p:txBody>
-          <a:bodyPr wrap="square" lIns="0" rIns="0" tIns="0" bIns="0" anchor="t">
-            <a:spAutoFit/>
-          </a:bodyPr>
-          <a:lstStyle/>
-          <a:p>
-            <a:pPr algn="ctr"/>
-            <a:r>
-              <a:rPr sz="1000" b="0" i="0">
-                <a:solidFill>
-                  <a:srgbClr val="52525B"/>
-                </a:solidFill>
-                <a:latin typeface="Consolas"/>
-              </a:rPr>
-              <a:t>Основной экран</a:t>
-            </a:r>
-          </a:p>
-        </p:txBody>
-      </p:sp>
-      <p:sp>
-        <p:nvSpPr>
-          <p:cNvPr id="15" name="Rectangle 14"/>
-          <p:cNvSpPr/>
-          <p:nvPr/>
-        </p:nvSpPr>
-        <p:spPr>
-          <a:xfrm>
-            <a:off x="822960" y="4343400"/>
-            <a:ext cx="5577840" cy="1920240"/>
-          </a:xfrm>
-          <a:prstGeom prst="rect">
-            <a:avLst/>
-          </a:prstGeom>
-          <a:solidFill>
-            <a:srgbClr val="F5F5F5"/>
-          </a:solidFill>
-          <a:ln w="9525">
-            <a:solidFill>
-              <a:srgbClr val="E5E5E5"/>
-            </a:solidFill>
-          </a:ln>
-          <a:effectLst/>
-        </p:spPr>
-        <p:style>
-          <a:lnRef idx="1">
-            <a:schemeClr val="accent1"/>
-          </a:lnRef>
-          <a:fillRef idx="3">
-            <a:schemeClr val="accent1"/>
-          </a:fillRef>
-          <a:effectRef idx="2">
-            <a:schemeClr val="accent1"/>
-          </a:effectRef>
-          <a:fontRef idx="minor">
-            <a:schemeClr val="lt1"/>
-          </a:fontRef>
-        </p:style>
-        <p:txBody>
-          <a:bodyPr rtlCol="0" anchor="ctr"/>
-          <a:lstStyle/>
-          <a:p>
-            <a:pPr algn="ctr"/>
-          </a:p>
-        </p:txBody>
-      </p:sp>
-      <p:pic>
-        <p:nvPicPr>
-          <p:cNvPr id="16" name="Picture 15" descr="03-profile.png"/>
-          <p:cNvPicPr>
-            <a:picLocks noChangeAspect="1"/>
-          </p:cNvPicPr>
-          <p:nvPr/>
-        </p:nvPicPr>
-        <p:blipFill>
-          <a:blip r:embed="rId4"/>
-          <a:stretch>
-            <a:fillRect/>
-          </a:stretch>
-        </p:blipFill>
-        <p:spPr>
-          <a:xfrm>
-            <a:off x="2962910" y="4480560"/>
-            <a:ext cx="1297940" cy="1417320"/>
-          </a:xfrm>
-          <a:prstGeom prst="rect">
-            <a:avLst/>
-          </a:prstGeom>
-        </p:spPr>
-      </p:pic>
-      <p:sp>
-        <p:nvSpPr>
-          <p:cNvPr id="17" name="TextBox 16"/>
-          <p:cNvSpPr txBox="1"/>
-          <p:nvPr/>
-        </p:nvSpPr>
-        <p:spPr>
-          <a:xfrm>
-            <a:off x="822960" y="5943600"/>
-            <a:ext cx="5577840" cy="274320"/>
-          </a:xfrm>
-          <a:prstGeom prst="rect">
-            <a:avLst/>
-          </a:prstGeom>
-          <a:noFill/>
-        </p:spPr>
-        <p:txBody>
-          <a:bodyPr wrap="square" lIns="0" rIns="0" tIns="0" bIns="0" anchor="t">
-            <a:spAutoFit/>
-          </a:bodyPr>
-          <a:lstStyle/>
-          <a:p>
-            <a:pPr algn="ctr"/>
-            <a:r>
-              <a:rPr sz="1000" b="0" i="0">
-                <a:solidFill>
-                  <a:srgbClr val="52525B"/>
-                </a:solidFill>
-                <a:latin typeface="Consolas"/>
-              </a:rPr>
-              <a:t>Профиль</a:t>
-            </a:r>
-          </a:p>
-        </p:txBody>
-      </p:sp>
-      <p:sp>
-        <p:nvSpPr>
-          <p:cNvPr id="18" name="Rectangle 17"/>
-          <p:cNvSpPr/>
-          <p:nvPr/>
-        </p:nvSpPr>
-        <p:spPr>
-          <a:xfrm>
-            <a:off x="6537960" y="4343400"/>
-            <a:ext cx="5577840" cy="1920240"/>
-          </a:xfrm>
-          <a:prstGeom prst="rect">
-            <a:avLst/>
-          </a:prstGeom>
-          <a:solidFill>
-            <a:srgbClr val="F5F5F5"/>
-          </a:solidFill>
-          <a:ln w="9525">
-            <a:solidFill>
-              <a:srgbClr val="E5E5E5"/>
-            </a:solidFill>
-          </a:ln>
-          <a:effectLst/>
-        </p:spPr>
-        <p:style>
-          <a:lnRef idx="1">
-            <a:schemeClr val="accent1"/>
-          </a:lnRef>
-          <a:fillRef idx="3">
-            <a:schemeClr val="accent1"/>
-          </a:fillRef>
-          <a:effectRef idx="2">
-            <a:schemeClr val="accent1"/>
-          </a:effectRef>
-          <a:fontRef idx="minor">
-            <a:schemeClr val="lt1"/>
-          </a:fontRef>
-        </p:style>
-        <p:txBody>
-          <a:bodyPr rtlCol="0" anchor="ctr"/>
-          <a:lstStyle/>
-          <a:p>
-            <a:pPr algn="ctr"/>
-          </a:p>
-        </p:txBody>
-      </p:sp>
-      <p:pic>
-        <p:nvPicPr>
-          <p:cNvPr id="19" name="Picture 18" descr="04-new-chat.png"/>
-          <p:cNvPicPr>
-            <a:picLocks noChangeAspect="1"/>
-          </p:cNvPicPr>
-          <p:nvPr/>
-        </p:nvPicPr>
-        <p:blipFill>
-          <a:blip r:embed="rId5"/>
-          <a:stretch>
-            <a:fillRect/>
-          </a:stretch>
-        </p:blipFill>
-        <p:spPr>
-          <a:xfrm>
-            <a:off x="8611496" y="4480560"/>
-            <a:ext cx="1430767" cy="1417320"/>
-          </a:xfrm>
-          <a:prstGeom prst="rect">
-            <a:avLst/>
-          </a:prstGeom>
-        </p:spPr>
-      </p:pic>
-      <p:sp>
-        <p:nvSpPr>
-          <p:cNvPr id="20" name="TextBox 19"/>
-          <p:cNvSpPr txBox="1"/>
-          <p:nvPr/>
-        </p:nvSpPr>
-        <p:spPr>
-          <a:xfrm>
-            <a:off x="6537960" y="5943600"/>
-            <a:ext cx="5577840" cy="274320"/>
-          </a:xfrm>
-          <a:prstGeom prst="rect">
-            <a:avLst/>
-          </a:prstGeom>
-          <a:noFill/>
-        </p:spPr>
-        <p:txBody>
-          <a:bodyPr wrap="square" lIns="0" rIns="0" tIns="0" bIns="0" anchor="t">
-            <a:spAutoFit/>
-          </a:bodyPr>
-          <a:lstStyle/>
-          <a:p>
-            <a:pPr algn="ctr"/>
-            <a:r>
-              <a:rPr sz="1000" b="0" i="0">
-                <a:solidFill>
-                  <a:srgbClr val="52525B"/>
-                </a:solidFill>
-                <a:latin typeface="Consolas"/>
-              </a:rPr>
-              <a:t>Создание группы</a:t>
-            </a:r>
-          </a:p>
-        </p:txBody>
-      </p:sp>
-      <p:sp>
-        <p:nvSpPr>
-          <p:cNvPr id="21" name="TextBox 20"/>
           <p:cNvSpPr txBox="1"/>
           <p:nvPr/>
         </p:nvSpPr>
@@ -5752,7 +5394,7 @@
       </p:sp>
       <p:sp>
         <p:nvSpPr>
-          <p:cNvPr id="22" name="TextBox 21"/>
+          <p:cNvPr id="12" name="TextBox 11"/>
           <p:cNvSpPr txBox="1"/>
           <p:nvPr/>
         </p:nvSpPr>
@@ -5780,7 +5422,7 @@
                 </a:solidFill>
                 <a:latin typeface="Consolas"/>
               </a:rPr>
-              <a:t>12 / 15</a:t>
+              <a:t>12 / 18</a:t>
             </a:r>
           </a:p>
         </p:txBody>
@@ -6017,7 +5659,7 @@
                 </a:solidFill>
                 <a:latin typeface="Consolas"/>
               </a:rPr>
-              <a:t>13  ·  КАК МЫ РАБОТАЛИ</a:t>
+              <a:t>13  ·  ИНТЕРФЕЙС</a:t>
             </a:r>
           </a:p>
         </p:txBody>
@@ -6052,7 +5694,7 @@
                 </a:solidFill>
                 <a:latin typeface="Segoe UI"/>
               </a:rPr>
-              <a:t>Этапы проекта</a:t>
+              <a:t>Основной экран</a:t>
             </a:r>
           </a:p>
         </p:txBody>
@@ -6101,81 +5743,61 @@
           </a:p>
         </p:txBody>
       </p:sp>
-      <p:sp>
-        <p:nvSpPr>
-          <p:cNvPr id="9" name="Rectangle 8"/>
-          <p:cNvSpPr/>
-          <p:nvPr/>
-        </p:nvSpPr>
-        <p:spPr>
-          <a:xfrm>
-            <a:off x="822960" y="2221992"/>
-            <a:ext cx="384048" cy="384048"/>
-          </a:xfrm>
-          <a:prstGeom prst="rect">
-            <a:avLst/>
-          </a:prstGeom>
-          <a:solidFill>
-            <a:srgbClr val="0066FF"/>
-          </a:solidFill>
-          <a:ln>
-            <a:noFill/>
-          </a:ln>
-          <a:effectLst/>
-        </p:spPr>
-        <p:style>
-          <a:lnRef idx="1">
-            <a:schemeClr val="accent1"/>
-          </a:lnRef>
-          <a:fillRef idx="3">
-            <a:schemeClr val="accent1"/>
-          </a:fillRef>
-          <a:effectRef idx="2">
-            <a:schemeClr val="accent1"/>
-          </a:effectRef>
-          <a:fontRef idx="minor">
-            <a:schemeClr val="lt1"/>
-          </a:fontRef>
-        </p:style>
-        <p:txBody>
-          <a:bodyPr rtlCol="0" anchor="ctr"/>
+      <p:pic>
+        <p:nvPicPr>
+          <p:cNvPr id="9" name="Picture 8" descr="02-main.png"/>
+          <p:cNvPicPr>
+            <a:picLocks noChangeAspect="1"/>
+          </p:cNvPicPr>
+          <p:nvPr/>
+        </p:nvPicPr>
+        <p:blipFill>
+          <a:blip r:embed="rId2"/>
+          <a:stretch>
+            <a:fillRect/>
+          </a:stretch>
+        </p:blipFill>
+        <p:spPr>
+          <a:xfrm>
+            <a:off x="1708004" y="1965960"/>
+            <a:ext cx="8745512" cy="4206240"/>
+          </a:xfrm>
+          <a:prstGeom prst="rect">
+            <a:avLst/>
+          </a:prstGeom>
+        </p:spPr>
+      </p:pic>
+      <p:sp>
+        <p:nvSpPr>
+          <p:cNvPr id="10" name="TextBox 9"/>
+          <p:cNvSpPr txBox="1"/>
+          <p:nvPr/>
+        </p:nvSpPr>
+        <p:spPr>
+          <a:xfrm>
+            <a:off x="822960" y="6172200"/>
+            <a:ext cx="10972800" cy="274320"/>
+          </a:xfrm>
+          <a:prstGeom prst="rect">
+            <a:avLst/>
+          </a:prstGeom>
+          <a:noFill/>
+        </p:spPr>
+        <p:txBody>
+          <a:bodyPr wrap="square" lIns="0" rIns="0" tIns="0" bIns="0" anchor="t">
+            <a:spAutoFit/>
+          </a:bodyPr>
           <a:lstStyle/>
           <a:p>
             <a:pPr algn="ctr"/>
-          </a:p>
-        </p:txBody>
-      </p:sp>
-      <p:sp>
-        <p:nvSpPr>
-          <p:cNvPr id="10" name="TextBox 9"/>
-          <p:cNvSpPr txBox="1"/>
-          <p:nvPr/>
-        </p:nvSpPr>
-        <p:spPr>
-          <a:xfrm>
-            <a:off x="822960" y="2258568"/>
-            <a:ext cx="384048" cy="320040"/>
-          </a:xfrm>
-          <a:prstGeom prst="rect">
-            <a:avLst/>
-          </a:prstGeom>
-          <a:noFill/>
-        </p:spPr>
-        <p:txBody>
-          <a:bodyPr wrap="square" lIns="0" rIns="0" tIns="0" bIns="0" anchor="t">
-            <a:spAutoFit/>
-          </a:bodyPr>
-          <a:lstStyle/>
-          <a:p>
-            <a:pPr algn="ctr"/>
-            <a:r>
-              <a:rPr sz="1300" b="1" i="0">
-                <a:solidFill>
-                  <a:srgbClr val="FFFFFF"/>
+            <a:r>
+              <a:rPr sz="1300" b="0" i="1">
+                <a:solidFill>
+                  <a:srgbClr val="52525B"/>
                 </a:solidFill>
                 <a:latin typeface="Segoe UI"/>
               </a:rPr>
-              <a:t>1</a:t>
+              <a:t>Список чатов слева, диалог справа, композер снизу</a:t>
             </a:r>
           </a:p>
         </p:txBody>
@@ -6183,970 +5805,6 @@
       <p:sp>
         <p:nvSpPr>
           <p:cNvPr id="11" name="TextBox 10"/>
-          <p:cNvSpPr txBox="1"/>
-          <p:nvPr/>
-        </p:nvSpPr>
-        <p:spPr>
-          <a:xfrm>
-            <a:off x="1417320" y="2194560"/>
-            <a:ext cx="4114800" cy="411480"/>
-          </a:xfrm>
-          <a:prstGeom prst="rect">
-            <a:avLst/>
-          </a:prstGeom>
-          <a:noFill/>
-        </p:spPr>
-        <p:txBody>
-          <a:bodyPr wrap="square" lIns="0" rIns="0" tIns="0" bIns="0" anchor="t">
-            <a:spAutoFit/>
-          </a:bodyPr>
-          <a:lstStyle/>
-          <a:p>
-            <a:pPr algn="l"/>
-            <a:r>
-              <a:rPr sz="1500" b="1" i="0">
-                <a:solidFill>
-                  <a:srgbClr val="0A0A0A"/>
-                </a:solidFill>
-                <a:latin typeface="Segoe UI"/>
-              </a:rPr>
-              <a:t>Разобрали ТЗ</a:t>
-            </a:r>
-          </a:p>
-        </p:txBody>
-      </p:sp>
-      <p:sp>
-        <p:nvSpPr>
-          <p:cNvPr id="12" name="TextBox 11"/>
-          <p:cNvSpPr txBox="1"/>
-          <p:nvPr/>
-        </p:nvSpPr>
-        <p:spPr>
-          <a:xfrm>
-            <a:off x="5669280" y="2221992"/>
-            <a:ext cx="6400800" cy="411480"/>
-          </a:xfrm>
-          <a:prstGeom prst="rect">
-            <a:avLst/>
-          </a:prstGeom>
-          <a:noFill/>
-        </p:spPr>
-        <p:txBody>
-          <a:bodyPr wrap="square" lIns="0" rIns="0" tIns="0" bIns="0" anchor="t">
-            <a:spAutoFit/>
-          </a:bodyPr>
-          <a:lstStyle/>
-          <a:p>
-            <a:pPr algn="l"/>
-            <a:r>
-              <a:rPr sz="1300" b="0" i="0">
-                <a:solidFill>
-                  <a:srgbClr val="52525B"/>
-                </a:solidFill>
-                <a:latin typeface="Segoe UI"/>
-              </a:rPr>
-              <a:t>выделили обязательные и дополнительные функции</a:t>
-            </a:r>
-          </a:p>
-        </p:txBody>
-      </p:sp>
-      <p:sp>
-        <p:nvSpPr>
-          <p:cNvPr id="13" name="Rectangle 12"/>
-          <p:cNvSpPr/>
-          <p:nvPr/>
-        </p:nvSpPr>
-        <p:spPr>
-          <a:xfrm>
-            <a:off x="822960" y="2788920"/>
-            <a:ext cx="384048" cy="384048"/>
-          </a:xfrm>
-          <a:prstGeom prst="rect">
-            <a:avLst/>
-          </a:prstGeom>
-          <a:solidFill>
-            <a:srgbClr val="0066FF"/>
-          </a:solidFill>
-          <a:ln>
-            <a:noFill/>
-          </a:ln>
-          <a:effectLst/>
-        </p:spPr>
-        <p:style>
-          <a:lnRef idx="1">
-            <a:schemeClr val="accent1"/>
-          </a:lnRef>
-          <a:fillRef idx="3">
-            <a:schemeClr val="accent1"/>
-          </a:fillRef>
-          <a:effectRef idx="2">
-            <a:schemeClr val="accent1"/>
-          </a:effectRef>
-          <a:fontRef idx="minor">
-            <a:schemeClr val="lt1"/>
-          </a:fontRef>
-        </p:style>
-        <p:txBody>
-          <a:bodyPr rtlCol="0" anchor="ctr"/>
-          <a:lstStyle/>
-          <a:p>
-            <a:pPr algn="ctr"/>
-          </a:p>
-        </p:txBody>
-      </p:sp>
-      <p:sp>
-        <p:nvSpPr>
-          <p:cNvPr id="14" name="TextBox 13"/>
-          <p:cNvSpPr txBox="1"/>
-          <p:nvPr/>
-        </p:nvSpPr>
-        <p:spPr>
-          <a:xfrm>
-            <a:off x="822960" y="2825496"/>
-            <a:ext cx="384048" cy="320040"/>
-          </a:xfrm>
-          <a:prstGeom prst="rect">
-            <a:avLst/>
-          </a:prstGeom>
-          <a:noFill/>
-        </p:spPr>
-        <p:txBody>
-          <a:bodyPr wrap="square" lIns="0" rIns="0" tIns="0" bIns="0" anchor="t">
-            <a:spAutoFit/>
-          </a:bodyPr>
-          <a:lstStyle/>
-          <a:p>
-            <a:pPr algn="ctr"/>
-            <a:r>
-              <a:rPr sz="1300" b="1" i="0">
-                <a:solidFill>
-                  <a:srgbClr val="FFFFFF"/>
-                </a:solidFill>
-                <a:latin typeface="Segoe UI"/>
-              </a:rPr>
-              <a:t>2</a:t>
-            </a:r>
-          </a:p>
-        </p:txBody>
-      </p:sp>
-      <p:sp>
-        <p:nvSpPr>
-          <p:cNvPr id="15" name="TextBox 14"/>
-          <p:cNvSpPr txBox="1"/>
-          <p:nvPr/>
-        </p:nvSpPr>
-        <p:spPr>
-          <a:xfrm>
-            <a:off x="1417320" y="2761488"/>
-            <a:ext cx="4114800" cy="411480"/>
-          </a:xfrm>
-          <a:prstGeom prst="rect">
-            <a:avLst/>
-          </a:prstGeom>
-          <a:noFill/>
-        </p:spPr>
-        <p:txBody>
-          <a:bodyPr wrap="square" lIns="0" rIns="0" tIns="0" bIns="0" anchor="t">
-            <a:spAutoFit/>
-          </a:bodyPr>
-          <a:lstStyle/>
-          <a:p>
-            <a:pPr algn="l"/>
-            <a:r>
-              <a:rPr sz="1500" b="1" i="0">
-                <a:solidFill>
-                  <a:srgbClr val="0A0A0A"/>
-                </a:solidFill>
-                <a:latin typeface="Segoe UI"/>
-              </a:rPr>
-              <a:t>Спроектировали схему БД</a:t>
-            </a:r>
-          </a:p>
-        </p:txBody>
-      </p:sp>
-      <p:sp>
-        <p:nvSpPr>
-          <p:cNvPr id="16" name="TextBox 15"/>
-          <p:cNvSpPr txBox="1"/>
-          <p:nvPr/>
-        </p:nvSpPr>
-        <p:spPr>
-          <a:xfrm>
-            <a:off x="5669280" y="2788920"/>
-            <a:ext cx="6400800" cy="411480"/>
-          </a:xfrm>
-          <a:prstGeom prst="rect">
-            <a:avLst/>
-          </a:prstGeom>
-          <a:noFill/>
-        </p:spPr>
-        <p:txBody>
-          <a:bodyPr wrap="square" lIns="0" rIns="0" tIns="0" bIns="0" anchor="t">
-            <a:spAutoFit/>
-          </a:bodyPr>
-          <a:lstStyle/>
-          <a:p>
-            <a:pPr algn="l"/>
-            <a:r>
-              <a:rPr sz="1300" b="0" i="0">
-                <a:solidFill>
-                  <a:srgbClr val="52525B"/>
-                </a:solidFill>
-                <a:latin typeface="Segoe UI"/>
-              </a:rPr>
-              <a:t>8 таблиц, связи между ними, ER-диаграмма</a:t>
-            </a:r>
-          </a:p>
-        </p:txBody>
-      </p:sp>
-      <p:sp>
-        <p:nvSpPr>
-          <p:cNvPr id="17" name="Rectangle 16"/>
-          <p:cNvSpPr/>
-          <p:nvPr/>
-        </p:nvSpPr>
-        <p:spPr>
-          <a:xfrm>
-            <a:off x="822960" y="3355848"/>
-            <a:ext cx="384048" cy="384048"/>
-          </a:xfrm>
-          <a:prstGeom prst="rect">
-            <a:avLst/>
-          </a:prstGeom>
-          <a:solidFill>
-            <a:srgbClr val="0066FF"/>
-          </a:solidFill>
-          <a:ln>
-            <a:noFill/>
-          </a:ln>
-          <a:effectLst/>
-        </p:spPr>
-        <p:style>
-          <a:lnRef idx="1">
-            <a:schemeClr val="accent1"/>
-          </a:lnRef>
-          <a:fillRef idx="3">
-            <a:schemeClr val="accent1"/>
-          </a:fillRef>
-          <a:effectRef idx="2">
-            <a:schemeClr val="accent1"/>
-          </a:effectRef>
-          <a:fontRef idx="minor">
-            <a:schemeClr val="lt1"/>
-          </a:fontRef>
-        </p:style>
-        <p:txBody>
-          <a:bodyPr rtlCol="0" anchor="ctr"/>
-          <a:lstStyle/>
-          <a:p>
-            <a:pPr algn="ctr"/>
-          </a:p>
-        </p:txBody>
-      </p:sp>
-      <p:sp>
-        <p:nvSpPr>
-          <p:cNvPr id="18" name="TextBox 17"/>
-          <p:cNvSpPr txBox="1"/>
-          <p:nvPr/>
-        </p:nvSpPr>
-        <p:spPr>
-          <a:xfrm>
-            <a:off x="822960" y="3392424"/>
-            <a:ext cx="384048" cy="320040"/>
-          </a:xfrm>
-          <a:prstGeom prst="rect">
-            <a:avLst/>
-          </a:prstGeom>
-          <a:noFill/>
-        </p:spPr>
-        <p:txBody>
-          <a:bodyPr wrap="square" lIns="0" rIns="0" tIns="0" bIns="0" anchor="t">
-            <a:spAutoFit/>
-          </a:bodyPr>
-          <a:lstStyle/>
-          <a:p>
-            <a:pPr algn="ctr"/>
-            <a:r>
-              <a:rPr sz="1300" b="1" i="0">
-                <a:solidFill>
-                  <a:srgbClr val="FFFFFF"/>
-                </a:solidFill>
-                <a:latin typeface="Segoe UI"/>
-              </a:rPr>
-              <a:t>3</a:t>
-            </a:r>
-          </a:p>
-        </p:txBody>
-      </p:sp>
-      <p:sp>
-        <p:nvSpPr>
-          <p:cNvPr id="19" name="TextBox 18"/>
-          <p:cNvSpPr txBox="1"/>
-          <p:nvPr/>
-        </p:nvSpPr>
-        <p:spPr>
-          <a:xfrm>
-            <a:off x="1417320" y="3328416"/>
-            <a:ext cx="4114800" cy="411480"/>
-          </a:xfrm>
-          <a:prstGeom prst="rect">
-            <a:avLst/>
-          </a:prstGeom>
-          <a:noFill/>
-        </p:spPr>
-        <p:txBody>
-          <a:bodyPr wrap="square" lIns="0" rIns="0" tIns="0" bIns="0" anchor="t">
-            <a:spAutoFit/>
-          </a:bodyPr>
-          <a:lstStyle/>
-          <a:p>
-            <a:pPr algn="l"/>
-            <a:r>
-              <a:rPr sz="1500" b="1" i="0">
-                <a:solidFill>
-                  <a:srgbClr val="0A0A0A"/>
-                </a:solidFill>
-                <a:latin typeface="Segoe UI"/>
-              </a:rPr>
-              <a:t>Написали сервер</a:t>
-            </a:r>
-          </a:p>
-        </p:txBody>
-      </p:sp>
-      <p:sp>
-        <p:nvSpPr>
-          <p:cNvPr id="20" name="TextBox 19"/>
-          <p:cNvSpPr txBox="1"/>
-          <p:nvPr/>
-        </p:nvSpPr>
-        <p:spPr>
-          <a:xfrm>
-            <a:off x="5669280" y="3355848"/>
-            <a:ext cx="6400800" cy="411480"/>
-          </a:xfrm>
-          <a:prstGeom prst="rect">
-            <a:avLst/>
-          </a:prstGeom>
-          <a:noFill/>
-        </p:spPr>
-        <p:txBody>
-          <a:bodyPr wrap="square" lIns="0" rIns="0" tIns="0" bIns="0" anchor="t">
-            <a:spAutoFit/>
-          </a:bodyPr>
-          <a:lstStyle/>
-          <a:p>
-            <a:pPr algn="l"/>
-            <a:r>
-              <a:rPr sz="1300" b="0" i="0">
-                <a:solidFill>
-                  <a:srgbClr val="52525B"/>
-                </a:solidFill>
-                <a:latin typeface="Segoe UI"/>
-              </a:rPr>
-              <a:t>регистрация, чаты, сообщения, WebSocket</a:t>
-            </a:r>
-          </a:p>
-        </p:txBody>
-      </p:sp>
-      <p:sp>
-        <p:nvSpPr>
-          <p:cNvPr id="21" name="Rectangle 20"/>
-          <p:cNvSpPr/>
-          <p:nvPr/>
-        </p:nvSpPr>
-        <p:spPr>
-          <a:xfrm>
-            <a:off x="822960" y="3922776"/>
-            <a:ext cx="384048" cy="384048"/>
-          </a:xfrm>
-          <a:prstGeom prst="rect">
-            <a:avLst/>
-          </a:prstGeom>
-          <a:solidFill>
-            <a:srgbClr val="0066FF"/>
-          </a:solidFill>
-          <a:ln>
-            <a:noFill/>
-          </a:ln>
-          <a:effectLst/>
-        </p:spPr>
-        <p:style>
-          <a:lnRef idx="1">
-            <a:schemeClr val="accent1"/>
-          </a:lnRef>
-          <a:fillRef idx="3">
-            <a:schemeClr val="accent1"/>
-          </a:fillRef>
-          <a:effectRef idx="2">
-            <a:schemeClr val="accent1"/>
-          </a:effectRef>
-          <a:fontRef idx="minor">
-            <a:schemeClr val="lt1"/>
-          </a:fontRef>
-        </p:style>
-        <p:txBody>
-          <a:bodyPr rtlCol="0" anchor="ctr"/>
-          <a:lstStyle/>
-          <a:p>
-            <a:pPr algn="ctr"/>
-          </a:p>
-        </p:txBody>
-      </p:sp>
-      <p:sp>
-        <p:nvSpPr>
-          <p:cNvPr id="22" name="TextBox 21"/>
-          <p:cNvSpPr txBox="1"/>
-          <p:nvPr/>
-        </p:nvSpPr>
-        <p:spPr>
-          <a:xfrm>
-            <a:off x="822960" y="3959352"/>
-            <a:ext cx="384048" cy="320040"/>
-          </a:xfrm>
-          <a:prstGeom prst="rect">
-            <a:avLst/>
-          </a:prstGeom>
-          <a:noFill/>
-        </p:spPr>
-        <p:txBody>
-          <a:bodyPr wrap="square" lIns="0" rIns="0" tIns="0" bIns="0" anchor="t">
-            <a:spAutoFit/>
-          </a:bodyPr>
-          <a:lstStyle/>
-          <a:p>
-            <a:pPr algn="ctr"/>
-            <a:r>
-              <a:rPr sz="1300" b="1" i="0">
-                <a:solidFill>
-                  <a:srgbClr val="FFFFFF"/>
-                </a:solidFill>
-                <a:latin typeface="Segoe UI"/>
-              </a:rPr>
-              <a:t>4</a:t>
-            </a:r>
-          </a:p>
-        </p:txBody>
-      </p:sp>
-      <p:sp>
-        <p:nvSpPr>
-          <p:cNvPr id="23" name="TextBox 22"/>
-          <p:cNvSpPr txBox="1"/>
-          <p:nvPr/>
-        </p:nvSpPr>
-        <p:spPr>
-          <a:xfrm>
-            <a:off x="1417320" y="3895344"/>
-            <a:ext cx="4114800" cy="411480"/>
-          </a:xfrm>
-          <a:prstGeom prst="rect">
-            <a:avLst/>
-          </a:prstGeom>
-          <a:noFill/>
-        </p:spPr>
-        <p:txBody>
-          <a:bodyPr wrap="square" lIns="0" rIns="0" tIns="0" bIns="0" anchor="t">
-            <a:spAutoFit/>
-          </a:bodyPr>
-          <a:lstStyle/>
-          <a:p>
-            <a:pPr algn="l"/>
-            <a:r>
-              <a:rPr sz="1500" b="1" i="0">
-                <a:solidFill>
-                  <a:srgbClr val="0A0A0A"/>
-                </a:solidFill>
-                <a:latin typeface="Segoe UI"/>
-              </a:rPr>
-              <a:t>Сделали клиент</a:t>
-            </a:r>
-          </a:p>
-        </p:txBody>
-      </p:sp>
-      <p:sp>
-        <p:nvSpPr>
-          <p:cNvPr id="24" name="TextBox 23"/>
-          <p:cNvSpPr txBox="1"/>
-          <p:nvPr/>
-        </p:nvSpPr>
-        <p:spPr>
-          <a:xfrm>
-            <a:off x="5669280" y="3922776"/>
-            <a:ext cx="6400800" cy="411480"/>
-          </a:xfrm>
-          <a:prstGeom prst="rect">
-            <a:avLst/>
-          </a:prstGeom>
-          <a:noFill/>
-        </p:spPr>
-        <p:txBody>
-          <a:bodyPr wrap="square" lIns="0" rIns="0" tIns="0" bIns="0" anchor="t">
-            <a:spAutoFit/>
-          </a:bodyPr>
-          <a:lstStyle/>
-          <a:p>
-            <a:pPr algn="l"/>
-            <a:r>
-              <a:rPr sz="1300" b="0" i="0">
-                <a:solidFill>
-                  <a:srgbClr val="52525B"/>
-                </a:solidFill>
-                <a:latin typeface="Segoe UI"/>
-              </a:rPr>
-              <a:t>одностраничное веб-приложение</a:t>
-            </a:r>
-          </a:p>
-        </p:txBody>
-      </p:sp>
-      <p:sp>
-        <p:nvSpPr>
-          <p:cNvPr id="25" name="Rectangle 24"/>
-          <p:cNvSpPr/>
-          <p:nvPr/>
-        </p:nvSpPr>
-        <p:spPr>
-          <a:xfrm>
-            <a:off x="822960" y="4489704"/>
-            <a:ext cx="384048" cy="384048"/>
-          </a:xfrm>
-          <a:prstGeom prst="rect">
-            <a:avLst/>
-          </a:prstGeom>
-          <a:solidFill>
-            <a:srgbClr val="0066FF"/>
-          </a:solidFill>
-          <a:ln>
-            <a:noFill/>
-          </a:ln>
-          <a:effectLst/>
-        </p:spPr>
-        <p:style>
-          <a:lnRef idx="1">
-            <a:schemeClr val="accent1"/>
-          </a:lnRef>
-          <a:fillRef idx="3">
-            <a:schemeClr val="accent1"/>
-          </a:fillRef>
-          <a:effectRef idx="2">
-            <a:schemeClr val="accent1"/>
-          </a:effectRef>
-          <a:fontRef idx="minor">
-            <a:schemeClr val="lt1"/>
-          </a:fontRef>
-        </p:style>
-        <p:txBody>
-          <a:bodyPr rtlCol="0" anchor="ctr"/>
-          <a:lstStyle/>
-          <a:p>
-            <a:pPr algn="ctr"/>
-          </a:p>
-        </p:txBody>
-      </p:sp>
-      <p:sp>
-        <p:nvSpPr>
-          <p:cNvPr id="26" name="TextBox 25"/>
-          <p:cNvSpPr txBox="1"/>
-          <p:nvPr/>
-        </p:nvSpPr>
-        <p:spPr>
-          <a:xfrm>
-            <a:off x="822960" y="4526280"/>
-            <a:ext cx="384048" cy="320040"/>
-          </a:xfrm>
-          <a:prstGeom prst="rect">
-            <a:avLst/>
-          </a:prstGeom>
-          <a:noFill/>
-        </p:spPr>
-        <p:txBody>
-          <a:bodyPr wrap="square" lIns="0" rIns="0" tIns="0" bIns="0" anchor="t">
-            <a:spAutoFit/>
-          </a:bodyPr>
-          <a:lstStyle/>
-          <a:p>
-            <a:pPr algn="ctr"/>
-            <a:r>
-              <a:rPr sz="1300" b="1" i="0">
-                <a:solidFill>
-                  <a:srgbClr val="FFFFFF"/>
-                </a:solidFill>
-                <a:latin typeface="Segoe UI"/>
-              </a:rPr>
-              <a:t>5</a:t>
-            </a:r>
-          </a:p>
-        </p:txBody>
-      </p:sp>
-      <p:sp>
-        <p:nvSpPr>
-          <p:cNvPr id="27" name="TextBox 26"/>
-          <p:cNvSpPr txBox="1"/>
-          <p:nvPr/>
-        </p:nvSpPr>
-        <p:spPr>
-          <a:xfrm>
-            <a:off x="1417320" y="4462272"/>
-            <a:ext cx="4114800" cy="411480"/>
-          </a:xfrm>
-          <a:prstGeom prst="rect">
-            <a:avLst/>
-          </a:prstGeom>
-          <a:noFill/>
-        </p:spPr>
-        <p:txBody>
-          <a:bodyPr wrap="square" lIns="0" rIns="0" tIns="0" bIns="0" anchor="t">
-            <a:spAutoFit/>
-          </a:bodyPr>
-          <a:lstStyle/>
-          <a:p>
-            <a:pPr algn="l"/>
-            <a:r>
-              <a:rPr sz="1500" b="1" i="0">
-                <a:solidFill>
-                  <a:srgbClr val="0A0A0A"/>
-                </a:solidFill>
-                <a:latin typeface="Segoe UI"/>
-              </a:rPr>
-              <a:t>Добавили доп. функции</a:t>
-            </a:r>
-          </a:p>
-        </p:txBody>
-      </p:sp>
-      <p:sp>
-        <p:nvSpPr>
-          <p:cNvPr id="28" name="TextBox 27"/>
-          <p:cNvSpPr txBox="1"/>
-          <p:nvPr/>
-        </p:nvSpPr>
-        <p:spPr>
-          <a:xfrm>
-            <a:off x="5669280" y="4489704"/>
-            <a:ext cx="6400800" cy="411480"/>
-          </a:xfrm>
-          <a:prstGeom prst="rect">
-            <a:avLst/>
-          </a:prstGeom>
-          <a:noFill/>
-        </p:spPr>
-        <p:txBody>
-          <a:bodyPr wrap="square" lIns="0" rIns="0" tIns="0" bIns="0" anchor="t">
-            <a:spAutoFit/>
-          </a:bodyPr>
-          <a:lstStyle/>
-          <a:p>
-            <a:pPr algn="l"/>
-            <a:r>
-              <a:rPr sz="1300" b="0" i="0">
-                <a:solidFill>
-                  <a:srgbClr val="52525B"/>
-                </a:solidFill>
-                <a:latin typeface="Segoe UI"/>
-              </a:rPr>
-              <a:t>статусы прочтения, вложения, поиск</a:t>
-            </a:r>
-          </a:p>
-        </p:txBody>
-      </p:sp>
-      <p:sp>
-        <p:nvSpPr>
-          <p:cNvPr id="29" name="Rectangle 28"/>
-          <p:cNvSpPr/>
-          <p:nvPr/>
-        </p:nvSpPr>
-        <p:spPr>
-          <a:xfrm>
-            <a:off x="822960" y="5056632"/>
-            <a:ext cx="384048" cy="384048"/>
-          </a:xfrm>
-          <a:prstGeom prst="rect">
-            <a:avLst/>
-          </a:prstGeom>
-          <a:solidFill>
-            <a:srgbClr val="0066FF"/>
-          </a:solidFill>
-          <a:ln>
-            <a:noFill/>
-          </a:ln>
-          <a:effectLst/>
-        </p:spPr>
-        <p:style>
-          <a:lnRef idx="1">
-            <a:schemeClr val="accent1"/>
-          </a:lnRef>
-          <a:fillRef idx="3">
-            <a:schemeClr val="accent1"/>
-          </a:fillRef>
-          <a:effectRef idx="2">
-            <a:schemeClr val="accent1"/>
-          </a:effectRef>
-          <a:fontRef idx="minor">
-            <a:schemeClr val="lt1"/>
-          </a:fontRef>
-        </p:style>
-        <p:txBody>
-          <a:bodyPr rtlCol="0" anchor="ctr"/>
-          <a:lstStyle/>
-          <a:p>
-            <a:pPr algn="ctr"/>
-          </a:p>
-        </p:txBody>
-      </p:sp>
-      <p:sp>
-        <p:nvSpPr>
-          <p:cNvPr id="30" name="TextBox 29"/>
-          <p:cNvSpPr txBox="1"/>
-          <p:nvPr/>
-        </p:nvSpPr>
-        <p:spPr>
-          <a:xfrm>
-            <a:off x="822960" y="5093208"/>
-            <a:ext cx="384048" cy="320040"/>
-          </a:xfrm>
-          <a:prstGeom prst="rect">
-            <a:avLst/>
-          </a:prstGeom>
-          <a:noFill/>
-        </p:spPr>
-        <p:txBody>
-          <a:bodyPr wrap="square" lIns="0" rIns="0" tIns="0" bIns="0" anchor="t">
-            <a:spAutoFit/>
-          </a:bodyPr>
-          <a:lstStyle/>
-          <a:p>
-            <a:pPr algn="ctr"/>
-            <a:r>
-              <a:rPr sz="1300" b="1" i="0">
-                <a:solidFill>
-                  <a:srgbClr val="FFFFFF"/>
-                </a:solidFill>
-                <a:latin typeface="Segoe UI"/>
-              </a:rPr>
-              <a:t>6</a:t>
-            </a:r>
-          </a:p>
-        </p:txBody>
-      </p:sp>
-      <p:sp>
-        <p:nvSpPr>
-          <p:cNvPr id="31" name="TextBox 30"/>
-          <p:cNvSpPr txBox="1"/>
-          <p:nvPr/>
-        </p:nvSpPr>
-        <p:spPr>
-          <a:xfrm>
-            <a:off x="1417320" y="5029200"/>
-            <a:ext cx="4114800" cy="411480"/>
-          </a:xfrm>
-          <a:prstGeom prst="rect">
-            <a:avLst/>
-          </a:prstGeom>
-          <a:noFill/>
-        </p:spPr>
-        <p:txBody>
-          <a:bodyPr wrap="square" lIns="0" rIns="0" tIns="0" bIns="0" anchor="t">
-            <a:spAutoFit/>
-          </a:bodyPr>
-          <a:lstStyle/>
-          <a:p>
-            <a:pPr algn="l"/>
-            <a:r>
-              <a:rPr sz="1500" b="1" i="0">
-                <a:solidFill>
-                  <a:srgbClr val="0A0A0A"/>
-                </a:solidFill>
-                <a:latin typeface="Segoe UI"/>
-              </a:rPr>
-              <a:t>Покрыли тестами</a:t>
-            </a:r>
-          </a:p>
-        </p:txBody>
-      </p:sp>
-      <p:sp>
-        <p:nvSpPr>
-          <p:cNvPr id="32" name="TextBox 31"/>
-          <p:cNvSpPr txBox="1"/>
-          <p:nvPr/>
-        </p:nvSpPr>
-        <p:spPr>
-          <a:xfrm>
-            <a:off x="5669280" y="5056632"/>
-            <a:ext cx="6400800" cy="411480"/>
-          </a:xfrm>
-          <a:prstGeom prst="rect">
-            <a:avLst/>
-          </a:prstGeom>
-          <a:noFill/>
-        </p:spPr>
-        <p:txBody>
-          <a:bodyPr wrap="square" lIns="0" rIns="0" tIns="0" bIns="0" anchor="t">
-            <a:spAutoFit/>
-          </a:bodyPr>
-          <a:lstStyle/>
-          <a:p>
-            <a:pPr algn="l"/>
-            <a:r>
-              <a:rPr sz="1300" b="0" i="0">
-                <a:solidFill>
-                  <a:srgbClr val="52525B"/>
-                </a:solidFill>
-                <a:latin typeface="Segoe UI"/>
-              </a:rPr>
-              <a:t>автоматические и ручные проверки</a:t>
-            </a:r>
-          </a:p>
-        </p:txBody>
-      </p:sp>
-      <p:sp>
-        <p:nvSpPr>
-          <p:cNvPr id="33" name="Rectangle 32"/>
-          <p:cNvSpPr/>
-          <p:nvPr/>
-        </p:nvSpPr>
-        <p:spPr>
-          <a:xfrm>
-            <a:off x="822960" y="5623560"/>
-            <a:ext cx="384048" cy="384048"/>
-          </a:xfrm>
-          <a:prstGeom prst="rect">
-            <a:avLst/>
-          </a:prstGeom>
-          <a:solidFill>
-            <a:srgbClr val="0066FF"/>
-          </a:solidFill>
-          <a:ln>
-            <a:noFill/>
-          </a:ln>
-          <a:effectLst/>
-        </p:spPr>
-        <p:style>
-          <a:lnRef idx="1">
-            <a:schemeClr val="accent1"/>
-          </a:lnRef>
-          <a:fillRef idx="3">
-            <a:schemeClr val="accent1"/>
-          </a:fillRef>
-          <a:effectRef idx="2">
-            <a:schemeClr val="accent1"/>
-          </a:effectRef>
-          <a:fontRef idx="minor">
-            <a:schemeClr val="lt1"/>
-          </a:fontRef>
-        </p:style>
-        <p:txBody>
-          <a:bodyPr rtlCol="0" anchor="ctr"/>
-          <a:lstStyle/>
-          <a:p>
-            <a:pPr algn="ctr"/>
-          </a:p>
-        </p:txBody>
-      </p:sp>
-      <p:sp>
-        <p:nvSpPr>
-          <p:cNvPr id="34" name="TextBox 33"/>
-          <p:cNvSpPr txBox="1"/>
-          <p:nvPr/>
-        </p:nvSpPr>
-        <p:spPr>
-          <a:xfrm>
-            <a:off x="822960" y="5660136"/>
-            <a:ext cx="384048" cy="320040"/>
-          </a:xfrm>
-          <a:prstGeom prst="rect">
-            <a:avLst/>
-          </a:prstGeom>
-          <a:noFill/>
-        </p:spPr>
-        <p:txBody>
-          <a:bodyPr wrap="square" lIns="0" rIns="0" tIns="0" bIns="0" anchor="t">
-            <a:spAutoFit/>
-          </a:bodyPr>
-          <a:lstStyle/>
-          <a:p>
-            <a:pPr algn="ctr"/>
-            <a:r>
-              <a:rPr sz="1300" b="1" i="0">
-                <a:solidFill>
-                  <a:srgbClr val="FFFFFF"/>
-                </a:solidFill>
-                <a:latin typeface="Segoe UI"/>
-              </a:rPr>
-              <a:t>7</a:t>
-            </a:r>
-          </a:p>
-        </p:txBody>
-      </p:sp>
-      <p:sp>
-        <p:nvSpPr>
-          <p:cNvPr id="35" name="TextBox 34"/>
-          <p:cNvSpPr txBox="1"/>
-          <p:nvPr/>
-        </p:nvSpPr>
-        <p:spPr>
-          <a:xfrm>
-            <a:off x="1417320" y="5596128"/>
-            <a:ext cx="4114800" cy="411480"/>
-          </a:xfrm>
-          <a:prstGeom prst="rect">
-            <a:avLst/>
-          </a:prstGeom>
-          <a:noFill/>
-        </p:spPr>
-        <p:txBody>
-          <a:bodyPr wrap="square" lIns="0" rIns="0" tIns="0" bIns="0" anchor="t">
-            <a:spAutoFit/>
-          </a:bodyPr>
-          <a:lstStyle/>
-          <a:p>
-            <a:pPr algn="l"/>
-            <a:r>
-              <a:rPr sz="1500" b="1" i="0">
-                <a:solidFill>
-                  <a:srgbClr val="0A0A0A"/>
-                </a:solidFill>
-                <a:latin typeface="Segoe UI"/>
-              </a:rPr>
-              <a:t>Оформили документацию</a:t>
-            </a:r>
-          </a:p>
-        </p:txBody>
-      </p:sp>
-      <p:sp>
-        <p:nvSpPr>
-          <p:cNvPr id="36" name="TextBox 35"/>
-          <p:cNvSpPr txBox="1"/>
-          <p:nvPr/>
-        </p:nvSpPr>
-        <p:spPr>
-          <a:xfrm>
-            <a:off x="5669280" y="5623560"/>
-            <a:ext cx="6400800" cy="411480"/>
-          </a:xfrm>
-          <a:prstGeom prst="rect">
-            <a:avLst/>
-          </a:prstGeom>
-          <a:noFill/>
-        </p:spPr>
-        <p:txBody>
-          <a:bodyPr wrap="square" lIns="0" rIns="0" tIns="0" bIns="0" anchor="t">
-            <a:spAutoFit/>
-          </a:bodyPr>
-          <a:lstStyle/>
-          <a:p>
-            <a:pPr algn="l"/>
-            <a:r>
-              <a:rPr sz="1300" b="0" i="0">
-                <a:solidFill>
-                  <a:srgbClr val="52525B"/>
-                </a:solidFill>
-                <a:latin typeface="Segoe UI"/>
-              </a:rPr>
-              <a:t>отчёт по ГОСТ, скриншоты, видеодемо</a:t>
-            </a:r>
-          </a:p>
-        </p:txBody>
-      </p:sp>
-      <p:sp>
-        <p:nvSpPr>
-          <p:cNvPr id="37" name="TextBox 36"/>
           <p:cNvSpPr txBox="1"/>
           <p:nvPr/>
         </p:nvSpPr>
@@ -7181,7 +5839,7 @@
       </p:sp>
       <p:sp>
         <p:nvSpPr>
-          <p:cNvPr id="38" name="TextBox 37"/>
+          <p:cNvPr id="12" name="TextBox 11"/>
           <p:cNvSpPr txBox="1"/>
           <p:nvPr/>
         </p:nvSpPr>
@@ -7209,7 +5867,7 @@
                 </a:solidFill>
                 <a:latin typeface="Consolas"/>
               </a:rPr>
-              <a:t>13 / 15</a:t>
+              <a:t>13 / 18</a:t>
             </a:r>
           </a:p>
         </p:txBody>
@@ -7446,7 +6104,7 @@
                 </a:solidFill>
                 <a:latin typeface="Consolas"/>
               </a:rPr>
-              <a:t>14  ·  ТЕСТИРОВАНИЕ</a:t>
+              <a:t>14  ·  ИНТЕРФЕЙС</a:t>
             </a:r>
           </a:p>
         </p:txBody>
@@ -7481,7 +6139,7 @@
                 </a:solidFill>
                 <a:latin typeface="Segoe UI"/>
               </a:rPr>
-              <a:t>Автотесты + ручные сценарии</a:t>
+              <a:t>Профиль</a:t>
             </a:r>
           </a:p>
         </p:txBody>
@@ -7530,637 +6188,68 @@
           </a:p>
         </p:txBody>
       </p:sp>
-      <p:sp>
-        <p:nvSpPr>
-          <p:cNvPr id="9" name="Rectangle 8"/>
-          <p:cNvSpPr/>
-          <p:nvPr/>
-        </p:nvSpPr>
-        <p:spPr>
-          <a:xfrm>
-            <a:off x="822960" y="2148840"/>
-            <a:ext cx="3566160" cy="1554480"/>
-          </a:xfrm>
-          <a:prstGeom prst="rect">
-            <a:avLst/>
-          </a:prstGeom>
-          <a:solidFill>
-            <a:srgbClr val="F5F8FF"/>
-          </a:solidFill>
-          <a:ln>
-            <a:noFill/>
-          </a:ln>
-          <a:effectLst/>
-        </p:spPr>
-        <p:style>
-          <a:lnRef idx="1">
-            <a:schemeClr val="accent1"/>
-          </a:lnRef>
-          <a:fillRef idx="3">
-            <a:schemeClr val="accent1"/>
-          </a:fillRef>
-          <a:effectRef idx="2">
-            <a:schemeClr val="accent1"/>
-          </a:effectRef>
-          <a:fontRef idx="minor">
-            <a:schemeClr val="lt1"/>
-          </a:fontRef>
-        </p:style>
-        <p:txBody>
-          <a:bodyPr rtlCol="0" anchor="ctr"/>
+      <p:pic>
+        <p:nvPicPr>
+          <p:cNvPr id="9" name="Picture 8" descr="03-profile.png"/>
+          <p:cNvPicPr>
+            <a:picLocks noChangeAspect="1"/>
+          </p:cNvPicPr>
+          <p:nvPr/>
+        </p:nvPicPr>
+        <p:blipFill>
+          <a:blip r:embed="rId2"/>
+          <a:stretch>
+            <a:fillRect/>
+          </a:stretch>
+        </p:blipFill>
+        <p:spPr>
+          <a:xfrm>
+            <a:off x="4154784" y="1965960"/>
+            <a:ext cx="3851951" cy="4206240"/>
+          </a:xfrm>
+          <a:prstGeom prst="rect">
+            <a:avLst/>
+          </a:prstGeom>
+        </p:spPr>
+      </p:pic>
+      <p:sp>
+        <p:nvSpPr>
+          <p:cNvPr id="10" name="TextBox 9"/>
+          <p:cNvSpPr txBox="1"/>
+          <p:nvPr/>
+        </p:nvSpPr>
+        <p:spPr>
+          <a:xfrm>
+            <a:off x="822960" y="6172200"/>
+            <a:ext cx="10972800" cy="274320"/>
+          </a:xfrm>
+          <a:prstGeom prst="rect">
+            <a:avLst/>
+          </a:prstGeom>
+          <a:noFill/>
+        </p:spPr>
+        <p:txBody>
+          <a:bodyPr wrap="square" lIns="0" rIns="0" tIns="0" bIns="0" anchor="t">
+            <a:spAutoFit/>
+          </a:bodyPr>
           <a:lstStyle/>
           <a:p>
             <a:pPr algn="ctr"/>
-          </a:p>
-        </p:txBody>
-      </p:sp>
-      <p:sp>
-        <p:nvSpPr>
-          <p:cNvPr id="10" name="Rectangle 9"/>
-          <p:cNvSpPr/>
-          <p:nvPr/>
-        </p:nvSpPr>
-        <p:spPr>
-          <a:xfrm>
-            <a:off x="822960" y="2148840"/>
-            <a:ext cx="35000" cy="1554480"/>
-          </a:xfrm>
-          <a:prstGeom prst="rect">
-            <a:avLst/>
-          </a:prstGeom>
-          <a:solidFill>
-            <a:srgbClr val="0066FF"/>
-          </a:solidFill>
-          <a:ln>
-            <a:noFill/>
-          </a:ln>
-          <a:effectLst/>
-        </p:spPr>
-        <p:style>
-          <a:lnRef idx="1">
-            <a:schemeClr val="accent1"/>
-          </a:lnRef>
-          <a:fillRef idx="3">
-            <a:schemeClr val="accent1"/>
-          </a:fillRef>
-          <a:effectRef idx="2">
-            <a:schemeClr val="accent1"/>
-          </a:effectRef>
-          <a:fontRef idx="minor">
-            <a:schemeClr val="lt1"/>
-          </a:fontRef>
-        </p:style>
-        <p:txBody>
-          <a:bodyPr rtlCol="0" anchor="ctr"/>
-          <a:lstStyle/>
-          <a:p>
-            <a:pPr algn="ctr"/>
+            <a:r>
+              <a:rPr sz="1300" b="0" i="1">
+                <a:solidFill>
+                  <a:srgbClr val="52525B"/>
+                </a:solidFill>
+                <a:latin typeface="Segoe UI"/>
+              </a:rPr>
+              <a:t>Смена отображаемого имени и загрузка аватара</a:t>
+            </a:r>
           </a:p>
         </p:txBody>
       </p:sp>
       <p:sp>
         <p:nvSpPr>
           <p:cNvPr id="11" name="TextBox 10"/>
-          <p:cNvSpPr txBox="1"/>
-          <p:nvPr/>
-        </p:nvSpPr>
-        <p:spPr>
-          <a:xfrm>
-            <a:off x="1143000" y="2377440"/>
-            <a:ext cx="3200400" cy="548640"/>
-          </a:xfrm>
-          <a:prstGeom prst="rect">
-            <a:avLst/>
-          </a:prstGeom>
-          <a:noFill/>
-        </p:spPr>
-        <p:txBody>
-          <a:bodyPr wrap="square" lIns="0" rIns="0" tIns="0" bIns="0" anchor="t">
-            <a:spAutoFit/>
-          </a:bodyPr>
-          <a:lstStyle/>
-          <a:p>
-            <a:pPr algn="l"/>
-            <a:r>
-              <a:rPr sz="2600" b="1" i="0">
-                <a:solidFill>
-                  <a:srgbClr val="0A0A0A"/>
-                </a:solidFill>
-                <a:latin typeface="Segoe UI"/>
-              </a:rPr>
-              <a:t>7 / 7</a:t>
-            </a:r>
-          </a:p>
-        </p:txBody>
-      </p:sp>
-      <p:sp>
-        <p:nvSpPr>
-          <p:cNvPr id="12" name="TextBox 11"/>
-          <p:cNvSpPr txBox="1"/>
-          <p:nvPr/>
-        </p:nvSpPr>
-        <p:spPr>
-          <a:xfrm>
-            <a:off x="1143000" y="2971800"/>
-            <a:ext cx="3200400" cy="640080"/>
-          </a:xfrm>
-          <a:prstGeom prst="rect">
-            <a:avLst/>
-          </a:prstGeom>
-          <a:noFill/>
-        </p:spPr>
-        <p:txBody>
-          <a:bodyPr wrap="square" lIns="0" rIns="0" tIns="0" bIns="0" anchor="t">
-            <a:spAutoFit/>
-          </a:bodyPr>
-          <a:lstStyle/>
-          <a:p>
-            <a:pPr algn="l"/>
-            <a:r>
-              <a:rPr sz="1300" b="0" i="0">
-                <a:solidFill>
-                  <a:srgbClr val="52525B"/>
-                </a:solidFill>
-                <a:latin typeface="Segoe UI"/>
-              </a:rPr>
-              <a:t>pytest-тестов проходят</a:t>
-            </a:r>
-          </a:p>
-        </p:txBody>
-      </p:sp>
-      <p:sp>
-        <p:nvSpPr>
-          <p:cNvPr id="13" name="Rectangle 12"/>
-          <p:cNvSpPr/>
-          <p:nvPr/>
-        </p:nvSpPr>
-        <p:spPr>
-          <a:xfrm>
-            <a:off x="4617720" y="2148840"/>
-            <a:ext cx="3566160" cy="1554480"/>
-          </a:xfrm>
-          <a:prstGeom prst="rect">
-            <a:avLst/>
-          </a:prstGeom>
-          <a:solidFill>
-            <a:srgbClr val="F5F8FF"/>
-          </a:solidFill>
-          <a:ln>
-            <a:noFill/>
-          </a:ln>
-          <a:effectLst/>
-        </p:spPr>
-        <p:style>
-          <a:lnRef idx="1">
-            <a:schemeClr val="accent1"/>
-          </a:lnRef>
-          <a:fillRef idx="3">
-            <a:schemeClr val="accent1"/>
-          </a:fillRef>
-          <a:effectRef idx="2">
-            <a:schemeClr val="accent1"/>
-          </a:effectRef>
-          <a:fontRef idx="minor">
-            <a:schemeClr val="lt1"/>
-          </a:fontRef>
-        </p:style>
-        <p:txBody>
-          <a:bodyPr rtlCol="0" anchor="ctr"/>
-          <a:lstStyle/>
-          <a:p>
-            <a:pPr algn="ctr"/>
-          </a:p>
-        </p:txBody>
-      </p:sp>
-      <p:sp>
-        <p:nvSpPr>
-          <p:cNvPr id="14" name="Rectangle 13"/>
-          <p:cNvSpPr/>
-          <p:nvPr/>
-        </p:nvSpPr>
-        <p:spPr>
-          <a:xfrm>
-            <a:off x="4617720" y="2148840"/>
-            <a:ext cx="35000" cy="1554480"/>
-          </a:xfrm>
-          <a:prstGeom prst="rect">
-            <a:avLst/>
-          </a:prstGeom>
-          <a:solidFill>
-            <a:srgbClr val="0066FF"/>
-          </a:solidFill>
-          <a:ln>
-            <a:noFill/>
-          </a:ln>
-          <a:effectLst/>
-        </p:spPr>
-        <p:style>
-          <a:lnRef idx="1">
-            <a:schemeClr val="accent1"/>
-          </a:lnRef>
-          <a:fillRef idx="3">
-            <a:schemeClr val="accent1"/>
-          </a:fillRef>
-          <a:effectRef idx="2">
-            <a:schemeClr val="accent1"/>
-          </a:effectRef>
-          <a:fontRef idx="minor">
-            <a:schemeClr val="lt1"/>
-          </a:fontRef>
-        </p:style>
-        <p:txBody>
-          <a:bodyPr rtlCol="0" anchor="ctr"/>
-          <a:lstStyle/>
-          <a:p>
-            <a:pPr algn="ctr"/>
-          </a:p>
-        </p:txBody>
-      </p:sp>
-      <p:sp>
-        <p:nvSpPr>
-          <p:cNvPr id="15" name="TextBox 14"/>
-          <p:cNvSpPr txBox="1"/>
-          <p:nvPr/>
-        </p:nvSpPr>
-        <p:spPr>
-          <a:xfrm>
-            <a:off x="4937760" y="2377440"/>
-            <a:ext cx="3200400" cy="548640"/>
-          </a:xfrm>
-          <a:prstGeom prst="rect">
-            <a:avLst/>
-          </a:prstGeom>
-          <a:noFill/>
-        </p:spPr>
-        <p:txBody>
-          <a:bodyPr wrap="square" lIns="0" rIns="0" tIns="0" bIns="0" anchor="t">
-            <a:spAutoFit/>
-          </a:bodyPr>
-          <a:lstStyle/>
-          <a:p>
-            <a:pPr algn="l"/>
-            <a:r>
-              <a:rPr sz="2600" b="1" i="0">
-                <a:solidFill>
-                  <a:srgbClr val="0A0A0A"/>
-                </a:solidFill>
-                <a:latin typeface="Segoe UI"/>
-              </a:rPr>
-              <a:t>4.5 сек</a:t>
-            </a:r>
-          </a:p>
-        </p:txBody>
-      </p:sp>
-      <p:sp>
-        <p:nvSpPr>
-          <p:cNvPr id="16" name="TextBox 15"/>
-          <p:cNvSpPr txBox="1"/>
-          <p:nvPr/>
-        </p:nvSpPr>
-        <p:spPr>
-          <a:xfrm>
-            <a:off x="4937760" y="2971800"/>
-            <a:ext cx="3200400" cy="640080"/>
-          </a:xfrm>
-          <a:prstGeom prst="rect">
-            <a:avLst/>
-          </a:prstGeom>
-          <a:noFill/>
-        </p:spPr>
-        <p:txBody>
-          <a:bodyPr wrap="square" lIns="0" rIns="0" tIns="0" bIns="0" anchor="t">
-            <a:spAutoFit/>
-          </a:bodyPr>
-          <a:lstStyle/>
-          <a:p>
-            <a:pPr algn="l"/>
-            <a:r>
-              <a:rPr sz="1300" b="0" i="0">
-                <a:solidFill>
-                  <a:srgbClr val="52525B"/>
-                </a:solidFill>
-                <a:latin typeface="Segoe UI"/>
-              </a:rPr>
-              <a:t>полный прогон suite</a:t>
-            </a:r>
-          </a:p>
-        </p:txBody>
-      </p:sp>
-      <p:sp>
-        <p:nvSpPr>
-          <p:cNvPr id="17" name="Rectangle 16"/>
-          <p:cNvSpPr/>
-          <p:nvPr/>
-        </p:nvSpPr>
-        <p:spPr>
-          <a:xfrm>
-            <a:off x="8412480" y="2148840"/>
-            <a:ext cx="3566160" cy="1554480"/>
-          </a:xfrm>
-          <a:prstGeom prst="rect">
-            <a:avLst/>
-          </a:prstGeom>
-          <a:solidFill>
-            <a:srgbClr val="F5F8FF"/>
-          </a:solidFill>
-          <a:ln>
-            <a:noFill/>
-          </a:ln>
-          <a:effectLst/>
-        </p:spPr>
-        <p:style>
-          <a:lnRef idx="1">
-            <a:schemeClr val="accent1"/>
-          </a:lnRef>
-          <a:fillRef idx="3">
-            <a:schemeClr val="accent1"/>
-          </a:fillRef>
-          <a:effectRef idx="2">
-            <a:schemeClr val="accent1"/>
-          </a:effectRef>
-          <a:fontRef idx="minor">
-            <a:schemeClr val="lt1"/>
-          </a:fontRef>
-        </p:style>
-        <p:txBody>
-          <a:bodyPr rtlCol="0" anchor="ctr"/>
-          <a:lstStyle/>
-          <a:p>
-            <a:pPr algn="ctr"/>
-          </a:p>
-        </p:txBody>
-      </p:sp>
-      <p:sp>
-        <p:nvSpPr>
-          <p:cNvPr id="18" name="Rectangle 17"/>
-          <p:cNvSpPr/>
-          <p:nvPr/>
-        </p:nvSpPr>
-        <p:spPr>
-          <a:xfrm>
-            <a:off x="8412480" y="2148840"/>
-            <a:ext cx="35000" cy="1554480"/>
-          </a:xfrm>
-          <a:prstGeom prst="rect">
-            <a:avLst/>
-          </a:prstGeom>
-          <a:solidFill>
-            <a:srgbClr val="0066FF"/>
-          </a:solidFill>
-          <a:ln>
-            <a:noFill/>
-          </a:ln>
-          <a:effectLst/>
-        </p:spPr>
-        <p:style>
-          <a:lnRef idx="1">
-            <a:schemeClr val="accent1"/>
-          </a:lnRef>
-          <a:fillRef idx="3">
-            <a:schemeClr val="accent1"/>
-          </a:fillRef>
-          <a:effectRef idx="2">
-            <a:schemeClr val="accent1"/>
-          </a:effectRef>
-          <a:fontRef idx="minor">
-            <a:schemeClr val="lt1"/>
-          </a:fontRef>
-        </p:style>
-        <p:txBody>
-          <a:bodyPr rtlCol="0" anchor="ctr"/>
-          <a:lstStyle/>
-          <a:p>
-            <a:pPr algn="ctr"/>
-          </a:p>
-        </p:txBody>
-      </p:sp>
-      <p:sp>
-        <p:nvSpPr>
-          <p:cNvPr id="19" name="TextBox 18"/>
-          <p:cNvSpPr txBox="1"/>
-          <p:nvPr/>
-        </p:nvSpPr>
-        <p:spPr>
-          <a:xfrm>
-            <a:off x="8732520" y="2377440"/>
-            <a:ext cx="3200400" cy="548640"/>
-          </a:xfrm>
-          <a:prstGeom prst="rect">
-            <a:avLst/>
-          </a:prstGeom>
-          <a:noFill/>
-        </p:spPr>
-        <p:txBody>
-          <a:bodyPr wrap="square" lIns="0" rIns="0" tIns="0" bIns="0" anchor="t">
-            <a:spAutoFit/>
-          </a:bodyPr>
-          <a:lstStyle/>
-          <a:p>
-            <a:pPr algn="l"/>
-            <a:r>
-              <a:rPr sz="2600" b="1" i="0">
-                <a:solidFill>
-                  <a:srgbClr val="0A0A0A"/>
-                </a:solidFill>
-                <a:latin typeface="Segoe UI"/>
-              </a:rPr>
-              <a:t>6 сцен.</a:t>
-            </a:r>
-          </a:p>
-        </p:txBody>
-      </p:sp>
-      <p:sp>
-        <p:nvSpPr>
-          <p:cNvPr id="20" name="TextBox 19"/>
-          <p:cNvSpPr txBox="1"/>
-          <p:nvPr/>
-        </p:nvSpPr>
-        <p:spPr>
-          <a:xfrm>
-            <a:off x="8732520" y="2971800"/>
-            <a:ext cx="3200400" cy="640080"/>
-          </a:xfrm>
-          <a:prstGeom prst="rect">
-            <a:avLst/>
-          </a:prstGeom>
-          <a:noFill/>
-        </p:spPr>
-        <p:txBody>
-          <a:bodyPr wrap="square" lIns="0" rIns="0" tIns="0" bIns="0" anchor="t">
-            <a:spAutoFit/>
-          </a:bodyPr>
-          <a:lstStyle/>
-          <a:p>
-            <a:pPr algn="l"/>
-            <a:r>
-              <a:rPr sz="1300" b="0" i="0">
-                <a:solidFill>
-                  <a:srgbClr val="52525B"/>
-                </a:solidFill>
-                <a:latin typeface="Segoe UI"/>
-              </a:rPr>
-              <a:t>ручных end-to-end проверок</a:t>
-            </a:r>
-          </a:p>
-        </p:txBody>
-      </p:sp>
-      <p:sp>
-        <p:nvSpPr>
-          <p:cNvPr id="21" name="TextBox 20"/>
-          <p:cNvSpPr txBox="1"/>
-          <p:nvPr/>
-        </p:nvSpPr>
-        <p:spPr>
-          <a:xfrm>
-            <a:off x="822960" y="4069080"/>
-            <a:ext cx="10972800" cy="320040"/>
-          </a:xfrm>
-          <a:prstGeom prst="rect">
-            <a:avLst/>
-          </a:prstGeom>
-          <a:noFill/>
-        </p:spPr>
-        <p:txBody>
-          <a:bodyPr wrap="square" lIns="0" rIns="0" tIns="0" bIns="0" anchor="t">
-            <a:spAutoFit/>
-          </a:bodyPr>
-          <a:lstStyle/>
-          <a:p>
-            <a:pPr algn="l"/>
-            <a:r>
-              <a:rPr sz="1100" b="0" i="0">
-                <a:solidFill>
-                  <a:srgbClr val="52525B"/>
-                </a:solidFill>
-                <a:latin typeface="Consolas"/>
-              </a:rPr>
-              <a:t>ЧТО ПОКРЫТО</a:t>
-            </a:r>
-          </a:p>
-        </p:txBody>
-      </p:sp>
-      <p:sp>
-        <p:nvSpPr>
-          <p:cNvPr id="22" name="TextBox 21"/>
-          <p:cNvSpPr txBox="1"/>
-          <p:nvPr/>
-        </p:nvSpPr>
-        <p:spPr>
-          <a:xfrm>
-            <a:off x="822960" y="4434840"/>
-            <a:ext cx="10972800" cy="1920240"/>
-          </a:xfrm>
-          <a:prstGeom prst="rect">
-            <a:avLst/>
-          </a:prstGeom>
-          <a:noFill/>
-        </p:spPr>
-        <p:txBody>
-          <a:bodyPr wrap="square" lIns="0" rIns="0">
-            <a:spAutoFit/>
-          </a:bodyPr>
-          <a:lstStyle/>
-          <a:p>
-            <a:pPr algn="l">
-              <a:lnSpc>
-                <a:spcPct val="135000"/>
-              </a:lnSpc>
-            </a:pPr>
-            <a:r>
-              <a:rPr sz="1300" b="0">
-                <a:solidFill>
-                  <a:srgbClr val="0A0A0A"/>
-                </a:solidFill>
-                <a:latin typeface="Segoe UI"/>
-              </a:rPr>
-              <a:t>— регистрация и вход по логину/паролю</a:t>
-            </a:r>
-          </a:p>
-          <a:p>
-            <a:pPr algn="l">
-              <a:lnSpc>
-                <a:spcPct val="135000"/>
-              </a:lnSpc>
-            </a:pPr>
-            <a:r>
-              <a:rPr sz="1300" b="0">
-                <a:solidFill>
-                  <a:srgbClr val="0A0A0A"/>
-                </a:solidFill>
-                <a:latin typeface="Segoe UI"/>
-              </a:rPr>
-              <a:t>— неверный пароль → 401</a:t>
-            </a:r>
-          </a:p>
-          <a:p>
-            <a:pPr algn="l">
-              <a:lnSpc>
-                <a:spcPct val="135000"/>
-              </a:lnSpc>
-            </a:pPr>
-            <a:r>
-              <a:rPr sz="1300" b="0">
-                <a:solidFill>
-                  <a:srgbClr val="0A0A0A"/>
-                </a:solidFill>
-                <a:latin typeface="Segoe UI"/>
-              </a:rPr>
-              <a:t>— создание чата, отправка, история, поиск (со стеммингом)</a:t>
-            </a:r>
-          </a:p>
-          <a:p>
-            <a:pPr algn="l">
-              <a:lnSpc>
-                <a:spcPct val="135000"/>
-              </a:lnSpc>
-            </a:pPr>
-            <a:r>
-              <a:rPr sz="1300" b="0">
-                <a:solidFill>
-                  <a:srgbClr val="0A0A0A"/>
-                </a:solidFill>
-                <a:latin typeface="Segoe UI"/>
-              </a:rPr>
-              <a:t>— ограничение прав: reader не может отправлять — 403</a:t>
-            </a:r>
-          </a:p>
-          <a:p>
-            <a:pPr algn="l">
-              <a:lnSpc>
-                <a:spcPct val="135000"/>
-              </a:lnSpc>
-            </a:pPr>
-            <a:r>
-              <a:rPr sz="1300" b="0">
-                <a:solidFill>
-                  <a:srgbClr val="0A0A0A"/>
-                </a:solidFill>
-                <a:latin typeface="Segoe UI"/>
-              </a:rPr>
-              <a:t>— ротация refresh: старый refresh становится недействительным</a:t>
-            </a:r>
-          </a:p>
-          <a:p>
-            <a:pPr algn="l">
-              <a:lnSpc>
-                <a:spcPct val="135000"/>
-              </a:lnSpc>
-            </a:pPr>
-            <a:r>
-              <a:rPr sz="1300" b="0">
-                <a:solidFill>
-                  <a:srgbClr val="0A0A0A"/>
-                </a:solidFill>
-                <a:latin typeface="Segoe UI"/>
-              </a:rPr>
-              <a:t>— идемпотентность: повтор с тем же client_msg_id не создаёт дубликат</a:t>
-            </a:r>
-          </a:p>
-        </p:txBody>
-      </p:sp>
-      <p:sp>
-        <p:nvSpPr>
-          <p:cNvPr id="23" name="TextBox 22"/>
           <p:cNvSpPr txBox="1"/>
           <p:nvPr/>
         </p:nvSpPr>
@@ -8195,7 +6284,7 @@
       </p:sp>
       <p:sp>
         <p:nvSpPr>
-          <p:cNvPr id="24" name="TextBox 23"/>
+          <p:cNvPr id="12" name="TextBox 11"/>
           <p:cNvSpPr txBox="1"/>
           <p:nvPr/>
         </p:nvSpPr>
@@ -8223,7 +6312,7 @@
                 </a:solidFill>
                 <a:latin typeface="Consolas"/>
               </a:rPr>
-              <a:t>14 / 15</a:t>
+              <a:t>14 / 18</a:t>
             </a:r>
           </a:p>
         </p:txBody>
@@ -8460,7 +6549,7 @@
                 </a:solidFill>
                 <a:latin typeface="Consolas"/>
               </a:rPr>
-              <a:t>15  ·  РЕЗУЛЬТАТЫ</a:t>
+              <a:t>15  ·  ИНТЕРФЕЙС</a:t>
             </a:r>
           </a:p>
         </p:txBody>
@@ -8495,7 +6584,7 @@
                 </a:solidFill>
                 <a:latin typeface="Segoe UI"/>
               </a:rPr>
-              <a:t>Что готово и что дальше</a:t>
+              <a:t>Создание группы</a:t>
             </a:r>
           </a:p>
         </p:txBody>
@@ -8544,16 +6633,75 @@
           </a:p>
         </p:txBody>
       </p:sp>
-      <p:sp>
-        <p:nvSpPr>
-          <p:cNvPr id="9" name="TextBox 8"/>
-          <p:cNvSpPr txBox="1"/>
-          <p:nvPr/>
-        </p:nvSpPr>
-        <p:spPr>
-          <a:xfrm>
-            <a:off x="822960" y="2148840"/>
-            <a:ext cx="10972800" cy="320040"/>
+      <p:pic>
+        <p:nvPicPr>
+          <p:cNvPr id="9" name="Picture 8" descr="04-new-chat.png"/>
+          <p:cNvPicPr>
+            <a:picLocks noChangeAspect="1"/>
+          </p:cNvPicPr>
+          <p:nvPr/>
+        </p:nvPicPr>
+        <p:blipFill>
+          <a:blip r:embed="rId2"/>
+          <a:stretch>
+            <a:fillRect/>
+          </a:stretch>
+        </p:blipFill>
+        <p:spPr>
+          <a:xfrm>
+            <a:off x="3957686" y="1965960"/>
+            <a:ext cx="4246147" cy="4206240"/>
+          </a:xfrm>
+          <a:prstGeom prst="rect">
+            <a:avLst/>
+          </a:prstGeom>
+        </p:spPr>
+      </p:pic>
+      <p:sp>
+        <p:nvSpPr>
+          <p:cNvPr id="10" name="TextBox 9"/>
+          <p:cNvSpPr txBox="1"/>
+          <p:nvPr/>
+        </p:nvSpPr>
+        <p:spPr>
+          <a:xfrm>
+            <a:off x="822960" y="6172200"/>
+            <a:ext cx="10972800" cy="274320"/>
+          </a:xfrm>
+          <a:prstGeom prst="rect">
+            <a:avLst/>
+          </a:prstGeom>
+          <a:noFill/>
+        </p:spPr>
+        <p:txBody>
+          <a:bodyPr wrap="square" lIns="0" rIns="0" tIns="0" bIns="0" anchor="t">
+            <a:spAutoFit/>
+          </a:bodyPr>
+          <a:lstStyle/>
+          <a:p>
+            <a:pPr algn="ctr"/>
+            <a:r>
+              <a:rPr sz="1300" b="0" i="1">
+                <a:solidFill>
+                  <a:srgbClr val="52525B"/>
+                </a:solidFill>
+                <a:latin typeface="Segoe UI"/>
+              </a:rPr>
+              <a:t>Групповые и личные чаты с добавлением участников</a:t>
+            </a:r>
+          </a:p>
+        </p:txBody>
+      </p:sp>
+      <p:sp>
+        <p:nvSpPr>
+          <p:cNvPr id="11" name="TextBox 10"/>
+          <p:cNvSpPr txBox="1"/>
+          <p:nvPr/>
+        </p:nvSpPr>
+        <p:spPr>
+          <a:xfrm>
+            <a:off x="502920" y="6446520"/>
+            <a:ext cx="5486400" cy="274320"/>
           </a:xfrm>
           <a:prstGeom prst="rect">
             <a:avLst/>
@@ -8568,236 +6716,334 @@
           <a:p>
             <a:pPr algn="l"/>
             <a:r>
+              <a:rPr sz="900" b="0" i="0">
+                <a:solidFill>
+                  <a:srgbClr val="52525B"/>
+                </a:solidFill>
+                <a:latin typeface="Consolas"/>
+              </a:rPr>
+              <a:t>MESSENGER  ·  VK Education / Case #1</a:t>
+            </a:r>
+          </a:p>
+        </p:txBody>
+      </p:sp>
+      <p:sp>
+        <p:nvSpPr>
+          <p:cNvPr id="12" name="TextBox 11"/>
+          <p:cNvSpPr txBox="1"/>
+          <p:nvPr/>
+        </p:nvSpPr>
+        <p:spPr>
+          <a:xfrm>
+            <a:off x="10561320" y="6446520"/>
+            <a:ext cx="1554480" cy="274320"/>
+          </a:xfrm>
+          <a:prstGeom prst="rect">
+            <a:avLst/>
+          </a:prstGeom>
+          <a:noFill/>
+        </p:spPr>
+        <p:txBody>
+          <a:bodyPr wrap="square" lIns="0" rIns="0" tIns="0" bIns="0" anchor="t">
+            <a:spAutoFit/>
+          </a:bodyPr>
+          <a:lstStyle/>
+          <a:p>
+            <a:pPr algn="r"/>
+            <a:r>
+              <a:rPr sz="900" b="0" i="0">
+                <a:solidFill>
+                  <a:srgbClr val="52525B"/>
+                </a:solidFill>
+                <a:latin typeface="Consolas"/>
+              </a:rPr>
+              <a:t>15 / 18</a:t>
+            </a:r>
+          </a:p>
+        </p:txBody>
+      </p:sp>
+    </p:spTree>
+  </p:cSld>
+  <p:clrMapOvr>
+    <a:masterClrMapping/>
+  </p:clrMapOvr>
+</p:sld>
+</file>
+
+<file path=ppt/slides/slide16.xml><?xml version="1.0" encoding="utf-8"?>
+<p:sld xmlns:a="http://schemas.openxmlformats.org/drawingml/2006/main" xmlns:p="http://schemas.openxmlformats.org/presentationml/2006/main" xmlns:r="http://schemas.openxmlformats.org/officeDocument/2006/relationships">
+  <p:cSld>
+    <p:bg>
+      <p:bgPr>
+        <a:solidFill>
+          <a:srgbClr val="FFFFFF"/>
+        </a:solidFill>
+        <a:effectLst/>
+      </p:bgPr>
+    </p:bg>
+    <p:spTree>
+      <p:nvGrpSpPr>
+        <p:cNvPr id="1" name=""/>
+        <p:cNvGrpSpPr/>
+        <p:nvPr/>
+      </p:nvGrpSpPr>
+      <p:grpSpPr/>
+      <p:sp>
+        <p:nvSpPr>
+          <p:cNvPr id="2" name="Rectangle 1"/>
+          <p:cNvSpPr/>
+          <p:nvPr/>
+        </p:nvSpPr>
+        <p:spPr>
+          <a:xfrm>
+            <a:off x="502920" y="457200"/>
+            <a:ext cx="160000" cy="160000"/>
+          </a:xfrm>
+          <a:prstGeom prst="rect">
+            <a:avLst/>
+          </a:prstGeom>
+          <a:solidFill>
+            <a:srgbClr val="0066FF"/>
+          </a:solidFill>
+          <a:ln>
+            <a:noFill/>
+          </a:ln>
+          <a:effectLst/>
+        </p:spPr>
+        <p:style>
+          <a:lnRef idx="1">
+            <a:schemeClr val="accent1"/>
+          </a:lnRef>
+          <a:fillRef idx="3">
+            <a:schemeClr val="accent1"/>
+          </a:fillRef>
+          <a:effectRef idx="2">
+            <a:schemeClr val="accent1"/>
+          </a:effectRef>
+          <a:fontRef idx="minor">
+            <a:schemeClr val="lt1"/>
+          </a:fontRef>
+        </p:style>
+        <p:txBody>
+          <a:bodyPr rtlCol="0" anchor="ctr"/>
+          <a:lstStyle/>
+          <a:p>
+            <a:pPr algn="ctr"/>
+          </a:p>
+        </p:txBody>
+      </p:sp>
+      <p:sp>
+        <p:nvSpPr>
+          <p:cNvPr id="3" name="Rectangle 2"/>
+          <p:cNvSpPr/>
+          <p:nvPr/>
+        </p:nvSpPr>
+        <p:spPr>
+          <a:xfrm>
+            <a:off x="732920" y="457200"/>
+            <a:ext cx="160000" cy="160000"/>
+          </a:xfrm>
+          <a:prstGeom prst="rect">
+            <a:avLst/>
+          </a:prstGeom>
+          <a:solidFill>
+            <a:srgbClr val="0066FF"/>
+          </a:solidFill>
+          <a:ln>
+            <a:noFill/>
+          </a:ln>
+          <a:effectLst/>
+        </p:spPr>
+        <p:style>
+          <a:lnRef idx="1">
+            <a:schemeClr val="accent1"/>
+          </a:lnRef>
+          <a:fillRef idx="3">
+            <a:schemeClr val="accent1"/>
+          </a:fillRef>
+          <a:effectRef idx="2">
+            <a:schemeClr val="accent1"/>
+          </a:effectRef>
+          <a:fontRef idx="minor">
+            <a:schemeClr val="lt1"/>
+          </a:fontRef>
+        </p:style>
+        <p:txBody>
+          <a:bodyPr rtlCol="0" anchor="ctr"/>
+          <a:lstStyle/>
+          <a:p>
+            <a:pPr algn="ctr"/>
+          </a:p>
+        </p:txBody>
+      </p:sp>
+      <p:sp>
+        <p:nvSpPr>
+          <p:cNvPr id="4" name="Rectangle 3"/>
+          <p:cNvSpPr/>
+          <p:nvPr/>
+        </p:nvSpPr>
+        <p:spPr>
+          <a:xfrm>
+            <a:off x="502920" y="687200"/>
+            <a:ext cx="160000" cy="160000"/>
+          </a:xfrm>
+          <a:prstGeom prst="rect">
+            <a:avLst/>
+          </a:prstGeom>
+          <a:solidFill>
+            <a:srgbClr val="0066FF"/>
+          </a:solidFill>
+          <a:ln>
+            <a:noFill/>
+          </a:ln>
+          <a:effectLst/>
+        </p:spPr>
+        <p:style>
+          <a:lnRef idx="1">
+            <a:schemeClr val="accent1"/>
+          </a:lnRef>
+          <a:fillRef idx="3">
+            <a:schemeClr val="accent1"/>
+          </a:fillRef>
+          <a:effectRef idx="2">
+            <a:schemeClr val="accent1"/>
+          </a:effectRef>
+          <a:fontRef idx="minor">
+            <a:schemeClr val="lt1"/>
+          </a:fontRef>
+        </p:style>
+        <p:txBody>
+          <a:bodyPr rtlCol="0" anchor="ctr"/>
+          <a:lstStyle/>
+          <a:p>
+            <a:pPr algn="ctr"/>
+          </a:p>
+        </p:txBody>
+      </p:sp>
+      <p:sp>
+        <p:nvSpPr>
+          <p:cNvPr id="5" name="Rectangle 4"/>
+          <p:cNvSpPr/>
+          <p:nvPr/>
+        </p:nvSpPr>
+        <p:spPr>
+          <a:xfrm>
+            <a:off x="732920" y="687200"/>
+            <a:ext cx="160000" cy="160000"/>
+          </a:xfrm>
+          <a:prstGeom prst="rect">
+            <a:avLst/>
+          </a:prstGeom>
+          <a:solidFill>
+            <a:srgbClr val="0066FF"/>
+          </a:solidFill>
+          <a:ln>
+            <a:noFill/>
+          </a:ln>
+          <a:effectLst/>
+        </p:spPr>
+        <p:style>
+          <a:lnRef idx="1">
+            <a:schemeClr val="accent1"/>
+          </a:lnRef>
+          <a:fillRef idx="3">
+            <a:schemeClr val="accent1"/>
+          </a:fillRef>
+          <a:effectRef idx="2">
+            <a:schemeClr val="accent1"/>
+          </a:effectRef>
+          <a:fontRef idx="minor">
+            <a:schemeClr val="lt1"/>
+          </a:fontRef>
+        </p:style>
+        <p:txBody>
+          <a:bodyPr rtlCol="0" anchor="ctr"/>
+          <a:lstStyle/>
+          <a:p>
+            <a:pPr algn="ctr"/>
+          </a:p>
+        </p:txBody>
+      </p:sp>
+      <p:sp>
+        <p:nvSpPr>
+          <p:cNvPr id="6" name="TextBox 5"/>
+          <p:cNvSpPr txBox="1"/>
+          <p:nvPr/>
+        </p:nvSpPr>
+        <p:spPr>
+          <a:xfrm>
+            <a:off x="1005840" y="384048"/>
+            <a:ext cx="5486400" cy="320040"/>
+          </a:xfrm>
+          <a:prstGeom prst="rect">
+            <a:avLst/>
+          </a:prstGeom>
+          <a:noFill/>
+        </p:spPr>
+        <p:txBody>
+          <a:bodyPr wrap="square" lIns="0" rIns="0" tIns="0" bIns="0" anchor="t">
+            <a:spAutoFit/>
+          </a:bodyPr>
+          <a:lstStyle/>
+          <a:p>
+            <a:pPr algn="l"/>
+            <a:r>
               <a:rPr sz="1100" b="0" i="0">
                 <a:solidFill>
-                  <a:srgbClr val="0066FF"/>
+                  <a:srgbClr val="52525B"/>
                 </a:solidFill>
                 <a:latin typeface="Consolas"/>
               </a:rPr>
-              <a:t>ГОТОВО</a:t>
-            </a:r>
-          </a:p>
-        </p:txBody>
-      </p:sp>
-      <p:sp>
-        <p:nvSpPr>
-          <p:cNvPr id="10" name="TextBox 9"/>
-          <p:cNvSpPr txBox="1"/>
-          <p:nvPr/>
-        </p:nvSpPr>
-        <p:spPr>
-          <a:xfrm>
-            <a:off x="822960" y="2514600"/>
-            <a:ext cx="10972800" cy="2286000"/>
-          </a:xfrm>
-          <a:prstGeom prst="rect">
-            <a:avLst/>
-          </a:prstGeom>
-          <a:noFill/>
-        </p:spPr>
-        <p:txBody>
-          <a:bodyPr wrap="square" lIns="0" rIns="0">
-            <a:spAutoFit/>
-          </a:bodyPr>
-          <a:lstStyle/>
-          <a:p>
-            <a:pPr algn="l">
-              <a:lnSpc>
-                <a:spcPct val="145000"/>
-              </a:lnSpc>
-            </a:pPr>
-            <a:r>
-              <a:rPr sz="1400" b="0">
+              <a:t>16  ·  КАК МЫ РАБОТАЛИ</a:t>
+            </a:r>
+          </a:p>
+        </p:txBody>
+      </p:sp>
+      <p:sp>
+        <p:nvSpPr>
+          <p:cNvPr id="7" name="TextBox 6"/>
+          <p:cNvSpPr txBox="1"/>
+          <p:nvPr/>
+        </p:nvSpPr>
+        <p:spPr>
+          <a:xfrm>
+            <a:off x="502920" y="868680"/>
+            <a:ext cx="10972800" cy="777240"/>
+          </a:xfrm>
+          <a:prstGeom prst="rect">
+            <a:avLst/>
+          </a:prstGeom>
+          <a:noFill/>
+        </p:spPr>
+        <p:txBody>
+          <a:bodyPr wrap="square" lIns="0" rIns="0" tIns="0" bIns="0" anchor="t">
+            <a:spAutoFit/>
+          </a:bodyPr>
+          <a:lstStyle/>
+          <a:p>
+            <a:pPr algn="l"/>
+            <a:r>
+              <a:rPr sz="3200" b="1" i="0">
                 <a:solidFill>
                   <a:srgbClr val="0A0A0A"/>
                 </a:solidFill>
                 <a:latin typeface="Segoe UI"/>
               </a:rPr>
-              <a:t>— все 7 обязательных функциональных требований</a:t>
-            </a:r>
-          </a:p>
-          <a:p>
-            <a:pPr algn="l">
-              <a:lnSpc>
-                <a:spcPct val="145000"/>
-              </a:lnSpc>
-            </a:pPr>
-            <a:r>
-              <a:rPr sz="1400" b="0">
-                <a:solidFill>
-                  <a:srgbClr val="0A0A0A"/>
-                </a:solidFill>
-                <a:latin typeface="Segoe UI"/>
-              </a:rPr>
-              <a:t>— 4 дополнительных (статусы, вложения, refresh, идемпотентность)</a:t>
-            </a:r>
-          </a:p>
-          <a:p>
-            <a:pPr algn="l">
-              <a:lnSpc>
-                <a:spcPct val="145000"/>
-              </a:lnSpc>
-            </a:pPr>
-            <a:r>
-              <a:rPr sz="1400" b="0">
-                <a:solidFill>
-                  <a:srgbClr val="0A0A0A"/>
-                </a:solidFill>
-                <a:latin typeface="Segoe UI"/>
-              </a:rPr>
-              <a:t>— полнотекстовый поиск на GIN + русской морфологии</a:t>
-            </a:r>
-          </a:p>
-          <a:p>
-            <a:pPr algn="l">
-              <a:lnSpc>
-                <a:spcPct val="145000"/>
-              </a:lnSpc>
-            </a:pPr>
-            <a:r>
-              <a:rPr sz="1400" b="0">
-                <a:solidFill>
-                  <a:srgbClr val="0A0A0A"/>
-                </a:solidFill>
-                <a:latin typeface="Segoe UI"/>
-              </a:rPr>
-              <a:t>— автоматизированные тесты (7 / 7 проходят)</a:t>
-            </a:r>
-          </a:p>
-          <a:p>
-            <a:pPr algn="l">
-              <a:lnSpc>
-                <a:spcPct val="145000"/>
-              </a:lnSpc>
-            </a:pPr>
-            <a:r>
-              <a:rPr sz="1400" b="0">
-                <a:solidFill>
-                  <a:srgbClr val="0A0A0A"/>
-                </a:solidFill>
-                <a:latin typeface="Segoe UI"/>
-              </a:rPr>
-              <a:t>— отчёт по ГОСТ 7.32-2017, ER-диаграмма, видеодемонстрация</a:t>
-            </a:r>
-          </a:p>
-        </p:txBody>
-      </p:sp>
-      <p:sp>
-        <p:nvSpPr>
-          <p:cNvPr id="11" name="TextBox 10"/>
-          <p:cNvSpPr txBox="1"/>
-          <p:nvPr/>
-        </p:nvSpPr>
-        <p:spPr>
-          <a:xfrm>
-            <a:off x="822960" y="4617720"/>
-            <a:ext cx="10972800" cy="320040"/>
-          </a:xfrm>
-          <a:prstGeom prst="rect">
-            <a:avLst/>
-          </a:prstGeom>
-          <a:noFill/>
-        </p:spPr>
-        <p:txBody>
-          <a:bodyPr wrap="square" lIns="0" rIns="0" tIns="0" bIns="0" anchor="t">
-            <a:spAutoFit/>
-          </a:bodyPr>
-          <a:lstStyle/>
-          <a:p>
-            <a:pPr algn="l"/>
-            <a:r>
-              <a:rPr sz="1100" b="0" i="0">
-                <a:solidFill>
-                  <a:srgbClr val="52525B"/>
-                </a:solidFill>
-                <a:latin typeface="Consolas"/>
-              </a:rPr>
-              <a:t>НАПРАВЛЕНИЯ РАЗВИТИЯ</a:t>
-            </a:r>
-          </a:p>
-        </p:txBody>
-      </p:sp>
-      <p:sp>
-        <p:nvSpPr>
-          <p:cNvPr id="12" name="TextBox 11"/>
-          <p:cNvSpPr txBox="1"/>
-          <p:nvPr/>
-        </p:nvSpPr>
-        <p:spPr>
-          <a:xfrm>
-            <a:off x="822960" y="4983480"/>
-            <a:ext cx="10972800" cy="1463040"/>
-          </a:xfrm>
-          <a:prstGeom prst="rect">
-            <a:avLst/>
-          </a:prstGeom>
-          <a:noFill/>
-        </p:spPr>
-        <p:txBody>
-          <a:bodyPr wrap="square" lIns="0" rIns="0">
-            <a:spAutoFit/>
-          </a:bodyPr>
-          <a:lstStyle/>
-          <a:p>
-            <a:pPr algn="l">
-              <a:lnSpc>
-                <a:spcPct val="145000"/>
-              </a:lnSpc>
-            </a:pPr>
-            <a:r>
-              <a:rPr sz="1400" b="0">
-                <a:solidFill>
-                  <a:srgbClr val="0A0A0A"/>
-                </a:solidFill>
-                <a:latin typeface="Segoe UI"/>
-              </a:rPr>
-              <a:t>— внешний брокер (Redis Streams / NATS) для горизонтального масштабирования</a:t>
-            </a:r>
-          </a:p>
-          <a:p>
-            <a:pPr algn="l">
-              <a:lnSpc>
-                <a:spcPct val="145000"/>
-              </a:lnSpc>
-            </a:pPr>
-            <a:r>
-              <a:rPr sz="1400" b="0">
-                <a:solidFill>
-                  <a:srgbClr val="0A0A0A"/>
-                </a:solidFill>
-                <a:latin typeface="Segoe UI"/>
-              </a:rPr>
-              <a:t>— оффлайн-уведомления, редактирование и удаление сообщений</a:t>
-            </a:r>
-          </a:p>
-          <a:p>
-            <a:pPr algn="l">
-              <a:lnSpc>
-                <a:spcPct val="145000"/>
-              </a:lnSpc>
-            </a:pPr>
-            <a:r>
-              <a:rPr sz="1400" b="0">
-                <a:solidFill>
-                  <a:srgbClr val="0A0A0A"/>
-                </a:solidFill>
-                <a:latin typeface="Segoe UI"/>
-              </a:rPr>
-              <a:t>— E2E-шифрование, голосовые сообщения, WebRTC-видеозвонки</a:t>
-            </a:r>
-          </a:p>
-        </p:txBody>
-      </p:sp>
-      <p:sp>
-        <p:nvSpPr>
-          <p:cNvPr id="13" name="Rectangle 12"/>
+              <a:t>Этапы проекта</a:t>
+            </a:r>
+          </a:p>
+        </p:txBody>
+      </p:sp>
+      <p:sp>
+        <p:nvSpPr>
+          <p:cNvPr id="8" name="Rectangle 7"/>
           <p:cNvSpPr/>
           <p:nvPr/>
         </p:nvSpPr>
         <p:spPr>
           <a:xfrm>
-            <a:off x="822960" y="6309360"/>
-            <a:ext cx="11247120" cy="9525"/>
+            <a:off x="502920" y="1691640"/>
+            <a:ext cx="11155680" cy="9525"/>
           </a:xfrm>
           <a:prstGeom prst="rect">
             <a:avLst/>
@@ -8834,6 +7080,2737 @@
       </p:sp>
       <p:sp>
         <p:nvSpPr>
+          <p:cNvPr id="9" name="Rectangle 8"/>
+          <p:cNvSpPr/>
+          <p:nvPr/>
+        </p:nvSpPr>
+        <p:spPr>
+          <a:xfrm>
+            <a:off x="822960" y="2221992"/>
+            <a:ext cx="384048" cy="384048"/>
+          </a:xfrm>
+          <a:prstGeom prst="rect">
+            <a:avLst/>
+          </a:prstGeom>
+          <a:solidFill>
+            <a:srgbClr val="0066FF"/>
+          </a:solidFill>
+          <a:ln>
+            <a:noFill/>
+          </a:ln>
+          <a:effectLst/>
+        </p:spPr>
+        <p:style>
+          <a:lnRef idx="1">
+            <a:schemeClr val="accent1"/>
+          </a:lnRef>
+          <a:fillRef idx="3">
+            <a:schemeClr val="accent1"/>
+          </a:fillRef>
+          <a:effectRef idx="2">
+            <a:schemeClr val="accent1"/>
+          </a:effectRef>
+          <a:fontRef idx="minor">
+            <a:schemeClr val="lt1"/>
+          </a:fontRef>
+        </p:style>
+        <p:txBody>
+          <a:bodyPr rtlCol="0" anchor="ctr"/>
+          <a:lstStyle/>
+          <a:p>
+            <a:pPr algn="ctr"/>
+          </a:p>
+        </p:txBody>
+      </p:sp>
+      <p:sp>
+        <p:nvSpPr>
+          <p:cNvPr id="10" name="TextBox 9"/>
+          <p:cNvSpPr txBox="1"/>
+          <p:nvPr/>
+        </p:nvSpPr>
+        <p:spPr>
+          <a:xfrm>
+            <a:off x="822960" y="2258568"/>
+            <a:ext cx="384048" cy="320040"/>
+          </a:xfrm>
+          <a:prstGeom prst="rect">
+            <a:avLst/>
+          </a:prstGeom>
+          <a:noFill/>
+        </p:spPr>
+        <p:txBody>
+          <a:bodyPr wrap="square" lIns="0" rIns="0" tIns="0" bIns="0" anchor="t">
+            <a:spAutoFit/>
+          </a:bodyPr>
+          <a:lstStyle/>
+          <a:p>
+            <a:pPr algn="ctr"/>
+            <a:r>
+              <a:rPr sz="1300" b="1" i="0">
+                <a:solidFill>
+                  <a:srgbClr val="FFFFFF"/>
+                </a:solidFill>
+                <a:latin typeface="Segoe UI"/>
+              </a:rPr>
+              <a:t>1</a:t>
+            </a:r>
+          </a:p>
+        </p:txBody>
+      </p:sp>
+      <p:sp>
+        <p:nvSpPr>
+          <p:cNvPr id="11" name="TextBox 10"/>
+          <p:cNvSpPr txBox="1"/>
+          <p:nvPr/>
+        </p:nvSpPr>
+        <p:spPr>
+          <a:xfrm>
+            <a:off x="1417320" y="2194560"/>
+            <a:ext cx="4114800" cy="411480"/>
+          </a:xfrm>
+          <a:prstGeom prst="rect">
+            <a:avLst/>
+          </a:prstGeom>
+          <a:noFill/>
+        </p:spPr>
+        <p:txBody>
+          <a:bodyPr wrap="square" lIns="0" rIns="0" tIns="0" bIns="0" anchor="t">
+            <a:spAutoFit/>
+          </a:bodyPr>
+          <a:lstStyle/>
+          <a:p>
+            <a:pPr algn="l"/>
+            <a:r>
+              <a:rPr sz="1500" b="1" i="0">
+                <a:solidFill>
+                  <a:srgbClr val="0A0A0A"/>
+                </a:solidFill>
+                <a:latin typeface="Segoe UI"/>
+              </a:rPr>
+              <a:t>Разобрали ТЗ</a:t>
+            </a:r>
+          </a:p>
+        </p:txBody>
+      </p:sp>
+      <p:sp>
+        <p:nvSpPr>
+          <p:cNvPr id="12" name="TextBox 11"/>
+          <p:cNvSpPr txBox="1"/>
+          <p:nvPr/>
+        </p:nvSpPr>
+        <p:spPr>
+          <a:xfrm>
+            <a:off x="5669280" y="2221992"/>
+            <a:ext cx="6400800" cy="411480"/>
+          </a:xfrm>
+          <a:prstGeom prst="rect">
+            <a:avLst/>
+          </a:prstGeom>
+          <a:noFill/>
+        </p:spPr>
+        <p:txBody>
+          <a:bodyPr wrap="square" lIns="0" rIns="0" tIns="0" bIns="0" anchor="t">
+            <a:spAutoFit/>
+          </a:bodyPr>
+          <a:lstStyle/>
+          <a:p>
+            <a:pPr algn="l"/>
+            <a:r>
+              <a:rPr sz="1300" b="0" i="0">
+                <a:solidFill>
+                  <a:srgbClr val="52525B"/>
+                </a:solidFill>
+                <a:latin typeface="Segoe UI"/>
+              </a:rPr>
+              <a:t>выделили обязательные и дополнительные функции</a:t>
+            </a:r>
+          </a:p>
+        </p:txBody>
+      </p:sp>
+      <p:sp>
+        <p:nvSpPr>
+          <p:cNvPr id="13" name="Rectangle 12"/>
+          <p:cNvSpPr/>
+          <p:nvPr/>
+        </p:nvSpPr>
+        <p:spPr>
+          <a:xfrm>
+            <a:off x="822960" y="2788920"/>
+            <a:ext cx="384048" cy="384048"/>
+          </a:xfrm>
+          <a:prstGeom prst="rect">
+            <a:avLst/>
+          </a:prstGeom>
+          <a:solidFill>
+            <a:srgbClr val="0066FF"/>
+          </a:solidFill>
+          <a:ln>
+            <a:noFill/>
+          </a:ln>
+          <a:effectLst/>
+        </p:spPr>
+        <p:style>
+          <a:lnRef idx="1">
+            <a:schemeClr val="accent1"/>
+          </a:lnRef>
+          <a:fillRef idx="3">
+            <a:schemeClr val="accent1"/>
+          </a:fillRef>
+          <a:effectRef idx="2">
+            <a:schemeClr val="accent1"/>
+          </a:effectRef>
+          <a:fontRef idx="minor">
+            <a:schemeClr val="lt1"/>
+          </a:fontRef>
+        </p:style>
+        <p:txBody>
+          <a:bodyPr rtlCol="0" anchor="ctr"/>
+          <a:lstStyle/>
+          <a:p>
+            <a:pPr algn="ctr"/>
+          </a:p>
+        </p:txBody>
+      </p:sp>
+      <p:sp>
+        <p:nvSpPr>
+          <p:cNvPr id="14" name="TextBox 13"/>
+          <p:cNvSpPr txBox="1"/>
+          <p:nvPr/>
+        </p:nvSpPr>
+        <p:spPr>
+          <a:xfrm>
+            <a:off x="822960" y="2825496"/>
+            <a:ext cx="384048" cy="320040"/>
+          </a:xfrm>
+          <a:prstGeom prst="rect">
+            <a:avLst/>
+          </a:prstGeom>
+          <a:noFill/>
+        </p:spPr>
+        <p:txBody>
+          <a:bodyPr wrap="square" lIns="0" rIns="0" tIns="0" bIns="0" anchor="t">
+            <a:spAutoFit/>
+          </a:bodyPr>
+          <a:lstStyle/>
+          <a:p>
+            <a:pPr algn="ctr"/>
+            <a:r>
+              <a:rPr sz="1300" b="1" i="0">
+                <a:solidFill>
+                  <a:srgbClr val="FFFFFF"/>
+                </a:solidFill>
+                <a:latin typeface="Segoe UI"/>
+              </a:rPr>
+              <a:t>2</a:t>
+            </a:r>
+          </a:p>
+        </p:txBody>
+      </p:sp>
+      <p:sp>
+        <p:nvSpPr>
+          <p:cNvPr id="15" name="TextBox 14"/>
+          <p:cNvSpPr txBox="1"/>
+          <p:nvPr/>
+        </p:nvSpPr>
+        <p:spPr>
+          <a:xfrm>
+            <a:off x="1417320" y="2761488"/>
+            <a:ext cx="4114800" cy="411480"/>
+          </a:xfrm>
+          <a:prstGeom prst="rect">
+            <a:avLst/>
+          </a:prstGeom>
+          <a:noFill/>
+        </p:spPr>
+        <p:txBody>
+          <a:bodyPr wrap="square" lIns="0" rIns="0" tIns="0" bIns="0" anchor="t">
+            <a:spAutoFit/>
+          </a:bodyPr>
+          <a:lstStyle/>
+          <a:p>
+            <a:pPr algn="l"/>
+            <a:r>
+              <a:rPr sz="1500" b="1" i="0">
+                <a:solidFill>
+                  <a:srgbClr val="0A0A0A"/>
+                </a:solidFill>
+                <a:latin typeface="Segoe UI"/>
+              </a:rPr>
+              <a:t>Спроектировали схему БД</a:t>
+            </a:r>
+          </a:p>
+        </p:txBody>
+      </p:sp>
+      <p:sp>
+        <p:nvSpPr>
+          <p:cNvPr id="16" name="TextBox 15"/>
+          <p:cNvSpPr txBox="1"/>
+          <p:nvPr/>
+        </p:nvSpPr>
+        <p:spPr>
+          <a:xfrm>
+            <a:off x="5669280" y="2788920"/>
+            <a:ext cx="6400800" cy="411480"/>
+          </a:xfrm>
+          <a:prstGeom prst="rect">
+            <a:avLst/>
+          </a:prstGeom>
+          <a:noFill/>
+        </p:spPr>
+        <p:txBody>
+          <a:bodyPr wrap="square" lIns="0" rIns="0" tIns="0" bIns="0" anchor="t">
+            <a:spAutoFit/>
+          </a:bodyPr>
+          <a:lstStyle/>
+          <a:p>
+            <a:pPr algn="l"/>
+            <a:r>
+              <a:rPr sz="1300" b="0" i="0">
+                <a:solidFill>
+                  <a:srgbClr val="52525B"/>
+                </a:solidFill>
+                <a:latin typeface="Segoe UI"/>
+              </a:rPr>
+              <a:t>8 таблиц, связи между ними, ER-диаграмма</a:t>
+            </a:r>
+          </a:p>
+        </p:txBody>
+      </p:sp>
+      <p:sp>
+        <p:nvSpPr>
+          <p:cNvPr id="17" name="Rectangle 16"/>
+          <p:cNvSpPr/>
+          <p:nvPr/>
+        </p:nvSpPr>
+        <p:spPr>
+          <a:xfrm>
+            <a:off x="822960" y="3355848"/>
+            <a:ext cx="384048" cy="384048"/>
+          </a:xfrm>
+          <a:prstGeom prst="rect">
+            <a:avLst/>
+          </a:prstGeom>
+          <a:solidFill>
+            <a:srgbClr val="0066FF"/>
+          </a:solidFill>
+          <a:ln>
+            <a:noFill/>
+          </a:ln>
+          <a:effectLst/>
+        </p:spPr>
+        <p:style>
+          <a:lnRef idx="1">
+            <a:schemeClr val="accent1"/>
+          </a:lnRef>
+          <a:fillRef idx="3">
+            <a:schemeClr val="accent1"/>
+          </a:fillRef>
+          <a:effectRef idx="2">
+            <a:schemeClr val="accent1"/>
+          </a:effectRef>
+          <a:fontRef idx="minor">
+            <a:schemeClr val="lt1"/>
+          </a:fontRef>
+        </p:style>
+        <p:txBody>
+          <a:bodyPr rtlCol="0" anchor="ctr"/>
+          <a:lstStyle/>
+          <a:p>
+            <a:pPr algn="ctr"/>
+          </a:p>
+        </p:txBody>
+      </p:sp>
+      <p:sp>
+        <p:nvSpPr>
+          <p:cNvPr id="18" name="TextBox 17"/>
+          <p:cNvSpPr txBox="1"/>
+          <p:nvPr/>
+        </p:nvSpPr>
+        <p:spPr>
+          <a:xfrm>
+            <a:off x="822960" y="3392424"/>
+            <a:ext cx="384048" cy="320040"/>
+          </a:xfrm>
+          <a:prstGeom prst="rect">
+            <a:avLst/>
+          </a:prstGeom>
+          <a:noFill/>
+        </p:spPr>
+        <p:txBody>
+          <a:bodyPr wrap="square" lIns="0" rIns="0" tIns="0" bIns="0" anchor="t">
+            <a:spAutoFit/>
+          </a:bodyPr>
+          <a:lstStyle/>
+          <a:p>
+            <a:pPr algn="ctr"/>
+            <a:r>
+              <a:rPr sz="1300" b="1" i="0">
+                <a:solidFill>
+                  <a:srgbClr val="FFFFFF"/>
+                </a:solidFill>
+                <a:latin typeface="Segoe UI"/>
+              </a:rPr>
+              <a:t>3</a:t>
+            </a:r>
+          </a:p>
+        </p:txBody>
+      </p:sp>
+      <p:sp>
+        <p:nvSpPr>
+          <p:cNvPr id="19" name="TextBox 18"/>
+          <p:cNvSpPr txBox="1"/>
+          <p:nvPr/>
+        </p:nvSpPr>
+        <p:spPr>
+          <a:xfrm>
+            <a:off x="1417320" y="3328416"/>
+            <a:ext cx="4114800" cy="411480"/>
+          </a:xfrm>
+          <a:prstGeom prst="rect">
+            <a:avLst/>
+          </a:prstGeom>
+          <a:noFill/>
+        </p:spPr>
+        <p:txBody>
+          <a:bodyPr wrap="square" lIns="0" rIns="0" tIns="0" bIns="0" anchor="t">
+            <a:spAutoFit/>
+          </a:bodyPr>
+          <a:lstStyle/>
+          <a:p>
+            <a:pPr algn="l"/>
+            <a:r>
+              <a:rPr sz="1500" b="1" i="0">
+                <a:solidFill>
+                  <a:srgbClr val="0A0A0A"/>
+                </a:solidFill>
+                <a:latin typeface="Segoe UI"/>
+              </a:rPr>
+              <a:t>Написали сервер</a:t>
+            </a:r>
+          </a:p>
+        </p:txBody>
+      </p:sp>
+      <p:sp>
+        <p:nvSpPr>
+          <p:cNvPr id="20" name="TextBox 19"/>
+          <p:cNvSpPr txBox="1"/>
+          <p:nvPr/>
+        </p:nvSpPr>
+        <p:spPr>
+          <a:xfrm>
+            <a:off x="5669280" y="3355848"/>
+            <a:ext cx="6400800" cy="411480"/>
+          </a:xfrm>
+          <a:prstGeom prst="rect">
+            <a:avLst/>
+          </a:prstGeom>
+          <a:noFill/>
+        </p:spPr>
+        <p:txBody>
+          <a:bodyPr wrap="square" lIns="0" rIns="0" tIns="0" bIns="0" anchor="t">
+            <a:spAutoFit/>
+          </a:bodyPr>
+          <a:lstStyle/>
+          <a:p>
+            <a:pPr algn="l"/>
+            <a:r>
+              <a:rPr sz="1300" b="0" i="0">
+                <a:solidFill>
+                  <a:srgbClr val="52525B"/>
+                </a:solidFill>
+                <a:latin typeface="Segoe UI"/>
+              </a:rPr>
+              <a:t>регистрация, чаты, сообщения, WebSocket</a:t>
+            </a:r>
+          </a:p>
+        </p:txBody>
+      </p:sp>
+      <p:sp>
+        <p:nvSpPr>
+          <p:cNvPr id="21" name="Rectangle 20"/>
+          <p:cNvSpPr/>
+          <p:nvPr/>
+        </p:nvSpPr>
+        <p:spPr>
+          <a:xfrm>
+            <a:off x="822960" y="3922776"/>
+            <a:ext cx="384048" cy="384048"/>
+          </a:xfrm>
+          <a:prstGeom prst="rect">
+            <a:avLst/>
+          </a:prstGeom>
+          <a:solidFill>
+            <a:srgbClr val="0066FF"/>
+          </a:solidFill>
+          <a:ln>
+            <a:noFill/>
+          </a:ln>
+          <a:effectLst/>
+        </p:spPr>
+        <p:style>
+          <a:lnRef idx="1">
+            <a:schemeClr val="accent1"/>
+          </a:lnRef>
+          <a:fillRef idx="3">
+            <a:schemeClr val="accent1"/>
+          </a:fillRef>
+          <a:effectRef idx="2">
+            <a:schemeClr val="accent1"/>
+          </a:effectRef>
+          <a:fontRef idx="minor">
+            <a:schemeClr val="lt1"/>
+          </a:fontRef>
+        </p:style>
+        <p:txBody>
+          <a:bodyPr rtlCol="0" anchor="ctr"/>
+          <a:lstStyle/>
+          <a:p>
+            <a:pPr algn="ctr"/>
+          </a:p>
+        </p:txBody>
+      </p:sp>
+      <p:sp>
+        <p:nvSpPr>
+          <p:cNvPr id="22" name="TextBox 21"/>
+          <p:cNvSpPr txBox="1"/>
+          <p:nvPr/>
+        </p:nvSpPr>
+        <p:spPr>
+          <a:xfrm>
+            <a:off x="822960" y="3959352"/>
+            <a:ext cx="384048" cy="320040"/>
+          </a:xfrm>
+          <a:prstGeom prst="rect">
+            <a:avLst/>
+          </a:prstGeom>
+          <a:noFill/>
+        </p:spPr>
+        <p:txBody>
+          <a:bodyPr wrap="square" lIns="0" rIns="0" tIns="0" bIns="0" anchor="t">
+            <a:spAutoFit/>
+          </a:bodyPr>
+          <a:lstStyle/>
+          <a:p>
+            <a:pPr algn="ctr"/>
+            <a:r>
+              <a:rPr sz="1300" b="1" i="0">
+                <a:solidFill>
+                  <a:srgbClr val="FFFFFF"/>
+                </a:solidFill>
+                <a:latin typeface="Segoe UI"/>
+              </a:rPr>
+              <a:t>4</a:t>
+            </a:r>
+          </a:p>
+        </p:txBody>
+      </p:sp>
+      <p:sp>
+        <p:nvSpPr>
+          <p:cNvPr id="23" name="TextBox 22"/>
+          <p:cNvSpPr txBox="1"/>
+          <p:nvPr/>
+        </p:nvSpPr>
+        <p:spPr>
+          <a:xfrm>
+            <a:off x="1417320" y="3895344"/>
+            <a:ext cx="4114800" cy="411480"/>
+          </a:xfrm>
+          <a:prstGeom prst="rect">
+            <a:avLst/>
+          </a:prstGeom>
+          <a:noFill/>
+        </p:spPr>
+        <p:txBody>
+          <a:bodyPr wrap="square" lIns="0" rIns="0" tIns="0" bIns="0" anchor="t">
+            <a:spAutoFit/>
+          </a:bodyPr>
+          <a:lstStyle/>
+          <a:p>
+            <a:pPr algn="l"/>
+            <a:r>
+              <a:rPr sz="1500" b="1" i="0">
+                <a:solidFill>
+                  <a:srgbClr val="0A0A0A"/>
+                </a:solidFill>
+                <a:latin typeface="Segoe UI"/>
+              </a:rPr>
+              <a:t>Сделали клиент</a:t>
+            </a:r>
+          </a:p>
+        </p:txBody>
+      </p:sp>
+      <p:sp>
+        <p:nvSpPr>
+          <p:cNvPr id="24" name="TextBox 23"/>
+          <p:cNvSpPr txBox="1"/>
+          <p:nvPr/>
+        </p:nvSpPr>
+        <p:spPr>
+          <a:xfrm>
+            <a:off x="5669280" y="3922776"/>
+            <a:ext cx="6400800" cy="411480"/>
+          </a:xfrm>
+          <a:prstGeom prst="rect">
+            <a:avLst/>
+          </a:prstGeom>
+          <a:noFill/>
+        </p:spPr>
+        <p:txBody>
+          <a:bodyPr wrap="square" lIns="0" rIns="0" tIns="0" bIns="0" anchor="t">
+            <a:spAutoFit/>
+          </a:bodyPr>
+          <a:lstStyle/>
+          <a:p>
+            <a:pPr algn="l"/>
+            <a:r>
+              <a:rPr sz="1300" b="0" i="0">
+                <a:solidFill>
+                  <a:srgbClr val="52525B"/>
+                </a:solidFill>
+                <a:latin typeface="Segoe UI"/>
+              </a:rPr>
+              <a:t>одностраничное веб-приложение</a:t>
+            </a:r>
+          </a:p>
+        </p:txBody>
+      </p:sp>
+      <p:sp>
+        <p:nvSpPr>
+          <p:cNvPr id="25" name="Rectangle 24"/>
+          <p:cNvSpPr/>
+          <p:nvPr/>
+        </p:nvSpPr>
+        <p:spPr>
+          <a:xfrm>
+            <a:off x="822960" y="4489704"/>
+            <a:ext cx="384048" cy="384048"/>
+          </a:xfrm>
+          <a:prstGeom prst="rect">
+            <a:avLst/>
+          </a:prstGeom>
+          <a:solidFill>
+            <a:srgbClr val="0066FF"/>
+          </a:solidFill>
+          <a:ln>
+            <a:noFill/>
+          </a:ln>
+          <a:effectLst/>
+        </p:spPr>
+        <p:style>
+          <a:lnRef idx="1">
+            <a:schemeClr val="accent1"/>
+          </a:lnRef>
+          <a:fillRef idx="3">
+            <a:schemeClr val="accent1"/>
+          </a:fillRef>
+          <a:effectRef idx="2">
+            <a:schemeClr val="accent1"/>
+          </a:effectRef>
+          <a:fontRef idx="minor">
+            <a:schemeClr val="lt1"/>
+          </a:fontRef>
+        </p:style>
+        <p:txBody>
+          <a:bodyPr rtlCol="0" anchor="ctr"/>
+          <a:lstStyle/>
+          <a:p>
+            <a:pPr algn="ctr"/>
+          </a:p>
+        </p:txBody>
+      </p:sp>
+      <p:sp>
+        <p:nvSpPr>
+          <p:cNvPr id="26" name="TextBox 25"/>
+          <p:cNvSpPr txBox="1"/>
+          <p:nvPr/>
+        </p:nvSpPr>
+        <p:spPr>
+          <a:xfrm>
+            <a:off x="822960" y="4526280"/>
+            <a:ext cx="384048" cy="320040"/>
+          </a:xfrm>
+          <a:prstGeom prst="rect">
+            <a:avLst/>
+          </a:prstGeom>
+          <a:noFill/>
+        </p:spPr>
+        <p:txBody>
+          <a:bodyPr wrap="square" lIns="0" rIns="0" tIns="0" bIns="0" anchor="t">
+            <a:spAutoFit/>
+          </a:bodyPr>
+          <a:lstStyle/>
+          <a:p>
+            <a:pPr algn="ctr"/>
+            <a:r>
+              <a:rPr sz="1300" b="1" i="0">
+                <a:solidFill>
+                  <a:srgbClr val="FFFFFF"/>
+                </a:solidFill>
+                <a:latin typeface="Segoe UI"/>
+              </a:rPr>
+              <a:t>5</a:t>
+            </a:r>
+          </a:p>
+        </p:txBody>
+      </p:sp>
+      <p:sp>
+        <p:nvSpPr>
+          <p:cNvPr id="27" name="TextBox 26"/>
+          <p:cNvSpPr txBox="1"/>
+          <p:nvPr/>
+        </p:nvSpPr>
+        <p:spPr>
+          <a:xfrm>
+            <a:off x="1417320" y="4462272"/>
+            <a:ext cx="4114800" cy="411480"/>
+          </a:xfrm>
+          <a:prstGeom prst="rect">
+            <a:avLst/>
+          </a:prstGeom>
+          <a:noFill/>
+        </p:spPr>
+        <p:txBody>
+          <a:bodyPr wrap="square" lIns="0" rIns="0" tIns="0" bIns="0" anchor="t">
+            <a:spAutoFit/>
+          </a:bodyPr>
+          <a:lstStyle/>
+          <a:p>
+            <a:pPr algn="l"/>
+            <a:r>
+              <a:rPr sz="1500" b="1" i="0">
+                <a:solidFill>
+                  <a:srgbClr val="0A0A0A"/>
+                </a:solidFill>
+                <a:latin typeface="Segoe UI"/>
+              </a:rPr>
+              <a:t>Добавили доп. функции</a:t>
+            </a:r>
+          </a:p>
+        </p:txBody>
+      </p:sp>
+      <p:sp>
+        <p:nvSpPr>
+          <p:cNvPr id="28" name="TextBox 27"/>
+          <p:cNvSpPr txBox="1"/>
+          <p:nvPr/>
+        </p:nvSpPr>
+        <p:spPr>
+          <a:xfrm>
+            <a:off x="5669280" y="4489704"/>
+            <a:ext cx="6400800" cy="411480"/>
+          </a:xfrm>
+          <a:prstGeom prst="rect">
+            <a:avLst/>
+          </a:prstGeom>
+          <a:noFill/>
+        </p:spPr>
+        <p:txBody>
+          <a:bodyPr wrap="square" lIns="0" rIns="0" tIns="0" bIns="0" anchor="t">
+            <a:spAutoFit/>
+          </a:bodyPr>
+          <a:lstStyle/>
+          <a:p>
+            <a:pPr algn="l"/>
+            <a:r>
+              <a:rPr sz="1300" b="0" i="0">
+                <a:solidFill>
+                  <a:srgbClr val="52525B"/>
+                </a:solidFill>
+                <a:latin typeface="Segoe UI"/>
+              </a:rPr>
+              <a:t>статусы прочтения, вложения, поиск</a:t>
+            </a:r>
+          </a:p>
+        </p:txBody>
+      </p:sp>
+      <p:sp>
+        <p:nvSpPr>
+          <p:cNvPr id="29" name="Rectangle 28"/>
+          <p:cNvSpPr/>
+          <p:nvPr/>
+        </p:nvSpPr>
+        <p:spPr>
+          <a:xfrm>
+            <a:off x="822960" y="5056632"/>
+            <a:ext cx="384048" cy="384048"/>
+          </a:xfrm>
+          <a:prstGeom prst="rect">
+            <a:avLst/>
+          </a:prstGeom>
+          <a:solidFill>
+            <a:srgbClr val="0066FF"/>
+          </a:solidFill>
+          <a:ln>
+            <a:noFill/>
+          </a:ln>
+          <a:effectLst/>
+        </p:spPr>
+        <p:style>
+          <a:lnRef idx="1">
+            <a:schemeClr val="accent1"/>
+          </a:lnRef>
+          <a:fillRef idx="3">
+            <a:schemeClr val="accent1"/>
+          </a:fillRef>
+          <a:effectRef idx="2">
+            <a:schemeClr val="accent1"/>
+          </a:effectRef>
+          <a:fontRef idx="minor">
+            <a:schemeClr val="lt1"/>
+          </a:fontRef>
+        </p:style>
+        <p:txBody>
+          <a:bodyPr rtlCol="0" anchor="ctr"/>
+          <a:lstStyle/>
+          <a:p>
+            <a:pPr algn="ctr"/>
+          </a:p>
+        </p:txBody>
+      </p:sp>
+      <p:sp>
+        <p:nvSpPr>
+          <p:cNvPr id="30" name="TextBox 29"/>
+          <p:cNvSpPr txBox="1"/>
+          <p:nvPr/>
+        </p:nvSpPr>
+        <p:spPr>
+          <a:xfrm>
+            <a:off x="822960" y="5093208"/>
+            <a:ext cx="384048" cy="320040"/>
+          </a:xfrm>
+          <a:prstGeom prst="rect">
+            <a:avLst/>
+          </a:prstGeom>
+          <a:noFill/>
+        </p:spPr>
+        <p:txBody>
+          <a:bodyPr wrap="square" lIns="0" rIns="0" tIns="0" bIns="0" anchor="t">
+            <a:spAutoFit/>
+          </a:bodyPr>
+          <a:lstStyle/>
+          <a:p>
+            <a:pPr algn="ctr"/>
+            <a:r>
+              <a:rPr sz="1300" b="1" i="0">
+                <a:solidFill>
+                  <a:srgbClr val="FFFFFF"/>
+                </a:solidFill>
+                <a:latin typeface="Segoe UI"/>
+              </a:rPr>
+              <a:t>6</a:t>
+            </a:r>
+          </a:p>
+        </p:txBody>
+      </p:sp>
+      <p:sp>
+        <p:nvSpPr>
+          <p:cNvPr id="31" name="TextBox 30"/>
+          <p:cNvSpPr txBox="1"/>
+          <p:nvPr/>
+        </p:nvSpPr>
+        <p:spPr>
+          <a:xfrm>
+            <a:off x="1417320" y="5029200"/>
+            <a:ext cx="4114800" cy="411480"/>
+          </a:xfrm>
+          <a:prstGeom prst="rect">
+            <a:avLst/>
+          </a:prstGeom>
+          <a:noFill/>
+        </p:spPr>
+        <p:txBody>
+          <a:bodyPr wrap="square" lIns="0" rIns="0" tIns="0" bIns="0" anchor="t">
+            <a:spAutoFit/>
+          </a:bodyPr>
+          <a:lstStyle/>
+          <a:p>
+            <a:pPr algn="l"/>
+            <a:r>
+              <a:rPr sz="1500" b="1" i="0">
+                <a:solidFill>
+                  <a:srgbClr val="0A0A0A"/>
+                </a:solidFill>
+                <a:latin typeface="Segoe UI"/>
+              </a:rPr>
+              <a:t>Покрыли тестами</a:t>
+            </a:r>
+          </a:p>
+        </p:txBody>
+      </p:sp>
+      <p:sp>
+        <p:nvSpPr>
+          <p:cNvPr id="32" name="TextBox 31"/>
+          <p:cNvSpPr txBox="1"/>
+          <p:nvPr/>
+        </p:nvSpPr>
+        <p:spPr>
+          <a:xfrm>
+            <a:off x="5669280" y="5056632"/>
+            <a:ext cx="6400800" cy="411480"/>
+          </a:xfrm>
+          <a:prstGeom prst="rect">
+            <a:avLst/>
+          </a:prstGeom>
+          <a:noFill/>
+        </p:spPr>
+        <p:txBody>
+          <a:bodyPr wrap="square" lIns="0" rIns="0" tIns="0" bIns="0" anchor="t">
+            <a:spAutoFit/>
+          </a:bodyPr>
+          <a:lstStyle/>
+          <a:p>
+            <a:pPr algn="l"/>
+            <a:r>
+              <a:rPr sz="1300" b="0" i="0">
+                <a:solidFill>
+                  <a:srgbClr val="52525B"/>
+                </a:solidFill>
+                <a:latin typeface="Segoe UI"/>
+              </a:rPr>
+              <a:t>автоматические и ручные проверки</a:t>
+            </a:r>
+          </a:p>
+        </p:txBody>
+      </p:sp>
+      <p:sp>
+        <p:nvSpPr>
+          <p:cNvPr id="33" name="Rectangle 32"/>
+          <p:cNvSpPr/>
+          <p:nvPr/>
+        </p:nvSpPr>
+        <p:spPr>
+          <a:xfrm>
+            <a:off x="822960" y="5623560"/>
+            <a:ext cx="384048" cy="384048"/>
+          </a:xfrm>
+          <a:prstGeom prst="rect">
+            <a:avLst/>
+          </a:prstGeom>
+          <a:solidFill>
+            <a:srgbClr val="0066FF"/>
+          </a:solidFill>
+          <a:ln>
+            <a:noFill/>
+          </a:ln>
+          <a:effectLst/>
+        </p:spPr>
+        <p:style>
+          <a:lnRef idx="1">
+            <a:schemeClr val="accent1"/>
+          </a:lnRef>
+          <a:fillRef idx="3">
+            <a:schemeClr val="accent1"/>
+          </a:fillRef>
+          <a:effectRef idx="2">
+            <a:schemeClr val="accent1"/>
+          </a:effectRef>
+          <a:fontRef idx="minor">
+            <a:schemeClr val="lt1"/>
+          </a:fontRef>
+        </p:style>
+        <p:txBody>
+          <a:bodyPr rtlCol="0" anchor="ctr"/>
+          <a:lstStyle/>
+          <a:p>
+            <a:pPr algn="ctr"/>
+          </a:p>
+        </p:txBody>
+      </p:sp>
+      <p:sp>
+        <p:nvSpPr>
+          <p:cNvPr id="34" name="TextBox 33"/>
+          <p:cNvSpPr txBox="1"/>
+          <p:nvPr/>
+        </p:nvSpPr>
+        <p:spPr>
+          <a:xfrm>
+            <a:off x="822960" y="5660136"/>
+            <a:ext cx="384048" cy="320040"/>
+          </a:xfrm>
+          <a:prstGeom prst="rect">
+            <a:avLst/>
+          </a:prstGeom>
+          <a:noFill/>
+        </p:spPr>
+        <p:txBody>
+          <a:bodyPr wrap="square" lIns="0" rIns="0" tIns="0" bIns="0" anchor="t">
+            <a:spAutoFit/>
+          </a:bodyPr>
+          <a:lstStyle/>
+          <a:p>
+            <a:pPr algn="ctr"/>
+            <a:r>
+              <a:rPr sz="1300" b="1" i="0">
+                <a:solidFill>
+                  <a:srgbClr val="FFFFFF"/>
+                </a:solidFill>
+                <a:latin typeface="Segoe UI"/>
+              </a:rPr>
+              <a:t>7</a:t>
+            </a:r>
+          </a:p>
+        </p:txBody>
+      </p:sp>
+      <p:sp>
+        <p:nvSpPr>
+          <p:cNvPr id="35" name="TextBox 34"/>
+          <p:cNvSpPr txBox="1"/>
+          <p:nvPr/>
+        </p:nvSpPr>
+        <p:spPr>
+          <a:xfrm>
+            <a:off x="1417320" y="5596128"/>
+            <a:ext cx="4114800" cy="411480"/>
+          </a:xfrm>
+          <a:prstGeom prst="rect">
+            <a:avLst/>
+          </a:prstGeom>
+          <a:noFill/>
+        </p:spPr>
+        <p:txBody>
+          <a:bodyPr wrap="square" lIns="0" rIns="0" tIns="0" bIns="0" anchor="t">
+            <a:spAutoFit/>
+          </a:bodyPr>
+          <a:lstStyle/>
+          <a:p>
+            <a:pPr algn="l"/>
+            <a:r>
+              <a:rPr sz="1500" b="1" i="0">
+                <a:solidFill>
+                  <a:srgbClr val="0A0A0A"/>
+                </a:solidFill>
+                <a:latin typeface="Segoe UI"/>
+              </a:rPr>
+              <a:t>Оформили документацию</a:t>
+            </a:r>
+          </a:p>
+        </p:txBody>
+      </p:sp>
+      <p:sp>
+        <p:nvSpPr>
+          <p:cNvPr id="36" name="TextBox 35"/>
+          <p:cNvSpPr txBox="1"/>
+          <p:nvPr/>
+        </p:nvSpPr>
+        <p:spPr>
+          <a:xfrm>
+            <a:off x="5669280" y="5623560"/>
+            <a:ext cx="6400800" cy="411480"/>
+          </a:xfrm>
+          <a:prstGeom prst="rect">
+            <a:avLst/>
+          </a:prstGeom>
+          <a:noFill/>
+        </p:spPr>
+        <p:txBody>
+          <a:bodyPr wrap="square" lIns="0" rIns="0" tIns="0" bIns="0" anchor="t">
+            <a:spAutoFit/>
+          </a:bodyPr>
+          <a:lstStyle/>
+          <a:p>
+            <a:pPr algn="l"/>
+            <a:r>
+              <a:rPr sz="1300" b="0" i="0">
+                <a:solidFill>
+                  <a:srgbClr val="52525B"/>
+                </a:solidFill>
+                <a:latin typeface="Segoe UI"/>
+              </a:rPr>
+              <a:t>отчёт по ГОСТ, скриншоты, видеодемо</a:t>
+            </a:r>
+          </a:p>
+        </p:txBody>
+      </p:sp>
+      <p:sp>
+        <p:nvSpPr>
+          <p:cNvPr id="37" name="TextBox 36"/>
+          <p:cNvSpPr txBox="1"/>
+          <p:nvPr/>
+        </p:nvSpPr>
+        <p:spPr>
+          <a:xfrm>
+            <a:off x="502920" y="6446520"/>
+            <a:ext cx="5486400" cy="274320"/>
+          </a:xfrm>
+          <a:prstGeom prst="rect">
+            <a:avLst/>
+          </a:prstGeom>
+          <a:noFill/>
+        </p:spPr>
+        <p:txBody>
+          <a:bodyPr wrap="square" lIns="0" rIns="0" tIns="0" bIns="0" anchor="t">
+            <a:spAutoFit/>
+          </a:bodyPr>
+          <a:lstStyle/>
+          <a:p>
+            <a:pPr algn="l"/>
+            <a:r>
+              <a:rPr sz="900" b="0" i="0">
+                <a:solidFill>
+                  <a:srgbClr val="52525B"/>
+                </a:solidFill>
+                <a:latin typeface="Consolas"/>
+              </a:rPr>
+              <a:t>MESSENGER  ·  VK Education / Case #1</a:t>
+            </a:r>
+          </a:p>
+        </p:txBody>
+      </p:sp>
+      <p:sp>
+        <p:nvSpPr>
+          <p:cNvPr id="38" name="TextBox 37"/>
+          <p:cNvSpPr txBox="1"/>
+          <p:nvPr/>
+        </p:nvSpPr>
+        <p:spPr>
+          <a:xfrm>
+            <a:off x="10561320" y="6446520"/>
+            <a:ext cx="1554480" cy="274320"/>
+          </a:xfrm>
+          <a:prstGeom prst="rect">
+            <a:avLst/>
+          </a:prstGeom>
+          <a:noFill/>
+        </p:spPr>
+        <p:txBody>
+          <a:bodyPr wrap="square" lIns="0" rIns="0" tIns="0" bIns="0" anchor="t">
+            <a:spAutoFit/>
+          </a:bodyPr>
+          <a:lstStyle/>
+          <a:p>
+            <a:pPr algn="r"/>
+            <a:r>
+              <a:rPr sz="900" b="0" i="0">
+                <a:solidFill>
+                  <a:srgbClr val="52525B"/>
+                </a:solidFill>
+                <a:latin typeface="Consolas"/>
+              </a:rPr>
+              <a:t>16 / 18</a:t>
+            </a:r>
+          </a:p>
+        </p:txBody>
+      </p:sp>
+    </p:spTree>
+  </p:cSld>
+  <p:clrMapOvr>
+    <a:masterClrMapping/>
+  </p:clrMapOvr>
+</p:sld>
+</file>
+
+<file path=ppt/slides/slide17.xml><?xml version="1.0" encoding="utf-8"?>
+<p:sld xmlns:a="http://schemas.openxmlformats.org/drawingml/2006/main" xmlns:p="http://schemas.openxmlformats.org/presentationml/2006/main" xmlns:r="http://schemas.openxmlformats.org/officeDocument/2006/relationships">
+  <p:cSld>
+    <p:bg>
+      <p:bgPr>
+        <a:solidFill>
+          <a:srgbClr val="FFFFFF"/>
+        </a:solidFill>
+        <a:effectLst/>
+      </p:bgPr>
+    </p:bg>
+    <p:spTree>
+      <p:nvGrpSpPr>
+        <p:cNvPr id="1" name=""/>
+        <p:cNvGrpSpPr/>
+        <p:nvPr/>
+      </p:nvGrpSpPr>
+      <p:grpSpPr/>
+      <p:sp>
+        <p:nvSpPr>
+          <p:cNvPr id="2" name="Rectangle 1"/>
+          <p:cNvSpPr/>
+          <p:nvPr/>
+        </p:nvSpPr>
+        <p:spPr>
+          <a:xfrm>
+            <a:off x="502920" y="457200"/>
+            <a:ext cx="160000" cy="160000"/>
+          </a:xfrm>
+          <a:prstGeom prst="rect">
+            <a:avLst/>
+          </a:prstGeom>
+          <a:solidFill>
+            <a:srgbClr val="0066FF"/>
+          </a:solidFill>
+          <a:ln>
+            <a:noFill/>
+          </a:ln>
+          <a:effectLst/>
+        </p:spPr>
+        <p:style>
+          <a:lnRef idx="1">
+            <a:schemeClr val="accent1"/>
+          </a:lnRef>
+          <a:fillRef idx="3">
+            <a:schemeClr val="accent1"/>
+          </a:fillRef>
+          <a:effectRef idx="2">
+            <a:schemeClr val="accent1"/>
+          </a:effectRef>
+          <a:fontRef idx="minor">
+            <a:schemeClr val="lt1"/>
+          </a:fontRef>
+        </p:style>
+        <p:txBody>
+          <a:bodyPr rtlCol="0" anchor="ctr"/>
+          <a:lstStyle/>
+          <a:p>
+            <a:pPr algn="ctr"/>
+          </a:p>
+        </p:txBody>
+      </p:sp>
+      <p:sp>
+        <p:nvSpPr>
+          <p:cNvPr id="3" name="Rectangle 2"/>
+          <p:cNvSpPr/>
+          <p:nvPr/>
+        </p:nvSpPr>
+        <p:spPr>
+          <a:xfrm>
+            <a:off x="732920" y="457200"/>
+            <a:ext cx="160000" cy="160000"/>
+          </a:xfrm>
+          <a:prstGeom prst="rect">
+            <a:avLst/>
+          </a:prstGeom>
+          <a:solidFill>
+            <a:srgbClr val="0066FF"/>
+          </a:solidFill>
+          <a:ln>
+            <a:noFill/>
+          </a:ln>
+          <a:effectLst/>
+        </p:spPr>
+        <p:style>
+          <a:lnRef idx="1">
+            <a:schemeClr val="accent1"/>
+          </a:lnRef>
+          <a:fillRef idx="3">
+            <a:schemeClr val="accent1"/>
+          </a:fillRef>
+          <a:effectRef idx="2">
+            <a:schemeClr val="accent1"/>
+          </a:effectRef>
+          <a:fontRef idx="minor">
+            <a:schemeClr val="lt1"/>
+          </a:fontRef>
+        </p:style>
+        <p:txBody>
+          <a:bodyPr rtlCol="0" anchor="ctr"/>
+          <a:lstStyle/>
+          <a:p>
+            <a:pPr algn="ctr"/>
+          </a:p>
+        </p:txBody>
+      </p:sp>
+      <p:sp>
+        <p:nvSpPr>
+          <p:cNvPr id="4" name="Rectangle 3"/>
+          <p:cNvSpPr/>
+          <p:nvPr/>
+        </p:nvSpPr>
+        <p:spPr>
+          <a:xfrm>
+            <a:off x="502920" y="687200"/>
+            <a:ext cx="160000" cy="160000"/>
+          </a:xfrm>
+          <a:prstGeom prst="rect">
+            <a:avLst/>
+          </a:prstGeom>
+          <a:solidFill>
+            <a:srgbClr val="0066FF"/>
+          </a:solidFill>
+          <a:ln>
+            <a:noFill/>
+          </a:ln>
+          <a:effectLst/>
+        </p:spPr>
+        <p:style>
+          <a:lnRef idx="1">
+            <a:schemeClr val="accent1"/>
+          </a:lnRef>
+          <a:fillRef idx="3">
+            <a:schemeClr val="accent1"/>
+          </a:fillRef>
+          <a:effectRef idx="2">
+            <a:schemeClr val="accent1"/>
+          </a:effectRef>
+          <a:fontRef idx="minor">
+            <a:schemeClr val="lt1"/>
+          </a:fontRef>
+        </p:style>
+        <p:txBody>
+          <a:bodyPr rtlCol="0" anchor="ctr"/>
+          <a:lstStyle/>
+          <a:p>
+            <a:pPr algn="ctr"/>
+          </a:p>
+        </p:txBody>
+      </p:sp>
+      <p:sp>
+        <p:nvSpPr>
+          <p:cNvPr id="5" name="Rectangle 4"/>
+          <p:cNvSpPr/>
+          <p:nvPr/>
+        </p:nvSpPr>
+        <p:spPr>
+          <a:xfrm>
+            <a:off x="732920" y="687200"/>
+            <a:ext cx="160000" cy="160000"/>
+          </a:xfrm>
+          <a:prstGeom prst="rect">
+            <a:avLst/>
+          </a:prstGeom>
+          <a:solidFill>
+            <a:srgbClr val="0066FF"/>
+          </a:solidFill>
+          <a:ln>
+            <a:noFill/>
+          </a:ln>
+          <a:effectLst/>
+        </p:spPr>
+        <p:style>
+          <a:lnRef idx="1">
+            <a:schemeClr val="accent1"/>
+          </a:lnRef>
+          <a:fillRef idx="3">
+            <a:schemeClr val="accent1"/>
+          </a:fillRef>
+          <a:effectRef idx="2">
+            <a:schemeClr val="accent1"/>
+          </a:effectRef>
+          <a:fontRef idx="minor">
+            <a:schemeClr val="lt1"/>
+          </a:fontRef>
+        </p:style>
+        <p:txBody>
+          <a:bodyPr rtlCol="0" anchor="ctr"/>
+          <a:lstStyle/>
+          <a:p>
+            <a:pPr algn="ctr"/>
+          </a:p>
+        </p:txBody>
+      </p:sp>
+      <p:sp>
+        <p:nvSpPr>
+          <p:cNvPr id="6" name="TextBox 5"/>
+          <p:cNvSpPr txBox="1"/>
+          <p:nvPr/>
+        </p:nvSpPr>
+        <p:spPr>
+          <a:xfrm>
+            <a:off x="1005840" y="384048"/>
+            <a:ext cx="5486400" cy="320040"/>
+          </a:xfrm>
+          <a:prstGeom prst="rect">
+            <a:avLst/>
+          </a:prstGeom>
+          <a:noFill/>
+        </p:spPr>
+        <p:txBody>
+          <a:bodyPr wrap="square" lIns="0" rIns="0" tIns="0" bIns="0" anchor="t">
+            <a:spAutoFit/>
+          </a:bodyPr>
+          <a:lstStyle/>
+          <a:p>
+            <a:pPr algn="l"/>
+            <a:r>
+              <a:rPr sz="1100" b="0" i="0">
+                <a:solidFill>
+                  <a:srgbClr val="52525B"/>
+                </a:solidFill>
+                <a:latin typeface="Consolas"/>
+              </a:rPr>
+              <a:t>17  ·  ТЕСТИРОВАНИЕ</a:t>
+            </a:r>
+          </a:p>
+        </p:txBody>
+      </p:sp>
+      <p:sp>
+        <p:nvSpPr>
+          <p:cNvPr id="7" name="TextBox 6"/>
+          <p:cNvSpPr txBox="1"/>
+          <p:nvPr/>
+        </p:nvSpPr>
+        <p:spPr>
+          <a:xfrm>
+            <a:off x="502920" y="868680"/>
+            <a:ext cx="10972800" cy="777240"/>
+          </a:xfrm>
+          <a:prstGeom prst="rect">
+            <a:avLst/>
+          </a:prstGeom>
+          <a:noFill/>
+        </p:spPr>
+        <p:txBody>
+          <a:bodyPr wrap="square" lIns="0" rIns="0" tIns="0" bIns="0" anchor="t">
+            <a:spAutoFit/>
+          </a:bodyPr>
+          <a:lstStyle/>
+          <a:p>
+            <a:pPr algn="l"/>
+            <a:r>
+              <a:rPr sz="3200" b="1" i="0">
+                <a:solidFill>
+                  <a:srgbClr val="0A0A0A"/>
+                </a:solidFill>
+                <a:latin typeface="Segoe UI"/>
+              </a:rPr>
+              <a:t>Автотесты + ручные сценарии</a:t>
+            </a:r>
+          </a:p>
+        </p:txBody>
+      </p:sp>
+      <p:sp>
+        <p:nvSpPr>
+          <p:cNvPr id="8" name="Rectangle 7"/>
+          <p:cNvSpPr/>
+          <p:nvPr/>
+        </p:nvSpPr>
+        <p:spPr>
+          <a:xfrm>
+            <a:off x="502920" y="1691640"/>
+            <a:ext cx="11155680" cy="9525"/>
+          </a:xfrm>
+          <a:prstGeom prst="rect">
+            <a:avLst/>
+          </a:prstGeom>
+          <a:solidFill>
+            <a:srgbClr val="E5E5E5"/>
+          </a:solidFill>
+          <a:ln>
+            <a:noFill/>
+          </a:ln>
+          <a:effectLst/>
+        </p:spPr>
+        <p:style>
+          <a:lnRef idx="1">
+            <a:schemeClr val="accent1"/>
+          </a:lnRef>
+          <a:fillRef idx="3">
+            <a:schemeClr val="accent1"/>
+          </a:fillRef>
+          <a:effectRef idx="2">
+            <a:schemeClr val="accent1"/>
+          </a:effectRef>
+          <a:fontRef idx="minor">
+            <a:schemeClr val="lt1"/>
+          </a:fontRef>
+        </p:style>
+        <p:txBody>
+          <a:bodyPr rtlCol="0" anchor="ctr"/>
+          <a:lstStyle/>
+          <a:p>
+            <a:pPr algn="ctr"/>
+          </a:p>
+        </p:txBody>
+      </p:sp>
+      <p:sp>
+        <p:nvSpPr>
+          <p:cNvPr id="9" name="Rectangle 8"/>
+          <p:cNvSpPr/>
+          <p:nvPr/>
+        </p:nvSpPr>
+        <p:spPr>
+          <a:xfrm>
+            <a:off x="822960" y="2148840"/>
+            <a:ext cx="3566160" cy="1554480"/>
+          </a:xfrm>
+          <a:prstGeom prst="rect">
+            <a:avLst/>
+          </a:prstGeom>
+          <a:solidFill>
+            <a:srgbClr val="F5F8FF"/>
+          </a:solidFill>
+          <a:ln>
+            <a:noFill/>
+          </a:ln>
+          <a:effectLst/>
+        </p:spPr>
+        <p:style>
+          <a:lnRef idx="1">
+            <a:schemeClr val="accent1"/>
+          </a:lnRef>
+          <a:fillRef idx="3">
+            <a:schemeClr val="accent1"/>
+          </a:fillRef>
+          <a:effectRef idx="2">
+            <a:schemeClr val="accent1"/>
+          </a:effectRef>
+          <a:fontRef idx="minor">
+            <a:schemeClr val="lt1"/>
+          </a:fontRef>
+        </p:style>
+        <p:txBody>
+          <a:bodyPr rtlCol="0" anchor="ctr"/>
+          <a:lstStyle/>
+          <a:p>
+            <a:pPr algn="ctr"/>
+          </a:p>
+        </p:txBody>
+      </p:sp>
+      <p:sp>
+        <p:nvSpPr>
+          <p:cNvPr id="10" name="Rectangle 9"/>
+          <p:cNvSpPr/>
+          <p:nvPr/>
+        </p:nvSpPr>
+        <p:spPr>
+          <a:xfrm>
+            <a:off x="822960" y="2148840"/>
+            <a:ext cx="35000" cy="1554480"/>
+          </a:xfrm>
+          <a:prstGeom prst="rect">
+            <a:avLst/>
+          </a:prstGeom>
+          <a:solidFill>
+            <a:srgbClr val="0066FF"/>
+          </a:solidFill>
+          <a:ln>
+            <a:noFill/>
+          </a:ln>
+          <a:effectLst/>
+        </p:spPr>
+        <p:style>
+          <a:lnRef idx="1">
+            <a:schemeClr val="accent1"/>
+          </a:lnRef>
+          <a:fillRef idx="3">
+            <a:schemeClr val="accent1"/>
+          </a:fillRef>
+          <a:effectRef idx="2">
+            <a:schemeClr val="accent1"/>
+          </a:effectRef>
+          <a:fontRef idx="minor">
+            <a:schemeClr val="lt1"/>
+          </a:fontRef>
+        </p:style>
+        <p:txBody>
+          <a:bodyPr rtlCol="0" anchor="ctr"/>
+          <a:lstStyle/>
+          <a:p>
+            <a:pPr algn="ctr"/>
+          </a:p>
+        </p:txBody>
+      </p:sp>
+      <p:sp>
+        <p:nvSpPr>
+          <p:cNvPr id="11" name="TextBox 10"/>
+          <p:cNvSpPr txBox="1"/>
+          <p:nvPr/>
+        </p:nvSpPr>
+        <p:spPr>
+          <a:xfrm>
+            <a:off x="1143000" y="2377440"/>
+            <a:ext cx="3200400" cy="548640"/>
+          </a:xfrm>
+          <a:prstGeom prst="rect">
+            <a:avLst/>
+          </a:prstGeom>
+          <a:noFill/>
+        </p:spPr>
+        <p:txBody>
+          <a:bodyPr wrap="square" lIns="0" rIns="0" tIns="0" bIns="0" anchor="t">
+            <a:spAutoFit/>
+          </a:bodyPr>
+          <a:lstStyle/>
+          <a:p>
+            <a:pPr algn="l"/>
+            <a:r>
+              <a:rPr sz="2600" b="1" i="0">
+                <a:solidFill>
+                  <a:srgbClr val="0A0A0A"/>
+                </a:solidFill>
+                <a:latin typeface="Segoe UI"/>
+              </a:rPr>
+              <a:t>7 / 7</a:t>
+            </a:r>
+          </a:p>
+        </p:txBody>
+      </p:sp>
+      <p:sp>
+        <p:nvSpPr>
+          <p:cNvPr id="12" name="TextBox 11"/>
+          <p:cNvSpPr txBox="1"/>
+          <p:nvPr/>
+        </p:nvSpPr>
+        <p:spPr>
+          <a:xfrm>
+            <a:off x="1143000" y="2971800"/>
+            <a:ext cx="3200400" cy="640080"/>
+          </a:xfrm>
+          <a:prstGeom prst="rect">
+            <a:avLst/>
+          </a:prstGeom>
+          <a:noFill/>
+        </p:spPr>
+        <p:txBody>
+          <a:bodyPr wrap="square" lIns="0" rIns="0" tIns="0" bIns="0" anchor="t">
+            <a:spAutoFit/>
+          </a:bodyPr>
+          <a:lstStyle/>
+          <a:p>
+            <a:pPr algn="l"/>
+            <a:r>
+              <a:rPr sz="1300" b="0" i="0">
+                <a:solidFill>
+                  <a:srgbClr val="52525B"/>
+                </a:solidFill>
+                <a:latin typeface="Segoe UI"/>
+              </a:rPr>
+              <a:t>pytest-тестов проходят</a:t>
+            </a:r>
+          </a:p>
+        </p:txBody>
+      </p:sp>
+      <p:sp>
+        <p:nvSpPr>
+          <p:cNvPr id="13" name="Rectangle 12"/>
+          <p:cNvSpPr/>
+          <p:nvPr/>
+        </p:nvSpPr>
+        <p:spPr>
+          <a:xfrm>
+            <a:off x="4617720" y="2148840"/>
+            <a:ext cx="3566160" cy="1554480"/>
+          </a:xfrm>
+          <a:prstGeom prst="rect">
+            <a:avLst/>
+          </a:prstGeom>
+          <a:solidFill>
+            <a:srgbClr val="F5F8FF"/>
+          </a:solidFill>
+          <a:ln>
+            <a:noFill/>
+          </a:ln>
+          <a:effectLst/>
+        </p:spPr>
+        <p:style>
+          <a:lnRef idx="1">
+            <a:schemeClr val="accent1"/>
+          </a:lnRef>
+          <a:fillRef idx="3">
+            <a:schemeClr val="accent1"/>
+          </a:fillRef>
+          <a:effectRef idx="2">
+            <a:schemeClr val="accent1"/>
+          </a:effectRef>
+          <a:fontRef idx="minor">
+            <a:schemeClr val="lt1"/>
+          </a:fontRef>
+        </p:style>
+        <p:txBody>
+          <a:bodyPr rtlCol="0" anchor="ctr"/>
+          <a:lstStyle/>
+          <a:p>
+            <a:pPr algn="ctr"/>
+          </a:p>
+        </p:txBody>
+      </p:sp>
+      <p:sp>
+        <p:nvSpPr>
+          <p:cNvPr id="14" name="Rectangle 13"/>
+          <p:cNvSpPr/>
+          <p:nvPr/>
+        </p:nvSpPr>
+        <p:spPr>
+          <a:xfrm>
+            <a:off x="4617720" y="2148840"/>
+            <a:ext cx="35000" cy="1554480"/>
+          </a:xfrm>
+          <a:prstGeom prst="rect">
+            <a:avLst/>
+          </a:prstGeom>
+          <a:solidFill>
+            <a:srgbClr val="0066FF"/>
+          </a:solidFill>
+          <a:ln>
+            <a:noFill/>
+          </a:ln>
+          <a:effectLst/>
+        </p:spPr>
+        <p:style>
+          <a:lnRef idx="1">
+            <a:schemeClr val="accent1"/>
+          </a:lnRef>
+          <a:fillRef idx="3">
+            <a:schemeClr val="accent1"/>
+          </a:fillRef>
+          <a:effectRef idx="2">
+            <a:schemeClr val="accent1"/>
+          </a:effectRef>
+          <a:fontRef idx="minor">
+            <a:schemeClr val="lt1"/>
+          </a:fontRef>
+        </p:style>
+        <p:txBody>
+          <a:bodyPr rtlCol="0" anchor="ctr"/>
+          <a:lstStyle/>
+          <a:p>
+            <a:pPr algn="ctr"/>
+          </a:p>
+        </p:txBody>
+      </p:sp>
+      <p:sp>
+        <p:nvSpPr>
+          <p:cNvPr id="15" name="TextBox 14"/>
+          <p:cNvSpPr txBox="1"/>
+          <p:nvPr/>
+        </p:nvSpPr>
+        <p:spPr>
+          <a:xfrm>
+            <a:off x="4937760" y="2377440"/>
+            <a:ext cx="3200400" cy="548640"/>
+          </a:xfrm>
+          <a:prstGeom prst="rect">
+            <a:avLst/>
+          </a:prstGeom>
+          <a:noFill/>
+        </p:spPr>
+        <p:txBody>
+          <a:bodyPr wrap="square" lIns="0" rIns="0" tIns="0" bIns="0" anchor="t">
+            <a:spAutoFit/>
+          </a:bodyPr>
+          <a:lstStyle/>
+          <a:p>
+            <a:pPr algn="l"/>
+            <a:r>
+              <a:rPr sz="2600" b="1" i="0">
+                <a:solidFill>
+                  <a:srgbClr val="0A0A0A"/>
+                </a:solidFill>
+                <a:latin typeface="Segoe UI"/>
+              </a:rPr>
+              <a:t>4.5 сек</a:t>
+            </a:r>
+          </a:p>
+        </p:txBody>
+      </p:sp>
+      <p:sp>
+        <p:nvSpPr>
+          <p:cNvPr id="16" name="TextBox 15"/>
+          <p:cNvSpPr txBox="1"/>
+          <p:nvPr/>
+        </p:nvSpPr>
+        <p:spPr>
+          <a:xfrm>
+            <a:off x="4937760" y="2971800"/>
+            <a:ext cx="3200400" cy="640080"/>
+          </a:xfrm>
+          <a:prstGeom prst="rect">
+            <a:avLst/>
+          </a:prstGeom>
+          <a:noFill/>
+        </p:spPr>
+        <p:txBody>
+          <a:bodyPr wrap="square" lIns="0" rIns="0" tIns="0" bIns="0" anchor="t">
+            <a:spAutoFit/>
+          </a:bodyPr>
+          <a:lstStyle/>
+          <a:p>
+            <a:pPr algn="l"/>
+            <a:r>
+              <a:rPr sz="1300" b="0" i="0">
+                <a:solidFill>
+                  <a:srgbClr val="52525B"/>
+                </a:solidFill>
+                <a:latin typeface="Segoe UI"/>
+              </a:rPr>
+              <a:t>полный прогон suite</a:t>
+            </a:r>
+          </a:p>
+        </p:txBody>
+      </p:sp>
+      <p:sp>
+        <p:nvSpPr>
+          <p:cNvPr id="17" name="Rectangle 16"/>
+          <p:cNvSpPr/>
+          <p:nvPr/>
+        </p:nvSpPr>
+        <p:spPr>
+          <a:xfrm>
+            <a:off x="8412480" y="2148840"/>
+            <a:ext cx="3566160" cy="1554480"/>
+          </a:xfrm>
+          <a:prstGeom prst="rect">
+            <a:avLst/>
+          </a:prstGeom>
+          <a:solidFill>
+            <a:srgbClr val="F5F8FF"/>
+          </a:solidFill>
+          <a:ln>
+            <a:noFill/>
+          </a:ln>
+          <a:effectLst/>
+        </p:spPr>
+        <p:style>
+          <a:lnRef idx="1">
+            <a:schemeClr val="accent1"/>
+          </a:lnRef>
+          <a:fillRef idx="3">
+            <a:schemeClr val="accent1"/>
+          </a:fillRef>
+          <a:effectRef idx="2">
+            <a:schemeClr val="accent1"/>
+          </a:effectRef>
+          <a:fontRef idx="minor">
+            <a:schemeClr val="lt1"/>
+          </a:fontRef>
+        </p:style>
+        <p:txBody>
+          <a:bodyPr rtlCol="0" anchor="ctr"/>
+          <a:lstStyle/>
+          <a:p>
+            <a:pPr algn="ctr"/>
+          </a:p>
+        </p:txBody>
+      </p:sp>
+      <p:sp>
+        <p:nvSpPr>
+          <p:cNvPr id="18" name="Rectangle 17"/>
+          <p:cNvSpPr/>
+          <p:nvPr/>
+        </p:nvSpPr>
+        <p:spPr>
+          <a:xfrm>
+            <a:off x="8412480" y="2148840"/>
+            <a:ext cx="35000" cy="1554480"/>
+          </a:xfrm>
+          <a:prstGeom prst="rect">
+            <a:avLst/>
+          </a:prstGeom>
+          <a:solidFill>
+            <a:srgbClr val="0066FF"/>
+          </a:solidFill>
+          <a:ln>
+            <a:noFill/>
+          </a:ln>
+          <a:effectLst/>
+        </p:spPr>
+        <p:style>
+          <a:lnRef idx="1">
+            <a:schemeClr val="accent1"/>
+          </a:lnRef>
+          <a:fillRef idx="3">
+            <a:schemeClr val="accent1"/>
+          </a:fillRef>
+          <a:effectRef idx="2">
+            <a:schemeClr val="accent1"/>
+          </a:effectRef>
+          <a:fontRef idx="minor">
+            <a:schemeClr val="lt1"/>
+          </a:fontRef>
+        </p:style>
+        <p:txBody>
+          <a:bodyPr rtlCol="0" anchor="ctr"/>
+          <a:lstStyle/>
+          <a:p>
+            <a:pPr algn="ctr"/>
+          </a:p>
+        </p:txBody>
+      </p:sp>
+      <p:sp>
+        <p:nvSpPr>
+          <p:cNvPr id="19" name="TextBox 18"/>
+          <p:cNvSpPr txBox="1"/>
+          <p:nvPr/>
+        </p:nvSpPr>
+        <p:spPr>
+          <a:xfrm>
+            <a:off x="8732520" y="2377440"/>
+            <a:ext cx="3200400" cy="548640"/>
+          </a:xfrm>
+          <a:prstGeom prst="rect">
+            <a:avLst/>
+          </a:prstGeom>
+          <a:noFill/>
+        </p:spPr>
+        <p:txBody>
+          <a:bodyPr wrap="square" lIns="0" rIns="0" tIns="0" bIns="0" anchor="t">
+            <a:spAutoFit/>
+          </a:bodyPr>
+          <a:lstStyle/>
+          <a:p>
+            <a:pPr algn="l"/>
+            <a:r>
+              <a:rPr sz="2600" b="1" i="0">
+                <a:solidFill>
+                  <a:srgbClr val="0A0A0A"/>
+                </a:solidFill>
+                <a:latin typeface="Segoe UI"/>
+              </a:rPr>
+              <a:t>6 сцен.</a:t>
+            </a:r>
+          </a:p>
+        </p:txBody>
+      </p:sp>
+      <p:sp>
+        <p:nvSpPr>
+          <p:cNvPr id="20" name="TextBox 19"/>
+          <p:cNvSpPr txBox="1"/>
+          <p:nvPr/>
+        </p:nvSpPr>
+        <p:spPr>
+          <a:xfrm>
+            <a:off x="8732520" y="2971800"/>
+            <a:ext cx="3200400" cy="640080"/>
+          </a:xfrm>
+          <a:prstGeom prst="rect">
+            <a:avLst/>
+          </a:prstGeom>
+          <a:noFill/>
+        </p:spPr>
+        <p:txBody>
+          <a:bodyPr wrap="square" lIns="0" rIns="0" tIns="0" bIns="0" anchor="t">
+            <a:spAutoFit/>
+          </a:bodyPr>
+          <a:lstStyle/>
+          <a:p>
+            <a:pPr algn="l"/>
+            <a:r>
+              <a:rPr sz="1300" b="0" i="0">
+                <a:solidFill>
+                  <a:srgbClr val="52525B"/>
+                </a:solidFill>
+                <a:latin typeface="Segoe UI"/>
+              </a:rPr>
+              <a:t>ручных end-to-end проверок</a:t>
+            </a:r>
+          </a:p>
+        </p:txBody>
+      </p:sp>
+      <p:sp>
+        <p:nvSpPr>
+          <p:cNvPr id="21" name="TextBox 20"/>
+          <p:cNvSpPr txBox="1"/>
+          <p:nvPr/>
+        </p:nvSpPr>
+        <p:spPr>
+          <a:xfrm>
+            <a:off x="822960" y="4069080"/>
+            <a:ext cx="10972800" cy="320040"/>
+          </a:xfrm>
+          <a:prstGeom prst="rect">
+            <a:avLst/>
+          </a:prstGeom>
+          <a:noFill/>
+        </p:spPr>
+        <p:txBody>
+          <a:bodyPr wrap="square" lIns="0" rIns="0" tIns="0" bIns="0" anchor="t">
+            <a:spAutoFit/>
+          </a:bodyPr>
+          <a:lstStyle/>
+          <a:p>
+            <a:pPr algn="l"/>
+            <a:r>
+              <a:rPr sz="1100" b="0" i="0">
+                <a:solidFill>
+                  <a:srgbClr val="52525B"/>
+                </a:solidFill>
+                <a:latin typeface="Consolas"/>
+              </a:rPr>
+              <a:t>ЧТО ПОКРЫТО</a:t>
+            </a:r>
+          </a:p>
+        </p:txBody>
+      </p:sp>
+      <p:sp>
+        <p:nvSpPr>
+          <p:cNvPr id="22" name="TextBox 21"/>
+          <p:cNvSpPr txBox="1"/>
+          <p:nvPr/>
+        </p:nvSpPr>
+        <p:spPr>
+          <a:xfrm>
+            <a:off x="822960" y="4434840"/>
+            <a:ext cx="10972800" cy="1920240"/>
+          </a:xfrm>
+          <a:prstGeom prst="rect">
+            <a:avLst/>
+          </a:prstGeom>
+          <a:noFill/>
+        </p:spPr>
+        <p:txBody>
+          <a:bodyPr wrap="square" lIns="0" rIns="0">
+            <a:spAutoFit/>
+          </a:bodyPr>
+          <a:lstStyle/>
+          <a:p>
+            <a:pPr algn="l">
+              <a:lnSpc>
+                <a:spcPct val="135000"/>
+              </a:lnSpc>
+            </a:pPr>
+            <a:r>
+              <a:rPr sz="1300" b="0">
+                <a:solidFill>
+                  <a:srgbClr val="0A0A0A"/>
+                </a:solidFill>
+                <a:latin typeface="Segoe UI"/>
+              </a:rPr>
+              <a:t>— регистрация и вход по логину/паролю</a:t>
+            </a:r>
+          </a:p>
+          <a:p>
+            <a:pPr algn="l">
+              <a:lnSpc>
+                <a:spcPct val="135000"/>
+              </a:lnSpc>
+            </a:pPr>
+            <a:r>
+              <a:rPr sz="1300" b="0">
+                <a:solidFill>
+                  <a:srgbClr val="0A0A0A"/>
+                </a:solidFill>
+                <a:latin typeface="Segoe UI"/>
+              </a:rPr>
+              <a:t>— неверный пароль → 401</a:t>
+            </a:r>
+          </a:p>
+          <a:p>
+            <a:pPr algn="l">
+              <a:lnSpc>
+                <a:spcPct val="135000"/>
+              </a:lnSpc>
+            </a:pPr>
+            <a:r>
+              <a:rPr sz="1300" b="0">
+                <a:solidFill>
+                  <a:srgbClr val="0A0A0A"/>
+                </a:solidFill>
+                <a:latin typeface="Segoe UI"/>
+              </a:rPr>
+              <a:t>— создание чата, отправка, история, поиск (со стеммингом)</a:t>
+            </a:r>
+          </a:p>
+          <a:p>
+            <a:pPr algn="l">
+              <a:lnSpc>
+                <a:spcPct val="135000"/>
+              </a:lnSpc>
+            </a:pPr>
+            <a:r>
+              <a:rPr sz="1300" b="0">
+                <a:solidFill>
+                  <a:srgbClr val="0A0A0A"/>
+                </a:solidFill>
+                <a:latin typeface="Segoe UI"/>
+              </a:rPr>
+              <a:t>— ограничение прав: reader не может отправлять — 403</a:t>
+            </a:r>
+          </a:p>
+          <a:p>
+            <a:pPr algn="l">
+              <a:lnSpc>
+                <a:spcPct val="135000"/>
+              </a:lnSpc>
+            </a:pPr>
+            <a:r>
+              <a:rPr sz="1300" b="0">
+                <a:solidFill>
+                  <a:srgbClr val="0A0A0A"/>
+                </a:solidFill>
+                <a:latin typeface="Segoe UI"/>
+              </a:rPr>
+              <a:t>— ротация refresh: старый refresh становится недействительным</a:t>
+            </a:r>
+          </a:p>
+          <a:p>
+            <a:pPr algn="l">
+              <a:lnSpc>
+                <a:spcPct val="135000"/>
+              </a:lnSpc>
+            </a:pPr>
+            <a:r>
+              <a:rPr sz="1300" b="0">
+                <a:solidFill>
+                  <a:srgbClr val="0A0A0A"/>
+                </a:solidFill>
+                <a:latin typeface="Segoe UI"/>
+              </a:rPr>
+              <a:t>— идемпотентность: повтор с тем же client_msg_id не создаёт дубликат</a:t>
+            </a:r>
+          </a:p>
+        </p:txBody>
+      </p:sp>
+      <p:sp>
+        <p:nvSpPr>
+          <p:cNvPr id="23" name="TextBox 22"/>
+          <p:cNvSpPr txBox="1"/>
+          <p:nvPr/>
+        </p:nvSpPr>
+        <p:spPr>
+          <a:xfrm>
+            <a:off x="502920" y="6446520"/>
+            <a:ext cx="5486400" cy="274320"/>
+          </a:xfrm>
+          <a:prstGeom prst="rect">
+            <a:avLst/>
+          </a:prstGeom>
+          <a:noFill/>
+        </p:spPr>
+        <p:txBody>
+          <a:bodyPr wrap="square" lIns="0" rIns="0" tIns="0" bIns="0" anchor="t">
+            <a:spAutoFit/>
+          </a:bodyPr>
+          <a:lstStyle/>
+          <a:p>
+            <a:pPr algn="l"/>
+            <a:r>
+              <a:rPr sz="900" b="0" i="0">
+                <a:solidFill>
+                  <a:srgbClr val="52525B"/>
+                </a:solidFill>
+                <a:latin typeface="Consolas"/>
+              </a:rPr>
+              <a:t>MESSENGER  ·  VK Education / Case #1</a:t>
+            </a:r>
+          </a:p>
+        </p:txBody>
+      </p:sp>
+      <p:sp>
+        <p:nvSpPr>
+          <p:cNvPr id="24" name="TextBox 23"/>
+          <p:cNvSpPr txBox="1"/>
+          <p:nvPr/>
+        </p:nvSpPr>
+        <p:spPr>
+          <a:xfrm>
+            <a:off x="10561320" y="6446520"/>
+            <a:ext cx="1554480" cy="274320"/>
+          </a:xfrm>
+          <a:prstGeom prst="rect">
+            <a:avLst/>
+          </a:prstGeom>
+          <a:noFill/>
+        </p:spPr>
+        <p:txBody>
+          <a:bodyPr wrap="square" lIns="0" rIns="0" tIns="0" bIns="0" anchor="t">
+            <a:spAutoFit/>
+          </a:bodyPr>
+          <a:lstStyle/>
+          <a:p>
+            <a:pPr algn="r"/>
+            <a:r>
+              <a:rPr sz="900" b="0" i="0">
+                <a:solidFill>
+                  <a:srgbClr val="52525B"/>
+                </a:solidFill>
+                <a:latin typeface="Consolas"/>
+              </a:rPr>
+              <a:t>17 / 18</a:t>
+            </a:r>
+          </a:p>
+        </p:txBody>
+      </p:sp>
+    </p:spTree>
+  </p:cSld>
+  <p:clrMapOvr>
+    <a:masterClrMapping/>
+  </p:clrMapOvr>
+</p:sld>
+</file>
+
+<file path=ppt/slides/slide18.xml><?xml version="1.0" encoding="utf-8"?>
+<p:sld xmlns:a="http://schemas.openxmlformats.org/drawingml/2006/main" xmlns:p="http://schemas.openxmlformats.org/presentationml/2006/main" xmlns:r="http://schemas.openxmlformats.org/officeDocument/2006/relationships">
+  <p:cSld>
+    <p:bg>
+      <p:bgPr>
+        <a:solidFill>
+          <a:srgbClr val="FFFFFF"/>
+        </a:solidFill>
+        <a:effectLst/>
+      </p:bgPr>
+    </p:bg>
+    <p:spTree>
+      <p:nvGrpSpPr>
+        <p:cNvPr id="1" name=""/>
+        <p:cNvGrpSpPr/>
+        <p:nvPr/>
+      </p:nvGrpSpPr>
+      <p:grpSpPr/>
+      <p:sp>
+        <p:nvSpPr>
+          <p:cNvPr id="2" name="Rectangle 1"/>
+          <p:cNvSpPr/>
+          <p:nvPr/>
+        </p:nvSpPr>
+        <p:spPr>
+          <a:xfrm>
+            <a:off x="502920" y="457200"/>
+            <a:ext cx="160000" cy="160000"/>
+          </a:xfrm>
+          <a:prstGeom prst="rect">
+            <a:avLst/>
+          </a:prstGeom>
+          <a:solidFill>
+            <a:srgbClr val="0066FF"/>
+          </a:solidFill>
+          <a:ln>
+            <a:noFill/>
+          </a:ln>
+          <a:effectLst/>
+        </p:spPr>
+        <p:style>
+          <a:lnRef idx="1">
+            <a:schemeClr val="accent1"/>
+          </a:lnRef>
+          <a:fillRef idx="3">
+            <a:schemeClr val="accent1"/>
+          </a:fillRef>
+          <a:effectRef idx="2">
+            <a:schemeClr val="accent1"/>
+          </a:effectRef>
+          <a:fontRef idx="minor">
+            <a:schemeClr val="lt1"/>
+          </a:fontRef>
+        </p:style>
+        <p:txBody>
+          <a:bodyPr rtlCol="0" anchor="ctr"/>
+          <a:lstStyle/>
+          <a:p>
+            <a:pPr algn="ctr"/>
+          </a:p>
+        </p:txBody>
+      </p:sp>
+      <p:sp>
+        <p:nvSpPr>
+          <p:cNvPr id="3" name="Rectangle 2"/>
+          <p:cNvSpPr/>
+          <p:nvPr/>
+        </p:nvSpPr>
+        <p:spPr>
+          <a:xfrm>
+            <a:off x="732920" y="457200"/>
+            <a:ext cx="160000" cy="160000"/>
+          </a:xfrm>
+          <a:prstGeom prst="rect">
+            <a:avLst/>
+          </a:prstGeom>
+          <a:solidFill>
+            <a:srgbClr val="0066FF"/>
+          </a:solidFill>
+          <a:ln>
+            <a:noFill/>
+          </a:ln>
+          <a:effectLst/>
+        </p:spPr>
+        <p:style>
+          <a:lnRef idx="1">
+            <a:schemeClr val="accent1"/>
+          </a:lnRef>
+          <a:fillRef idx="3">
+            <a:schemeClr val="accent1"/>
+          </a:fillRef>
+          <a:effectRef idx="2">
+            <a:schemeClr val="accent1"/>
+          </a:effectRef>
+          <a:fontRef idx="minor">
+            <a:schemeClr val="lt1"/>
+          </a:fontRef>
+        </p:style>
+        <p:txBody>
+          <a:bodyPr rtlCol="0" anchor="ctr"/>
+          <a:lstStyle/>
+          <a:p>
+            <a:pPr algn="ctr"/>
+          </a:p>
+        </p:txBody>
+      </p:sp>
+      <p:sp>
+        <p:nvSpPr>
+          <p:cNvPr id="4" name="Rectangle 3"/>
+          <p:cNvSpPr/>
+          <p:nvPr/>
+        </p:nvSpPr>
+        <p:spPr>
+          <a:xfrm>
+            <a:off x="502920" y="687200"/>
+            <a:ext cx="160000" cy="160000"/>
+          </a:xfrm>
+          <a:prstGeom prst="rect">
+            <a:avLst/>
+          </a:prstGeom>
+          <a:solidFill>
+            <a:srgbClr val="0066FF"/>
+          </a:solidFill>
+          <a:ln>
+            <a:noFill/>
+          </a:ln>
+          <a:effectLst/>
+        </p:spPr>
+        <p:style>
+          <a:lnRef idx="1">
+            <a:schemeClr val="accent1"/>
+          </a:lnRef>
+          <a:fillRef idx="3">
+            <a:schemeClr val="accent1"/>
+          </a:fillRef>
+          <a:effectRef idx="2">
+            <a:schemeClr val="accent1"/>
+          </a:effectRef>
+          <a:fontRef idx="minor">
+            <a:schemeClr val="lt1"/>
+          </a:fontRef>
+        </p:style>
+        <p:txBody>
+          <a:bodyPr rtlCol="0" anchor="ctr"/>
+          <a:lstStyle/>
+          <a:p>
+            <a:pPr algn="ctr"/>
+          </a:p>
+        </p:txBody>
+      </p:sp>
+      <p:sp>
+        <p:nvSpPr>
+          <p:cNvPr id="5" name="Rectangle 4"/>
+          <p:cNvSpPr/>
+          <p:nvPr/>
+        </p:nvSpPr>
+        <p:spPr>
+          <a:xfrm>
+            <a:off x="732920" y="687200"/>
+            <a:ext cx="160000" cy="160000"/>
+          </a:xfrm>
+          <a:prstGeom prst="rect">
+            <a:avLst/>
+          </a:prstGeom>
+          <a:solidFill>
+            <a:srgbClr val="0066FF"/>
+          </a:solidFill>
+          <a:ln>
+            <a:noFill/>
+          </a:ln>
+          <a:effectLst/>
+        </p:spPr>
+        <p:style>
+          <a:lnRef idx="1">
+            <a:schemeClr val="accent1"/>
+          </a:lnRef>
+          <a:fillRef idx="3">
+            <a:schemeClr val="accent1"/>
+          </a:fillRef>
+          <a:effectRef idx="2">
+            <a:schemeClr val="accent1"/>
+          </a:effectRef>
+          <a:fontRef idx="minor">
+            <a:schemeClr val="lt1"/>
+          </a:fontRef>
+        </p:style>
+        <p:txBody>
+          <a:bodyPr rtlCol="0" anchor="ctr"/>
+          <a:lstStyle/>
+          <a:p>
+            <a:pPr algn="ctr"/>
+          </a:p>
+        </p:txBody>
+      </p:sp>
+      <p:sp>
+        <p:nvSpPr>
+          <p:cNvPr id="6" name="TextBox 5"/>
+          <p:cNvSpPr txBox="1"/>
+          <p:nvPr/>
+        </p:nvSpPr>
+        <p:spPr>
+          <a:xfrm>
+            <a:off x="1005840" y="384048"/>
+            <a:ext cx="5486400" cy="320040"/>
+          </a:xfrm>
+          <a:prstGeom prst="rect">
+            <a:avLst/>
+          </a:prstGeom>
+          <a:noFill/>
+        </p:spPr>
+        <p:txBody>
+          <a:bodyPr wrap="square" lIns="0" rIns="0" tIns="0" bIns="0" anchor="t">
+            <a:spAutoFit/>
+          </a:bodyPr>
+          <a:lstStyle/>
+          <a:p>
+            <a:pPr algn="l"/>
+            <a:r>
+              <a:rPr sz="1100" b="0" i="0">
+                <a:solidFill>
+                  <a:srgbClr val="52525B"/>
+                </a:solidFill>
+                <a:latin typeface="Consolas"/>
+              </a:rPr>
+              <a:t>18  ·  РЕЗУЛЬТАТЫ</a:t>
+            </a:r>
+          </a:p>
+        </p:txBody>
+      </p:sp>
+      <p:sp>
+        <p:nvSpPr>
+          <p:cNvPr id="7" name="TextBox 6"/>
+          <p:cNvSpPr txBox="1"/>
+          <p:nvPr/>
+        </p:nvSpPr>
+        <p:spPr>
+          <a:xfrm>
+            <a:off x="502920" y="868680"/>
+            <a:ext cx="10972800" cy="777240"/>
+          </a:xfrm>
+          <a:prstGeom prst="rect">
+            <a:avLst/>
+          </a:prstGeom>
+          <a:noFill/>
+        </p:spPr>
+        <p:txBody>
+          <a:bodyPr wrap="square" lIns="0" rIns="0" tIns="0" bIns="0" anchor="t">
+            <a:spAutoFit/>
+          </a:bodyPr>
+          <a:lstStyle/>
+          <a:p>
+            <a:pPr algn="l"/>
+            <a:r>
+              <a:rPr sz="3200" b="1" i="0">
+                <a:solidFill>
+                  <a:srgbClr val="0A0A0A"/>
+                </a:solidFill>
+                <a:latin typeface="Segoe UI"/>
+              </a:rPr>
+              <a:t>Что готово и что дальше</a:t>
+            </a:r>
+          </a:p>
+        </p:txBody>
+      </p:sp>
+      <p:sp>
+        <p:nvSpPr>
+          <p:cNvPr id="8" name="Rectangle 7"/>
+          <p:cNvSpPr/>
+          <p:nvPr/>
+        </p:nvSpPr>
+        <p:spPr>
+          <a:xfrm>
+            <a:off x="502920" y="1691640"/>
+            <a:ext cx="11155680" cy="9525"/>
+          </a:xfrm>
+          <a:prstGeom prst="rect">
+            <a:avLst/>
+          </a:prstGeom>
+          <a:solidFill>
+            <a:srgbClr val="E5E5E5"/>
+          </a:solidFill>
+          <a:ln>
+            <a:noFill/>
+          </a:ln>
+          <a:effectLst/>
+        </p:spPr>
+        <p:style>
+          <a:lnRef idx="1">
+            <a:schemeClr val="accent1"/>
+          </a:lnRef>
+          <a:fillRef idx="3">
+            <a:schemeClr val="accent1"/>
+          </a:fillRef>
+          <a:effectRef idx="2">
+            <a:schemeClr val="accent1"/>
+          </a:effectRef>
+          <a:fontRef idx="minor">
+            <a:schemeClr val="lt1"/>
+          </a:fontRef>
+        </p:style>
+        <p:txBody>
+          <a:bodyPr rtlCol="0" anchor="ctr"/>
+          <a:lstStyle/>
+          <a:p>
+            <a:pPr algn="ctr"/>
+          </a:p>
+        </p:txBody>
+      </p:sp>
+      <p:sp>
+        <p:nvSpPr>
+          <p:cNvPr id="9" name="TextBox 8"/>
+          <p:cNvSpPr txBox="1"/>
+          <p:nvPr/>
+        </p:nvSpPr>
+        <p:spPr>
+          <a:xfrm>
+            <a:off x="822960" y="2148840"/>
+            <a:ext cx="10972800" cy="320040"/>
+          </a:xfrm>
+          <a:prstGeom prst="rect">
+            <a:avLst/>
+          </a:prstGeom>
+          <a:noFill/>
+        </p:spPr>
+        <p:txBody>
+          <a:bodyPr wrap="square" lIns="0" rIns="0" tIns="0" bIns="0" anchor="t">
+            <a:spAutoFit/>
+          </a:bodyPr>
+          <a:lstStyle/>
+          <a:p>
+            <a:pPr algn="l"/>
+            <a:r>
+              <a:rPr sz="1100" b="0" i="0">
+                <a:solidFill>
+                  <a:srgbClr val="0066FF"/>
+                </a:solidFill>
+                <a:latin typeface="Consolas"/>
+              </a:rPr>
+              <a:t>ГОТОВО</a:t>
+            </a:r>
+          </a:p>
+        </p:txBody>
+      </p:sp>
+      <p:sp>
+        <p:nvSpPr>
+          <p:cNvPr id="10" name="TextBox 9"/>
+          <p:cNvSpPr txBox="1"/>
+          <p:nvPr/>
+        </p:nvSpPr>
+        <p:spPr>
+          <a:xfrm>
+            <a:off x="822960" y="2514600"/>
+            <a:ext cx="10972800" cy="2286000"/>
+          </a:xfrm>
+          <a:prstGeom prst="rect">
+            <a:avLst/>
+          </a:prstGeom>
+          <a:noFill/>
+        </p:spPr>
+        <p:txBody>
+          <a:bodyPr wrap="square" lIns="0" rIns="0">
+            <a:spAutoFit/>
+          </a:bodyPr>
+          <a:lstStyle/>
+          <a:p>
+            <a:pPr algn="l">
+              <a:lnSpc>
+                <a:spcPct val="145000"/>
+              </a:lnSpc>
+            </a:pPr>
+            <a:r>
+              <a:rPr sz="1400" b="0">
+                <a:solidFill>
+                  <a:srgbClr val="0A0A0A"/>
+                </a:solidFill>
+                <a:latin typeface="Segoe UI"/>
+              </a:rPr>
+              <a:t>— все 7 обязательных функциональных требований</a:t>
+            </a:r>
+          </a:p>
+          <a:p>
+            <a:pPr algn="l">
+              <a:lnSpc>
+                <a:spcPct val="145000"/>
+              </a:lnSpc>
+            </a:pPr>
+            <a:r>
+              <a:rPr sz="1400" b="0">
+                <a:solidFill>
+                  <a:srgbClr val="0A0A0A"/>
+                </a:solidFill>
+                <a:latin typeface="Segoe UI"/>
+              </a:rPr>
+              <a:t>— 4 дополнительных (статусы, вложения, refresh, идемпотентность)</a:t>
+            </a:r>
+          </a:p>
+          <a:p>
+            <a:pPr algn="l">
+              <a:lnSpc>
+                <a:spcPct val="145000"/>
+              </a:lnSpc>
+            </a:pPr>
+            <a:r>
+              <a:rPr sz="1400" b="0">
+                <a:solidFill>
+                  <a:srgbClr val="0A0A0A"/>
+                </a:solidFill>
+                <a:latin typeface="Segoe UI"/>
+              </a:rPr>
+              <a:t>— полнотекстовый поиск на GIN + русской морфологии</a:t>
+            </a:r>
+          </a:p>
+          <a:p>
+            <a:pPr algn="l">
+              <a:lnSpc>
+                <a:spcPct val="145000"/>
+              </a:lnSpc>
+            </a:pPr>
+            <a:r>
+              <a:rPr sz="1400" b="0">
+                <a:solidFill>
+                  <a:srgbClr val="0A0A0A"/>
+                </a:solidFill>
+                <a:latin typeface="Segoe UI"/>
+              </a:rPr>
+              <a:t>— автоматизированные тесты (7 / 7 проходят)</a:t>
+            </a:r>
+          </a:p>
+          <a:p>
+            <a:pPr algn="l">
+              <a:lnSpc>
+                <a:spcPct val="145000"/>
+              </a:lnSpc>
+            </a:pPr>
+            <a:r>
+              <a:rPr sz="1400" b="0">
+                <a:solidFill>
+                  <a:srgbClr val="0A0A0A"/>
+                </a:solidFill>
+                <a:latin typeface="Segoe UI"/>
+              </a:rPr>
+              <a:t>— отчёт по ГОСТ 7.32-2017, ER-диаграмма, видеодемонстрация</a:t>
+            </a:r>
+          </a:p>
+        </p:txBody>
+      </p:sp>
+      <p:sp>
+        <p:nvSpPr>
+          <p:cNvPr id="11" name="TextBox 10"/>
+          <p:cNvSpPr txBox="1"/>
+          <p:nvPr/>
+        </p:nvSpPr>
+        <p:spPr>
+          <a:xfrm>
+            <a:off x="822960" y="4617720"/>
+            <a:ext cx="10972800" cy="320040"/>
+          </a:xfrm>
+          <a:prstGeom prst="rect">
+            <a:avLst/>
+          </a:prstGeom>
+          <a:noFill/>
+        </p:spPr>
+        <p:txBody>
+          <a:bodyPr wrap="square" lIns="0" rIns="0" tIns="0" bIns="0" anchor="t">
+            <a:spAutoFit/>
+          </a:bodyPr>
+          <a:lstStyle/>
+          <a:p>
+            <a:pPr algn="l"/>
+            <a:r>
+              <a:rPr sz="1100" b="0" i="0">
+                <a:solidFill>
+                  <a:srgbClr val="52525B"/>
+                </a:solidFill>
+                <a:latin typeface="Consolas"/>
+              </a:rPr>
+              <a:t>НАПРАВЛЕНИЯ РАЗВИТИЯ</a:t>
+            </a:r>
+          </a:p>
+        </p:txBody>
+      </p:sp>
+      <p:sp>
+        <p:nvSpPr>
+          <p:cNvPr id="12" name="TextBox 11"/>
+          <p:cNvSpPr txBox="1"/>
+          <p:nvPr/>
+        </p:nvSpPr>
+        <p:spPr>
+          <a:xfrm>
+            <a:off x="822960" y="4983480"/>
+            <a:ext cx="10972800" cy="1463040"/>
+          </a:xfrm>
+          <a:prstGeom prst="rect">
+            <a:avLst/>
+          </a:prstGeom>
+          <a:noFill/>
+        </p:spPr>
+        <p:txBody>
+          <a:bodyPr wrap="square" lIns="0" rIns="0">
+            <a:spAutoFit/>
+          </a:bodyPr>
+          <a:lstStyle/>
+          <a:p>
+            <a:pPr algn="l">
+              <a:lnSpc>
+                <a:spcPct val="145000"/>
+              </a:lnSpc>
+            </a:pPr>
+            <a:r>
+              <a:rPr sz="1400" b="0">
+                <a:solidFill>
+                  <a:srgbClr val="0A0A0A"/>
+                </a:solidFill>
+                <a:latin typeface="Segoe UI"/>
+              </a:rPr>
+              <a:t>— внешний брокер (Redis Streams / NATS) для горизонтального масштабирования</a:t>
+            </a:r>
+          </a:p>
+          <a:p>
+            <a:pPr algn="l">
+              <a:lnSpc>
+                <a:spcPct val="145000"/>
+              </a:lnSpc>
+            </a:pPr>
+            <a:r>
+              <a:rPr sz="1400" b="0">
+                <a:solidFill>
+                  <a:srgbClr val="0A0A0A"/>
+                </a:solidFill>
+                <a:latin typeface="Segoe UI"/>
+              </a:rPr>
+              <a:t>— оффлайн-уведомления, редактирование и удаление сообщений</a:t>
+            </a:r>
+          </a:p>
+          <a:p>
+            <a:pPr algn="l">
+              <a:lnSpc>
+                <a:spcPct val="145000"/>
+              </a:lnSpc>
+            </a:pPr>
+            <a:r>
+              <a:rPr sz="1400" b="0">
+                <a:solidFill>
+                  <a:srgbClr val="0A0A0A"/>
+                </a:solidFill>
+                <a:latin typeface="Segoe UI"/>
+              </a:rPr>
+              <a:t>— E2E-шифрование, голосовые сообщения, WebRTC-видеозвонки</a:t>
+            </a:r>
+          </a:p>
+        </p:txBody>
+      </p:sp>
+      <p:sp>
+        <p:nvSpPr>
+          <p:cNvPr id="13" name="Rectangle 12"/>
+          <p:cNvSpPr/>
+          <p:nvPr/>
+        </p:nvSpPr>
+        <p:spPr>
+          <a:xfrm>
+            <a:off x="822960" y="6309360"/>
+            <a:ext cx="11247120" cy="9525"/>
+          </a:xfrm>
+          <a:prstGeom prst="rect">
+            <a:avLst/>
+          </a:prstGeom>
+          <a:solidFill>
+            <a:srgbClr val="E5E5E5"/>
+          </a:solidFill>
+          <a:ln>
+            <a:noFill/>
+          </a:ln>
+          <a:effectLst/>
+        </p:spPr>
+        <p:style>
+          <a:lnRef idx="1">
+            <a:schemeClr val="accent1"/>
+          </a:lnRef>
+          <a:fillRef idx="3">
+            <a:schemeClr val="accent1"/>
+          </a:fillRef>
+          <a:effectRef idx="2">
+            <a:schemeClr val="accent1"/>
+          </a:effectRef>
+          <a:fontRef idx="minor">
+            <a:schemeClr val="lt1"/>
+          </a:fontRef>
+        </p:style>
+        <p:txBody>
+          <a:bodyPr rtlCol="0" anchor="ctr"/>
+          <a:lstStyle/>
+          <a:p>
+            <a:pPr algn="ctr"/>
+          </a:p>
+        </p:txBody>
+      </p:sp>
+      <p:sp>
+        <p:nvSpPr>
           <p:cNvPr id="14" name="TextBox 13"/>
           <p:cNvSpPr txBox="1"/>
           <p:nvPr/>
@@ -8932,7 +9909,7 @@
                 </a:solidFill>
                 <a:latin typeface="Consolas"/>
               </a:rPr>
-              <a:t>15 / 15</a:t>
+              <a:t>18 / 18</a:t>
             </a:r>
           </a:p>
         </p:txBody>
@@ -9492,7 +10469,7 @@
                 </a:solidFill>
                 <a:latin typeface="Consolas"/>
               </a:rPr>
-              <a:t>02 / 15</a:t>
+              <a:t>02 / 18</a:t>
             </a:r>
           </a:p>
         </p:txBody>
@@ -10423,7 +11400,7 @@
                 </a:solidFill>
                 <a:latin typeface="Consolas"/>
               </a:rPr>
-              <a:t>03 / 15</a:t>
+              <a:t>03 / 18</a:t>
             </a:r>
           </a:p>
         </p:txBody>
@@ -11069,7 +12046,7 @@
                 </a:solidFill>
                 <a:latin typeface="Consolas"/>
               </a:rPr>
-              <a:t>04 / 15</a:t>
+              <a:t>04 / 18</a:t>
             </a:r>
           </a:p>
         </p:txBody>
@@ -11877,7 +12854,7 @@
                 </a:solidFill>
                 <a:latin typeface="Consolas"/>
               </a:rPr>
-              <a:t>05 / 15</a:t>
+              <a:t>05 / 18</a:t>
             </a:r>
           </a:p>
         </p:txBody>
@@ -12668,7 +13645,7 @@
                 </a:solidFill>
                 <a:latin typeface="Consolas"/>
               </a:rPr>
-              <a:t>06 / 15</a:t>
+              <a:t>06 / 18</a:t>
             </a:r>
           </a:p>
         </p:txBody>
@@ -14318,7 +15295,7 @@
                 </a:solidFill>
                 <a:latin typeface="Consolas"/>
               </a:rPr>
-              <a:t>07 / 15</a:t>
+              <a:t>07 / 18</a:t>
             </a:r>
           </a:p>
         </p:txBody>
@@ -15328,7 +16305,7 @@
                 </a:solidFill>
                 <a:latin typeface="Consolas"/>
               </a:rPr>
-              <a:t>08 / 15</a:t>
+              <a:t>08 / 18</a:t>
             </a:r>
           </a:p>
         </p:txBody>
@@ -16309,7 +17286,7 @@
                 </a:solidFill>
                 <a:latin typeface="Consolas"/>
               </a:rPr>
-              <a:t>09 / 15</a:t>
+              <a:t>09 / 18</a:t>
             </a:r>
           </a:p>
         </p:txBody>
